--- a/Day1_Probability/FW536_Day1_Afternoon Distributions I_accessible.pptx
+++ b/Day1_Probability/FW536_Day1_Afternoon Distributions I_accessible.pptx
@@ -10182,60 +10182,6 @@
           </a:p>
         </p:txBody>
       </p:sp>
-      <p:pic>
-        <p:nvPicPr>
-          <p:cNvPr id="163843" name="Picture 1" descr="Equation: L-tilde(p | k, N) = (N choose k) p^k (1-p)^(N-k). The binomial written as a likelihood function of p given observed k and N." title="Equation: L-tilde(p | k, N) = (N choose k) p^k (1-p)^(N-k). The binomial written"/>
-          <p:cNvPicPr>
-            <a:picLocks noChangeAspect="1"/>
-          </p:cNvPicPr>
-          <p:nvPr/>
-        </p:nvPicPr>
-        <p:blipFill>
-          <a:blip r:embed="rId3">
-            <a:extLst>
-              <a:ext uri="{28A0092B-C50C-407E-A947-70E740481C1C}">
-                <a14:useLocalDpi xmlns:a14="http://schemas.microsoft.com/office/drawing/2010/main" val="0"/>
-              </a:ext>
-            </a:extLst>
-          </a:blip>
-          <a:srcRect/>
-          <a:stretch>
-            <a:fillRect/>
-          </a:stretch>
-        </p:blipFill>
-        <p:spPr bwMode="auto">
-          <a:xfrm>
-            <a:off x="3631291" y="3812333"/>
-            <a:ext cx="5016500" cy="1257300"/>
-          </a:xfrm>
-          <a:prstGeom prst="rect">
-            <a:avLst/>
-          </a:prstGeom>
-          <a:noFill/>
-          <a:ln>
-            <a:noFill/>
-          </a:ln>
-          <a:extLst>
-            <a:ext uri="{909E8E84-426E-40DD-AFC4-6F175D3DCCD1}">
-              <a14:hiddenFill xmlns:a14="http://schemas.microsoft.com/office/drawing/2010/main">
-                <a:solidFill>
-                  <a:srgbClr val="FFFFFF"/>
-                </a:solidFill>
-              </a14:hiddenFill>
-            </a:ext>
-            <a:ext uri="{91240B29-F687-4F45-9708-019B960494DF}">
-              <a14:hiddenLine xmlns:a14="http://schemas.microsoft.com/office/drawing/2010/main" w="9525">
-                <a:solidFill>
-                  <a:srgbClr val="000000"/>
-                </a:solidFill>
-                <a:miter lim="800000"/>
-                <a:headEnd/>
-                <a:tailEnd/>
-              </a14:hiddenLine>
-            </a:ext>
-          </a:extLst>
-        </p:spPr>
-      </p:pic>
       <p:sp>
         <p:nvSpPr>
           <p:cNvPr id="163844" name="TextBox 3"/>
@@ -10516,6 +10462,55 @@
           </a:p>
         </p:txBody>
       </p:sp>
+      <p:sp>
+        <p:nvSpPr>
+          <p:cNvPr id="163845" name="TextBox 163844"/>
+          <p:cNvSpPr txBox="1"/>
+          <p:nvPr/>
+        </p:nvSpPr>
+        <p:spPr>
+          <a:xfrm>
+            <a:off x="3631291" y="3812333"/>
+            <a:ext cx="5908430" cy="1257300"/>
+          </a:xfrm>
+          <a:prstGeom prst="rect">
+            <a:avLst/>
+          </a:prstGeom>
+          <a:noFill/>
+        </p:spPr>
+        <p:txBody>
+          <a:bodyPr wrap="square" anchor="ctr" lIns="0" rIns="0" tIns="0" bIns="0">
+            <a:spAutoFit/>
+          </a:bodyPr>
+          <a:lstStyle/>
+          <a:p>
+            <a:r>
+              <a:rPr sz="1900" b="0">
+                <a:latin typeface="Cambria"/>
+              </a:rPr>
+              <a:t>ℒ(p | k, N) = (N choose k) p</a:t>
+            </a:r>
+            <a:r>
+              <a:rPr sz="1900" b="0" baseline="30000">
+                <a:latin typeface="Cambria"/>
+              </a:rPr>
+              <a:t>k</a:t>
+            </a:r>
+            <a:r>
+              <a:rPr sz="1900" b="0">
+                <a:latin typeface="Cambria"/>
+              </a:rPr>
+              <a:t> (1 − p)</a:t>
+            </a:r>
+            <a:r>
+              <a:rPr sz="1900" b="0" baseline="30000">
+                <a:latin typeface="Cambria"/>
+              </a:rPr>
+              <a:t>N − k</a:t>
+            </a:r>
+          </a:p>
+        </p:txBody>
+      </p:sp>
     </p:spTree>
     <p:extLst>
       <p:ext uri="{BB962C8B-B14F-4D97-AF65-F5344CB8AC3E}">
@@ -10727,60 +10722,55 @@
           </a:p>
         </p:txBody>
       </p:sp>
-      <p:pic>
-        <p:nvPicPr>
-          <p:cNvPr id="165891" name="Picture 1" descr="Equation: L-tilde(p | k, N) = (N choose k) p^k (1-p)^(N-k). The binomial written as a likelihood function of p given observed k and N." title="Equation: L-tilde(p | k, N) = (N choose k) p^k (1-p)^(N-k). The binomial written"/>
-          <p:cNvPicPr>
-            <a:picLocks noChangeAspect="1"/>
-          </p:cNvPicPr>
+      <p:sp>
+        <p:nvSpPr>
+          <p:cNvPr id="14339" name="TextBox 14338"/>
+          <p:cNvSpPr txBox="1"/>
           <p:nvPr/>
-        </p:nvPicPr>
-        <p:blipFill>
-          <a:blip r:embed="rId3">
-            <a:extLst>
-              <a:ext uri="{28A0092B-C50C-407E-A947-70E740481C1C}">
-                <a14:useLocalDpi xmlns:a14="http://schemas.microsoft.com/office/drawing/2010/main" val="0"/>
-              </a:ext>
-            </a:extLst>
-          </a:blip>
-          <a:srcRect/>
-          <a:stretch>
-            <a:fillRect/>
-          </a:stretch>
-        </p:blipFill>
-        <p:spPr bwMode="auto">
+        </p:nvSpPr>
+        <p:spPr>
           <a:xfrm>
             <a:off x="3265715" y="2063230"/>
-            <a:ext cx="5016500" cy="1257300"/>
+            <a:ext cx="5908430" cy="1257300"/>
           </a:xfrm>
           <a:prstGeom prst="rect">
             <a:avLst/>
           </a:prstGeom>
           <a:noFill/>
-          <a:ln>
-            <a:noFill/>
-          </a:ln>
-          <a:extLst>
-            <a:ext uri="{909E8E84-426E-40DD-AFC4-6F175D3DCCD1}">
-              <a14:hiddenFill xmlns:a14="http://schemas.microsoft.com/office/drawing/2010/main">
-                <a:solidFill>
-                  <a:srgbClr val="FFFFFF"/>
-                </a:solidFill>
-              </a14:hiddenFill>
-            </a:ext>
-            <a:ext uri="{91240B29-F687-4F45-9708-019B960494DF}">
-              <a14:hiddenLine xmlns:a14="http://schemas.microsoft.com/office/drawing/2010/main" w="9525">
-                <a:solidFill>
-                  <a:srgbClr val="000000"/>
-                </a:solidFill>
-                <a:miter lim="800000"/>
-                <a:headEnd/>
-                <a:tailEnd/>
-              </a14:hiddenLine>
-            </a:ext>
-          </a:extLst>
         </p:spPr>
-      </p:pic>
+        <p:txBody>
+          <a:bodyPr wrap="square" anchor="ctr" lIns="0" rIns="0" tIns="0" bIns="0">
+            <a:spAutoFit/>
+          </a:bodyPr>
+          <a:lstStyle/>
+          <a:p>
+            <a:r>
+              <a:rPr sz="1900" b="0">
+                <a:latin typeface="Cambria"/>
+              </a:rPr>
+              <a:t>ℒ(p | k, N) = (N choose k) p</a:t>
+            </a:r>
+            <a:r>
+              <a:rPr sz="1900" b="0" baseline="30000">
+                <a:latin typeface="Cambria"/>
+              </a:rPr>
+              <a:t>k</a:t>
+            </a:r>
+            <a:r>
+              <a:rPr sz="1900" b="0">
+                <a:latin typeface="Cambria"/>
+              </a:rPr>
+              <a:t> (1 − p)</a:t>
+            </a:r>
+            <a:r>
+              <a:rPr sz="1900" b="0" baseline="30000">
+                <a:latin typeface="Cambria"/>
+              </a:rPr>
+              <a:t>N − k</a:t>
+            </a:r>
+          </a:p>
+        </p:txBody>
+      </p:sp>
     </p:spTree>
     <p:extLst>
       <p:ext uri="{BB962C8B-B14F-4D97-AF65-F5344CB8AC3E}">
@@ -11106,114 +11096,6 @@
           </a:p>
         </p:txBody>
       </p:sp>
-      <p:pic>
-        <p:nvPicPr>
-          <p:cNvPr id="167939" name="Picture 1" descr="Equation: L-tilde(p | k, N) = (N choose k) p^k (1-p)^(N-k)." title="Equation: L-tilde(p | k, N) = (N choose k) p^k (1-p)^(N-k)."/>
-          <p:cNvPicPr>
-            <a:picLocks noChangeAspect="1"/>
-          </p:cNvPicPr>
-          <p:nvPr/>
-        </p:nvPicPr>
-        <p:blipFill>
-          <a:blip r:embed="rId3">
-            <a:extLst>
-              <a:ext uri="{28A0092B-C50C-407E-A947-70E740481C1C}">
-                <a14:useLocalDpi xmlns:a14="http://schemas.microsoft.com/office/drawing/2010/main" val="0"/>
-              </a:ext>
-            </a:extLst>
-          </a:blip>
-          <a:srcRect/>
-          <a:stretch>
-            <a:fillRect/>
-          </a:stretch>
-        </p:blipFill>
-        <p:spPr bwMode="auto">
-          <a:xfrm>
-            <a:off x="3612357" y="2019300"/>
-            <a:ext cx="5016500" cy="1257300"/>
-          </a:xfrm>
-          <a:prstGeom prst="rect">
-            <a:avLst/>
-          </a:prstGeom>
-          <a:noFill/>
-          <a:ln>
-            <a:noFill/>
-          </a:ln>
-          <a:extLst>
-            <a:ext uri="{909E8E84-426E-40DD-AFC4-6F175D3DCCD1}">
-              <a14:hiddenFill xmlns:a14="http://schemas.microsoft.com/office/drawing/2010/main">
-                <a:solidFill>
-                  <a:srgbClr val="FFFFFF"/>
-                </a:solidFill>
-              </a14:hiddenFill>
-            </a:ext>
-            <a:ext uri="{91240B29-F687-4F45-9708-019B960494DF}">
-              <a14:hiddenLine xmlns:a14="http://schemas.microsoft.com/office/drawing/2010/main" w="9525">
-                <a:solidFill>
-                  <a:srgbClr val="000000"/>
-                </a:solidFill>
-                <a:miter lim="800000"/>
-                <a:headEnd/>
-                <a:tailEnd/>
-              </a14:hiddenLine>
-            </a:ext>
-          </a:extLst>
-        </p:spPr>
-      </p:pic>
-      <p:pic>
-        <p:nvPicPr>
-          <p:cNvPr id="4" name="Picture 3" descr="Equation: L(p | k, N) = log(N choose k) + k log(p) + (N-k) log(1-p). The binomial log-likelihood." title="Equation: L(p | k, N) = log(N choose k) + k log(p) + (N-k) log(1-p). The binomia"/>
-          <p:cNvPicPr>
-            <a:picLocks noChangeAspect="1"/>
-          </p:cNvPicPr>
-          <p:nvPr/>
-        </p:nvPicPr>
-        <p:blipFill>
-          <a:blip r:embed="rId4">
-            <a:extLst>
-              <a:ext uri="{28A0092B-C50C-407E-A947-70E740481C1C}">
-                <a14:useLocalDpi xmlns:a14="http://schemas.microsoft.com/office/drawing/2010/main" val="0"/>
-              </a:ext>
-            </a:extLst>
-          </a:blip>
-          <a:srcRect/>
-          <a:stretch>
-            <a:fillRect/>
-          </a:stretch>
-        </p:blipFill>
-        <p:spPr bwMode="auto">
-          <a:xfrm>
-            <a:off x="1936750" y="4538568"/>
-            <a:ext cx="8242300" cy="1155700"/>
-          </a:xfrm>
-          <a:prstGeom prst="rect">
-            <a:avLst/>
-          </a:prstGeom>
-          <a:noFill/>
-          <a:ln>
-            <a:noFill/>
-          </a:ln>
-          <a:extLst>
-            <a:ext uri="{909E8E84-426E-40DD-AFC4-6F175D3DCCD1}">
-              <a14:hiddenFill xmlns:a14="http://schemas.microsoft.com/office/drawing/2010/main">
-                <a:solidFill>
-                  <a:srgbClr val="FFFFFF"/>
-                </a:solidFill>
-              </a14:hiddenFill>
-            </a:ext>
-            <a:ext uri="{91240B29-F687-4F45-9708-019B960494DF}">
-              <a14:hiddenLine xmlns:a14="http://schemas.microsoft.com/office/drawing/2010/main" w="9525">
-                <a:solidFill>
-                  <a:srgbClr val="000000"/>
-                </a:solidFill>
-                <a:miter lim="800000"/>
-                <a:headEnd/>
-                <a:tailEnd/>
-              </a14:hiddenLine>
-            </a:ext>
-          </a:extLst>
-        </p:spPr>
-      </p:pic>
       <p:sp>
         <p:nvSpPr>
           <p:cNvPr id="5" name="TextBox 4"/>
@@ -11474,6 +11356,86 @@
           </a:p>
         </p:txBody>
       </p:sp>
+      <p:sp>
+        <p:nvSpPr>
+          <p:cNvPr id="11" name="TextBox 10"/>
+          <p:cNvSpPr txBox="1"/>
+          <p:nvPr/>
+        </p:nvSpPr>
+        <p:spPr>
+          <a:xfrm>
+            <a:off x="3612357" y="2019300"/>
+            <a:ext cx="5908430" cy="1257300"/>
+          </a:xfrm>
+          <a:prstGeom prst="rect">
+            <a:avLst/>
+          </a:prstGeom>
+          <a:noFill/>
+        </p:spPr>
+        <p:txBody>
+          <a:bodyPr wrap="square" anchor="ctr" lIns="0" rIns="0" tIns="0" bIns="0">
+            <a:spAutoFit/>
+          </a:bodyPr>
+          <a:lstStyle/>
+          <a:p>
+            <a:r>
+              <a:rPr sz="1900" b="0">
+                <a:latin typeface="Cambria"/>
+              </a:rPr>
+              <a:t>ℒ(p | k, N) = (N choose k) p</a:t>
+            </a:r>
+            <a:r>
+              <a:rPr sz="1900" b="0" baseline="30000">
+                <a:latin typeface="Cambria"/>
+              </a:rPr>
+              <a:t>k</a:t>
+            </a:r>
+            <a:r>
+              <a:rPr sz="1900" b="0">
+                <a:latin typeface="Cambria"/>
+              </a:rPr>
+              <a:t> (1 − p)</a:t>
+            </a:r>
+            <a:r>
+              <a:rPr sz="1900" b="0" baseline="30000">
+                <a:latin typeface="Cambria"/>
+              </a:rPr>
+              <a:t>N − k</a:t>
+            </a:r>
+          </a:p>
+        </p:txBody>
+      </p:sp>
+      <p:sp>
+        <p:nvSpPr>
+          <p:cNvPr id="12" name="TextBox 11"/>
+          <p:cNvSpPr txBox="1"/>
+          <p:nvPr/>
+        </p:nvSpPr>
+        <p:spPr>
+          <a:xfrm>
+            <a:off x="1936750" y="4538568"/>
+            <a:ext cx="8581292" cy="1155700"/>
+          </a:xfrm>
+          <a:prstGeom prst="rect">
+            <a:avLst/>
+          </a:prstGeom>
+          <a:noFill/>
+        </p:spPr>
+        <p:txBody>
+          <a:bodyPr wrap="square" anchor="ctr" lIns="0" rIns="0" tIns="0" bIns="0">
+            <a:spAutoFit/>
+          </a:bodyPr>
+          <a:lstStyle/>
+          <a:p>
+            <a:r>
+              <a:rPr sz="1900" b="0">
+                <a:latin typeface="Cambria"/>
+              </a:rPr>
+              <a:t>L(p | k, N) = log(N choose k) + k log(p) + (N − k) log(1 − p)</a:t>
+            </a:r>
+          </a:p>
+        </p:txBody>
+      </p:sp>
     </p:spTree>
     <p:extLst>
       <p:ext uri="{BB962C8B-B14F-4D97-AF65-F5344CB8AC3E}">
@@ -11723,60 +11685,6 @@
           </a:p>
         </p:txBody>
       </p:sp>
-      <p:pic>
-        <p:nvPicPr>
-          <p:cNvPr id="169987" name="Picture 3" descr="Equation: L(p | k, N) = log(N choose k) + k log(p) + (N-k) log(1-p). The binomial log-likelihood to be maximized for the MLE." title="Equation: L(p | k, N) = log(N choose k) + k log(p) + (N-k) log(1-p). The binomia"/>
-          <p:cNvPicPr>
-            <a:picLocks noChangeAspect="1"/>
-          </p:cNvPicPr>
-          <p:nvPr/>
-        </p:nvPicPr>
-        <p:blipFill>
-          <a:blip r:embed="rId3">
-            <a:extLst>
-              <a:ext uri="{28A0092B-C50C-407E-A947-70E740481C1C}">
-                <a14:useLocalDpi xmlns:a14="http://schemas.microsoft.com/office/drawing/2010/main" val="0"/>
-              </a:ext>
-            </a:extLst>
-          </a:blip>
-          <a:srcRect/>
-          <a:stretch>
-            <a:fillRect/>
-          </a:stretch>
-        </p:blipFill>
-        <p:spPr bwMode="auto">
-          <a:xfrm>
-            <a:off x="1465071" y="2303105"/>
-            <a:ext cx="8242300" cy="1155700"/>
-          </a:xfrm>
-          <a:prstGeom prst="rect">
-            <a:avLst/>
-          </a:prstGeom>
-          <a:noFill/>
-          <a:ln>
-            <a:noFill/>
-          </a:ln>
-          <a:extLst>
-            <a:ext uri="{909E8E84-426E-40DD-AFC4-6F175D3DCCD1}">
-              <a14:hiddenFill xmlns:a14="http://schemas.microsoft.com/office/drawing/2010/main">
-                <a:solidFill>
-                  <a:srgbClr val="FFFFFF"/>
-                </a:solidFill>
-              </a14:hiddenFill>
-            </a:ext>
-            <a:ext uri="{91240B29-F687-4F45-9708-019B960494DF}">
-              <a14:hiddenLine xmlns:a14="http://schemas.microsoft.com/office/drawing/2010/main" w="9525">
-                <a:solidFill>
-                  <a:srgbClr val="000000"/>
-                </a:solidFill>
-                <a:miter lim="800000"/>
-                <a:headEnd/>
-                <a:tailEnd/>
-              </a14:hiddenLine>
-            </a:ext>
-          </a:extLst>
-        </p:spPr>
-      </p:pic>
       <p:sp>
         <p:nvSpPr>
           <p:cNvPr id="6" name="Rectangle 2"/>
@@ -11826,6 +11734,37 @@
               <a:t>Sneak peak: Maximum likelihood is just doing this in reverse!!!</a:t>
             </a:r>
             <a:endParaRPr lang="en-US" sz="3600" dirty="0"/>
+          </a:p>
+        </p:txBody>
+      </p:sp>
+      <p:sp>
+        <p:nvSpPr>
+          <p:cNvPr id="11" name="TextBox 10"/>
+          <p:cNvSpPr txBox="1"/>
+          <p:nvPr/>
+        </p:nvSpPr>
+        <p:spPr>
+          <a:xfrm>
+            <a:off x="1465071" y="2303105"/>
+            <a:ext cx="8581292" cy="1155700"/>
+          </a:xfrm>
+          <a:prstGeom prst="rect">
+            <a:avLst/>
+          </a:prstGeom>
+          <a:noFill/>
+        </p:spPr>
+        <p:txBody>
+          <a:bodyPr wrap="square" anchor="ctr" lIns="0" rIns="0" tIns="0" bIns="0">
+            <a:spAutoFit/>
+          </a:bodyPr>
+          <a:lstStyle/>
+          <a:p>
+            <a:r>
+              <a:rPr sz="1900" b="0">
+                <a:latin typeface="Cambria"/>
+              </a:rPr>
+              <a:t>L(p | k, N) = log(N choose k) + k log(p) + (N − k) log(1 − p)</a:t>
+            </a:r>
           </a:p>
         </p:txBody>
       </p:sp>
@@ -13183,30 +13122,6 @@
           </a:prstGeom>
         </p:spPr>
       </p:pic>
-      <p:pic>
-        <p:nvPicPr>
-          <p:cNvPr id="6" name="Picture 5" descr="Equation: n! / (x_1! ... x_k!) times p_1^(x_1) ... p_k^(x_k). Multinomial probability written with x and k notation." title="Equation: n! / (x_1! ... x_k!) times p_1^(x_1) ... p_k^(x_k). Multinomial probab"/>
-          <p:cNvPicPr>
-            <a:picLocks noChangeAspect="1"/>
-          </p:cNvPicPr>
-          <p:nvPr/>
-        </p:nvPicPr>
-        <p:blipFill>
-          <a:blip r:embed="rId3"/>
-          <a:stretch>
-            <a:fillRect/>
-          </a:stretch>
-        </p:blipFill>
-        <p:spPr>
-          <a:xfrm>
-            <a:off x="8605352" y="5330867"/>
-            <a:ext cx="3276600" cy="952500"/>
-          </a:xfrm>
-          <a:prstGeom prst="rect">
-            <a:avLst/>
-          </a:prstGeom>
-        </p:spPr>
-      </p:pic>
       <p:sp>
         <p:nvSpPr>
           <p:cNvPr id="7" name="TextBox 6"/>
@@ -13232,6 +13147,91 @@
             <a:r>
               <a:rPr lang="en-US" sz="2800" dirty="0"/>
               <a:t>Alternatively written</a:t>
+            </a:r>
+          </a:p>
+        </p:txBody>
+      </p:sp>
+      <p:sp>
+        <p:nvSpPr>
+          <p:cNvPr id="8" name="TextBox 7"/>
+          <p:cNvSpPr txBox="1"/>
+          <p:nvPr/>
+        </p:nvSpPr>
+        <p:spPr>
+          <a:xfrm>
+            <a:off x="8605352" y="5330867"/>
+            <a:ext cx="3358048" cy="952500"/>
+          </a:xfrm>
+          <a:prstGeom prst="rect">
+            <a:avLst/>
+          </a:prstGeom>
+          <a:noFill/>
+        </p:spPr>
+        <p:txBody>
+          <a:bodyPr wrap="square" anchor="ctr" lIns="0" rIns="0" tIns="0" bIns="0">
+            <a:spAutoFit/>
+          </a:bodyPr>
+          <a:lstStyle/>
+          <a:p>
+            <a:r>
+              <a:rPr sz="1500" b="0">
+                <a:latin typeface="Cambria"/>
+              </a:rPr>
+              <a:t>n! / (x</a:t>
+            </a:r>
+            <a:r>
+              <a:rPr sz="1500" b="0" baseline="-25000">
+                <a:latin typeface="Cambria"/>
+              </a:rPr>
+              <a:t>1</a:t>
+            </a:r>
+            <a:r>
+              <a:rPr sz="1500" b="0">
+                <a:latin typeface="Cambria"/>
+              </a:rPr>
+              <a:t>! ⋯ x</a:t>
+            </a:r>
+            <a:r>
+              <a:rPr sz="1500" b="0" baseline="-25000">
+                <a:latin typeface="Cambria"/>
+              </a:rPr>
+              <a:t>k</a:t>
+            </a:r>
+            <a:r>
+              <a:rPr sz="1500" b="0">
+                <a:latin typeface="Cambria"/>
+              </a:rPr>
+              <a:t>!) · p</a:t>
+            </a:r>
+            <a:r>
+              <a:rPr sz="1500" b="0" baseline="-25000">
+                <a:latin typeface="Cambria"/>
+              </a:rPr>
+              <a:t>1</a:t>
+            </a:r>
+            <a:r>
+              <a:rPr sz="1500" b="0" baseline="30000">
+                <a:latin typeface="Cambria"/>
+              </a:rPr>
+              <a:t>x₁</a:t>
+            </a:r>
+            <a:r>
+              <a:rPr sz="1500" b="0">
+                <a:latin typeface="Cambria"/>
+              </a:rPr>
+              <a:t> ⋯ p</a:t>
+            </a:r>
+            <a:r>
+              <a:rPr sz="1500" b="0" baseline="-25000">
+                <a:latin typeface="Cambria"/>
+              </a:rPr>
+              <a:t>k</a:t>
+            </a:r>
+            <a:r>
+              <a:rPr sz="1500" b="0" baseline="30000">
+                <a:latin typeface="Cambria"/>
+              </a:rPr>
+              <a:t>xₖ</a:t>
             </a:r>
           </a:p>
         </p:txBody>
@@ -14327,114 +14327,122 @@
           </a:graphicData>
         </a:graphic>
       </p:graphicFrame>
-      <p:pic>
-        <p:nvPicPr>
-          <p:cNvPr id="191493" name="Picture 1" descr="Equation: p_k(t) = (lambda t)^k / k! times e^(-lambda t). The Poisson pmf with rate lambda over interval t." title="Equation: p_k(t) = (lambda t)^k / k! times e^(-lambda t). The Poisson pmf with r"/>
-          <p:cNvPicPr>
-            <a:picLocks noChangeAspect="1"/>
-          </p:cNvPicPr>
+      <p:sp>
+        <p:nvSpPr>
+          <p:cNvPr id="191493" name="TextBox 191492"/>
+          <p:cNvSpPr txBox="1"/>
           <p:nvPr/>
-        </p:nvPicPr>
-        <p:blipFill>
-          <a:blip r:embed="rId7">
-            <a:extLst>
-              <a:ext uri="{28A0092B-C50C-407E-A947-70E740481C1C}">
-                <a14:useLocalDpi xmlns:a14="http://schemas.microsoft.com/office/drawing/2010/main" val="0"/>
-              </a:ext>
-            </a:extLst>
-          </a:blip>
-          <a:srcRect/>
-          <a:stretch>
-            <a:fillRect/>
-          </a:stretch>
-        </p:blipFill>
-        <p:spPr bwMode="auto">
+        </p:nvSpPr>
+        <p:spPr>
           <a:xfrm>
             <a:off x="1099295" y="2277675"/>
-            <a:ext cx="2890999" cy="1193056"/>
+            <a:ext cx="3516923" cy="1193056"/>
           </a:xfrm>
           <a:prstGeom prst="rect">
             <a:avLst/>
           </a:prstGeom>
           <a:noFill/>
-          <a:ln>
-            <a:noFill/>
-          </a:ln>
-          <a:extLst>
-            <a:ext uri="{909E8E84-426E-40DD-AFC4-6F175D3DCCD1}">
-              <a14:hiddenFill xmlns:a14="http://schemas.microsoft.com/office/drawing/2010/main">
-                <a:solidFill>
-                  <a:srgbClr val="FFFFFF"/>
-                </a:solidFill>
-              </a14:hiddenFill>
-            </a:ext>
-            <a:ext uri="{91240B29-F687-4F45-9708-019B960494DF}">
-              <a14:hiddenLine xmlns:a14="http://schemas.microsoft.com/office/drawing/2010/main" w="9525">
-                <a:solidFill>
-                  <a:srgbClr val="000000"/>
-                </a:solidFill>
-                <a:miter lim="800000"/>
-                <a:headEnd/>
-                <a:tailEnd/>
-              </a14:hiddenLine>
-            </a:ext>
-          </a:extLst>
         </p:spPr>
-      </p:pic>
-      <p:pic>
-        <p:nvPicPr>
-          <p:cNvPr id="2" name="Picture 1" descr="Equation: P(k events in interval) = e^(-lambda) lambda^k / k!. The Poisson pmf with mean lambda." title="Equation: P(k events in interval) = e^(-lambda) lambda^k / k!. The Poisson pmf w"/>
-          <p:cNvPicPr>
-            <a:picLocks noChangeAspect="1"/>
-          </p:cNvPicPr>
+        <p:txBody>
+          <a:bodyPr wrap="square" anchor="ctr" lIns="0" rIns="0" tIns="0" bIns="0">
+            <a:spAutoFit/>
+          </a:bodyPr>
+          <a:lstStyle/>
+          <a:p>
+            <a:r>
+              <a:rPr sz="1900" b="0">
+                <a:latin typeface="Cambria"/>
+              </a:rPr>
+              <a:t>p</a:t>
+            </a:r>
+            <a:r>
+              <a:rPr sz="1900" b="0" baseline="-25000">
+                <a:latin typeface="Cambria"/>
+              </a:rPr>
+              <a:t>k</a:t>
+            </a:r>
+            <a:r>
+              <a:rPr sz="1900" b="0">
+                <a:latin typeface="Cambria"/>
+              </a:rPr>
+              <a:t>(t) = (λt)</a:t>
+            </a:r>
+            <a:r>
+              <a:rPr sz="1900" b="0" baseline="30000">
+                <a:latin typeface="Cambria"/>
+              </a:rPr>
+              <a:t>k</a:t>
+            </a:r>
+            <a:r>
+              <a:rPr sz="1900" b="0">
+                <a:latin typeface="Cambria"/>
+              </a:rPr>
+              <a:t> / k! · e</a:t>
+            </a:r>
+            <a:r>
+              <a:rPr sz="1900" b="0" baseline="30000">
+                <a:latin typeface="Cambria"/>
+              </a:rPr>
+              <a:t>−λt</a:t>
+            </a:r>
+          </a:p>
+        </p:txBody>
+      </p:sp>
+      <p:sp>
+        <p:nvSpPr>
+          <p:cNvPr id="191494" name="TextBox 191493"/>
+          <p:cNvSpPr txBox="1"/>
           <p:nvPr/>
-        </p:nvPicPr>
-        <p:blipFill>
-          <a:blip r:embed="rId8">
-            <a:extLst>
-              <a:ext uri="{28A0092B-C50C-407E-A947-70E740481C1C}">
-                <a14:useLocalDpi xmlns:a14="http://schemas.microsoft.com/office/drawing/2010/main" val="0"/>
-              </a:ext>
-            </a:extLst>
-          </a:blip>
-          <a:srcRect/>
-          <a:stretch>
-            <a:fillRect/>
-          </a:stretch>
-        </p:blipFill>
-        <p:spPr bwMode="auto">
+        </p:nvSpPr>
+        <p:spPr>
           <a:xfrm>
             <a:off x="7117699" y="2509997"/>
-            <a:ext cx="3594100" cy="744537"/>
+            <a:ext cx="4845701" cy="744537"/>
           </a:xfrm>
           <a:prstGeom prst="rect">
             <a:avLst/>
           </a:prstGeom>
           <a:noFill/>
-          <a:ln>
-            <a:noFill/>
-          </a:ln>
-          <a:extLst>
-            <a:ext uri="{909E8E84-426E-40DD-AFC4-6F175D3DCCD1}">
-              <a14:hiddenFill xmlns:a14="http://schemas.microsoft.com/office/drawing/2010/main">
-                <a:solidFill>
-                  <a:srgbClr val="FFFFFF"/>
-                </a:solidFill>
-              </a14:hiddenFill>
-            </a:ext>
-            <a:ext uri="{91240B29-F687-4F45-9708-019B960494DF}">
-              <a14:hiddenLine xmlns:a14="http://schemas.microsoft.com/office/drawing/2010/main" w="9525">
-                <a:solidFill>
-                  <a:srgbClr val="000000"/>
-                </a:solidFill>
-                <a:miter lim="800000"/>
-                <a:headEnd/>
-                <a:tailEnd/>
-              </a14:hiddenLine>
-            </a:ext>
-          </a:extLst>
         </p:spPr>
-      </p:pic>
+        <p:txBody>
+          <a:bodyPr wrap="square" anchor="ctr" lIns="0" rIns="0" tIns="0" bIns="0">
+            <a:spAutoFit/>
+          </a:bodyPr>
+          <a:lstStyle/>
+          <a:p>
+            <a:r>
+              <a:rPr sz="1700" b="0">
+                <a:latin typeface="Cambria"/>
+              </a:rPr>
+              <a:t>P(k events in interval) = e</a:t>
+            </a:r>
+            <a:r>
+              <a:rPr sz="1700" b="0" baseline="30000">
+                <a:latin typeface="Cambria"/>
+              </a:rPr>
+              <a:t>−λ</a:t>
+            </a:r>
+            <a:r>
+              <a:rPr sz="1700" b="0">
+                <a:latin typeface="Cambria"/>
+              </a:rPr>
+              <a:t> · λ</a:t>
+            </a:r>
+            <a:r>
+              <a:rPr sz="1700" b="0" baseline="30000">
+                <a:latin typeface="Cambria"/>
+              </a:rPr>
+              <a:t>k</a:t>
+            </a:r>
+            <a:r>
+              <a:rPr sz="1700" b="0">
+                <a:latin typeface="Cambria"/>
+              </a:rPr>
+              <a:t> / k!</a:t>
+            </a:r>
+          </a:p>
+        </p:txBody>
+      </p:sp>
     </p:spTree>
     <p:extLst>
       <p:ext uri="{BB962C8B-B14F-4D97-AF65-F5344CB8AC3E}">
@@ -14865,60 +14873,6 @@
             <a:chExt cx="9946888" cy="2488375"/>
           </a:xfrm>
         </p:grpSpPr>
-        <p:pic>
-          <p:nvPicPr>
-            <p:cNvPr id="179202" name="Picture 2"/>
-            <p:cNvPicPr>
-              <a:picLocks noChangeAspect="1"/>
-            </p:cNvPicPr>
-            <p:nvPr/>
-          </p:nvPicPr>
-          <p:blipFill>
-            <a:blip r:embed="rId3">
-              <a:extLst>
-                <a:ext uri="{28A0092B-C50C-407E-A947-70E740481C1C}">
-                  <a14:useLocalDpi xmlns:a14="http://schemas.microsoft.com/office/drawing/2010/main" val="0"/>
-                </a:ext>
-              </a:extLst>
-            </a:blip>
-            <a:srcRect/>
-            <a:stretch>
-              <a:fillRect/>
-            </a:stretch>
-          </p:blipFill>
-          <p:spPr bwMode="auto">
-            <a:xfrm>
-              <a:off x="2728913" y="2347914"/>
-              <a:ext cx="6172200" cy="1431925"/>
-            </a:xfrm>
-            <a:prstGeom prst="rect">
-              <a:avLst/>
-            </a:prstGeom>
-            <a:noFill/>
-            <a:ln>
-              <a:noFill/>
-            </a:ln>
-            <a:extLst>
-              <a:ext uri="{909E8E84-426E-40DD-AFC4-6F175D3DCCD1}">
-                <a14:hiddenFill xmlns:a14="http://schemas.microsoft.com/office/drawing/2010/main">
-                  <a:solidFill>
-                    <a:srgbClr val="FFFFFF"/>
-                  </a:solidFill>
-                </a14:hiddenFill>
-              </a:ext>
-              <a:ext uri="{91240B29-F687-4F45-9708-019B960494DF}">
-                <a14:hiddenLine xmlns:a14="http://schemas.microsoft.com/office/drawing/2010/main" w="9525">
-                  <a:solidFill>
-                    <a:srgbClr val="000000"/>
-                  </a:solidFill>
-                  <a:miter lim="800000"/>
-                  <a:headEnd/>
-                  <a:tailEnd/>
-                </a14:hiddenLine>
-              </a:ext>
-            </a:extLst>
-          </p:spPr>
-        </p:pic>
         <p:sp>
           <p:nvSpPr>
             <p:cNvPr id="179203" name="TextBox 3"/>
@@ -15387,6 +15341,53 @@
           </p:txBody>
         </p:sp>
       </p:grpSp>
+      <p:sp>
+        <p:nvSpPr>
+          <p:cNvPr id="179206" name="TextBox 179205"/>
+          <p:cNvSpPr txBox="1"/>
+          <p:nvPr/>
+        </p:nvSpPr>
+        <p:spPr>
+          <a:xfrm>
+            <a:off x="2728913" y="2347914"/>
+            <a:ext cx="6172200" cy="1431925"/>
+          </a:xfrm>
+          <a:prstGeom prst="rect">
+            <a:avLst/>
+          </a:prstGeom>
+          <a:noFill/>
+        </p:spPr>
+        <p:txBody>
+          <a:bodyPr wrap="square" anchor="ctr" lIns="0" rIns="0" tIns="0" bIns="0">
+            <a:spAutoFit/>
+          </a:bodyPr>
+          <a:lstStyle/>
+          <a:p>
+            <a:r>
+              <a:rPr sz="1900" b="0">
+                <a:latin typeface="Cambria"/>
+              </a:rPr>
+              <a:t>Pr{no event in the next dt} = 1 − λdt + o(dt)</a:t>
+            </a:r>
+          </a:p>
+          <a:p>
+            <a:r>
+              <a:rPr sz="1900" b="0">
+                <a:latin typeface="Cambria"/>
+              </a:rPr>
+              <a:t>Pr{1 event in the next dt} = λdt + o(dt)</a:t>
+            </a:r>
+          </a:p>
+          <a:p>
+            <a:r>
+              <a:rPr sz="1900" b="0">
+                <a:latin typeface="Cambria"/>
+              </a:rPr>
+              <a:t>Pr{more than one event in the next dt} = o(dt)</a:t>
+            </a:r>
+          </a:p>
+        </p:txBody>
+      </p:sp>
     </p:spTree>
     <p:extLst>
       <p:ext uri="{BB962C8B-B14F-4D97-AF65-F5344CB8AC3E}">
@@ -15839,114 +15840,6 @@
           </a:p>
         </p:txBody>
       </p:sp>
-      <p:pic>
-        <p:nvPicPr>
-          <p:cNvPr id="9" name="Picture 8" descr="Equation: dp_0/dt = -lambda p_0. Differential equation for the probability of no events." title="Equation: dp_0/dt = -lambda p_0. Differential equation for the probability of no"/>
-          <p:cNvPicPr>
-            <a:picLocks noChangeAspect="1"/>
-          </p:cNvPicPr>
-          <p:nvPr/>
-        </p:nvPicPr>
-        <p:blipFill>
-          <a:blip r:embed="rId3">
-            <a:extLst>
-              <a:ext uri="{28A0092B-C50C-407E-A947-70E740481C1C}">
-                <a14:useLocalDpi xmlns:a14="http://schemas.microsoft.com/office/drawing/2010/main" val="0"/>
-              </a:ext>
-            </a:extLst>
-          </a:blip>
-          <a:srcRect/>
-          <a:stretch>
-            <a:fillRect/>
-          </a:stretch>
-        </p:blipFill>
-        <p:spPr bwMode="auto">
-          <a:xfrm>
-            <a:off x="4640426" y="4125439"/>
-            <a:ext cx="2278063" cy="1050925"/>
-          </a:xfrm>
-          <a:prstGeom prst="rect">
-            <a:avLst/>
-          </a:prstGeom>
-          <a:noFill/>
-          <a:ln>
-            <a:noFill/>
-          </a:ln>
-          <a:extLst>
-            <a:ext uri="{909E8E84-426E-40DD-AFC4-6F175D3DCCD1}">
-              <a14:hiddenFill xmlns:a14="http://schemas.microsoft.com/office/drawing/2010/main">
-                <a:solidFill>
-                  <a:srgbClr val="FFFFFF"/>
-                </a:solidFill>
-              </a14:hiddenFill>
-            </a:ext>
-            <a:ext uri="{91240B29-F687-4F45-9708-019B960494DF}">
-              <a14:hiddenLine xmlns:a14="http://schemas.microsoft.com/office/drawing/2010/main" w="9525">
-                <a:solidFill>
-                  <a:srgbClr val="000000"/>
-                </a:solidFill>
-                <a:miter lim="800000"/>
-                <a:headEnd/>
-                <a:tailEnd/>
-              </a14:hiddenLine>
-            </a:ext>
-          </a:extLst>
-        </p:spPr>
-      </p:pic>
-      <p:pic>
-        <p:nvPicPr>
-          <p:cNvPr id="10" name="Picture 9" descr="Equation: p_0(t) = exp(-lambda t). Solution giving the probability of no events by time t." title="Equation: p_0(t) = exp(-lambda t). Solution giving the probability of no events "/>
-          <p:cNvPicPr>
-            <a:picLocks noChangeAspect="1"/>
-          </p:cNvPicPr>
-          <p:nvPr/>
-        </p:nvPicPr>
-        <p:blipFill>
-          <a:blip r:embed="rId4">
-            <a:extLst>
-              <a:ext uri="{28A0092B-C50C-407E-A947-70E740481C1C}">
-                <a14:useLocalDpi xmlns:a14="http://schemas.microsoft.com/office/drawing/2010/main" val="0"/>
-              </a:ext>
-            </a:extLst>
-          </a:blip>
-          <a:srcRect/>
-          <a:stretch>
-            <a:fillRect/>
-          </a:stretch>
-        </p:blipFill>
-        <p:spPr bwMode="auto">
-          <a:xfrm>
-            <a:off x="4159900" y="5897173"/>
-            <a:ext cx="2963863" cy="582613"/>
-          </a:xfrm>
-          <a:prstGeom prst="rect">
-            <a:avLst/>
-          </a:prstGeom>
-          <a:noFill/>
-          <a:ln>
-            <a:noFill/>
-          </a:ln>
-          <a:extLst>
-            <a:ext uri="{909E8E84-426E-40DD-AFC4-6F175D3DCCD1}">
-              <a14:hiddenFill xmlns:a14="http://schemas.microsoft.com/office/drawing/2010/main">
-                <a:solidFill>
-                  <a:srgbClr val="FFFFFF"/>
-                </a:solidFill>
-              </a14:hiddenFill>
-            </a:ext>
-            <a:ext uri="{91240B29-F687-4F45-9708-019B960494DF}">
-              <a14:hiddenLine xmlns:a14="http://schemas.microsoft.com/office/drawing/2010/main" w="9525">
-                <a:solidFill>
-                  <a:srgbClr val="000000"/>
-                </a:solidFill>
-                <a:miter lim="800000"/>
-                <a:headEnd/>
-                <a:tailEnd/>
-              </a14:hiddenLine>
-            </a:ext>
-          </a:extLst>
-        </p:spPr>
-      </p:pic>
       <p:grpSp>
         <p:nvGrpSpPr>
           <p:cNvPr id="5" name="Group 4">
@@ -15967,60 +15860,6 @@
             <a:chExt cx="5671456" cy="831407"/>
           </a:xfrm>
         </p:grpSpPr>
-        <p:pic>
-          <p:nvPicPr>
-            <p:cNvPr id="8" name="Picture 7"/>
-            <p:cNvPicPr>
-              <a:picLocks noChangeAspect="1"/>
-            </p:cNvPicPr>
-            <p:nvPr/>
-          </p:nvPicPr>
-          <p:blipFill>
-            <a:blip r:embed="rId5">
-              <a:extLst>
-                <a:ext uri="{28A0092B-C50C-407E-A947-70E740481C1C}">
-                  <a14:useLocalDpi xmlns:a14="http://schemas.microsoft.com/office/drawing/2010/main" val="0"/>
-                </a:ext>
-              </a:extLst>
-            </a:blip>
-            <a:srcRect/>
-            <a:stretch>
-              <a:fillRect/>
-            </a:stretch>
-          </p:blipFill>
-          <p:spPr bwMode="auto">
-            <a:xfrm>
-              <a:off x="3207885" y="2832085"/>
-              <a:ext cx="5671456" cy="658406"/>
-            </a:xfrm>
-            <a:prstGeom prst="rect">
-              <a:avLst/>
-            </a:prstGeom>
-            <a:noFill/>
-            <a:ln>
-              <a:noFill/>
-            </a:ln>
-            <a:extLst>
-              <a:ext uri="{909E8E84-426E-40DD-AFC4-6F175D3DCCD1}">
-                <a14:hiddenFill xmlns:a14="http://schemas.microsoft.com/office/drawing/2010/main">
-                  <a:solidFill>
-                    <a:srgbClr val="FFFFFF"/>
-                  </a:solidFill>
-                </a14:hiddenFill>
-              </a:ext>
-              <a:ext uri="{91240B29-F687-4F45-9708-019B960494DF}">
-                <a14:hiddenLine xmlns:a14="http://schemas.microsoft.com/office/drawing/2010/main" w="9525">
-                  <a:solidFill>
-                    <a:srgbClr val="000000"/>
-                  </a:solidFill>
-                  <a:miter lim="800000"/>
-                  <a:headEnd/>
-                  <a:tailEnd/>
-                </a14:hiddenLine>
-              </a:ext>
-            </a:extLst>
-          </p:spPr>
-        </p:pic>
         <p:sp>
           <p:nvSpPr>
             <p:cNvPr id="3" name="Rectangle 2">
@@ -16073,45 +15912,154 @@
             </a:p>
           </p:txBody>
         </p:sp>
-        <p:sp>
-          <p:nvSpPr>
-            <p:cNvPr id="4" name="TextBox 3">
-              <a:extLst>
-                <a:ext uri="{FF2B5EF4-FFF2-40B4-BE49-F238E27FC236}">
-                  <a16:creationId xmlns:a16="http://schemas.microsoft.com/office/drawing/2014/main" id="{DB544836-8B04-D983-0E0E-A579EE0009F3}"/>
-                </a:ext>
-              </a:extLst>
-            </p:cNvPr>
-            <p:cNvSpPr txBox="1"/>
-            <p:nvPr/>
-          </p:nvSpPr>
-          <p:spPr>
-            <a:xfrm>
-              <a:off x="7292262" y="2659084"/>
-              <a:ext cx="476412" cy="677108"/>
-            </a:xfrm>
-            <a:prstGeom prst="rect">
-              <a:avLst/>
-            </a:prstGeom>
-            <a:noFill/>
-          </p:spPr>
-          <p:txBody>
-            <a:bodyPr wrap="none" rtlCol="0">
-              <a:spAutoFit/>
-            </a:bodyPr>
-            <a:lstStyle/>
-            <a:p>
-              <a:r>
-                <a:rPr lang="en-US" sz="3800" dirty="0">
-                  <a:latin typeface="Courier New" panose="02070309020205020404" pitchFamily="49" charset="0"/>
-                  <a:cs typeface="Courier New" panose="02070309020205020404" pitchFamily="49" charset="0"/>
-                </a:rPr>
-                <a:t>)</a:t>
-              </a:r>
-            </a:p>
-          </p:txBody>
-        </p:sp>
       </p:grpSp>
+      <p:sp>
+        <p:nvSpPr>
+          <p:cNvPr id="181251" name="TextBox 181250"/>
+          <p:cNvSpPr txBox="1"/>
+          <p:nvPr/>
+        </p:nvSpPr>
+        <p:spPr>
+          <a:xfrm>
+            <a:off x="4640426" y="4125439"/>
+            <a:ext cx="2278063" cy="1050925"/>
+          </a:xfrm>
+          <a:prstGeom prst="rect">
+            <a:avLst/>
+          </a:prstGeom>
+          <a:noFill/>
+        </p:spPr>
+        <p:txBody>
+          <a:bodyPr wrap="square" anchor="ctr" lIns="0" rIns="0" tIns="0" bIns="0">
+            <a:spAutoFit/>
+          </a:bodyPr>
+          <a:lstStyle/>
+          <a:p>
+            <a:r>
+              <a:rPr sz="2000" b="0">
+                <a:latin typeface="Cambria"/>
+              </a:rPr>
+              <a:t>dp</a:t>
+            </a:r>
+            <a:r>
+              <a:rPr sz="2000" b="0" baseline="-25000">
+                <a:latin typeface="Cambria"/>
+              </a:rPr>
+              <a:t>0</a:t>
+            </a:r>
+            <a:r>
+              <a:rPr sz="2000" b="0">
+                <a:latin typeface="Cambria"/>
+              </a:rPr>
+              <a:t> / dt = −λ p</a:t>
+            </a:r>
+            <a:r>
+              <a:rPr sz="2000" b="0" baseline="-25000">
+                <a:latin typeface="Cambria"/>
+              </a:rPr>
+              <a:t>0</a:t>
+            </a:r>
+          </a:p>
+        </p:txBody>
+      </p:sp>
+      <p:sp>
+        <p:nvSpPr>
+          <p:cNvPr id="181252" name="TextBox 181251"/>
+          <p:cNvSpPr txBox="1"/>
+          <p:nvPr/>
+        </p:nvSpPr>
+        <p:spPr>
+          <a:xfrm>
+            <a:off x="4159900" y="5897173"/>
+            <a:ext cx="2963863" cy="582613"/>
+          </a:xfrm>
+          <a:prstGeom prst="rect">
+            <a:avLst/>
+          </a:prstGeom>
+          <a:noFill/>
+        </p:spPr>
+        <p:txBody>
+          <a:bodyPr wrap="square" anchor="ctr" lIns="0" rIns="0" tIns="0" bIns="0">
+            <a:spAutoFit/>
+          </a:bodyPr>
+          <a:lstStyle/>
+          <a:p>
+            <a:r>
+              <a:rPr sz="2600" b="0">
+                <a:latin typeface="Cambria"/>
+              </a:rPr>
+              <a:t>p</a:t>
+            </a:r>
+            <a:r>
+              <a:rPr sz="2600" b="0" baseline="-25000">
+                <a:latin typeface="Cambria"/>
+              </a:rPr>
+              <a:t>0</a:t>
+            </a:r>
+            <a:r>
+              <a:rPr sz="2600" b="0">
+                <a:latin typeface="Cambria"/>
+              </a:rPr>
+              <a:t>(t) = exp(−λt)</a:t>
+            </a:r>
+          </a:p>
+        </p:txBody>
+      </p:sp>
+      <p:sp>
+        <p:nvSpPr>
+          <p:cNvPr id="181253" name="TextBox 181252"/>
+          <p:cNvSpPr txBox="1"/>
+          <p:nvPr/>
+        </p:nvSpPr>
+        <p:spPr>
+          <a:xfrm>
+            <a:off x="3207885" y="2832085"/>
+            <a:ext cx="5671456" cy="658406"/>
+          </a:xfrm>
+          <a:prstGeom prst="rect">
+            <a:avLst/>
+          </a:prstGeom>
+          <a:noFill/>
+        </p:spPr>
+        <p:txBody>
+          <a:bodyPr wrap="square" anchor="ctr" lIns="0" rIns="0" tIns="0" bIns="0">
+            <a:spAutoFit/>
+          </a:bodyPr>
+          <a:lstStyle/>
+          <a:p>
+            <a:r>
+              <a:rPr sz="2300" b="0">
+                <a:latin typeface="Cambria"/>
+              </a:rPr>
+              <a:t>p</a:t>
+            </a:r>
+            <a:r>
+              <a:rPr sz="2300" b="0" baseline="-25000">
+                <a:latin typeface="Cambria"/>
+              </a:rPr>
+              <a:t>0</a:t>
+            </a:r>
+            <a:r>
+              <a:rPr sz="2300" b="0">
+                <a:latin typeface="Cambria"/>
+              </a:rPr>
+              <a:t>(t + dt) = p</a:t>
+            </a:r>
+            <a:r>
+              <a:rPr sz="2300" b="0" baseline="-25000">
+                <a:latin typeface="Cambria"/>
+              </a:rPr>
+              <a:t>0</a:t>
+            </a:r>
+            <a:r>
+              <a:rPr sz="2300" b="0">
+                <a:latin typeface="Cambria"/>
+              </a:rPr>
+              <a:t>(t)(1 − λdt − o(dt))</a:t>
+            </a:r>
+          </a:p>
+        </p:txBody>
+      </p:sp>
     </p:spTree>
     <p:extLst>
       <p:ext uri="{BB962C8B-B14F-4D97-AF65-F5344CB8AC3E}">
@@ -16294,114 +16242,6 @@
           </a:p>
         </p:txBody>
       </p:sp>
-      <p:pic>
-        <p:nvPicPr>
-          <p:cNvPr id="183299" name="Picture 1" descr="Equation: Pr{no event in 0 to t} = p_0(t) = e^(-lambda t). The zero term of the Poisson." title="Equation: Pr{no event in 0 to t} = p_0(t) = e^(-lambda t). The zero term of the "/>
-          <p:cNvPicPr>
-            <a:picLocks noChangeAspect="1"/>
-          </p:cNvPicPr>
-          <p:nvPr/>
-        </p:nvPicPr>
-        <p:blipFill>
-          <a:blip r:embed="rId3">
-            <a:extLst>
-              <a:ext uri="{28A0092B-C50C-407E-A947-70E740481C1C}">
-                <a14:useLocalDpi xmlns:a14="http://schemas.microsoft.com/office/drawing/2010/main" val="0"/>
-              </a:ext>
-            </a:extLst>
-          </a:blip>
-          <a:srcRect/>
-          <a:stretch>
-            <a:fillRect/>
-          </a:stretch>
-        </p:blipFill>
-        <p:spPr bwMode="auto">
-          <a:xfrm>
-            <a:off x="5916613" y="1713463"/>
-            <a:ext cx="2654300" cy="1095375"/>
-          </a:xfrm>
-          <a:prstGeom prst="rect">
-            <a:avLst/>
-          </a:prstGeom>
-          <a:noFill/>
-          <a:ln>
-            <a:noFill/>
-          </a:ln>
-          <a:extLst>
-            <a:ext uri="{909E8E84-426E-40DD-AFC4-6F175D3DCCD1}">
-              <a14:hiddenFill xmlns:a14="http://schemas.microsoft.com/office/drawing/2010/main">
-                <a:solidFill>
-                  <a:srgbClr val="FFFFFF"/>
-                </a:solidFill>
-              </a14:hiddenFill>
-            </a:ext>
-            <a:ext uri="{91240B29-F687-4F45-9708-019B960494DF}">
-              <a14:hiddenLine xmlns:a14="http://schemas.microsoft.com/office/drawing/2010/main" w="9525">
-                <a:solidFill>
-                  <a:srgbClr val="000000"/>
-                </a:solidFill>
-                <a:miter lim="800000"/>
-                <a:headEnd/>
-                <a:tailEnd/>
-              </a14:hiddenLine>
-            </a:ext>
-          </a:extLst>
-        </p:spPr>
-      </p:pic>
-      <p:pic>
-        <p:nvPicPr>
-          <p:cNvPr id="183301" name="Picture 4" descr="Equation: p_0(t) = exp(-lambda t). Probability of no events by time t." title="Equation: p_0(t) = exp(-lambda t). Probability of no events by time t."/>
-          <p:cNvPicPr>
-            <a:picLocks noChangeAspect="1"/>
-          </p:cNvPicPr>
-          <p:nvPr/>
-        </p:nvPicPr>
-        <p:blipFill>
-          <a:blip r:embed="rId4">
-            <a:extLst>
-              <a:ext uri="{28A0092B-C50C-407E-A947-70E740481C1C}">
-                <a14:useLocalDpi xmlns:a14="http://schemas.microsoft.com/office/drawing/2010/main" val="0"/>
-              </a:ext>
-            </a:extLst>
-          </a:blip>
-          <a:srcRect/>
-          <a:stretch>
-            <a:fillRect/>
-          </a:stretch>
-        </p:blipFill>
-        <p:spPr bwMode="auto">
-          <a:xfrm>
-            <a:off x="2335213" y="3158089"/>
-            <a:ext cx="6235700" cy="704850"/>
-          </a:xfrm>
-          <a:prstGeom prst="rect">
-            <a:avLst/>
-          </a:prstGeom>
-          <a:noFill/>
-          <a:ln>
-            <a:noFill/>
-          </a:ln>
-          <a:extLst>
-            <a:ext uri="{909E8E84-426E-40DD-AFC4-6F175D3DCCD1}">
-              <a14:hiddenFill xmlns:a14="http://schemas.microsoft.com/office/drawing/2010/main">
-                <a:solidFill>
-                  <a:srgbClr val="FFFFFF"/>
-                </a:solidFill>
-              </a14:hiddenFill>
-            </a:ext>
-            <a:ext uri="{91240B29-F687-4F45-9708-019B960494DF}">
-              <a14:hiddenLine xmlns:a14="http://schemas.microsoft.com/office/drawing/2010/main" w="9525">
-                <a:solidFill>
-                  <a:srgbClr val="000000"/>
-                </a:solidFill>
-                <a:miter lim="800000"/>
-                <a:headEnd/>
-                <a:tailEnd/>
-              </a14:hiddenLine>
-            </a:ext>
-          </a:extLst>
-        </p:spPr>
-      </p:pic>
       <p:sp>
         <p:nvSpPr>
           <p:cNvPr id="183304" name="TextBox 9"/>
@@ -16630,6 +16470,116 @@
           </a:p>
         </p:txBody>
       </p:sp>
+      <p:sp>
+        <p:nvSpPr>
+          <p:cNvPr id="183305" name="TextBox 183304"/>
+          <p:cNvSpPr txBox="1"/>
+          <p:nvPr/>
+        </p:nvSpPr>
+        <p:spPr>
+          <a:xfrm>
+            <a:off x="5916613" y="1713463"/>
+            <a:ext cx="3516923" cy="1095375"/>
+          </a:xfrm>
+          <a:prstGeom prst="rect">
+            <a:avLst/>
+          </a:prstGeom>
+          <a:noFill/>
+        </p:spPr>
+        <p:txBody>
+          <a:bodyPr wrap="square" anchor="ctr" lIns="0" rIns="0" tIns="0" bIns="0">
+            <a:spAutoFit/>
+          </a:bodyPr>
+          <a:lstStyle/>
+          <a:p>
+            <a:r>
+              <a:rPr sz="1900" b="0">
+                <a:latin typeface="Cambria"/>
+              </a:rPr>
+              <a:t>p</a:t>
+            </a:r>
+            <a:r>
+              <a:rPr sz="1900" b="0" baseline="-25000">
+                <a:latin typeface="Cambria"/>
+              </a:rPr>
+              <a:t>k</a:t>
+            </a:r>
+            <a:r>
+              <a:rPr sz="1900" b="0">
+                <a:latin typeface="Cambria"/>
+              </a:rPr>
+              <a:t>(t) = (λt)</a:t>
+            </a:r>
+            <a:r>
+              <a:rPr sz="1900" b="0" baseline="30000">
+                <a:latin typeface="Cambria"/>
+              </a:rPr>
+              <a:t>k</a:t>
+            </a:r>
+            <a:r>
+              <a:rPr sz="1900" b="0">
+                <a:latin typeface="Cambria"/>
+              </a:rPr>
+              <a:t> / k! · e</a:t>
+            </a:r>
+            <a:r>
+              <a:rPr sz="1900" b="0" baseline="30000">
+                <a:latin typeface="Cambria"/>
+              </a:rPr>
+              <a:t>−λt</a:t>
+            </a:r>
+          </a:p>
+        </p:txBody>
+      </p:sp>
+      <p:sp>
+        <p:nvSpPr>
+          <p:cNvPr id="183306" name="TextBox 183305"/>
+          <p:cNvSpPr txBox="1"/>
+          <p:nvPr/>
+        </p:nvSpPr>
+        <p:spPr>
+          <a:xfrm>
+            <a:off x="2335213" y="3158089"/>
+            <a:ext cx="6235700" cy="704850"/>
+          </a:xfrm>
+          <a:prstGeom prst="rect">
+            <a:avLst/>
+          </a:prstGeom>
+          <a:noFill/>
+        </p:spPr>
+        <p:txBody>
+          <a:bodyPr wrap="square" anchor="ctr" lIns="0" rIns="0" tIns="0" bIns="0">
+            <a:spAutoFit/>
+          </a:bodyPr>
+          <a:lstStyle/>
+          <a:p>
+            <a:r>
+              <a:rPr sz="2300" b="0">
+                <a:latin typeface="Cambria"/>
+              </a:rPr>
+              <a:t>Pr{no event in 0 to t} = p</a:t>
+            </a:r>
+            <a:r>
+              <a:rPr sz="2300" b="0" baseline="-25000">
+                <a:latin typeface="Cambria"/>
+              </a:rPr>
+              <a:t>0</a:t>
+            </a:r>
+            <a:r>
+              <a:rPr sz="2300" b="0">
+                <a:latin typeface="Cambria"/>
+              </a:rPr>
+              <a:t>(t) = e</a:t>
+            </a:r>
+            <a:r>
+              <a:rPr sz="2300" b="0" baseline="30000">
+                <a:latin typeface="Cambria"/>
+              </a:rPr>
+              <a:t>−λt</a:t>
+            </a:r>
+          </a:p>
+        </p:txBody>
+      </p:sp>
     </p:spTree>
     <p:extLst>
       <p:ext uri="{BB962C8B-B14F-4D97-AF65-F5344CB8AC3E}">
@@ -17439,114 +17389,122 @@
           </a:graphicData>
         </a:graphic>
       </p:graphicFrame>
-      <p:pic>
-        <p:nvPicPr>
-          <p:cNvPr id="191493" name="Picture 1" descr="Equation: p_k(t) = (lambda t)^k / k! times e^(-lambda t). The Poisson pmf with rate lambda over interval t." title="Equation: p_k(t) = (lambda t)^k / k! times e^(-lambda t). The Poisson pmf with r"/>
-          <p:cNvPicPr>
-            <a:picLocks noChangeAspect="1"/>
-          </p:cNvPicPr>
+      <p:sp>
+        <p:nvSpPr>
+          <p:cNvPr id="191493" name="TextBox 191492"/>
+          <p:cNvSpPr txBox="1"/>
           <p:nvPr/>
-        </p:nvPicPr>
-        <p:blipFill>
-          <a:blip r:embed="rId7">
-            <a:extLst>
-              <a:ext uri="{28A0092B-C50C-407E-A947-70E740481C1C}">
-                <a14:useLocalDpi xmlns:a14="http://schemas.microsoft.com/office/drawing/2010/main" val="0"/>
-              </a:ext>
-            </a:extLst>
-          </a:blip>
-          <a:srcRect/>
-          <a:stretch>
-            <a:fillRect/>
-          </a:stretch>
-        </p:blipFill>
-        <p:spPr bwMode="auto">
+        </p:nvSpPr>
+        <p:spPr>
           <a:xfrm>
             <a:off x="1099295" y="2277675"/>
-            <a:ext cx="2890999" cy="1193056"/>
+            <a:ext cx="3516923" cy="1193056"/>
           </a:xfrm>
           <a:prstGeom prst="rect">
             <a:avLst/>
           </a:prstGeom>
           <a:noFill/>
-          <a:ln>
-            <a:noFill/>
-          </a:ln>
-          <a:extLst>
-            <a:ext uri="{909E8E84-426E-40DD-AFC4-6F175D3DCCD1}">
-              <a14:hiddenFill xmlns:a14="http://schemas.microsoft.com/office/drawing/2010/main">
-                <a:solidFill>
-                  <a:srgbClr val="FFFFFF"/>
-                </a:solidFill>
-              </a14:hiddenFill>
-            </a:ext>
-            <a:ext uri="{91240B29-F687-4F45-9708-019B960494DF}">
-              <a14:hiddenLine xmlns:a14="http://schemas.microsoft.com/office/drawing/2010/main" w="9525">
-                <a:solidFill>
-                  <a:srgbClr val="000000"/>
-                </a:solidFill>
-                <a:miter lim="800000"/>
-                <a:headEnd/>
-                <a:tailEnd/>
-              </a14:hiddenLine>
-            </a:ext>
-          </a:extLst>
         </p:spPr>
-      </p:pic>
-      <p:pic>
-        <p:nvPicPr>
-          <p:cNvPr id="2" name="Picture 1" descr="Equation: P(k events in interval) = e^(-lambda) lambda^k / k!. The Poisson pmf with mean lambda." title="Equation: P(k events in interval) = e^(-lambda) lambda^k / k!. The Poisson pmf w"/>
-          <p:cNvPicPr>
-            <a:picLocks noChangeAspect="1"/>
-          </p:cNvPicPr>
+        <p:txBody>
+          <a:bodyPr wrap="square" anchor="ctr" lIns="0" rIns="0" tIns="0" bIns="0">
+            <a:spAutoFit/>
+          </a:bodyPr>
+          <a:lstStyle/>
+          <a:p>
+            <a:r>
+              <a:rPr sz="1900" b="0">
+                <a:latin typeface="Cambria"/>
+              </a:rPr>
+              <a:t>p</a:t>
+            </a:r>
+            <a:r>
+              <a:rPr sz="1900" b="0" baseline="-25000">
+                <a:latin typeface="Cambria"/>
+              </a:rPr>
+              <a:t>k</a:t>
+            </a:r>
+            <a:r>
+              <a:rPr sz="1900" b="0">
+                <a:latin typeface="Cambria"/>
+              </a:rPr>
+              <a:t>(t) = (λt)</a:t>
+            </a:r>
+            <a:r>
+              <a:rPr sz="1900" b="0" baseline="30000">
+                <a:latin typeface="Cambria"/>
+              </a:rPr>
+              <a:t>k</a:t>
+            </a:r>
+            <a:r>
+              <a:rPr sz="1900" b="0">
+                <a:latin typeface="Cambria"/>
+              </a:rPr>
+              <a:t> / k! · e</a:t>
+            </a:r>
+            <a:r>
+              <a:rPr sz="1900" b="0" baseline="30000">
+                <a:latin typeface="Cambria"/>
+              </a:rPr>
+              <a:t>−λt</a:t>
+            </a:r>
+          </a:p>
+        </p:txBody>
+      </p:sp>
+      <p:sp>
+        <p:nvSpPr>
+          <p:cNvPr id="191494" name="TextBox 191493"/>
+          <p:cNvSpPr txBox="1"/>
           <p:nvPr/>
-        </p:nvPicPr>
-        <p:blipFill>
-          <a:blip r:embed="rId8">
-            <a:extLst>
-              <a:ext uri="{28A0092B-C50C-407E-A947-70E740481C1C}">
-                <a14:useLocalDpi xmlns:a14="http://schemas.microsoft.com/office/drawing/2010/main" val="0"/>
-              </a:ext>
-            </a:extLst>
-          </a:blip>
-          <a:srcRect/>
-          <a:stretch>
-            <a:fillRect/>
-          </a:stretch>
-        </p:blipFill>
-        <p:spPr bwMode="auto">
+        </p:nvSpPr>
+        <p:spPr>
           <a:xfrm>
             <a:off x="7117699" y="2509997"/>
-            <a:ext cx="3594100" cy="744537"/>
+            <a:ext cx="4845701" cy="744537"/>
           </a:xfrm>
           <a:prstGeom prst="rect">
             <a:avLst/>
           </a:prstGeom>
           <a:noFill/>
-          <a:ln>
-            <a:noFill/>
-          </a:ln>
-          <a:extLst>
-            <a:ext uri="{909E8E84-426E-40DD-AFC4-6F175D3DCCD1}">
-              <a14:hiddenFill xmlns:a14="http://schemas.microsoft.com/office/drawing/2010/main">
-                <a:solidFill>
-                  <a:srgbClr val="FFFFFF"/>
-                </a:solidFill>
-              </a14:hiddenFill>
-            </a:ext>
-            <a:ext uri="{91240B29-F687-4F45-9708-019B960494DF}">
-              <a14:hiddenLine xmlns:a14="http://schemas.microsoft.com/office/drawing/2010/main" w="9525">
-                <a:solidFill>
-                  <a:srgbClr val="000000"/>
-                </a:solidFill>
-                <a:miter lim="800000"/>
-                <a:headEnd/>
-                <a:tailEnd/>
-              </a14:hiddenLine>
-            </a:ext>
-          </a:extLst>
         </p:spPr>
-      </p:pic>
+        <p:txBody>
+          <a:bodyPr wrap="square" anchor="ctr" lIns="0" rIns="0" tIns="0" bIns="0">
+            <a:spAutoFit/>
+          </a:bodyPr>
+          <a:lstStyle/>
+          <a:p>
+            <a:r>
+              <a:rPr sz="1700" b="0">
+                <a:latin typeface="Cambria"/>
+              </a:rPr>
+              <a:t>P(k events in interval) = e</a:t>
+            </a:r>
+            <a:r>
+              <a:rPr sz="1700" b="0" baseline="30000">
+                <a:latin typeface="Cambria"/>
+              </a:rPr>
+              <a:t>−λ</a:t>
+            </a:r>
+            <a:r>
+              <a:rPr sz="1700" b="0">
+                <a:latin typeface="Cambria"/>
+              </a:rPr>
+              <a:t> · λ</a:t>
+            </a:r>
+            <a:r>
+              <a:rPr sz="1700" b="0" baseline="30000">
+                <a:latin typeface="Cambria"/>
+              </a:rPr>
+              <a:t>k</a:t>
+            </a:r>
+            <a:r>
+              <a:rPr sz="1700" b="0">
+                <a:latin typeface="Cambria"/>
+              </a:rPr>
+              <a:t> / k!</a:t>
+            </a:r>
+          </a:p>
+        </p:txBody>
+      </p:sp>
     </p:spTree>
     <p:extLst>
       <p:ext uri="{BB962C8B-B14F-4D97-AF65-F5344CB8AC3E}">
@@ -20532,168 +20490,213 @@
           </a:p>
         </p:txBody>
       </p:sp>
-      <p:pic>
-        <p:nvPicPr>
-          <p:cNvPr id="207875" name="Picture 3" descr="Equation: p_k(t) = (lambda t)^k / k! times e^(-lambda t). The Poisson pmf." title="Equation: p_k(t) = (lambda t)^k / k! times e^(-lambda t). The Poisson pmf."/>
-          <p:cNvPicPr>
-            <a:picLocks noChangeAspect="1"/>
-          </p:cNvPicPr>
+      <p:sp>
+        <p:nvSpPr>
+          <p:cNvPr id="11268" name="TextBox 11267"/>
+          <p:cNvSpPr txBox="1"/>
           <p:nvPr/>
-        </p:nvPicPr>
-        <p:blipFill>
-          <a:blip r:embed="rId3">
-            <a:extLst>
-              <a:ext uri="{28A0092B-C50C-407E-A947-70E740481C1C}">
-                <a14:useLocalDpi xmlns:a14="http://schemas.microsoft.com/office/drawing/2010/main" val="0"/>
-              </a:ext>
-            </a:extLst>
-          </a:blip>
-          <a:srcRect/>
-          <a:stretch>
-            <a:fillRect/>
-          </a:stretch>
-        </p:blipFill>
-        <p:spPr bwMode="auto">
+        </p:nvSpPr>
+        <p:spPr>
           <a:xfrm>
             <a:off x="4572000" y="1961731"/>
-            <a:ext cx="2654300" cy="1095375"/>
+            <a:ext cx="3516923" cy="1095375"/>
           </a:xfrm>
           <a:prstGeom prst="rect">
             <a:avLst/>
           </a:prstGeom>
           <a:noFill/>
-          <a:ln>
-            <a:noFill/>
-          </a:ln>
-          <a:extLst>
-            <a:ext uri="{909E8E84-426E-40DD-AFC4-6F175D3DCCD1}">
-              <a14:hiddenFill xmlns:a14="http://schemas.microsoft.com/office/drawing/2010/main">
-                <a:solidFill>
-                  <a:srgbClr val="FFFFFF"/>
-                </a:solidFill>
-              </a14:hiddenFill>
-            </a:ext>
-            <a:ext uri="{91240B29-F687-4F45-9708-019B960494DF}">
-              <a14:hiddenLine xmlns:a14="http://schemas.microsoft.com/office/drawing/2010/main" w="9525">
-                <a:solidFill>
-                  <a:srgbClr val="000000"/>
-                </a:solidFill>
-                <a:miter lim="800000"/>
-                <a:headEnd/>
-                <a:tailEnd/>
-              </a14:hiddenLine>
-            </a:ext>
-          </a:extLst>
         </p:spPr>
-      </p:pic>
-      <p:pic>
-        <p:nvPicPr>
-          <p:cNvPr id="5" name="Picture 4" descr="Equation: L(p | {X_i}) = sum from i=1 to n of log(f(X_i | p)). The log-likelihood for n observations." title="Equation: L(p | {X_i}) = sum from i=1 to n of log(f(X_i | p)). The log-likelihoo"/>
-          <p:cNvPicPr>
-            <a:picLocks noChangeAspect="1"/>
-          </p:cNvPicPr>
+        <p:txBody>
+          <a:bodyPr wrap="square" anchor="ctr" lIns="0" rIns="0" tIns="0" bIns="0">
+            <a:spAutoFit/>
+          </a:bodyPr>
+          <a:lstStyle/>
+          <a:p>
+            <a:r>
+              <a:rPr sz="1900" b="0">
+                <a:latin typeface="Cambria"/>
+              </a:rPr>
+              <a:t>p</a:t>
+            </a:r>
+            <a:r>
+              <a:rPr sz="1900" b="0" baseline="-25000">
+                <a:latin typeface="Cambria"/>
+              </a:rPr>
+              <a:t>k</a:t>
+            </a:r>
+            <a:r>
+              <a:rPr sz="1900" b="0">
+                <a:latin typeface="Cambria"/>
+              </a:rPr>
+              <a:t>(t) = (λt)</a:t>
+            </a:r>
+            <a:r>
+              <a:rPr sz="1900" b="0" baseline="30000">
+                <a:latin typeface="Cambria"/>
+              </a:rPr>
+              <a:t>k</a:t>
+            </a:r>
+            <a:r>
+              <a:rPr sz="1900" b="0">
+                <a:latin typeface="Cambria"/>
+              </a:rPr>
+              <a:t> / k! · e</a:t>
+            </a:r>
+            <a:r>
+              <a:rPr sz="1900" b="0" baseline="30000">
+                <a:latin typeface="Cambria"/>
+              </a:rPr>
+              <a:t>−λt</a:t>
+            </a:r>
+          </a:p>
+        </p:txBody>
+      </p:sp>
+      <p:sp>
+        <p:nvSpPr>
+          <p:cNvPr id="11269" name="TextBox 11268"/>
+          <p:cNvSpPr txBox="1"/>
           <p:nvPr/>
-        </p:nvPicPr>
-        <p:blipFill>
-          <a:blip r:embed="rId4">
-            <a:extLst>
-              <a:ext uri="{28A0092B-C50C-407E-A947-70E740481C1C}">
-                <a14:useLocalDpi xmlns:a14="http://schemas.microsoft.com/office/drawing/2010/main" val="0"/>
-              </a:ext>
-            </a:extLst>
-          </a:blip>
-          <a:srcRect/>
-          <a:stretch>
-            <a:fillRect/>
-          </a:stretch>
-        </p:blipFill>
-        <p:spPr bwMode="auto">
+        </p:nvSpPr>
+        <p:spPr>
           <a:xfrm>
             <a:off x="5903556" y="5027477"/>
-            <a:ext cx="4945062" cy="546100"/>
+            <a:ext cx="5064369" cy="546100"/>
           </a:xfrm>
           <a:prstGeom prst="rect">
             <a:avLst/>
           </a:prstGeom>
           <a:noFill/>
-          <a:ln>
-            <a:noFill/>
-          </a:ln>
-          <a:extLst>
-            <a:ext uri="{909E8E84-426E-40DD-AFC4-6F175D3DCCD1}">
-              <a14:hiddenFill xmlns:a14="http://schemas.microsoft.com/office/drawing/2010/main">
-                <a:solidFill>
-                  <a:srgbClr val="FFFFFF"/>
-                </a:solidFill>
-              </a14:hiddenFill>
-            </a:ext>
-            <a:ext uri="{91240B29-F687-4F45-9708-019B960494DF}">
-              <a14:hiddenLine xmlns:a14="http://schemas.microsoft.com/office/drawing/2010/main" w="9525">
-                <a:solidFill>
-                  <a:srgbClr val="000000"/>
-                </a:solidFill>
-                <a:miter lim="800000"/>
-                <a:headEnd/>
-                <a:tailEnd/>
-              </a14:hiddenLine>
-            </a:ext>
-          </a:extLst>
         </p:spPr>
-      </p:pic>
-      <p:pic>
-        <p:nvPicPr>
-          <p:cNvPr id="6" name="Picture 5" descr="Equation: L-tilde(p | {X_i}) = product from i=1 to n of f(X_i | p). The likelihood as a product over n observations." title="Equation: L-tilde(p | {X_i}) = product from i=1 to n of f(X_i | p). The likeliho"/>
-          <p:cNvPicPr>
-            <a:picLocks noChangeAspect="1"/>
-          </p:cNvPicPr>
+        <p:txBody>
+          <a:bodyPr wrap="square" anchor="ctr" lIns="0" rIns="0" tIns="0" bIns="0">
+            <a:spAutoFit/>
+          </a:bodyPr>
+          <a:lstStyle/>
+          <a:p>
+            <a:r>
+              <a:rPr sz="1900" b="0">
+                <a:latin typeface="Cambria"/>
+              </a:rPr>
+              <a:t>L(p | {X</a:t>
+            </a:r>
+            <a:r>
+              <a:rPr sz="1900" b="0" baseline="-25000">
+                <a:latin typeface="Cambria"/>
+              </a:rPr>
+              <a:t>i</a:t>
+            </a:r>
+            <a:r>
+              <a:rPr sz="1900" b="0">
+                <a:latin typeface="Cambria"/>
+              </a:rPr>
+              <a:t>}) = Σ</a:t>
+            </a:r>
+            <a:r>
+              <a:rPr sz="1900" b="0" baseline="-25000">
+                <a:latin typeface="Cambria"/>
+              </a:rPr>
+              <a:t>i=1</a:t>
+            </a:r>
+            <a:r>
+              <a:rPr sz="1900" b="0" baseline="30000">
+                <a:latin typeface="Cambria"/>
+              </a:rPr>
+              <a:t>n</a:t>
+            </a:r>
+            <a:r>
+              <a:rPr sz="1900" b="0">
+                <a:latin typeface="Cambria"/>
+              </a:rPr>
+              <a:t> log( f(X</a:t>
+            </a:r>
+            <a:r>
+              <a:rPr sz="1900" b="0" baseline="-25000">
+                <a:latin typeface="Cambria"/>
+              </a:rPr>
+              <a:t>i</a:t>
+            </a:r>
+            <a:r>
+              <a:rPr sz="1900" b="0">
+                <a:latin typeface="Cambria"/>
+              </a:rPr>
+              <a:t> | p) )</a:t>
+            </a:r>
+          </a:p>
+        </p:txBody>
+      </p:sp>
+      <p:sp>
+        <p:nvSpPr>
+          <p:cNvPr id="11270" name="TextBox 11269"/>
+          <p:cNvSpPr txBox="1"/>
           <p:nvPr/>
-        </p:nvPicPr>
-        <p:blipFill>
-          <a:blip r:embed="rId5">
-            <a:extLst>
-              <a:ext uri="{28A0092B-C50C-407E-A947-70E740481C1C}">
-                <a14:useLocalDpi xmlns:a14="http://schemas.microsoft.com/office/drawing/2010/main" val="0"/>
-              </a:ext>
-            </a:extLst>
-          </a:blip>
-          <a:srcRect/>
-          <a:stretch>
-            <a:fillRect/>
-          </a:stretch>
-        </p:blipFill>
-        <p:spPr bwMode="auto">
+        </p:nvSpPr>
+        <p:spPr>
           <a:xfrm>
             <a:off x="1226975" y="5024047"/>
-            <a:ext cx="3733800" cy="538163"/>
+            <a:ext cx="4079630" cy="538163"/>
           </a:xfrm>
           <a:prstGeom prst="rect">
             <a:avLst/>
           </a:prstGeom>
           <a:noFill/>
-          <a:ln>
-            <a:noFill/>
-          </a:ln>
-          <a:extLst>
-            <a:ext uri="{909E8E84-426E-40DD-AFC4-6F175D3DCCD1}">
-              <a14:hiddenFill xmlns:a14="http://schemas.microsoft.com/office/drawing/2010/main">
-                <a:solidFill>
-                  <a:srgbClr val="FFFFFF"/>
-                </a:solidFill>
-              </a14:hiddenFill>
-            </a:ext>
-            <a:ext uri="{91240B29-F687-4F45-9708-019B960494DF}">
-              <a14:hiddenLine xmlns:a14="http://schemas.microsoft.com/office/drawing/2010/main" w="9525">
-                <a:solidFill>
-                  <a:srgbClr val="000000"/>
-                </a:solidFill>
-                <a:miter lim="800000"/>
-                <a:headEnd/>
-                <a:tailEnd/>
-              </a14:hiddenLine>
-            </a:ext>
-          </a:extLst>
         </p:spPr>
-      </p:pic>
+        <p:txBody>
+          <a:bodyPr wrap="square" anchor="ctr" lIns="0" rIns="0" tIns="0" bIns="0">
+            <a:spAutoFit/>
+          </a:bodyPr>
+          <a:lstStyle/>
+          <a:p>
+            <a:r>
+              <a:rPr sz="1900" b="0">
+                <a:latin typeface="Cambria"/>
+              </a:rPr>
+              <a:t>ℒ(p | {X</a:t>
+            </a:r>
+            <a:r>
+              <a:rPr sz="1900" b="0" baseline="-25000">
+                <a:latin typeface="Cambria"/>
+              </a:rPr>
+              <a:t>i</a:t>
+            </a:r>
+            <a:r>
+              <a:rPr sz="1900" b="0">
+                <a:latin typeface="Cambria"/>
+              </a:rPr>
+              <a:t>}) = ∏</a:t>
+            </a:r>
+            <a:r>
+              <a:rPr sz="1900" b="0" baseline="-25000">
+                <a:latin typeface="Cambria"/>
+              </a:rPr>
+              <a:t>i=1</a:t>
+            </a:r>
+            <a:r>
+              <a:rPr sz="1900" b="0" baseline="30000">
+                <a:latin typeface="Cambria"/>
+              </a:rPr>
+              <a:t>n</a:t>
+            </a:r>
+            <a:r>
+              <a:rPr sz="1900" b="0">
+                <a:latin typeface="Cambria"/>
+              </a:rPr>
+              <a:t> f(X</a:t>
+            </a:r>
+            <a:r>
+              <a:rPr sz="1900" b="0" baseline="-25000">
+                <a:latin typeface="Cambria"/>
+              </a:rPr>
+              <a:t>i</a:t>
+            </a:r>
+            <a:r>
+              <a:rPr sz="1900" b="0">
+                <a:latin typeface="Cambria"/>
+              </a:rPr>
+              <a:t> | p)</a:t>
+            </a:r>
+          </a:p>
+        </p:txBody>
+      </p:sp>
     </p:spTree>
     <p:extLst>
       <p:ext uri="{BB962C8B-B14F-4D97-AF65-F5344CB8AC3E}">
@@ -21921,60 +21924,6 @@
       </p:grpSpPr>
       <p:pic>
         <p:nvPicPr>
-          <p:cNvPr id="211970" name="Picture 2" descr="Equation: Pr{N = n | k, p} = Probability that the kth success occurs on trial n. Sets up the negative binomial." title="Equation: Pr{N = n | k, p} = Probability that the kth success occurs on trial n."/>
-          <p:cNvPicPr>
-            <a:picLocks noChangeAspect="1"/>
-          </p:cNvPicPr>
-          <p:nvPr/>
-        </p:nvPicPr>
-        <p:blipFill>
-          <a:blip r:embed="rId3">
-            <a:extLst>
-              <a:ext uri="{28A0092B-C50C-407E-A947-70E740481C1C}">
-                <a14:useLocalDpi xmlns:a14="http://schemas.microsoft.com/office/drawing/2010/main" val="0"/>
-              </a:ext>
-            </a:extLst>
-          </a:blip>
-          <a:srcRect/>
-          <a:stretch>
-            <a:fillRect/>
-          </a:stretch>
-        </p:blipFill>
-        <p:spPr bwMode="auto">
-          <a:xfrm>
-            <a:off x="1535113" y="1390986"/>
-            <a:ext cx="9144000" cy="427037"/>
-          </a:xfrm>
-          <a:prstGeom prst="rect">
-            <a:avLst/>
-          </a:prstGeom>
-          <a:noFill/>
-          <a:ln>
-            <a:noFill/>
-          </a:ln>
-          <a:extLst>
-            <a:ext uri="{909E8E84-426E-40DD-AFC4-6F175D3DCCD1}">
-              <a14:hiddenFill xmlns:a14="http://schemas.microsoft.com/office/drawing/2010/main">
-                <a:solidFill>
-                  <a:srgbClr val="FFFFFF"/>
-                </a:solidFill>
-              </a14:hiddenFill>
-            </a:ext>
-            <a:ext uri="{91240B29-F687-4F45-9708-019B960494DF}">
-              <a14:hiddenLine xmlns:a14="http://schemas.microsoft.com/office/drawing/2010/main" w="9525">
-                <a:solidFill>
-                  <a:srgbClr val="000000"/>
-                </a:solidFill>
-                <a:miter lim="800000"/>
-                <a:headEnd/>
-                <a:tailEnd/>
-              </a14:hiddenLine>
-            </a:ext>
-          </a:extLst>
-        </p:spPr>
-      </p:pic>
-      <p:pic>
-        <p:nvPicPr>
           <p:cNvPr id="211971" name="Picture 3" descr="Text: for the kth success on trial n, we need k-1 successes in the first n-1 trials (binomial with parameters n-1 and p) and a success on trial n with probability p, independently." title="Text: for the kth success on trial n, we need k-1 successes in the first n-1 tri"/>
           <p:cNvPicPr>
             <a:picLocks noChangeAspect="1"/>
@@ -21998,60 +21947,6 @@
           <a:xfrm>
             <a:off x="1524000" y="2046622"/>
             <a:ext cx="9144000" cy="2724150"/>
-          </a:xfrm>
-          <a:prstGeom prst="rect">
-            <a:avLst/>
-          </a:prstGeom>
-          <a:noFill/>
-          <a:ln>
-            <a:noFill/>
-          </a:ln>
-          <a:extLst>
-            <a:ext uri="{909E8E84-426E-40DD-AFC4-6F175D3DCCD1}">
-              <a14:hiddenFill xmlns:a14="http://schemas.microsoft.com/office/drawing/2010/main">
-                <a:solidFill>
-                  <a:srgbClr val="FFFFFF"/>
-                </a:solidFill>
-              </a14:hiddenFill>
-            </a:ext>
-            <a:ext uri="{91240B29-F687-4F45-9708-019B960494DF}">
-              <a14:hiddenLine xmlns:a14="http://schemas.microsoft.com/office/drawing/2010/main" w="9525">
-                <a:solidFill>
-                  <a:srgbClr val="000000"/>
-                </a:solidFill>
-                <a:miter lim="800000"/>
-                <a:headEnd/>
-                <a:tailEnd/>
-              </a14:hiddenLine>
-            </a:ext>
-          </a:extLst>
-        </p:spPr>
-      </p:pic>
-      <p:pic>
-        <p:nvPicPr>
-          <p:cNvPr id="6" name="Picture 5" descr="Equation: Pr{N = n | k, p} = (n-1 choose k-1) p^(k-1) (1-p)^(n-k) p = (n-1 choose k-1) p^k (1-p)^(n-k). The negative binomial pmf." title="Equation: Pr{N = n | k, p} = (n-1 choose k-1) p^(k-1) (1-p)^(n-k) p = (n-1 choos"/>
-          <p:cNvPicPr>
-            <a:picLocks noChangeAspect="1"/>
-          </p:cNvPicPr>
-          <p:nvPr/>
-        </p:nvPicPr>
-        <p:blipFill>
-          <a:blip r:embed="rId5">
-            <a:extLst>
-              <a:ext uri="{28A0092B-C50C-407E-A947-70E740481C1C}">
-                <a14:useLocalDpi xmlns:a14="http://schemas.microsoft.com/office/drawing/2010/main" val="0"/>
-              </a:ext>
-            </a:extLst>
-          </a:blip>
-          <a:srcRect/>
-          <a:stretch>
-            <a:fillRect/>
-          </a:stretch>
-        </p:blipFill>
-        <p:spPr bwMode="auto">
-          <a:xfrm>
-            <a:off x="1535113" y="4892484"/>
-            <a:ext cx="9144000" cy="955675"/>
           </a:xfrm>
           <a:prstGeom prst="rect">
             <a:avLst/>
@@ -22338,36 +22233,6 @@
           </a:p>
         </p:txBody>
       </p:sp>
-      <p:pic>
-        <p:nvPicPr>
-          <p:cNvPr id="3" name="Picture 2" descr="Equation: f(k; r, p) = Pr(X = k) = (k+r-1 choose r-1) (1-p)^k p^r. Negative binomial for number of failures k before r successes." title="Equation: f(k; r, p) = Pr(X = k) = (k+r-1 choose r-1) (1-p)^k p^r. Negative bino"/>
-          <p:cNvPicPr>
-            <a:picLocks noChangeAspect="1"/>
-          </p:cNvPicPr>
-          <p:nvPr/>
-        </p:nvPicPr>
-        <p:blipFill>
-          <a:blip r:embed="rId6">
-            <a:extLst>
-              <a:ext uri="{28A0092B-C50C-407E-A947-70E740481C1C}">
-                <a14:useLocalDpi xmlns:a14="http://schemas.microsoft.com/office/drawing/2010/main" val="0"/>
-              </a:ext>
-            </a:extLst>
-          </a:blip>
-          <a:stretch>
-            <a:fillRect/>
-          </a:stretch>
-        </p:blipFill>
-        <p:spPr>
-          <a:xfrm>
-            <a:off x="5963239" y="5922241"/>
-            <a:ext cx="6165041" cy="955675"/>
-          </a:xfrm>
-          <a:prstGeom prst="rect">
-            <a:avLst/>
-          </a:prstGeom>
-        </p:spPr>
-      </p:pic>
       <p:sp>
         <p:nvSpPr>
           <p:cNvPr id="10" name="Rectangle 2"/>
@@ -22424,6 +22289,159 @@
               <a:t>(1) # failures/trials before fixed number of successes</a:t>
             </a:r>
             <a:endParaRPr lang="en-US" sz="2400" dirty="0"/>
+          </a:p>
+        </p:txBody>
+      </p:sp>
+      <p:sp>
+        <p:nvSpPr>
+          <p:cNvPr id="211974" name="TextBox 211973"/>
+          <p:cNvSpPr txBox="1"/>
+          <p:nvPr/>
+        </p:nvSpPr>
+        <p:spPr>
+          <a:xfrm>
+            <a:off x="1535113" y="1390986"/>
+            <a:ext cx="9706707" cy="427037"/>
+          </a:xfrm>
+          <a:prstGeom prst="rect">
+            <a:avLst/>
+          </a:prstGeom>
+          <a:noFill/>
+        </p:spPr>
+        <p:txBody>
+          <a:bodyPr wrap="square" anchor="ctr" lIns="0" rIns="0" tIns="0" bIns="0">
+            <a:spAutoFit/>
+          </a:bodyPr>
+          <a:lstStyle/>
+          <a:p>
+            <a:r>
+              <a:rPr sz="1900" b="0">
+                <a:latin typeface="Cambria"/>
+              </a:rPr>
+              <a:t>Pr{N = n | k, p} = Probability that the kth success occurs on trial n</a:t>
+            </a:r>
+          </a:p>
+        </p:txBody>
+      </p:sp>
+      <p:sp>
+        <p:nvSpPr>
+          <p:cNvPr id="211975" name="TextBox 211974"/>
+          <p:cNvSpPr txBox="1"/>
+          <p:nvPr/>
+        </p:nvSpPr>
+        <p:spPr>
+          <a:xfrm>
+            <a:off x="1535113" y="4892484"/>
+            <a:ext cx="10428287" cy="955675"/>
+          </a:xfrm>
+          <a:prstGeom prst="rect">
+            <a:avLst/>
+          </a:prstGeom>
+          <a:noFill/>
+        </p:spPr>
+        <p:txBody>
+          <a:bodyPr wrap="square" anchor="ctr" lIns="0" rIns="0" tIns="0" bIns="0">
+            <a:spAutoFit/>
+          </a:bodyPr>
+          <a:lstStyle/>
+          <a:p>
+            <a:r>
+              <a:rPr sz="1600" b="0">
+                <a:latin typeface="Cambria"/>
+              </a:rPr>
+              <a:t>Pr{N = n | k, p} = (n−1 choose k−1) p</a:t>
+            </a:r>
+            <a:r>
+              <a:rPr sz="1600" b="0" baseline="30000">
+                <a:latin typeface="Cambria"/>
+              </a:rPr>
+              <a:t>k−1</a:t>
+            </a:r>
+            <a:r>
+              <a:rPr sz="1600" b="0">
+                <a:latin typeface="Cambria"/>
+              </a:rPr>
+              <a:t> (1 − p)</a:t>
+            </a:r>
+            <a:r>
+              <a:rPr sz="1600" b="0" baseline="30000">
+                <a:latin typeface="Cambria"/>
+              </a:rPr>
+              <a:t>n − k</a:t>
+            </a:r>
+            <a:r>
+              <a:rPr sz="1600" b="0">
+                <a:latin typeface="Cambria"/>
+              </a:rPr>
+              <a:t> p = (n−1 choose k−1) p</a:t>
+            </a:r>
+            <a:r>
+              <a:rPr sz="1600" b="0" baseline="30000">
+                <a:latin typeface="Cambria"/>
+              </a:rPr>
+              <a:t>k</a:t>
+            </a:r>
+            <a:r>
+              <a:rPr sz="1600" b="0">
+                <a:latin typeface="Cambria"/>
+              </a:rPr>
+              <a:t> (1 − p)</a:t>
+            </a:r>
+            <a:r>
+              <a:rPr sz="1600" b="0" baseline="30000">
+                <a:latin typeface="Cambria"/>
+              </a:rPr>
+              <a:t>n − k</a:t>
+            </a:r>
+          </a:p>
+        </p:txBody>
+      </p:sp>
+      <p:sp>
+        <p:nvSpPr>
+          <p:cNvPr id="211976" name="TextBox 211975"/>
+          <p:cNvSpPr txBox="1"/>
+          <p:nvPr/>
+        </p:nvSpPr>
+        <p:spPr>
+          <a:xfrm>
+            <a:off x="5963239" y="5922241"/>
+            <a:ext cx="6000161" cy="955675"/>
+          </a:xfrm>
+          <a:prstGeom prst="rect">
+            <a:avLst/>
+          </a:prstGeom>
+          <a:noFill/>
+        </p:spPr>
+        <p:txBody>
+          <a:bodyPr wrap="square" anchor="ctr" lIns="0" rIns="0" tIns="0" bIns="0">
+            <a:spAutoFit/>
+          </a:bodyPr>
+          <a:lstStyle/>
+          <a:p>
+            <a:r>
+              <a:rPr sz="1500" b="0">
+                <a:latin typeface="Cambria"/>
+              </a:rPr>
+              <a:t>f(k; r, p) ≡ Pr(X = k) = (k+r−1 choose r−1) (1 − p)</a:t>
+            </a:r>
+            <a:r>
+              <a:rPr sz="1500" b="0" baseline="30000">
+                <a:latin typeface="Cambria"/>
+              </a:rPr>
+              <a:t>k</a:t>
+            </a:r>
+            <a:r>
+              <a:rPr sz="1500" b="0">
+                <a:latin typeface="Cambria"/>
+              </a:rPr>
+              <a:t> p</a:t>
+            </a:r>
+            <a:r>
+              <a:rPr sz="1500" b="0" baseline="30000">
+                <a:latin typeface="Cambria"/>
+              </a:rPr>
+              <a:t>r</a:t>
+            </a:r>
           </a:p>
         </p:txBody>
       </p:sp>
@@ -22715,144 +22733,6 @@
           </a:p>
         </p:txBody>
       </p:sp>
-      <p:pic>
-        <p:nvPicPr>
-          <p:cNvPr id="214019" name="Picture 2" descr="Equation: Pr{k events in [0,t] | lambda} = (lambda t)^k / k! times e^(-lambda t). The Poisson before making lambda random." title="Equation: Pr{k events in [0,t] | lambda} = (lambda t)^k / k! times e^(-lambda t)"/>
-          <p:cNvPicPr>
-            <a:picLocks noChangeAspect="1"/>
-          </p:cNvPicPr>
-          <p:nvPr/>
-        </p:nvPicPr>
-        <p:blipFill>
-          <a:blip r:embed="rId3">
-            <a:extLst>
-              <a:ext uri="{28A0092B-C50C-407E-A947-70E740481C1C}">
-                <a14:useLocalDpi xmlns:a14="http://schemas.microsoft.com/office/drawing/2010/main" val="0"/>
-              </a:ext>
-            </a:extLst>
-          </a:blip>
-          <a:srcRect/>
-          <a:stretch>
-            <a:fillRect/>
-          </a:stretch>
-        </p:blipFill>
-        <p:spPr bwMode="auto">
-          <a:xfrm>
-            <a:off x="5081752" y="1149920"/>
-            <a:ext cx="5346700" cy="1352550"/>
-          </a:xfrm>
-          <a:prstGeom prst="rect">
-            <a:avLst/>
-          </a:prstGeom>
-          <a:noFill/>
-          <a:ln>
-            <a:noFill/>
-          </a:ln>
-          <a:extLst>
-            <a:ext uri="{909E8E84-426E-40DD-AFC4-6F175D3DCCD1}">
-              <a14:hiddenFill xmlns:a14="http://schemas.microsoft.com/office/drawing/2010/main">
-                <a:solidFill>
-                  <a:srgbClr val="FFFFFF"/>
-                </a:solidFill>
-              </a14:hiddenFill>
-            </a:ext>
-            <a:ext uri="{91240B29-F687-4F45-9708-019B960494DF}">
-              <a14:hiddenLine xmlns:a14="http://schemas.microsoft.com/office/drawing/2010/main" w="9525">
-                <a:solidFill>
-                  <a:srgbClr val="000000"/>
-                </a:solidFill>
-                <a:miter lim="800000"/>
-                <a:headEnd/>
-                <a:tailEnd/>
-              </a14:hiddenLine>
-            </a:ext>
-          </a:extLst>
-        </p:spPr>
-      </p:pic>
-      <p:pic>
-        <p:nvPicPr>
-          <p:cNvPr id="214020" name="Picture 4" descr="Equation: Pr{k events in [0,t]} = integral from 0 to infinity of (lambda t)^k / k! times e^(-lambda t) f(lambda) d-lambda. Marginalizing the Poisson over a distribution of lambda." title="Equation: Pr{k events in [0,t]} = integral from 0 to infinity of (lambda t)^k / "/>
-          <p:cNvPicPr>
-            <a:picLocks noChangeAspect="1"/>
-          </p:cNvPicPr>
-          <p:nvPr/>
-        </p:nvPicPr>
-        <p:blipFill>
-          <a:blip r:embed="rId4">
-            <a:extLst>
-              <a:ext uri="{28A0092B-C50C-407E-A947-70E740481C1C}">
-                <a14:useLocalDpi xmlns:a14="http://schemas.microsoft.com/office/drawing/2010/main" val="0"/>
-              </a:ext>
-            </a:extLst>
-          </a:blip>
-          <a:srcRect/>
-          <a:stretch>
-            <a:fillRect/>
-          </a:stretch>
-        </p:blipFill>
-        <p:spPr bwMode="auto">
-          <a:xfrm>
-            <a:off x="3134519" y="4045520"/>
-            <a:ext cx="5486400" cy="1377950"/>
-          </a:xfrm>
-          <a:prstGeom prst="rect">
-            <a:avLst/>
-          </a:prstGeom>
-          <a:noFill/>
-          <a:ln>
-            <a:noFill/>
-          </a:ln>
-          <a:extLst>
-            <a:ext uri="{909E8E84-426E-40DD-AFC4-6F175D3DCCD1}">
-              <a14:hiddenFill xmlns:a14="http://schemas.microsoft.com/office/drawing/2010/main">
-                <a:solidFill>
-                  <a:srgbClr val="FFFFFF"/>
-                </a:solidFill>
-              </a14:hiddenFill>
-            </a:ext>
-            <a:ext uri="{91240B29-F687-4F45-9708-019B960494DF}">
-              <a14:hiddenLine xmlns:a14="http://schemas.microsoft.com/office/drawing/2010/main" w="9525">
-                <a:solidFill>
-                  <a:srgbClr val="000000"/>
-                </a:solidFill>
-                <a:miter lim="800000"/>
-                <a:headEnd/>
-                <a:tailEnd/>
-              </a14:hiddenLine>
-            </a:ext>
-          </a:extLst>
-        </p:spPr>
-      </p:pic>
-      <p:pic>
-        <p:nvPicPr>
-          <p:cNvPr id="3" name="Picture 2" descr="Equation: p_X(x) = integral over y of p_{X,Y}(x,y) dy = integral over y of p_{X|Y}(x|y) p_Y(y) dy. The marginalization identity." title="Equation: p_X(x) = integral over y of p_{X,Y}(x,y) dy = integral over y of p_{X|"/>
-          <p:cNvPicPr>
-            <a:picLocks noChangeAspect="1"/>
-          </p:cNvPicPr>
-          <p:nvPr/>
-        </p:nvPicPr>
-        <p:blipFill>
-          <a:blip r:embed="rId5">
-            <a:extLst>
-              <a:ext uri="{28A0092B-C50C-407E-A947-70E740481C1C}">
-                <a14:useLocalDpi xmlns:a14="http://schemas.microsoft.com/office/drawing/2010/main" val="0"/>
-              </a:ext>
-            </a:extLst>
-          </a:blip>
-          <a:stretch>
-            <a:fillRect/>
-          </a:stretch>
-        </p:blipFill>
-        <p:spPr>
-          <a:xfrm>
-            <a:off x="2753519" y="5791131"/>
-            <a:ext cx="6248400" cy="736600"/>
-          </a:xfrm>
-          <a:prstGeom prst="rect">
-            <a:avLst/>
-          </a:prstGeom>
-        </p:spPr>
-      </p:pic>
       <p:sp>
         <p:nvSpPr>
           <p:cNvPr id="4" name="TextBox 3"/>
@@ -22878,6 +22758,231 @@
             <a:r>
               <a:rPr lang="en-US"/>
               <a:t>Because:</a:t>
+            </a:r>
+          </a:p>
+        </p:txBody>
+      </p:sp>
+      <p:sp>
+        <p:nvSpPr>
+          <p:cNvPr id="214021" name="TextBox 214020"/>
+          <p:cNvSpPr txBox="1"/>
+          <p:nvPr/>
+        </p:nvSpPr>
+        <p:spPr>
+          <a:xfrm>
+            <a:off x="5081752" y="1149920"/>
+            <a:ext cx="6471138" cy="1352550"/>
+          </a:xfrm>
+          <a:prstGeom prst="rect">
+            <a:avLst/>
+          </a:prstGeom>
+          <a:noFill/>
+        </p:spPr>
+        <p:txBody>
+          <a:bodyPr wrap="square" anchor="ctr" lIns="0" rIns="0" tIns="0" bIns="0">
+            <a:spAutoFit/>
+          </a:bodyPr>
+          <a:lstStyle/>
+          <a:p>
+            <a:r>
+              <a:rPr sz="1900" b="0">
+                <a:latin typeface="Cambria"/>
+              </a:rPr>
+              <a:t>Pr{k events in [0, t] | λ} = (λt)</a:t>
+            </a:r>
+            <a:r>
+              <a:rPr sz="1900" b="0" baseline="30000">
+                <a:latin typeface="Cambria"/>
+              </a:rPr>
+              <a:t>k</a:t>
+            </a:r>
+            <a:r>
+              <a:rPr sz="1900" b="0">
+                <a:latin typeface="Cambria"/>
+              </a:rPr>
+              <a:t> / k! · e</a:t>
+            </a:r>
+            <a:r>
+              <a:rPr sz="1900" b="0" baseline="30000">
+                <a:latin typeface="Cambria"/>
+              </a:rPr>
+              <a:t>−λt</a:t>
+            </a:r>
+          </a:p>
+        </p:txBody>
+      </p:sp>
+      <p:sp>
+        <p:nvSpPr>
+          <p:cNvPr id="214022" name="TextBox 214021"/>
+          <p:cNvSpPr txBox="1"/>
+          <p:nvPr/>
+        </p:nvSpPr>
+        <p:spPr>
+          <a:xfrm>
+            <a:off x="3134519" y="4045520"/>
+            <a:ext cx="7877907" cy="1377950"/>
+          </a:xfrm>
+          <a:prstGeom prst="rect">
+            <a:avLst/>
+          </a:prstGeom>
+          <a:noFill/>
+        </p:spPr>
+        <p:txBody>
+          <a:bodyPr wrap="square" anchor="ctr" lIns="0" rIns="0" tIns="0" bIns="0">
+            <a:spAutoFit/>
+          </a:bodyPr>
+          <a:lstStyle/>
+          <a:p>
+            <a:r>
+              <a:rPr sz="1900" b="0">
+                <a:latin typeface="Cambria"/>
+              </a:rPr>
+              <a:t>Pr{k events in [0, t]} = ∫</a:t>
+            </a:r>
+            <a:r>
+              <a:rPr sz="1900" b="0" baseline="-25000">
+                <a:latin typeface="Cambria"/>
+              </a:rPr>
+              <a:t>0</a:t>
+            </a:r>
+            <a:r>
+              <a:rPr sz="1900" b="0" baseline="30000">
+                <a:latin typeface="Cambria"/>
+              </a:rPr>
+              <a:t>∞</a:t>
+            </a:r>
+            <a:r>
+              <a:rPr sz="1900" b="0">
+                <a:latin typeface="Cambria"/>
+              </a:rPr>
+              <a:t> (λt)</a:t>
+            </a:r>
+            <a:r>
+              <a:rPr sz="1900" b="0" baseline="30000">
+                <a:latin typeface="Cambria"/>
+              </a:rPr>
+              <a:t>k</a:t>
+            </a:r>
+            <a:r>
+              <a:rPr sz="1900" b="0">
+                <a:latin typeface="Cambria"/>
+              </a:rPr>
+              <a:t> / k! · e</a:t>
+            </a:r>
+            <a:r>
+              <a:rPr sz="1900" b="0" baseline="30000">
+                <a:latin typeface="Cambria"/>
+              </a:rPr>
+              <a:t>−λt</a:t>
+            </a:r>
+            <a:r>
+              <a:rPr sz="1900" b="0">
+                <a:latin typeface="Cambria"/>
+              </a:rPr>
+              <a:t> · f(λ) dλ</a:t>
+            </a:r>
+          </a:p>
+        </p:txBody>
+      </p:sp>
+      <p:sp>
+        <p:nvSpPr>
+          <p:cNvPr id="214023" name="TextBox 214022"/>
+          <p:cNvSpPr txBox="1"/>
+          <p:nvPr/>
+        </p:nvSpPr>
+        <p:spPr>
+          <a:xfrm>
+            <a:off x="2753519" y="5791131"/>
+            <a:ext cx="7033846" cy="736600"/>
+          </a:xfrm>
+          <a:prstGeom prst="rect">
+            <a:avLst/>
+          </a:prstGeom>
+          <a:noFill/>
+        </p:spPr>
+        <p:txBody>
+          <a:bodyPr wrap="square" anchor="ctr" lIns="0" rIns="0" tIns="0" bIns="0">
+            <a:spAutoFit/>
+          </a:bodyPr>
+          <a:lstStyle/>
+          <a:p>
+            <a:r>
+              <a:rPr sz="1900" b="0">
+                <a:latin typeface="Cambria"/>
+              </a:rPr>
+              <a:t>p</a:t>
+            </a:r>
+            <a:r>
+              <a:rPr sz="1900" b="0" baseline="-25000">
+                <a:latin typeface="Cambria"/>
+              </a:rPr>
+              <a:t>X</a:t>
+            </a:r>
+            <a:r>
+              <a:rPr sz="1900" b="0">
+                <a:latin typeface="Cambria"/>
+              </a:rPr>
+              <a:t>(x) = ∫</a:t>
+            </a:r>
+            <a:r>
+              <a:rPr sz="1900" b="0" baseline="-25000">
+                <a:latin typeface="Cambria"/>
+              </a:rPr>
+              <a:t>y</a:t>
+            </a:r>
+            <a:r>
+              <a:rPr sz="1900" b="0">
+                <a:latin typeface="Cambria"/>
+              </a:rPr>
+              <a:t> p</a:t>
+            </a:r>
+            <a:r>
+              <a:rPr sz="1900" b="0" baseline="-25000">
+                <a:latin typeface="Cambria"/>
+              </a:rPr>
+              <a:t>X,Y</a:t>
+            </a:r>
+            <a:r>
+              <a:rPr sz="1900" b="0">
+                <a:latin typeface="Cambria"/>
+              </a:rPr>
+              <a:t>(x, y) dy = ∫</a:t>
+            </a:r>
+            <a:r>
+              <a:rPr sz="1900" b="0" baseline="-25000">
+                <a:latin typeface="Cambria"/>
+              </a:rPr>
+              <a:t>y</a:t>
+            </a:r>
+            <a:r>
+              <a:rPr sz="1900" b="0">
+                <a:latin typeface="Cambria"/>
+              </a:rPr>
+              <a:t> p</a:t>
+            </a:r>
+            <a:r>
+              <a:rPr sz="1900" b="0" baseline="-25000">
+                <a:latin typeface="Cambria"/>
+              </a:rPr>
+              <a:t>X|Y</a:t>
+            </a:r>
+            <a:r>
+              <a:rPr sz="1900" b="0">
+                <a:latin typeface="Cambria"/>
+              </a:rPr>
+              <a:t>(x | y) p</a:t>
+            </a:r>
+            <a:r>
+              <a:rPr sz="1900" b="0" baseline="-25000">
+                <a:latin typeface="Cambria"/>
+              </a:rPr>
+              <a:t>Y</a:t>
+            </a:r>
+            <a:r>
+              <a:rPr sz="1900" b="0">
+                <a:latin typeface="Cambria"/>
+              </a:rPr>
+              <a:t>(y) dy</a:t>
             </a:r>
           </a:p>
         </p:txBody>
@@ -23017,28 +23122,13 @@
           </a:p>
         </p:txBody>
       </p:sp>
-      <p:pic>
-        <p:nvPicPr>
-          <p:cNvPr id="3" name="Picture 2" descr="Equation: Gamma(z) = (z-1)!. The gamma function equals the factorial for integer z." title="Equation: Gamma(z) = (z-1)!. The gamma function equals the factorial for integer"/>
-          <p:cNvPicPr>
-            <a:picLocks noChangeAspect="1"/>
-          </p:cNvPicPr>
+      <p:sp>
+        <p:nvSpPr>
+          <p:cNvPr id="17412" name="TextBox 17411"/>
+          <p:cNvSpPr txBox="1"/>
           <p:nvPr/>
-        </p:nvPicPr>
-        <p:blipFill>
-          <a:blip r:embed="rId3">
-            <a:extLst>
-              <a:ext uri="{28A0092B-C50C-407E-A947-70E740481C1C}">
-                <a14:useLocalDpi xmlns:a14="http://schemas.microsoft.com/office/drawing/2010/main" val="0"/>
-              </a:ext>
-            </a:extLst>
-          </a:blip>
-          <a:srcRect/>
-          <a:stretch>
-            <a:fillRect/>
-          </a:stretch>
-        </p:blipFill>
-        <p:spPr bwMode="auto">
+        </p:nvSpPr>
+        <p:spPr>
           <a:xfrm>
             <a:off x="5791200" y="2514600"/>
             <a:ext cx="2552700" cy="520700"/>
@@ -23047,52 +23137,29 @@
             <a:avLst/>
           </a:prstGeom>
           <a:noFill/>
-          <a:ln>
-            <a:noFill/>
-          </a:ln>
-          <a:extLst>
-            <a:ext uri="{909E8E84-426E-40DD-AFC4-6F175D3DCCD1}">
-              <a14:hiddenFill xmlns:a14="http://schemas.microsoft.com/office/drawing/2010/main">
-                <a:solidFill>
-                  <a:srgbClr val="FFFFFF"/>
-                </a:solidFill>
-              </a14:hiddenFill>
-            </a:ext>
-            <a:ext uri="{91240B29-F687-4F45-9708-019B960494DF}">
-              <a14:hiddenLine xmlns:a14="http://schemas.microsoft.com/office/drawing/2010/main" w="9525">
-                <a:solidFill>
-                  <a:srgbClr val="000000"/>
-                </a:solidFill>
-                <a:miter lim="800000"/>
-                <a:headEnd/>
-                <a:tailEnd/>
-              </a14:hiddenLine>
-            </a:ext>
-          </a:extLst>
         </p:spPr>
-      </p:pic>
-      <p:pic>
-        <p:nvPicPr>
-          <p:cNvPr id="4" name="Picture 3" descr="Equation: Gamma(z+1) = z Gamma(z). The recurrence relation of the gamma function." title="Equation: Gamma(z+1) = z Gamma(z). The recurrence relation of the gamma function"/>
-          <p:cNvPicPr>
-            <a:picLocks noChangeAspect="1"/>
-          </p:cNvPicPr>
+        <p:txBody>
+          <a:bodyPr wrap="square" anchor="ctr" lIns="0" rIns="0" tIns="0" bIns="0">
+            <a:spAutoFit/>
+          </a:bodyPr>
+          <a:lstStyle/>
+          <a:p>
+            <a:r>
+              <a:rPr sz="2400" b="0">
+                <a:latin typeface="Cambria"/>
+              </a:rPr>
+              <a:t>Γ(z) = (z − 1)!</a:t>
+            </a:r>
+          </a:p>
+        </p:txBody>
+      </p:sp>
+      <p:sp>
+        <p:nvSpPr>
+          <p:cNvPr id="17413" name="TextBox 17412"/>
+          <p:cNvSpPr txBox="1"/>
           <p:nvPr/>
-        </p:nvPicPr>
-        <p:blipFill>
-          <a:blip r:embed="rId4">
-            <a:extLst>
-              <a:ext uri="{28A0092B-C50C-407E-A947-70E740481C1C}">
-                <a14:useLocalDpi xmlns:a14="http://schemas.microsoft.com/office/drawing/2010/main" val="0"/>
-              </a:ext>
-            </a:extLst>
-          </a:blip>
-          <a:srcRect/>
-          <a:stretch>
-            <a:fillRect/>
-          </a:stretch>
-        </p:blipFill>
-        <p:spPr bwMode="auto">
+        </p:nvSpPr>
+        <p:spPr>
           <a:xfrm>
             <a:off x="5072063" y="3035300"/>
             <a:ext cx="2997200" cy="685800"/>
@@ -23101,52 +23168,29 @@
             <a:avLst/>
           </a:prstGeom>
           <a:noFill/>
-          <a:ln>
-            <a:noFill/>
-          </a:ln>
-          <a:extLst>
-            <a:ext uri="{909E8E84-426E-40DD-AFC4-6F175D3DCCD1}">
-              <a14:hiddenFill xmlns:a14="http://schemas.microsoft.com/office/drawing/2010/main">
-                <a:solidFill>
-                  <a:srgbClr val="FFFFFF"/>
-                </a:solidFill>
-              </a14:hiddenFill>
-            </a:ext>
-            <a:ext uri="{91240B29-F687-4F45-9708-019B960494DF}">
-              <a14:hiddenLine xmlns:a14="http://schemas.microsoft.com/office/drawing/2010/main" w="9525">
-                <a:solidFill>
-                  <a:srgbClr val="000000"/>
-                </a:solidFill>
-                <a:miter lim="800000"/>
-                <a:headEnd/>
-                <a:tailEnd/>
-              </a14:hiddenLine>
-            </a:ext>
-          </a:extLst>
         </p:spPr>
-      </p:pic>
-      <p:pic>
-        <p:nvPicPr>
-          <p:cNvPr id="5" name="Picture 4" descr="Equation: Gamma(z) = integral from 0 to infinity of s^(z-1) e^(-s) ds. Integral definition of the gamma function for z&gt;0." title="Equation: Gamma(z) = integral from 0 to infinity of s^(z-1) e^(-s) ds. Integral "/>
-          <p:cNvPicPr>
-            <a:picLocks noChangeAspect="1"/>
-          </p:cNvPicPr>
+        <p:txBody>
+          <a:bodyPr wrap="square" anchor="ctr" lIns="0" rIns="0" tIns="0" bIns="0">
+            <a:spAutoFit/>
+          </a:bodyPr>
+          <a:lstStyle/>
+          <a:p>
+            <a:r>
+              <a:rPr sz="2500" b="0">
+                <a:latin typeface="Cambria"/>
+              </a:rPr>
+              <a:t>Γ(z + 1) = z Γ(z)</a:t>
+            </a:r>
+          </a:p>
+        </p:txBody>
+      </p:sp>
+      <p:sp>
+        <p:nvSpPr>
+          <p:cNvPr id="17414" name="TextBox 17413"/>
+          <p:cNvSpPr txBox="1"/>
           <p:nvPr/>
-        </p:nvPicPr>
-        <p:blipFill>
-          <a:blip r:embed="rId5">
-            <a:extLst>
-              <a:ext uri="{28A0092B-C50C-407E-A947-70E740481C1C}">
-                <a14:useLocalDpi xmlns:a14="http://schemas.microsoft.com/office/drawing/2010/main" val="0"/>
-              </a:ext>
-            </a:extLst>
-          </a:blip>
-          <a:srcRect/>
-          <a:stretch>
-            <a:fillRect/>
-          </a:stretch>
-        </p:blipFill>
-        <p:spPr bwMode="auto">
+        </p:nvSpPr>
+        <p:spPr>
           <a:xfrm>
             <a:off x="6361113" y="3963988"/>
             <a:ext cx="3416300" cy="1816100"/>
@@ -23155,30 +23199,64 @@
             <a:avLst/>
           </a:prstGeom>
           <a:noFill/>
-          <a:ln>
-            <a:noFill/>
-          </a:ln>
-          <a:extLst>
-            <a:ext uri="{909E8E84-426E-40DD-AFC4-6F175D3DCCD1}">
-              <a14:hiddenFill xmlns:a14="http://schemas.microsoft.com/office/drawing/2010/main">
-                <a:solidFill>
-                  <a:srgbClr val="FFFFFF"/>
-                </a:solidFill>
-              </a14:hiddenFill>
-            </a:ext>
-            <a:ext uri="{91240B29-F687-4F45-9708-019B960494DF}">
-              <a14:hiddenLine xmlns:a14="http://schemas.microsoft.com/office/drawing/2010/main" w="9525">
-                <a:solidFill>
-                  <a:srgbClr val="000000"/>
-                </a:solidFill>
-                <a:miter lim="800000"/>
-                <a:headEnd/>
-                <a:tailEnd/>
-              </a14:hiddenLine>
-            </a:ext>
-          </a:extLst>
         </p:spPr>
-      </p:pic>
+        <p:txBody>
+          <a:bodyPr wrap="square" anchor="ctr" lIns="0" rIns="0" tIns="0" bIns="0">
+            <a:spAutoFit/>
+          </a:bodyPr>
+          <a:lstStyle/>
+          <a:p>
+            <a:r>
+              <a:rPr sz="2200" b="0">
+                <a:latin typeface="Cambria"/>
+              </a:rPr>
+              <a:t>Γ(z) = ∫</a:t>
+            </a:r>
+            <a:r>
+              <a:rPr sz="2200" b="0" baseline="-25000">
+                <a:latin typeface="Cambria"/>
+              </a:rPr>
+              <a:t>0</a:t>
+            </a:r>
+            <a:r>
+              <a:rPr sz="2200" b="0" baseline="30000">
+                <a:latin typeface="Cambria"/>
+              </a:rPr>
+              <a:t>∞</a:t>
+            </a:r>
+            <a:r>
+              <a:rPr sz="2200" b="0">
+                <a:latin typeface="Cambria"/>
+              </a:rPr>
+              <a:t> s</a:t>
+            </a:r>
+            <a:r>
+              <a:rPr sz="2200" b="0" baseline="30000">
+                <a:latin typeface="Cambria"/>
+              </a:rPr>
+              <a:t>z−1</a:t>
+            </a:r>
+            <a:r>
+              <a:rPr sz="2200" b="0">
+                <a:latin typeface="Cambria"/>
+              </a:rPr>
+              <a:t> e</a:t>
+            </a:r>
+            <a:r>
+              <a:rPr sz="2200" b="0" baseline="30000">
+                <a:latin typeface="Cambria"/>
+              </a:rPr>
+              <a:t>−s</a:t>
+            </a:r>
+            <a:r>
+              <a:rPr sz="2200" b="0">
+                <a:latin typeface="Cambria"/>
+              </a:rPr>
+              <a:t> ds</a:t>
+            </a:r>
+          </a:p>
+        </p:txBody>
+      </p:sp>
     </p:spTree>
     <p:extLst>
       <p:ext uri="{BB962C8B-B14F-4D97-AF65-F5344CB8AC3E}">
@@ -23754,60 +23832,6 @@
           </a:p>
         </p:txBody>
       </p:sp>
-      <p:pic>
-        <p:nvPicPr>
-          <p:cNvPr id="220164" name="Picture 1" descr="Equation: Pr{N = n} = p_n(m, k) = Gamma(k+n) / (n! Gamma(k)) times (k/(k+m))^k times (m/(k+m))^n. Negative binomial parameterized by mean m and dispersion k." title="Equation: Pr{N = n} = p_n(m, k) = Gamma(k+n) / (n! Gamma(k)) times (k/(k+m))^k t"/>
-          <p:cNvPicPr>
-            <a:picLocks noChangeAspect="1"/>
-          </p:cNvPicPr>
-          <p:nvPr/>
-        </p:nvPicPr>
-        <p:blipFill>
-          <a:blip r:embed="rId3">
-            <a:extLst>
-              <a:ext uri="{28A0092B-C50C-407E-A947-70E740481C1C}">
-                <a14:useLocalDpi xmlns:a14="http://schemas.microsoft.com/office/drawing/2010/main" val="0"/>
-              </a:ext>
-            </a:extLst>
-          </a:blip>
-          <a:srcRect b="11819"/>
-          <a:stretch>
-            <a:fillRect/>
-          </a:stretch>
-        </p:blipFill>
-        <p:spPr bwMode="auto">
-          <a:xfrm>
-            <a:off x="2852351" y="3120729"/>
-            <a:ext cx="6670704" cy="1070272"/>
-          </a:xfrm>
-          <a:prstGeom prst="rect">
-            <a:avLst/>
-          </a:prstGeom>
-          <a:noFill/>
-          <a:ln>
-            <a:noFill/>
-          </a:ln>
-          <a:extLst>
-            <a:ext uri="{909E8E84-426E-40DD-AFC4-6F175D3DCCD1}">
-              <a14:hiddenFill xmlns:a14="http://schemas.microsoft.com/office/drawing/2010/main">
-                <a:solidFill>
-                  <a:srgbClr val="FFFFFF"/>
-                </a:solidFill>
-              </a14:hiddenFill>
-            </a:ext>
-            <a:ext uri="{91240B29-F687-4F45-9708-019B960494DF}">
-              <a14:hiddenLine xmlns:a14="http://schemas.microsoft.com/office/drawing/2010/main" w="9525">
-                <a:solidFill>
-                  <a:srgbClr val="000000"/>
-                </a:solidFill>
-                <a:miter lim="800000"/>
-                <a:headEnd/>
-                <a:tailEnd/>
-              </a14:hiddenLine>
-            </a:ext>
-          </a:extLst>
-        </p:spPr>
-      </p:pic>
       <p:sp>
         <p:nvSpPr>
           <p:cNvPr id="2" name="TextBox 1">
@@ -23865,6 +23889,67 @@
               <a:t>k</a:t>
             </a:r>
             <a:endParaRPr lang="en-US" sz="2400" dirty="0"/>
+          </a:p>
+        </p:txBody>
+      </p:sp>
+      <p:sp>
+        <p:nvSpPr>
+          <p:cNvPr id="220163" name="TextBox 220162"/>
+          <p:cNvSpPr txBox="1"/>
+          <p:nvPr/>
+        </p:nvSpPr>
+        <p:spPr>
+          <a:xfrm>
+            <a:off x="2852351" y="3120729"/>
+            <a:ext cx="9111049" cy="1070272"/>
+          </a:xfrm>
+          <a:prstGeom prst="rect">
+            <a:avLst/>
+          </a:prstGeom>
+          <a:noFill/>
+        </p:spPr>
+        <p:txBody>
+          <a:bodyPr wrap="square" anchor="ctr" lIns="0" rIns="0" tIns="0" bIns="0">
+            <a:spAutoFit/>
+          </a:bodyPr>
+          <a:lstStyle/>
+          <a:p>
+            <a:r>
+              <a:rPr sz="1600" b="0">
+                <a:latin typeface="Cambria"/>
+              </a:rPr>
+              <a:t>Pr{N = n} ≡ p</a:t>
+            </a:r>
+            <a:r>
+              <a:rPr sz="1600" b="0" baseline="-25000">
+                <a:latin typeface="Cambria"/>
+              </a:rPr>
+              <a:t>n</a:t>
+            </a:r>
+            <a:r>
+              <a:rPr sz="1600" b="0">
+                <a:latin typeface="Cambria"/>
+              </a:rPr>
+              <a:t>(m, k) = Γ(k + n) / (n! Γ(k)) · (k / (k + m))</a:t>
+            </a:r>
+            <a:r>
+              <a:rPr sz="1600" b="0" baseline="30000">
+                <a:latin typeface="Cambria"/>
+              </a:rPr>
+              <a:t>k</a:t>
+            </a:r>
+            <a:r>
+              <a:rPr sz="1600" b="0">
+                <a:latin typeface="Cambria"/>
+              </a:rPr>
+              <a:t> · (m / (k + m))</a:t>
+            </a:r>
+            <a:r>
+              <a:rPr sz="1600" b="0" baseline="30000">
+                <a:latin typeface="Cambria"/>
+              </a:rPr>
+              <a:t>n</a:t>
+            </a:r>
           </a:p>
         </p:txBody>
       </p:sp>
@@ -23935,114 +24020,6 @@
           </a:p>
         </p:txBody>
       </p:sp>
-      <p:pic>
-        <p:nvPicPr>
-          <p:cNvPr id="222210" name="Picture 1" descr="Equation: Pr{N = n} = p_n(m, k) = Gamma(k+n) / (n! Gamma(k)) times (k/(k+m))^k times (m/(k+m))^n. Negative binomial in mean-dispersion form." title="Equation: Pr{N = n} = p_n(m, k) = Gamma(k+n) / (n! Gamma(k)) times (k/(k+m))^k t"/>
-          <p:cNvPicPr>
-            <a:picLocks noChangeAspect="1"/>
-          </p:cNvPicPr>
-          <p:nvPr/>
-        </p:nvPicPr>
-        <p:blipFill>
-          <a:blip r:embed="rId3">
-            <a:extLst>
-              <a:ext uri="{28A0092B-C50C-407E-A947-70E740481C1C}">
-                <a14:useLocalDpi xmlns:a14="http://schemas.microsoft.com/office/drawing/2010/main" val="0"/>
-              </a:ext>
-            </a:extLst>
-          </a:blip>
-          <a:srcRect b="11819"/>
-          <a:stretch>
-            <a:fillRect/>
-          </a:stretch>
-        </p:blipFill>
-        <p:spPr bwMode="auto">
-          <a:xfrm>
-            <a:off x="2943225" y="1360488"/>
-            <a:ext cx="5867400" cy="939800"/>
-          </a:xfrm>
-          <a:prstGeom prst="rect">
-            <a:avLst/>
-          </a:prstGeom>
-          <a:noFill/>
-          <a:ln>
-            <a:noFill/>
-          </a:ln>
-          <a:extLst>
-            <a:ext uri="{909E8E84-426E-40DD-AFC4-6F175D3DCCD1}">
-              <a14:hiddenFill xmlns:a14="http://schemas.microsoft.com/office/drawing/2010/main">
-                <a:solidFill>
-                  <a:srgbClr val="FFFFFF"/>
-                </a:solidFill>
-              </a14:hiddenFill>
-            </a:ext>
-            <a:ext uri="{91240B29-F687-4F45-9708-019B960494DF}">
-              <a14:hiddenLine xmlns:a14="http://schemas.microsoft.com/office/drawing/2010/main" w="9525">
-                <a:solidFill>
-                  <a:srgbClr val="000000"/>
-                </a:solidFill>
-                <a:miter lim="800000"/>
-                <a:headEnd/>
-                <a:tailEnd/>
-              </a14:hiddenLine>
-            </a:ext>
-          </a:extLst>
-        </p:spPr>
-      </p:pic>
-      <p:pic>
-        <p:nvPicPr>
-          <p:cNvPr id="6" name="Picture 5" descr="Equation: p_0(m, k) = (k/(k+m))^k. Negative binomial probability of no events; large when k is small even if m is big." title="Equation: p_0(m, k) = (k/(k+m))^k. Negative binomial probability of no events; l"/>
-          <p:cNvPicPr>
-            <a:picLocks noChangeAspect="1"/>
-          </p:cNvPicPr>
-          <p:nvPr/>
-        </p:nvPicPr>
-        <p:blipFill>
-          <a:blip r:embed="rId4">
-            <a:extLst>
-              <a:ext uri="{28A0092B-C50C-407E-A947-70E740481C1C}">
-                <a14:useLocalDpi xmlns:a14="http://schemas.microsoft.com/office/drawing/2010/main" val="0"/>
-              </a:ext>
-            </a:extLst>
-          </a:blip>
-          <a:srcRect/>
-          <a:stretch>
-            <a:fillRect/>
-          </a:stretch>
-        </p:blipFill>
-        <p:spPr bwMode="auto">
-          <a:xfrm>
-            <a:off x="4724400" y="3117850"/>
-            <a:ext cx="2768600" cy="1066800"/>
-          </a:xfrm>
-          <a:prstGeom prst="rect">
-            <a:avLst/>
-          </a:prstGeom>
-          <a:noFill/>
-          <a:ln>
-            <a:noFill/>
-          </a:ln>
-          <a:extLst>
-            <a:ext uri="{909E8E84-426E-40DD-AFC4-6F175D3DCCD1}">
-              <a14:hiddenFill xmlns:a14="http://schemas.microsoft.com/office/drawing/2010/main">
-                <a:solidFill>
-                  <a:srgbClr val="FFFFFF"/>
-                </a:solidFill>
-              </a14:hiddenFill>
-            </a:ext>
-            <a:ext uri="{91240B29-F687-4F45-9708-019B960494DF}">
-              <a14:hiddenLine xmlns:a14="http://schemas.microsoft.com/office/drawing/2010/main" w="9525">
-                <a:solidFill>
-                  <a:srgbClr val="000000"/>
-                </a:solidFill>
-                <a:miter lim="800000"/>
-                <a:headEnd/>
-                <a:tailEnd/>
-              </a14:hiddenLine>
-            </a:ext>
-          </a:extLst>
-        </p:spPr>
-      </p:pic>
       <p:sp>
         <p:nvSpPr>
           <p:cNvPr id="222212" name="TextBox 8"/>
@@ -24511,6 +24488,116 @@
             <a:r>
               <a:rPr lang="en-US" altLang="en-US" sz="2400"/>
               <a:t>is big</a:t>
+            </a:r>
+          </a:p>
+        </p:txBody>
+      </p:sp>
+      <p:sp>
+        <p:nvSpPr>
+          <p:cNvPr id="222213" name="TextBox 222212"/>
+          <p:cNvSpPr txBox="1"/>
+          <p:nvPr/>
+        </p:nvSpPr>
+        <p:spPr>
+          <a:xfrm>
+            <a:off x="2943225" y="1360488"/>
+            <a:ext cx="9020175" cy="939800"/>
+          </a:xfrm>
+          <a:prstGeom prst="rect">
+            <a:avLst/>
+          </a:prstGeom>
+          <a:noFill/>
+        </p:spPr>
+        <p:txBody>
+          <a:bodyPr wrap="square" anchor="ctr" lIns="0" rIns="0" tIns="0" bIns="0">
+            <a:spAutoFit/>
+          </a:bodyPr>
+          <a:lstStyle/>
+          <a:p>
+            <a:r>
+              <a:rPr sz="1600" b="0">
+                <a:latin typeface="Cambria"/>
+              </a:rPr>
+              <a:t>Pr{N = n} ≡ p</a:t>
+            </a:r>
+            <a:r>
+              <a:rPr sz="1600" b="0" baseline="-25000">
+                <a:latin typeface="Cambria"/>
+              </a:rPr>
+              <a:t>n</a:t>
+            </a:r>
+            <a:r>
+              <a:rPr sz="1600" b="0">
+                <a:latin typeface="Cambria"/>
+              </a:rPr>
+              <a:t>(m, k) = Γ(k + n) / (n! Γ(k)) · (k / (k + m))</a:t>
+            </a:r>
+            <a:r>
+              <a:rPr sz="1600" b="0" baseline="30000">
+                <a:latin typeface="Cambria"/>
+              </a:rPr>
+              <a:t>k</a:t>
+            </a:r>
+            <a:r>
+              <a:rPr sz="1600" b="0">
+                <a:latin typeface="Cambria"/>
+              </a:rPr>
+              <a:t> · (m / (k + m))</a:t>
+            </a:r>
+            <a:r>
+              <a:rPr sz="1600" b="0" baseline="30000">
+                <a:latin typeface="Cambria"/>
+              </a:rPr>
+              <a:t>n</a:t>
+            </a:r>
+          </a:p>
+        </p:txBody>
+      </p:sp>
+      <p:sp>
+        <p:nvSpPr>
+          <p:cNvPr id="222214" name="TextBox 222213"/>
+          <p:cNvSpPr txBox="1"/>
+          <p:nvPr/>
+        </p:nvSpPr>
+        <p:spPr>
+          <a:xfrm>
+            <a:off x="4724400" y="3117850"/>
+            <a:ext cx="3516923" cy="1066800"/>
+          </a:xfrm>
+          <a:prstGeom prst="rect">
+            <a:avLst/>
+          </a:prstGeom>
+          <a:noFill/>
+        </p:spPr>
+        <p:txBody>
+          <a:bodyPr wrap="square" anchor="ctr" lIns="0" rIns="0" tIns="0" bIns="0">
+            <a:spAutoFit/>
+          </a:bodyPr>
+          <a:lstStyle/>
+          <a:p>
+            <a:r>
+              <a:rPr sz="1900" b="0">
+                <a:latin typeface="Cambria"/>
+              </a:rPr>
+              <a:t>p</a:t>
+            </a:r>
+            <a:r>
+              <a:rPr sz="1900" b="0" baseline="-25000">
+                <a:latin typeface="Cambria"/>
+              </a:rPr>
+              <a:t>0</a:t>
+            </a:r>
+            <a:r>
+              <a:rPr sz="1900" b="0">
+                <a:latin typeface="Cambria"/>
+              </a:rPr>
+              <a:t>(m, k) = (k / (k + m))</a:t>
+            </a:r>
+            <a:r>
+              <a:rPr sz="1900" b="0" baseline="30000">
+                <a:latin typeface="Cambria"/>
+              </a:rPr>
+              <a:t>k</a:t>
             </a:r>
           </a:p>
         </p:txBody>

--- a/Day1_Probability/FW536_Day1_Afternoon Distributions I_accessible.pptx
+++ b/Day1_Probability/FW536_Day1_Afternoon Distributions I_accessible.pptx
@@ -7793,91 +7793,6 @@
           </a:p>
         </p:txBody>
       </p:sp>
-      <p:graphicFrame>
-        <p:nvGraphicFramePr>
-          <p:cNvPr id="149508" name="Object 9"/>
-          <p:cNvGraphicFramePr>
-            <a:graphicFrameLocks noGrp="1" noChangeAspect="1"/>
-          </p:cNvGraphicFramePr>
-          <p:nvPr>
-            <p:ph sz="quarter" idx="3"/>
-          </p:nvPr>
-        </p:nvGraphicFramePr>
-        <p:xfrm>
-          <a:off x="4924425" y="4114800"/>
-          <a:ext cx="2514600" cy="914400"/>
-        </p:xfrm>
-        <a:graphic>
-          <a:graphicData uri="http://schemas.openxmlformats.org/presentationml/2006/ole">
-            <mc:AlternateContent xmlns:mc="http://schemas.openxmlformats.org/markup-compatibility/2006">
-              <mc:Choice xmlns:v="urn:schemas-microsoft-com:vml" Requires="v">
-                <p:oleObj name="Equation" r:id="rId3" imgW="1257231" imgH="456924" progId="">
-                  <p:embed/>
-                </p:oleObj>
-              </mc:Choice>
-              <mc:Fallback>
-                <p:oleObj name="Equation" r:id="rId3" imgW="1257231" imgH="456924" progId="">
-                  <p:embed/>
-                  <p:pic>
-                    <p:nvPicPr>
-                      <p:cNvPr id="0" name=""/>
-                      <p:cNvPicPr>
-                        <a:picLocks noGrp="1" noChangeAspect="1" noChangeArrowheads="1"/>
-                      </p:cNvPicPr>
-                      <p:nvPr/>
-                    </p:nvPicPr>
-                    <p:blipFill>
-                      <a:blip r:embed="rId4">
-                        <a:extLst>
-                          <a:ext uri="{28A0092B-C50C-407E-A947-70E740481C1C}">
-                            <a14:useLocalDpi xmlns:a14="http://schemas.microsoft.com/office/drawing/2010/main" val="0"/>
-                          </a:ext>
-                        </a:extLst>
-                      </a:blip>
-                      <a:srcRect/>
-                      <a:stretch>
-                        <a:fillRect/>
-                      </a:stretch>
-                    </p:blipFill>
-                    <p:spPr bwMode="auto">
-                      <a:xfrm>
-                        <a:off x="4924425" y="4114800"/>
-                        <a:ext cx="2514600" cy="914400"/>
-                      </a:xfrm>
-                      <a:prstGeom prst="rect">
-                        <a:avLst/>
-                      </a:prstGeom>
-                      <a:noFill/>
-                      <a:ln>
-                        <a:noFill/>
-                      </a:ln>
-                      <a:extLst>
-                        <a:ext uri="{909E8E84-426E-40DD-AFC4-6F175D3DCCD1}">
-                          <a14:hiddenFill xmlns:a14="http://schemas.microsoft.com/office/drawing/2010/main">
-                            <a:solidFill>
-                              <a:srgbClr val="FFFFFF"/>
-                            </a:solidFill>
-                          </a14:hiddenFill>
-                        </a:ext>
-                        <a:ext uri="{91240B29-F687-4F45-9708-019B960494DF}">
-                          <a14:hiddenLine xmlns:a14="http://schemas.microsoft.com/office/drawing/2010/main" w="9525">
-                            <a:solidFill>
-                              <a:schemeClr val="tx1"/>
-                            </a:solidFill>
-                            <a:miter lim="800000"/>
-                            <a:headEnd/>
-                            <a:tailEnd/>
-                          </a14:hiddenLine>
-                        </a:ext>
-                      </a:extLst>
-                    </p:spPr>
-                  </p:pic>
-                </p:oleObj>
-              </mc:Fallback>
-            </mc:AlternateContent>
-          </a:graphicData>
-        </a:graphic>
-      </p:graphicFrame>
       <p:sp>
         <p:nvSpPr>
           <p:cNvPr id="6" name="TextBox 5"/>
@@ -7972,6 +7887,57 @@
               <a:t>)</a:t>
             </a:r>
             <a:endParaRPr lang="en-US" sz="2800" i="1" dirty="0"/>
+          </a:p>
+        </p:txBody>
+      </p:sp>
+      <p:sp>
+        <p:nvSpPr>
+          <p:cNvPr id="8196" name="TextBox 8195"/>
+          <p:cNvSpPr txBox="1"/>
+          <p:nvPr/>
+        </p:nvSpPr>
+        <p:spPr>
+          <a:xfrm>
+            <a:off x="4924425" y="4114800"/>
+            <a:ext cx="2514600" cy="914400"/>
+          </a:xfrm>
+          <a:prstGeom prst="rect">
+            <a:avLst/>
+          </a:prstGeom>
+          <a:noFill/>
+        </p:spPr>
+        <p:txBody>
+          <a:bodyPr wrap="square" anchor="ctr" lIns="0" rIns="0" tIns="0" bIns="0">
+            <a:spAutoFit/>
+          </a:bodyPr>
+          <a:lstStyle/>
+          <a:p>
+            <a:r>
+              <a:rPr sz="1800">
+                <a:latin typeface="Cambria"/>
+              </a:rPr>
+              <a:t>Mean : μ = n p</a:t>
+            </a:r>
+          </a:p>
+          <a:p>
+            <a:r>
+              <a:rPr sz="1800">
+                <a:latin typeface="Cambria"/>
+              </a:rPr>
+              <a:t>Variance : σ</a:t>
+            </a:r>
+            <a:r>
+              <a:rPr sz="1800" baseline="30000">
+                <a:latin typeface="Cambria"/>
+              </a:rPr>
+              <a:t>2</a:t>
+            </a:r>
+            <a:r>
+              <a:rPr sz="1800">
+                <a:latin typeface="Cambria"/>
+              </a:rPr>
+              <a:t> = npq</a:t>
+            </a:r>
           </a:p>
         </p:txBody>
       </p:sp>
@@ -9199,95 +9165,6 @@
           </a:p>
         </p:txBody>
       </p:sp>
-      <p:graphicFrame>
-        <p:nvGraphicFramePr>
-          <p:cNvPr id="157699" name="Object 4"/>
-          <p:cNvGraphicFramePr>
-            <a:graphicFrameLocks noChangeAspect="1"/>
-          </p:cNvGraphicFramePr>
-          <p:nvPr>
-            <p:extLst>
-              <p:ext uri="{D42A27DB-BD31-4B8C-83A1-F6EECF244321}">
-                <p14:modId xmlns:p14="http://schemas.microsoft.com/office/powerpoint/2010/main" val="1473999975"/>
-              </p:ext>
-            </p:extLst>
-          </p:nvPr>
-        </p:nvGraphicFramePr>
-        <p:xfrm>
-          <a:off x="3468130" y="4590536"/>
-          <a:ext cx="3810000" cy="690563"/>
-        </p:xfrm>
-        <a:graphic>
-          <a:graphicData uri="http://schemas.openxmlformats.org/presentationml/2006/ole">
-            <mc:AlternateContent xmlns:mc="http://schemas.openxmlformats.org/markup-compatibility/2006">
-              <mc:Choice xmlns:v="urn:schemas-microsoft-com:vml" Requires="v">
-                <p:oleObj name="Equation" r:id="rId3" imgW="2311078" imgH="418893" progId="">
-                  <p:embed/>
-                </p:oleObj>
-              </mc:Choice>
-              <mc:Fallback>
-                <p:oleObj name="Equation" r:id="rId3" imgW="2311078" imgH="418893" progId="">
-                  <p:embed/>
-                  <p:pic>
-                    <p:nvPicPr>
-                      <p:cNvPr id="0" name=""/>
-                      <p:cNvPicPr>
-                        <a:picLocks noChangeAspect="1" noChangeArrowheads="1"/>
-                      </p:cNvPicPr>
-                      <p:nvPr/>
-                    </p:nvPicPr>
-                    <p:blipFill>
-                      <a:blip r:embed="rId4">
-                        <a:extLst>
-                          <a:ext uri="{28A0092B-C50C-407E-A947-70E740481C1C}">
-                            <a14:useLocalDpi xmlns:a14="http://schemas.microsoft.com/office/drawing/2010/main" val="0"/>
-                          </a:ext>
-                        </a:extLst>
-                      </a:blip>
-                      <a:srcRect/>
-                      <a:stretch>
-                        <a:fillRect/>
-                      </a:stretch>
-                    </p:blipFill>
-                    <p:spPr bwMode="auto">
-                      <a:xfrm>
-                        <a:off x="3468130" y="4590536"/>
-                        <a:ext cx="3810000" cy="690563"/>
-                      </a:xfrm>
-                      <a:prstGeom prst="rect">
-                        <a:avLst/>
-                      </a:prstGeom>
-                      <a:noFill/>
-                      <a:ln>
-                        <a:noFill/>
-                      </a:ln>
-                      <a:extLst>
-                        <a:ext uri="{909E8E84-426E-40DD-AFC4-6F175D3DCCD1}">
-                          <a14:hiddenFill xmlns:a14="http://schemas.microsoft.com/office/drawing/2010/main">
-                            <a:solidFill>
-                              <a:srgbClr val="FFFFFF"/>
-                            </a:solidFill>
-                          </a14:hiddenFill>
-                        </a:ext>
-                        <a:ext uri="{91240B29-F687-4F45-9708-019B960494DF}">
-                          <a14:hiddenLine xmlns:a14="http://schemas.microsoft.com/office/drawing/2010/main" w="9525">
-                            <a:solidFill>
-                              <a:schemeClr val="tx1"/>
-                            </a:solidFill>
-                            <a:miter lim="800000"/>
-                            <a:headEnd/>
-                            <a:tailEnd/>
-                          </a14:hiddenLine>
-                        </a:ext>
-                      </a:extLst>
-                    </p:spPr>
-                  </p:pic>
-                </p:oleObj>
-              </mc:Fallback>
-            </mc:AlternateContent>
-          </a:graphicData>
-        </a:graphic>
-      </p:graphicFrame>
       <p:sp>
         <p:nvSpPr>
           <p:cNvPr id="2" name="TextBox 1">
@@ -9323,6 +9200,103 @@
                 </a:solidFill>
               </a:rPr>
               <a:t>Group Work</a:t>
+            </a:r>
+          </a:p>
+        </p:txBody>
+      </p:sp>
+      <p:sp>
+        <p:nvSpPr>
+          <p:cNvPr id="12292" name="TextBox 12291"/>
+          <p:cNvSpPr txBox="1"/>
+          <p:nvPr/>
+        </p:nvSpPr>
+        <p:spPr>
+          <a:xfrm>
+            <a:off x="3468130" y="4590536"/>
+            <a:ext cx="6893169" cy="690563"/>
+          </a:xfrm>
+          <a:prstGeom prst="rect">
+            <a:avLst/>
+          </a:prstGeom>
+          <a:noFill/>
+        </p:spPr>
+        <p:txBody>
+          <a:bodyPr wrap="square" anchor="ctr" lIns="0" rIns="0" tIns="0" bIns="0">
+            <a:spAutoFit/>
+          </a:bodyPr>
+          <a:lstStyle/>
+          <a:p>
+            <a:r>
+              <a:rPr sz="1900">
+                <a:latin typeface="Cambria"/>
+              </a:rPr>
+              <a:t>P(x) = </a:t>
+            </a:r>
+            <a:r>
+              <a:rPr sz="1900" baseline="-25000">
+                <a:latin typeface="Cambria"/>
+              </a:rPr>
+              <a:t>n</a:t>
+            </a:r>
+            <a:r>
+              <a:rPr sz="1900">
+                <a:latin typeface="Cambria"/>
+              </a:rPr>
+              <a:t>C</a:t>
+            </a:r>
+            <a:r>
+              <a:rPr sz="1900" baseline="-25000">
+                <a:latin typeface="Cambria"/>
+              </a:rPr>
+              <a:t>x</a:t>
+            </a:r>
+            <a:r>
+              <a:rPr sz="1900">
+                <a:latin typeface="Cambria"/>
+              </a:rPr>
+              <a:t> p</a:t>
+            </a:r>
+            <a:r>
+              <a:rPr sz="1900" baseline="30000">
+                <a:latin typeface="Cambria"/>
+              </a:rPr>
+              <a:t>x</a:t>
+            </a:r>
+            <a:r>
+              <a:rPr sz="1900">
+                <a:latin typeface="Cambria"/>
+              </a:rPr>
+              <a:t> q</a:t>
+            </a:r>
+            <a:r>
+              <a:rPr sz="1900" baseline="30000">
+                <a:latin typeface="Cambria"/>
+              </a:rPr>
+              <a:t>n−x</a:t>
+            </a:r>
+            <a:r>
+              <a:rPr sz="1900">
+                <a:latin typeface="Cambria"/>
+              </a:rPr>
+              <a:t> = n! / ((n − x)! x!) · p</a:t>
+            </a:r>
+            <a:r>
+              <a:rPr sz="1900" baseline="30000">
+                <a:latin typeface="Cambria"/>
+              </a:rPr>
+              <a:t>x</a:t>
+            </a:r>
+            <a:r>
+              <a:rPr sz="1900">
+                <a:latin typeface="Cambria"/>
+              </a:rPr>
+              <a:t> q</a:t>
+            </a:r>
+            <a:r>
+              <a:rPr sz="1900" baseline="30000">
+                <a:latin typeface="Cambria"/>
+              </a:rPr>
+              <a:t>n−x</a:t>
             </a:r>
           </a:p>
         </p:txBody>
@@ -9441,10 +9415,8 @@
               <a:t>P[X</a:t>
             </a:r>
             <a:r>
-              <a:rPr lang="en-US" sz="3000" dirty="0">
-                <a:sym typeface="Symbol" pitchFamily="18" charset="2"/>
-              </a:rPr>
-              <a:t>2]=1-P[X=0]-P[X=1]=0.3410</a:t>
+              <a:rPr lang="en-US" sz="3000" dirty="0"/>
+              <a:t>≥2]=1-P[X=0]-P[X=1]=0.3410</a:t>
             </a:r>
           </a:p>
           <a:p>
@@ -9455,176 +9427,6 @@
           </a:p>
         </p:txBody>
       </p:sp>
-      <p:graphicFrame>
-        <p:nvGraphicFramePr>
-          <p:cNvPr id="159747" name="Object 4"/>
-          <p:cNvGraphicFramePr>
-            <a:graphicFrameLocks noGrp="1" noChangeAspect="1"/>
-          </p:cNvGraphicFramePr>
-          <p:nvPr>
-            <p:ph sz="quarter" idx="2"/>
-          </p:nvPr>
-        </p:nvGraphicFramePr>
-        <p:xfrm>
-          <a:off x="5106988" y="1905000"/>
-          <a:ext cx="2019300" cy="649288"/>
-        </p:xfrm>
-        <a:graphic>
-          <a:graphicData uri="http://schemas.openxmlformats.org/presentationml/2006/ole">
-            <mc:AlternateContent xmlns:mc="http://schemas.openxmlformats.org/markup-compatibility/2006">
-              <mc:Choice xmlns:v="urn:schemas-microsoft-com:vml" Requires="v">
-                <p:oleObj name="Equation" r:id="rId3" imgW="1422890" imgH="457200" progId="">
-                  <p:embed/>
-                </p:oleObj>
-              </mc:Choice>
-              <mc:Fallback>
-                <p:oleObj name="Equation" r:id="rId3" imgW="1422890" imgH="457200" progId="">
-                  <p:embed/>
-                  <p:pic>
-                    <p:nvPicPr>
-                      <p:cNvPr id="0" name=""/>
-                      <p:cNvPicPr>
-                        <a:picLocks noGrp="1" noChangeAspect="1" noChangeArrowheads="1"/>
-                      </p:cNvPicPr>
-                      <p:nvPr/>
-                    </p:nvPicPr>
-                    <p:blipFill>
-                      <a:blip r:embed="rId4">
-                        <a:extLst>
-                          <a:ext uri="{28A0092B-C50C-407E-A947-70E740481C1C}">
-                            <a14:useLocalDpi xmlns:a14="http://schemas.microsoft.com/office/drawing/2010/main" val="0"/>
-                          </a:ext>
-                        </a:extLst>
-                      </a:blip>
-                      <a:srcRect/>
-                      <a:stretch>
-                        <a:fillRect/>
-                      </a:stretch>
-                    </p:blipFill>
-                    <p:spPr bwMode="auto">
-                      <a:xfrm>
-                        <a:off x="5106988" y="1905000"/>
-                        <a:ext cx="2019300" cy="649288"/>
-                      </a:xfrm>
-                      <a:prstGeom prst="rect">
-                        <a:avLst/>
-                      </a:prstGeom>
-                      <a:noFill/>
-                      <a:ln>
-                        <a:noFill/>
-                      </a:ln>
-                      <a:extLst>
-                        <a:ext uri="{909E8E84-426E-40DD-AFC4-6F175D3DCCD1}">
-                          <a14:hiddenFill xmlns:a14="http://schemas.microsoft.com/office/drawing/2010/main">
-                            <a:solidFill>
-                              <a:srgbClr val="FFFFFF"/>
-                            </a:solidFill>
-                          </a14:hiddenFill>
-                        </a:ext>
-                        <a:ext uri="{91240B29-F687-4F45-9708-019B960494DF}">
-                          <a14:hiddenLine xmlns:a14="http://schemas.microsoft.com/office/drawing/2010/main" w="9525">
-                            <a:solidFill>
-                              <a:schemeClr val="tx1"/>
-                            </a:solidFill>
-                            <a:miter lim="800000"/>
-                            <a:headEnd/>
-                            <a:tailEnd/>
-                          </a14:hiddenLine>
-                        </a:ext>
-                      </a:extLst>
-                    </p:spPr>
-                  </p:pic>
-                </p:oleObj>
-              </mc:Fallback>
-            </mc:AlternateContent>
-          </a:graphicData>
-        </a:graphic>
-      </p:graphicFrame>
-      <p:graphicFrame>
-        <p:nvGraphicFramePr>
-          <p:cNvPr id="159748" name="Object 6"/>
-          <p:cNvGraphicFramePr>
-            <a:graphicFrameLocks noGrp="1" noChangeAspect="1"/>
-          </p:cNvGraphicFramePr>
-          <p:nvPr>
-            <p:ph sz="quarter" idx="3"/>
-          </p:nvPr>
-        </p:nvGraphicFramePr>
-        <p:xfrm>
-          <a:off x="5106988" y="2514600"/>
-          <a:ext cx="2038350" cy="649288"/>
-        </p:xfrm>
-        <a:graphic>
-          <a:graphicData uri="http://schemas.openxmlformats.org/presentationml/2006/ole">
-            <mc:AlternateContent xmlns:mc="http://schemas.openxmlformats.org/markup-compatibility/2006">
-              <mc:Choice xmlns:v="urn:schemas-microsoft-com:vml" Requires="v">
-                <p:oleObj name="Equation" r:id="rId5" imgW="1435575" imgH="457200" progId="">
-                  <p:embed/>
-                </p:oleObj>
-              </mc:Choice>
-              <mc:Fallback>
-                <p:oleObj name="Equation" r:id="rId5" imgW="1435575" imgH="457200" progId="">
-                  <p:embed/>
-                  <p:pic>
-                    <p:nvPicPr>
-                      <p:cNvPr id="0" name=""/>
-                      <p:cNvPicPr>
-                        <a:picLocks noGrp="1" noChangeAspect="1" noChangeArrowheads="1"/>
-                      </p:cNvPicPr>
-                      <p:nvPr/>
-                    </p:nvPicPr>
-                    <p:blipFill>
-                      <a:blip r:embed="rId6">
-                        <a:extLst>
-                          <a:ext uri="{28A0092B-C50C-407E-A947-70E740481C1C}">
-                            <a14:useLocalDpi xmlns:a14="http://schemas.microsoft.com/office/drawing/2010/main" val="0"/>
-                          </a:ext>
-                        </a:extLst>
-                      </a:blip>
-                      <a:srcRect/>
-                      <a:stretch>
-                        <a:fillRect/>
-                      </a:stretch>
-                    </p:blipFill>
-                    <p:spPr bwMode="auto">
-                      <a:xfrm>
-                        <a:off x="5106988" y="2514600"/>
-                        <a:ext cx="2038350" cy="649288"/>
-                      </a:xfrm>
-                      <a:prstGeom prst="rect">
-                        <a:avLst/>
-                      </a:prstGeom>
-                      <a:noFill/>
-                      <a:ln>
-                        <a:noFill/>
-                      </a:ln>
-                      <a:extLst>
-                        <a:ext uri="{909E8E84-426E-40DD-AFC4-6F175D3DCCD1}">
-                          <a14:hiddenFill xmlns:a14="http://schemas.microsoft.com/office/drawing/2010/main">
-                            <a:solidFill>
-                              <a:srgbClr val="FFFFFF"/>
-                            </a:solidFill>
-                          </a14:hiddenFill>
-                        </a:ext>
-                        <a:ext uri="{91240B29-F687-4F45-9708-019B960494DF}">
-                          <a14:hiddenLine xmlns:a14="http://schemas.microsoft.com/office/drawing/2010/main" w="9525">
-                            <a:solidFill>
-                              <a:schemeClr val="tx1"/>
-                            </a:solidFill>
-                            <a:miter lim="800000"/>
-                            <a:headEnd/>
-                            <a:tailEnd/>
-                          </a14:hiddenLine>
-                        </a:ext>
-                      </a:extLst>
-                    </p:spPr>
-                  </p:pic>
-                </p:oleObj>
-              </mc:Fallback>
-            </mc:AlternateContent>
-          </a:graphicData>
-        </a:graphic>
-      </p:graphicFrame>
       <p:pic>
         <p:nvPicPr>
           <p:cNvPr id="2" name="Picture 1" descr="R console: 1-pbinom(1,12,0.1) returns 0.3409977, the probability of 2 or more diseased animals out of 12 when p=0.1." title="R console: 1-pbinom(1,12,0.1) returns 0.3409977, the probability of 2 or more di"/>
@@ -9733,6 +9535,116 @@
           </a:extLst>
         </p:spPr>
       </p:pic>
+      <p:sp>
+        <p:nvSpPr>
+          <p:cNvPr id="159749" name="TextBox 159748"/>
+          <p:cNvSpPr txBox="1"/>
+          <p:nvPr/>
+        </p:nvSpPr>
+        <p:spPr>
+          <a:xfrm>
+            <a:off x="5106988" y="1905000"/>
+            <a:ext cx="4642338" cy="649288"/>
+          </a:xfrm>
+          <a:prstGeom prst="rect">
+            <a:avLst/>
+          </a:prstGeom>
+          <a:noFill/>
+        </p:spPr>
+        <p:txBody>
+          <a:bodyPr wrap="square" anchor="ctr" lIns="0" rIns="0" tIns="0" bIns="0">
+            <a:spAutoFit/>
+          </a:bodyPr>
+          <a:lstStyle/>
+          <a:p>
+            <a:r>
+              <a:rPr sz="1900">
+                <a:latin typeface="Cambria"/>
+              </a:rPr>
+              <a:t>(12 choose 2) 0.1</a:t>
+            </a:r>
+            <a:r>
+              <a:rPr sz="1900" baseline="30000">
+                <a:latin typeface="Cambria"/>
+              </a:rPr>
+              <a:t>2</a:t>
+            </a:r>
+            <a:r>
+              <a:rPr sz="1900">
+                <a:latin typeface="Cambria"/>
+              </a:rPr>
+              <a:t> 0.9</a:t>
+            </a:r>
+            <a:r>
+              <a:rPr sz="1900" baseline="30000">
+                <a:latin typeface="Cambria"/>
+              </a:rPr>
+              <a:t>10</a:t>
+            </a:r>
+            <a:r>
+              <a:rPr sz="1900">
+                <a:latin typeface="Cambria"/>
+              </a:rPr>
+              <a:t> = 0.2301</a:t>
+            </a:r>
+          </a:p>
+        </p:txBody>
+      </p:sp>
+      <p:sp>
+        <p:nvSpPr>
+          <p:cNvPr id="159750" name="TextBox 159749"/>
+          <p:cNvSpPr txBox="1"/>
+          <p:nvPr/>
+        </p:nvSpPr>
+        <p:spPr>
+          <a:xfrm>
+            <a:off x="5106988" y="2514600"/>
+            <a:ext cx="4642338" cy="649288"/>
+          </a:xfrm>
+          <a:prstGeom prst="rect">
+            <a:avLst/>
+          </a:prstGeom>
+          <a:noFill/>
+        </p:spPr>
+        <p:txBody>
+          <a:bodyPr wrap="square" anchor="ctr" lIns="0" rIns="0" tIns="0" bIns="0">
+            <a:spAutoFit/>
+          </a:bodyPr>
+          <a:lstStyle/>
+          <a:p>
+            <a:r>
+              <a:rPr sz="1900">
+                <a:latin typeface="Cambria"/>
+              </a:rPr>
+              <a:t>(12 choose 0) 0.1</a:t>
+            </a:r>
+            <a:r>
+              <a:rPr sz="1900" baseline="30000">
+                <a:latin typeface="Cambria"/>
+              </a:rPr>
+              <a:t>0</a:t>
+            </a:r>
+            <a:r>
+              <a:rPr sz="1900">
+                <a:latin typeface="Cambria"/>
+              </a:rPr>
+              <a:t> 0.9</a:t>
+            </a:r>
+            <a:r>
+              <a:rPr sz="1900" baseline="30000">
+                <a:latin typeface="Cambria"/>
+              </a:rPr>
+              <a:t>12</a:t>
+            </a:r>
+            <a:r>
+              <a:rPr sz="1900">
+                <a:latin typeface="Cambria"/>
+              </a:rPr>
+              <a:t> = 0.2824</a:t>
+            </a:r>
+          </a:p>
+        </p:txBody>
+      </p:sp>
     </p:spTree>
     <p:extLst>
       <p:ext uri="{BB962C8B-B14F-4D97-AF65-F5344CB8AC3E}">
@@ -11076,10 +10988,8 @@
               <a:t>We usually work with the log-likelihood. Can you find that? </a:t>
             </a:r>
             <a:r>
-              <a:rPr lang="en-US" dirty="0">
-                <a:sym typeface="Wingdings"/>
-              </a:rPr>
-              <a:t> </a:t>
+              <a:rPr lang="en-US" dirty="0"/>
+              <a:t>→ </a:t>
             </a:r>
             <a:r>
               <a:rPr lang="en-US" dirty="0"/>
@@ -14193,140 +14103,6 @@
           </a:p>
         </p:txBody>
       </p:sp>
-      <p:graphicFrame>
-        <p:nvGraphicFramePr>
-          <p:cNvPr id="189443" name="Object 4"/>
-          <p:cNvGraphicFramePr>
-            <a:graphicFrameLocks noGrp="1" noChangeAspect="1"/>
-          </p:cNvGraphicFramePr>
-          <p:nvPr>
-            <p:ph sz="quarter" idx="2"/>
-          </p:nvPr>
-        </p:nvGraphicFramePr>
-        <p:xfrm>
-          <a:off x="4397471" y="2509997"/>
-          <a:ext cx="2054225" cy="728412"/>
-        </p:xfrm>
-        <a:graphic>
-          <a:graphicData uri="http://schemas.openxmlformats.org/presentationml/2006/ole">
-            <mc:AlternateContent xmlns:mc="http://schemas.openxmlformats.org/markup-compatibility/2006">
-              <mc:Choice xmlns:v="urn:schemas-microsoft-com:vml" Requires="v">
-                <p:oleObj name="Equation" r:id="rId3" imgW="1180588" imgH="418918" progId="Equation.DSMT4">
-                  <p:embed/>
-                </p:oleObj>
-              </mc:Choice>
-              <mc:Fallback>
-                <p:oleObj name="Equation" r:id="rId3" imgW="1180588" imgH="418918" progId="Equation.DSMT4">
-                  <p:embed/>
-                  <p:pic>
-                    <p:nvPicPr>
-                      <p:cNvPr id="0" name=""/>
-                      <p:cNvPicPr>
-                        <a:picLocks noChangeAspect="1" noChangeArrowheads="1"/>
-                      </p:cNvPicPr>
-                      <p:nvPr/>
-                    </p:nvPicPr>
-                    <p:blipFill>
-                      <a:blip r:embed="rId4">
-                        <a:extLst>
-                          <a:ext uri="{28A0092B-C50C-407E-A947-70E740481C1C}">
-                            <a14:useLocalDpi xmlns:a14="http://schemas.microsoft.com/office/drawing/2010/main" val="0"/>
-                          </a:ext>
-                        </a:extLst>
-                      </a:blip>
-                      <a:srcRect/>
-                      <a:stretch>
-                        <a:fillRect/>
-                      </a:stretch>
-                    </p:blipFill>
-                    <p:spPr bwMode="auto">
-                      <a:xfrm>
-                        <a:off x="4397471" y="2509997"/>
-                        <a:ext cx="2054225" cy="728412"/>
-                      </a:xfrm>
-                      <a:prstGeom prst="rect">
-                        <a:avLst/>
-                      </a:prstGeom>
-                      <a:noFill/>
-                      <a:ln>
-                        <a:noFill/>
-                      </a:ln>
-                      <a:effectLst/>
-                    </p:spPr>
-                  </p:pic>
-                </p:oleObj>
-              </mc:Fallback>
-            </mc:AlternateContent>
-          </a:graphicData>
-        </a:graphic>
-      </p:graphicFrame>
-      <p:graphicFrame>
-        <p:nvGraphicFramePr>
-          <p:cNvPr id="191492" name="Object 6"/>
-          <p:cNvGraphicFramePr>
-            <a:graphicFrameLocks noGrp="1" noChangeAspect="1"/>
-          </p:cNvGraphicFramePr>
-          <p:nvPr>
-            <p:ph sz="quarter" idx="3"/>
-          </p:nvPr>
-        </p:nvGraphicFramePr>
-        <p:xfrm>
-          <a:off x="4297990" y="4872555"/>
-          <a:ext cx="3616658" cy="947220"/>
-        </p:xfrm>
-        <a:graphic>
-          <a:graphicData uri="http://schemas.openxmlformats.org/presentationml/2006/ole">
-            <mc:AlternateContent xmlns:mc="http://schemas.openxmlformats.org/markup-compatibility/2006">
-              <mc:Choice xmlns:v="urn:schemas-microsoft-com:vml" Requires="v">
-                <p:oleObj name="Equation" r:id="rId5" imgW="1651000" imgH="431800" progId="Equation.DSMT4">
-                  <p:embed/>
-                </p:oleObj>
-              </mc:Choice>
-              <mc:Fallback>
-                <p:oleObj name="Equation" r:id="rId5" imgW="1651000" imgH="431800" progId="Equation.DSMT4">
-                  <p:embed/>
-                  <p:pic>
-                    <p:nvPicPr>
-                      <p:cNvPr id="0" name=""/>
-                      <p:cNvPicPr>
-                        <a:picLocks noChangeAspect="1" noChangeArrowheads="1"/>
-                      </p:cNvPicPr>
-                      <p:nvPr/>
-                    </p:nvPicPr>
-                    <p:blipFill>
-                      <a:blip r:embed="rId6">
-                        <a:extLst>
-                          <a:ext uri="{28A0092B-C50C-407E-A947-70E740481C1C}">
-                            <a14:useLocalDpi xmlns:a14="http://schemas.microsoft.com/office/drawing/2010/main" val="0"/>
-                          </a:ext>
-                        </a:extLst>
-                      </a:blip>
-                      <a:srcRect/>
-                      <a:stretch>
-                        <a:fillRect/>
-                      </a:stretch>
-                    </p:blipFill>
-                    <p:spPr bwMode="auto">
-                      <a:xfrm>
-                        <a:off x="4297990" y="4872555"/>
-                        <a:ext cx="3616658" cy="947220"/>
-                      </a:xfrm>
-                      <a:prstGeom prst="rect">
-                        <a:avLst/>
-                      </a:prstGeom>
-                      <a:noFill/>
-                      <a:ln>
-                        <a:noFill/>
-                      </a:ln>
-                      <a:effectLst/>
-                    </p:spPr>
-                  </p:pic>
-                </p:oleObj>
-              </mc:Fallback>
-            </mc:AlternateContent>
-          </a:graphicData>
-        </a:graphic>
-      </p:graphicFrame>
       <p:sp>
         <p:nvSpPr>
           <p:cNvPr id="191493" name="TextBox 191492"/>
@@ -14439,6 +14215,100 @@
                 <a:latin typeface="Cambria"/>
               </a:rPr>
               <a:t> / k!</a:t>
+            </a:r>
+          </a:p>
+        </p:txBody>
+      </p:sp>
+      <p:sp>
+        <p:nvSpPr>
+          <p:cNvPr id="191495" name="TextBox 191494"/>
+          <p:cNvSpPr txBox="1"/>
+          <p:nvPr/>
+        </p:nvSpPr>
+        <p:spPr>
+          <a:xfrm>
+            <a:off x="4397471" y="2509997"/>
+            <a:ext cx="3094892" cy="728412"/>
+          </a:xfrm>
+          <a:prstGeom prst="rect">
+            <a:avLst/>
+          </a:prstGeom>
+          <a:noFill/>
+        </p:spPr>
+        <p:txBody>
+          <a:bodyPr wrap="square" anchor="ctr" lIns="0" rIns="0" tIns="0" bIns="0">
+            <a:spAutoFit/>
+          </a:bodyPr>
+          <a:lstStyle/>
+          <a:p>
+            <a:r>
+              <a:rPr sz="1900">
+                <a:latin typeface="Cambria"/>
+              </a:rPr>
+              <a:t>P(X = x) = μ</a:t>
+            </a:r>
+            <a:r>
+              <a:rPr sz="1900" baseline="30000">
+                <a:latin typeface="Cambria"/>
+              </a:rPr>
+              <a:t>x</a:t>
+            </a:r>
+            <a:r>
+              <a:rPr sz="1900">
+                <a:latin typeface="Cambria"/>
+              </a:rPr>
+              <a:t> e</a:t>
+            </a:r>
+            <a:r>
+              <a:rPr sz="1900" baseline="30000">
+                <a:latin typeface="Cambria"/>
+              </a:rPr>
+              <a:t>−μ</a:t>
+            </a:r>
+            <a:r>
+              <a:rPr sz="1900">
+                <a:latin typeface="Cambria"/>
+              </a:rPr>
+              <a:t> / x!</a:t>
+            </a:r>
+          </a:p>
+        </p:txBody>
+      </p:sp>
+      <p:sp>
+        <p:nvSpPr>
+          <p:cNvPr id="191496" name="TextBox 191495"/>
+          <p:cNvSpPr txBox="1"/>
+          <p:nvPr/>
+        </p:nvSpPr>
+        <p:spPr>
+          <a:xfrm>
+            <a:off x="4297990" y="4872555"/>
+            <a:ext cx="3616658" cy="947220"/>
+          </a:xfrm>
+          <a:prstGeom prst="rect">
+            <a:avLst/>
+          </a:prstGeom>
+          <a:noFill/>
+        </p:spPr>
+        <p:txBody>
+          <a:bodyPr wrap="square" anchor="ctr" lIns="0" rIns="0" tIns="0" bIns="0">
+            <a:spAutoFit/>
+          </a:bodyPr>
+          <a:lstStyle/>
+          <a:p>
+            <a:r>
+              <a:rPr sz="1800">
+                <a:latin typeface="Cambria"/>
+              </a:rPr>
+              <a:t>Mean : μ (rate per interval)</a:t>
+            </a:r>
+          </a:p>
+          <a:p>
+            <a:r>
+              <a:rPr sz="1800">
+                <a:latin typeface="Cambria"/>
+              </a:rPr>
+              <a:t>Variance : μ</a:t>
             </a:r>
           </a:p>
         </p:txBody>
@@ -15123,10 +14993,8 @@
                 <a:t> </a:t>
               </a:r>
               <a:r>
-                <a:rPr lang="en-US" altLang="en-US" sz="2000" dirty="0">
-                  <a:sym typeface="Wingdings" charset="2"/>
-                </a:rPr>
-                <a:t> 0</a:t>
+                <a:rPr lang="en-US" altLang="en-US" sz="2000" dirty="0"/>
+                <a:t>→ 0</a:t>
               </a:r>
               <a:endParaRPr lang="en-US" altLang="en-US" sz="2000" dirty="0"/>
             </a:p>
@@ -17245,150 +17113,6 @@
           </a:p>
         </p:txBody>
       </p:sp>
-      <p:graphicFrame>
-        <p:nvGraphicFramePr>
-          <p:cNvPr id="189443" name="Object 4"/>
-          <p:cNvGraphicFramePr>
-            <a:graphicFrameLocks noGrp="1" noChangeAspect="1"/>
-          </p:cNvGraphicFramePr>
-          <p:nvPr>
-            <p:ph sz="quarter" idx="2"/>
-            <p:extLst>
-              <p:ext uri="{D42A27DB-BD31-4B8C-83A1-F6EECF244321}">
-                <p14:modId xmlns:p14="http://schemas.microsoft.com/office/powerpoint/2010/main" val="368061340"/>
-              </p:ext>
-            </p:extLst>
-          </p:nvPr>
-        </p:nvGraphicFramePr>
-        <p:xfrm>
-          <a:off x="4397471" y="2509997"/>
-          <a:ext cx="2054225" cy="728412"/>
-        </p:xfrm>
-        <a:graphic>
-          <a:graphicData uri="http://schemas.openxmlformats.org/presentationml/2006/ole">
-            <mc:AlternateContent xmlns:mc="http://schemas.openxmlformats.org/markup-compatibility/2006">
-              <mc:Choice xmlns:v="urn:schemas-microsoft-com:vml" Requires="v">
-                <p:oleObj name="Equation" r:id="rId3" imgW="1180588" imgH="418918" progId="Equation.DSMT4">
-                  <p:embed/>
-                </p:oleObj>
-              </mc:Choice>
-              <mc:Fallback>
-                <p:oleObj name="Equation" r:id="rId3" imgW="1180588" imgH="418918" progId="Equation.DSMT4">
-                  <p:embed/>
-                  <p:pic>
-                    <p:nvPicPr>
-                      <p:cNvPr id="0" name=""/>
-                      <p:cNvPicPr>
-                        <a:picLocks noChangeAspect="1" noChangeArrowheads="1"/>
-                      </p:cNvPicPr>
-                      <p:nvPr/>
-                    </p:nvPicPr>
-                    <p:blipFill>
-                      <a:blip r:embed="rId4">
-                        <a:extLst>
-                          <a:ext uri="{28A0092B-C50C-407E-A947-70E740481C1C}">
-                            <a14:useLocalDpi xmlns:a14="http://schemas.microsoft.com/office/drawing/2010/main" val="0"/>
-                          </a:ext>
-                        </a:extLst>
-                      </a:blip>
-                      <a:srcRect/>
-                      <a:stretch>
-                        <a:fillRect/>
-                      </a:stretch>
-                    </p:blipFill>
-                    <p:spPr bwMode="auto">
-                      <a:xfrm>
-                        <a:off x="4397471" y="2509997"/>
-                        <a:ext cx="2054225" cy="728412"/>
-                      </a:xfrm>
-                      <a:prstGeom prst="rect">
-                        <a:avLst/>
-                      </a:prstGeom>
-                      <a:noFill/>
-                      <a:ln>
-                        <a:noFill/>
-                      </a:ln>
-                      <a:effectLst/>
-                    </p:spPr>
-                  </p:pic>
-                </p:oleObj>
-              </mc:Fallback>
-            </mc:AlternateContent>
-          </a:graphicData>
-        </a:graphic>
-      </p:graphicFrame>
-      <p:graphicFrame>
-        <p:nvGraphicFramePr>
-          <p:cNvPr id="191492" name="Object 6"/>
-          <p:cNvGraphicFramePr>
-            <a:graphicFrameLocks noGrp="1" noChangeAspect="1"/>
-          </p:cNvGraphicFramePr>
-          <p:nvPr>
-            <p:ph sz="quarter" idx="3"/>
-            <p:extLst>
-              <p:ext uri="{D42A27DB-BD31-4B8C-83A1-F6EECF244321}">
-                <p14:modId xmlns:p14="http://schemas.microsoft.com/office/powerpoint/2010/main" val="276206557"/>
-              </p:ext>
-            </p:extLst>
-          </p:nvPr>
-        </p:nvGraphicFramePr>
-        <p:xfrm>
-          <a:off x="4297990" y="4872555"/>
-          <a:ext cx="3616658" cy="947220"/>
-        </p:xfrm>
-        <a:graphic>
-          <a:graphicData uri="http://schemas.openxmlformats.org/presentationml/2006/ole">
-            <mc:AlternateContent xmlns:mc="http://schemas.openxmlformats.org/markup-compatibility/2006">
-              <mc:Choice xmlns:v="urn:schemas-microsoft-com:vml" Requires="v">
-                <p:oleObj name="Equation" r:id="rId5" imgW="1651000" imgH="431800" progId="Equation.DSMT4">
-                  <p:embed/>
-                </p:oleObj>
-              </mc:Choice>
-              <mc:Fallback>
-                <p:oleObj name="Equation" r:id="rId5" imgW="1651000" imgH="431800" progId="Equation.DSMT4">
-                  <p:embed/>
-                  <p:pic>
-                    <p:nvPicPr>
-                      <p:cNvPr id="0" name=""/>
-                      <p:cNvPicPr>
-                        <a:picLocks noChangeAspect="1" noChangeArrowheads="1"/>
-                      </p:cNvPicPr>
-                      <p:nvPr/>
-                    </p:nvPicPr>
-                    <p:blipFill>
-                      <a:blip r:embed="rId6">
-                        <a:extLst>
-                          <a:ext uri="{28A0092B-C50C-407E-A947-70E740481C1C}">
-                            <a14:useLocalDpi xmlns:a14="http://schemas.microsoft.com/office/drawing/2010/main" val="0"/>
-                          </a:ext>
-                        </a:extLst>
-                      </a:blip>
-                      <a:srcRect/>
-                      <a:stretch>
-                        <a:fillRect/>
-                      </a:stretch>
-                    </p:blipFill>
-                    <p:spPr bwMode="auto">
-                      <a:xfrm>
-                        <a:off x="4297990" y="4872555"/>
-                        <a:ext cx="3616658" cy="947220"/>
-                      </a:xfrm>
-                      <a:prstGeom prst="rect">
-                        <a:avLst/>
-                      </a:prstGeom>
-                      <a:noFill/>
-                      <a:ln>
-                        <a:noFill/>
-                      </a:ln>
-                      <a:effectLst/>
-                    </p:spPr>
-                  </p:pic>
-                </p:oleObj>
-              </mc:Fallback>
-            </mc:AlternateContent>
-          </a:graphicData>
-        </a:graphic>
-      </p:graphicFrame>
       <p:sp>
         <p:nvSpPr>
           <p:cNvPr id="191493" name="TextBox 191492"/>
@@ -17501,6 +17225,100 @@
                 <a:latin typeface="Cambria"/>
               </a:rPr>
               <a:t> / k!</a:t>
+            </a:r>
+          </a:p>
+        </p:txBody>
+      </p:sp>
+      <p:sp>
+        <p:nvSpPr>
+          <p:cNvPr id="191495" name="TextBox 191494"/>
+          <p:cNvSpPr txBox="1"/>
+          <p:nvPr/>
+        </p:nvSpPr>
+        <p:spPr>
+          <a:xfrm>
+            <a:off x="4397471" y="2509997"/>
+            <a:ext cx="3094892" cy="728412"/>
+          </a:xfrm>
+          <a:prstGeom prst="rect">
+            <a:avLst/>
+          </a:prstGeom>
+          <a:noFill/>
+        </p:spPr>
+        <p:txBody>
+          <a:bodyPr wrap="square" anchor="ctr" lIns="0" rIns="0" tIns="0" bIns="0">
+            <a:spAutoFit/>
+          </a:bodyPr>
+          <a:lstStyle/>
+          <a:p>
+            <a:r>
+              <a:rPr sz="1900">
+                <a:latin typeface="Cambria"/>
+              </a:rPr>
+              <a:t>P(X = x) = μ</a:t>
+            </a:r>
+            <a:r>
+              <a:rPr sz="1900" baseline="30000">
+                <a:latin typeface="Cambria"/>
+              </a:rPr>
+              <a:t>x</a:t>
+            </a:r>
+            <a:r>
+              <a:rPr sz="1900">
+                <a:latin typeface="Cambria"/>
+              </a:rPr>
+              <a:t> e</a:t>
+            </a:r>
+            <a:r>
+              <a:rPr sz="1900" baseline="30000">
+                <a:latin typeface="Cambria"/>
+              </a:rPr>
+              <a:t>−μ</a:t>
+            </a:r>
+            <a:r>
+              <a:rPr sz="1900">
+                <a:latin typeface="Cambria"/>
+              </a:rPr>
+              <a:t> / x!</a:t>
+            </a:r>
+          </a:p>
+        </p:txBody>
+      </p:sp>
+      <p:sp>
+        <p:nvSpPr>
+          <p:cNvPr id="191496" name="TextBox 191495"/>
+          <p:cNvSpPr txBox="1"/>
+          <p:nvPr/>
+        </p:nvSpPr>
+        <p:spPr>
+          <a:xfrm>
+            <a:off x="4297990" y="4872555"/>
+            <a:ext cx="3616658" cy="947220"/>
+          </a:xfrm>
+          <a:prstGeom prst="rect">
+            <a:avLst/>
+          </a:prstGeom>
+          <a:noFill/>
+        </p:spPr>
+        <p:txBody>
+          <a:bodyPr wrap="square" anchor="ctr" lIns="0" rIns="0" tIns="0" bIns="0">
+            <a:spAutoFit/>
+          </a:bodyPr>
+          <a:lstStyle/>
+          <a:p>
+            <a:r>
+              <a:rPr sz="1800">
+                <a:latin typeface="Cambria"/>
+              </a:rPr>
+              <a:t>Mean : μ (rate per interval)</a:t>
+            </a:r>
+          </a:p>
+          <a:p>
+            <a:r>
+              <a:rPr sz="1800">
+                <a:latin typeface="Cambria"/>
+              </a:rPr>
+              <a:t>Variance : μ</a:t>
             </a:r>
           </a:p>
         </p:txBody>
@@ -17973,10 +17791,8 @@
               <a:defRPr/>
             </a:pPr>
             <a:r>
-              <a:rPr lang="en-US" altLang="en-US" sz="2400" i="0">
-                <a:sym typeface="Symbol" charset="2"/>
-              </a:rPr>
-              <a:t>=2</a:t>
+              <a:rPr lang="en-US" altLang="en-US" sz="2400" i="0"/>
+              <a:t>μ=2</a:t>
             </a:r>
           </a:p>
         </p:txBody>
@@ -18140,10 +17956,8 @@
               <a:defRPr/>
             </a:pPr>
             <a:r>
-              <a:rPr lang="en-US" altLang="en-US" sz="2400" i="0">
-                <a:sym typeface="Symbol" charset="2"/>
-              </a:rPr>
-              <a:t>=5</a:t>
+              <a:rPr lang="en-US" altLang="en-US" sz="2400" i="0"/>
+              <a:t>μ=5</a:t>
             </a:r>
           </a:p>
         </p:txBody>
@@ -18307,10 +18121,8 @@
               <a:defRPr/>
             </a:pPr>
             <a:r>
-              <a:rPr lang="en-US" altLang="en-US" sz="2400" i="0">
-                <a:sym typeface="Symbol" charset="2"/>
-              </a:rPr>
-              <a:t>=8</a:t>
+              <a:rPr lang="en-US" altLang="en-US" sz="2400" i="0"/>
+              <a:t>μ=8</a:t>
             </a:r>
           </a:p>
         </p:txBody>
@@ -18450,77 +18262,6 @@
           </a:p>
         </p:txBody>
       </p:sp>
-      <p:graphicFrame>
-        <p:nvGraphicFramePr>
-          <p:cNvPr id="4" name="Object 4"/>
-          <p:cNvGraphicFramePr>
-            <a:graphicFrameLocks noChangeAspect="1"/>
-          </p:cNvGraphicFramePr>
-          <p:nvPr>
-            <p:extLst>
-              <p:ext uri="{D42A27DB-BD31-4B8C-83A1-F6EECF244321}">
-                <p14:modId xmlns:p14="http://schemas.microsoft.com/office/powerpoint/2010/main" val="1764011272"/>
-              </p:ext>
-            </p:extLst>
-          </p:nvPr>
-        </p:nvGraphicFramePr>
-        <p:xfrm>
-          <a:off x="4818820" y="4919723"/>
-          <a:ext cx="2554360" cy="905756"/>
-        </p:xfrm>
-        <a:graphic>
-          <a:graphicData uri="http://schemas.openxmlformats.org/presentationml/2006/ole">
-            <mc:AlternateContent xmlns:mc="http://schemas.openxmlformats.org/markup-compatibility/2006">
-              <mc:Choice xmlns:v="urn:schemas-microsoft-com:vml" Requires="v">
-                <p:oleObj name="Equation" r:id="rId3" imgW="1180588" imgH="418918" progId="Equation.DSMT4">
-                  <p:embed/>
-                </p:oleObj>
-              </mc:Choice>
-              <mc:Fallback>
-                <p:oleObj name="Equation" r:id="rId3" imgW="1180588" imgH="418918" progId="Equation.DSMT4">
-                  <p:embed/>
-                  <p:pic>
-                    <p:nvPicPr>
-                      <p:cNvPr id="0" name=""/>
-                      <p:cNvPicPr>
-                        <a:picLocks noChangeAspect="1" noChangeArrowheads="1"/>
-                      </p:cNvPicPr>
-                      <p:nvPr/>
-                    </p:nvPicPr>
-                    <p:blipFill>
-                      <a:blip r:embed="rId4">
-                        <a:extLst>
-                          <a:ext uri="{28A0092B-C50C-407E-A947-70E740481C1C}">
-                            <a14:useLocalDpi xmlns:a14="http://schemas.microsoft.com/office/drawing/2010/main" val="0"/>
-                          </a:ext>
-                        </a:extLst>
-                      </a:blip>
-                      <a:srcRect/>
-                      <a:stretch>
-                        <a:fillRect/>
-                      </a:stretch>
-                    </p:blipFill>
-                    <p:spPr bwMode="auto">
-                      <a:xfrm>
-                        <a:off x="4818820" y="4919723"/>
-                        <a:ext cx="2554360" cy="905756"/>
-                      </a:xfrm>
-                      <a:prstGeom prst="rect">
-                        <a:avLst/>
-                      </a:prstGeom>
-                      <a:noFill/>
-                      <a:ln>
-                        <a:noFill/>
-                      </a:ln>
-                      <a:effectLst/>
-                    </p:spPr>
-                  </p:pic>
-                </p:oleObj>
-              </mc:Fallback>
-            </mc:AlternateContent>
-          </a:graphicData>
-        </a:graphic>
-      </p:graphicFrame>
       <p:sp>
         <p:nvSpPr>
           <p:cNvPr id="2" name="TextBox 1"/>
@@ -18585,6 +18326,61 @@
                 </a:solidFill>
               </a:rPr>
               <a:t>Group Work</a:t>
+            </a:r>
+          </a:p>
+        </p:txBody>
+      </p:sp>
+      <p:sp>
+        <p:nvSpPr>
+          <p:cNvPr id="6148" name="TextBox 6147"/>
+          <p:cNvSpPr txBox="1"/>
+          <p:nvPr/>
+        </p:nvSpPr>
+        <p:spPr>
+          <a:xfrm>
+            <a:off x="4818820" y="4919723"/>
+            <a:ext cx="3094892" cy="905756"/>
+          </a:xfrm>
+          <a:prstGeom prst="rect">
+            <a:avLst/>
+          </a:prstGeom>
+          <a:noFill/>
+        </p:spPr>
+        <p:txBody>
+          <a:bodyPr wrap="square" anchor="ctr" lIns="0" rIns="0" tIns="0" bIns="0">
+            <a:spAutoFit/>
+          </a:bodyPr>
+          <a:lstStyle/>
+          <a:p>
+            <a:r>
+              <a:rPr sz="1900">
+                <a:latin typeface="Cambria"/>
+              </a:rPr>
+              <a:t>P(X = x) = μ</a:t>
+            </a:r>
+            <a:r>
+              <a:rPr sz="1900" baseline="30000">
+                <a:latin typeface="Cambria"/>
+              </a:rPr>
+              <a:t>x</a:t>
+            </a:r>
+            <a:r>
+              <a:rPr sz="1900">
+                <a:latin typeface="Cambria"/>
+              </a:rPr>
+              <a:t> e</a:t>
+            </a:r>
+            <a:r>
+              <a:rPr sz="1900" baseline="30000">
+                <a:latin typeface="Cambria"/>
+              </a:rPr>
+              <a:t>−μ</a:t>
+            </a:r>
+            <a:r>
+              <a:rPr sz="1900">
+                <a:latin typeface="Cambria"/>
+              </a:rPr>
+              <a:t> / x!</a:t>
             </a:r>
           </a:p>
         </p:txBody>
@@ -18775,106 +18571,6 @@
           </a:p>
         </p:txBody>
       </p:sp>
-      <p:graphicFrame>
-        <p:nvGraphicFramePr>
-          <p:cNvPr id="7172" name="Object 6"/>
-          <p:cNvGraphicFramePr>
-            <a:graphicFrameLocks noGrp="1" noChangeAspect="1"/>
-          </p:cNvGraphicFramePr>
-          <p:nvPr>
-            <p:ph sz="half" idx="2"/>
-            <p:extLst>
-              <p:ext uri="{D42A27DB-BD31-4B8C-83A1-F6EECF244321}">
-                <p14:modId xmlns:p14="http://schemas.microsoft.com/office/powerpoint/2010/main" val="1390098713"/>
-              </p:ext>
-            </p:extLst>
-          </p:nvPr>
-        </p:nvGraphicFramePr>
-        <p:xfrm>
-          <a:off x="3200400" y="3895533"/>
-          <a:ext cx="5410200" cy="1055688"/>
-        </p:xfrm>
-        <a:graphic>
-          <a:graphicData uri="http://schemas.openxmlformats.org/presentationml/2006/ole">
-            <mc:AlternateContent xmlns:mc="http://schemas.openxmlformats.org/markup-compatibility/2006">
-              <mc:Choice xmlns:v="urn:schemas-microsoft-com:vml" Requires="v">
-                <p:oleObj name="Equation" r:id="rId3" imgW="2146300" imgH="419100" progId="Equation.DSMT4">
-                  <p:embed/>
-                </p:oleObj>
-              </mc:Choice>
-              <mc:Fallback>
-                <p:oleObj name="Equation" r:id="rId3" imgW="2146300" imgH="419100" progId="Equation.DSMT4">
-                  <p:embed/>
-                  <p:pic>
-                    <p:nvPicPr>
-                      <p:cNvPr id="0" name=""/>
-                      <p:cNvPicPr>
-                        <a:picLocks noChangeAspect="1" noChangeArrowheads="1"/>
-                      </p:cNvPicPr>
-                      <p:nvPr/>
-                    </p:nvPicPr>
-                    <p:blipFill>
-                      <a:blip r:embed="rId4">
-                        <a:extLst>
-                          <a:ext uri="{28A0092B-C50C-407E-A947-70E740481C1C}">
-                            <a14:useLocalDpi xmlns:a14="http://schemas.microsoft.com/office/drawing/2010/main" val="0"/>
-                          </a:ext>
-                        </a:extLst>
-                      </a:blip>
-                      <a:srcRect/>
-                      <a:stretch>
-                        <a:fillRect/>
-                      </a:stretch>
-                    </p:blipFill>
-                    <p:spPr bwMode="auto">
-                      <a:xfrm>
-                        <a:off x="3200400" y="3895533"/>
-                        <a:ext cx="5410200" cy="1055688"/>
-                      </a:xfrm>
-                      <a:prstGeom prst="rect">
-                        <a:avLst/>
-                      </a:prstGeom>
-                      <a:noFill/>
-                      <a:ln>
-                        <a:noFill/>
-                      </a:ln>
-                      <a:effectLst/>
-                      <a:extLst>
-                        <a:ext uri="{909E8E84-426E-40DD-AFC4-6F175D3DCCD1}">
-                          <a14:hiddenFill xmlns:a14="http://schemas.microsoft.com/office/drawing/2010/main">
-                            <a:solidFill>
-                              <a:srgbClr val="FFFFFF"/>
-                            </a:solidFill>
-                          </a14:hiddenFill>
-                        </a:ext>
-                        <a:ext uri="{91240B29-F687-4F45-9708-019B960494DF}">
-                          <a14:hiddenLine xmlns:a14="http://schemas.microsoft.com/office/drawing/2010/main" w="9525">
-                            <a:solidFill>
-                              <a:srgbClr val="000000"/>
-                            </a:solidFill>
-                            <a:miter lim="800000"/>
-                            <a:headEnd/>
-                            <a:tailEnd/>
-                          </a14:hiddenLine>
-                        </a:ext>
-                        <a:ext uri="{AF507438-7753-43E0-B8FC-AC1667EBCBE1}">
-                          <a14:hiddenEffects xmlns:a14="http://schemas.microsoft.com/office/drawing/2010/main">
-                            <a:effectLst>
-                              <a:outerShdw dist="35921" dir="2700000" algn="ctr" rotWithShape="0">
-                                <a:srgbClr val="808080"/>
-                              </a:outerShdw>
-                            </a:effectLst>
-                          </a14:hiddenEffects>
-                        </a:ext>
-                      </a:extLst>
-                    </p:spPr>
-                  </p:pic>
-                </p:oleObj>
-              </mc:Fallback>
-            </mc:AlternateContent>
-          </a:graphicData>
-        </a:graphic>
-      </p:graphicFrame>
       <p:pic>
         <p:nvPicPr>
           <p:cNvPr id="2" name="Picture 1" descr="R console: dpois(4,3) returns 0.1680314, the Poisson probability of exactly 4 events when the mean is 3." title="R console: dpois(4,3) returns 0.1680314, the Poisson probability of exactly 4 ev"/>
@@ -18929,6 +18625,85 @@
           </a:extLst>
         </p:spPr>
       </p:pic>
+      <p:sp>
+        <p:nvSpPr>
+          <p:cNvPr id="7172" name="TextBox 7171"/>
+          <p:cNvSpPr txBox="1"/>
+          <p:nvPr/>
+        </p:nvSpPr>
+        <p:spPr>
+          <a:xfrm>
+            <a:off x="3200400" y="3895533"/>
+            <a:ext cx="6189784" cy="1055688"/>
+          </a:xfrm>
+          <a:prstGeom prst="rect">
+            <a:avLst/>
+          </a:prstGeom>
+          <a:noFill/>
+        </p:spPr>
+        <p:txBody>
+          <a:bodyPr wrap="square" anchor="ctr" lIns="0" rIns="0" tIns="0" bIns="0">
+            <a:spAutoFit/>
+          </a:bodyPr>
+          <a:lstStyle/>
+          <a:p>
+            <a:r>
+              <a:rPr sz="1900">
+                <a:latin typeface="Cambria"/>
+              </a:rPr>
+              <a:t>P[X = 4] = μ</a:t>
+            </a:r>
+            <a:r>
+              <a:rPr sz="1900" baseline="30000">
+                <a:latin typeface="Cambria"/>
+              </a:rPr>
+              <a:t>x</a:t>
+            </a:r>
+            <a:r>
+              <a:rPr sz="1900">
+                <a:latin typeface="Cambria"/>
+              </a:rPr>
+              <a:t> e</a:t>
+            </a:r>
+            <a:r>
+              <a:rPr sz="1900" baseline="30000">
+                <a:latin typeface="Cambria"/>
+              </a:rPr>
+              <a:t>−μ</a:t>
+            </a:r>
+            <a:r>
+              <a:rPr sz="1900">
+                <a:latin typeface="Cambria"/>
+              </a:rPr>
+              <a:t> / x! = 3</a:t>
+            </a:r>
+            <a:r>
+              <a:rPr sz="1900" baseline="30000">
+                <a:latin typeface="Cambria"/>
+              </a:rPr>
+              <a:t>4</a:t>
+            </a:r>
+            <a:r>
+              <a:rPr sz="1900">
+                <a:latin typeface="Cambria"/>
+              </a:rPr>
+              <a:t> e</a:t>
+            </a:r>
+            <a:r>
+              <a:rPr sz="1900" baseline="30000">
+                <a:latin typeface="Cambria"/>
+              </a:rPr>
+              <a:t>−3</a:t>
+            </a:r>
+            <a:r>
+              <a:rPr sz="1900">
+                <a:latin typeface="Cambria"/>
+              </a:rPr>
+              <a:t> / 4! = 0.168</a:t>
+            </a:r>
+          </a:p>
+        </p:txBody>
+      </p:sp>
     </p:spTree>
     <p:extLst>
       <p:ext uri="{BB962C8B-B14F-4D97-AF65-F5344CB8AC3E}">
@@ -19178,99 +18953,12 @@
               <a:t>P[X</a:t>
             </a:r>
             <a:r>
-              <a:rPr lang="en-US" altLang="en-US" dirty="0">
-                <a:sym typeface="Symbol" charset="2"/>
-              </a:rPr>
-              <a:t>2]=P[X=0]+P[X=1]+P[X=2]=</a:t>
+              <a:rPr lang="en-US" altLang="en-US" dirty="0"/>
+              <a:t>≤2]=P[X=0]+P[X=1]+P[X=2]=</a:t>
             </a:r>
           </a:p>
         </p:txBody>
       </p:sp>
-      <p:graphicFrame>
-        <p:nvGraphicFramePr>
-          <p:cNvPr id="8196" name="Object 4"/>
-          <p:cNvGraphicFramePr>
-            <a:graphicFrameLocks noGrp="1" noChangeAspect="1"/>
-          </p:cNvGraphicFramePr>
-          <p:nvPr>
-            <p:ph sz="half" idx="2"/>
-          </p:nvPr>
-        </p:nvGraphicFramePr>
-        <p:xfrm>
-          <a:off x="1524000" y="5334001"/>
-          <a:ext cx="4267200" cy="804863"/>
-        </p:xfrm>
-        <a:graphic>
-          <a:graphicData uri="http://schemas.openxmlformats.org/presentationml/2006/ole">
-            <mc:AlternateContent xmlns:mc="http://schemas.openxmlformats.org/markup-compatibility/2006">
-              <mc:Choice xmlns:v="urn:schemas-microsoft-com:vml" Requires="v">
-                <p:oleObj name="Equation" r:id="rId3" imgW="2222500" imgH="419100" progId="Equation.DSMT4">
-                  <p:embed/>
-                </p:oleObj>
-              </mc:Choice>
-              <mc:Fallback>
-                <p:oleObj name="Equation" r:id="rId3" imgW="2222500" imgH="419100" progId="Equation.DSMT4">
-                  <p:embed/>
-                  <p:pic>
-                    <p:nvPicPr>
-                      <p:cNvPr id="0" name=""/>
-                      <p:cNvPicPr>
-                        <a:picLocks noChangeAspect="1" noChangeArrowheads="1"/>
-                      </p:cNvPicPr>
-                      <p:nvPr/>
-                    </p:nvPicPr>
-                    <p:blipFill>
-                      <a:blip r:embed="rId4">
-                        <a:extLst>
-                          <a:ext uri="{28A0092B-C50C-407E-A947-70E740481C1C}">
-                            <a14:useLocalDpi xmlns:a14="http://schemas.microsoft.com/office/drawing/2010/main" val="0"/>
-                          </a:ext>
-                        </a:extLst>
-                      </a:blip>
-                      <a:srcRect/>
-                      <a:stretch>
-                        <a:fillRect/>
-                      </a:stretch>
-                    </p:blipFill>
-                    <p:spPr bwMode="auto">
-                      <a:xfrm>
-                        <a:off x="1524000" y="5334001"/>
-                        <a:ext cx="4267200" cy="804863"/>
-                      </a:xfrm>
-                      <a:prstGeom prst="rect">
-                        <a:avLst/>
-                      </a:prstGeom>
-                      <a:noFill/>
-                      <a:ln>
-                        <a:noFill/>
-                      </a:ln>
-                      <a:extLst>
-                        <a:ext uri="{909E8E84-426E-40DD-AFC4-6F175D3DCCD1}">
-                          <a14:hiddenFill xmlns:a14="http://schemas.microsoft.com/office/drawing/2010/main">
-                            <a:solidFill>
-                              <a:schemeClr val="accent1"/>
-                            </a:solidFill>
-                          </a14:hiddenFill>
-                        </a:ext>
-                        <a:ext uri="{91240B29-F687-4F45-9708-019B960494DF}">
-                          <a14:hiddenLine xmlns:a14="http://schemas.microsoft.com/office/drawing/2010/main" w="9525">
-                            <a:solidFill>
-                              <a:schemeClr val="tx1"/>
-                            </a:solidFill>
-                            <a:miter lim="800000"/>
-                            <a:headEnd/>
-                            <a:tailEnd/>
-                          </a14:hiddenLine>
-                        </a:ext>
-                      </a:extLst>
-                    </p:spPr>
-                  </p:pic>
-                </p:oleObj>
-              </mc:Fallback>
-            </mc:AlternateContent>
-          </a:graphicData>
-        </a:graphic>
-      </p:graphicFrame>
       <p:pic>
         <p:nvPicPr>
           <p:cNvPr id="2" name="Picture 1" descr="R console: dpois(0,3)+dpois(1,3)+dpois(2,3)=0.4231901 and ppois(2,3)=0.4231901, the Poisson probability of 2 or fewer events when the mean is 3." title="R console: dpois(0,3)+dpois(1,3)+dpois(2,3)=0.4231901 and ppois(2,3)=0.4231901, "/>
@@ -19325,6 +19013,85 @@
           </a:extLst>
         </p:spPr>
       </p:pic>
+      <p:sp>
+        <p:nvSpPr>
+          <p:cNvPr id="8196" name="TextBox 8195"/>
+          <p:cNvSpPr txBox="1"/>
+          <p:nvPr/>
+        </p:nvSpPr>
+        <p:spPr>
+          <a:xfrm>
+            <a:off x="1524000" y="5334001"/>
+            <a:ext cx="6752492" cy="804863"/>
+          </a:xfrm>
+          <a:prstGeom prst="rect">
+            <a:avLst/>
+          </a:prstGeom>
+          <a:noFill/>
+        </p:spPr>
+        <p:txBody>
+          <a:bodyPr wrap="square" anchor="ctr" lIns="0" rIns="0" tIns="0" bIns="0">
+            <a:spAutoFit/>
+          </a:bodyPr>
+          <a:lstStyle/>
+          <a:p>
+            <a:r>
+              <a:rPr sz="1900">
+                <a:latin typeface="Cambria"/>
+              </a:rPr>
+              <a:t>P[X ≤ 2] = e</a:t>
+            </a:r>
+            <a:r>
+              <a:rPr sz="1900" baseline="30000">
+                <a:latin typeface="Cambria"/>
+              </a:rPr>
+              <a:t>−3</a:t>
+            </a:r>
+            <a:r>
+              <a:rPr sz="1900">
+                <a:latin typeface="Cambria"/>
+              </a:rPr>
+              <a:t> [ 3</a:t>
+            </a:r>
+            <a:r>
+              <a:rPr sz="1900" baseline="30000">
+                <a:latin typeface="Cambria"/>
+              </a:rPr>
+              <a:t>0</a:t>
+            </a:r>
+            <a:r>
+              <a:rPr sz="1900">
+                <a:latin typeface="Cambria"/>
+              </a:rPr>
+              <a:t>/0! + 3</a:t>
+            </a:r>
+            <a:r>
+              <a:rPr sz="1900" baseline="30000">
+                <a:latin typeface="Cambria"/>
+              </a:rPr>
+              <a:t>1</a:t>
+            </a:r>
+            <a:r>
+              <a:rPr sz="1900">
+                <a:latin typeface="Cambria"/>
+              </a:rPr>
+              <a:t>/1! + 3</a:t>
+            </a:r>
+            <a:r>
+              <a:rPr sz="1900" baseline="30000">
+                <a:latin typeface="Cambria"/>
+              </a:rPr>
+              <a:t>2</a:t>
+            </a:r>
+            <a:r>
+              <a:rPr sz="1900">
+                <a:latin typeface="Cambria"/>
+              </a:rPr>
+              <a:t>/2! ] = 0.423</a:t>
+            </a:r>
+          </a:p>
+        </p:txBody>
+      </p:sp>
     </p:spTree>
     <p:extLst>
       <p:ext uri="{BB962C8B-B14F-4D97-AF65-F5344CB8AC3E}">
@@ -20160,10 +19927,8 @@
               <a:t> </a:t>
             </a:r>
             <a:r>
-              <a:rPr lang="en-US" altLang="en-US" dirty="0">
-                <a:sym typeface="Wingdings"/>
-              </a:rPr>
-              <a:t> Onward to negative binomial!</a:t>
+              <a:rPr lang="en-US" altLang="en-US" dirty="0"/>
+              <a:t>→ Onward to negative binomial!</a:t>
             </a:r>
             <a:endParaRPr lang="en-US" altLang="en-US" dirty="0"/>
           </a:p>
@@ -21123,77 +20888,6 @@
           </a:p>
         </p:txBody>
       </p:sp>
-      <p:graphicFrame>
-        <p:nvGraphicFramePr>
-          <p:cNvPr id="143362" name="Object 4"/>
-          <p:cNvGraphicFramePr>
-            <a:graphicFrameLocks noGrp="1" noChangeAspect="1"/>
-          </p:cNvGraphicFramePr>
-          <p:nvPr>
-            <p:ph idx="1"/>
-            <p:extLst>
-              <p:ext uri="{D42A27DB-BD31-4B8C-83A1-F6EECF244321}">
-                <p14:modId xmlns:p14="http://schemas.microsoft.com/office/powerpoint/2010/main" val="2017998080"/>
-              </p:ext>
-            </p:extLst>
-          </p:nvPr>
-        </p:nvGraphicFramePr>
-        <p:xfrm>
-          <a:off x="2101534" y="2770188"/>
-          <a:ext cx="8801398" cy="2033032"/>
-        </p:xfrm>
-        <a:graphic>
-          <a:graphicData uri="http://schemas.openxmlformats.org/presentationml/2006/ole">
-            <mc:AlternateContent xmlns:mc="http://schemas.openxmlformats.org/markup-compatibility/2006">
-              <mc:Choice xmlns:v="urn:schemas-microsoft-com:vml" Requires="v">
-                <p:oleObj name="Equation" r:id="rId3" imgW="3847204" imgH="889046" progId="">
-                  <p:embed/>
-                </p:oleObj>
-              </mc:Choice>
-              <mc:Fallback>
-                <p:oleObj name="Equation" r:id="rId3" imgW="3847204" imgH="889046" progId="">
-                  <p:embed/>
-                  <p:pic>
-                    <p:nvPicPr>
-                      <p:cNvPr id="0" name=""/>
-                      <p:cNvPicPr>
-                        <a:picLocks noGrp="1" noChangeAspect="1" noChangeArrowheads="1"/>
-                      </p:cNvPicPr>
-                      <p:nvPr/>
-                    </p:nvPicPr>
-                    <p:blipFill>
-                      <a:blip r:embed="rId4">
-                        <a:extLst>
-                          <a:ext uri="{28A0092B-C50C-407E-A947-70E740481C1C}">
-                            <a14:useLocalDpi xmlns:a14="http://schemas.microsoft.com/office/drawing/2010/main" val="0"/>
-                          </a:ext>
-                        </a:extLst>
-                      </a:blip>
-                      <a:srcRect/>
-                      <a:stretch>
-                        <a:fillRect/>
-                      </a:stretch>
-                    </p:blipFill>
-                    <p:spPr bwMode="auto">
-                      <a:xfrm>
-                        <a:off x="2101534" y="2770188"/>
-                        <a:ext cx="8801398" cy="2033032"/>
-                      </a:xfrm>
-                      <a:prstGeom prst="rect">
-                        <a:avLst/>
-                      </a:prstGeom>
-                      <a:noFill/>
-                      <a:ln>
-                        <a:noFill/>
-                      </a:ln>
-                    </p:spPr>
-                  </p:pic>
-                </p:oleObj>
-              </mc:Fallback>
-            </mc:AlternateContent>
-          </a:graphicData>
-        </a:graphic>
-      </p:graphicFrame>
       <p:sp>
         <p:nvSpPr>
           <p:cNvPr id="143363" name="Rectangle 4"/>
@@ -21765,6 +21459,61 @@
               <a:t>Also N</a:t>
             </a:r>
             <a:endParaRPr lang="en-US" sz="2800" i="1" dirty="0"/>
+          </a:p>
+        </p:txBody>
+      </p:sp>
+      <p:sp>
+        <p:nvSpPr>
+          <p:cNvPr id="143365" name="TextBox 143364"/>
+          <p:cNvSpPr txBox="1"/>
+          <p:nvPr/>
+        </p:nvSpPr>
+        <p:spPr>
+          <a:xfrm>
+            <a:off x="2101534" y="2770188"/>
+            <a:ext cx="8801398" cy="2033032"/>
+          </a:xfrm>
+          <a:prstGeom prst="rect">
+            <a:avLst/>
+          </a:prstGeom>
+          <a:noFill/>
+        </p:spPr>
+        <p:txBody>
+          <a:bodyPr wrap="square" anchor="ctr" lIns="0" rIns="0" tIns="0" bIns="0">
+            <a:spAutoFit/>
+          </a:bodyPr>
+          <a:lstStyle/>
+          <a:p>
+            <a:r>
+              <a:rPr sz="1700">
+                <a:latin typeface="Cambria"/>
+              </a:rPr>
+              <a:t>n            The number of times a trial is repeated</a:t>
+            </a:r>
+          </a:p>
+          <a:p>
+            <a:r>
+              <a:rPr sz="1700">
+                <a:latin typeface="Cambria"/>
+              </a:rPr>
+              <a:t>p = P(S)     The probability of a success in a single trial</a:t>
+            </a:r>
+          </a:p>
+          <a:p>
+            <a:r>
+              <a:rPr sz="1700">
+                <a:latin typeface="Cambria"/>
+              </a:rPr>
+              <a:t>q = P(F)     The probability of a failure in a single trial, q = 1 − p</a:t>
+            </a:r>
+          </a:p>
+          <a:p>
+            <a:r>
+              <a:rPr sz="1700">
+                <a:latin typeface="Cambria"/>
+              </a:rPr>
+              <a:t>x            The number of successes on n trials (x = 0, 1, .., n)</a:t>
+            </a:r>
           </a:p>
         </p:txBody>
       </p:sp>
@@ -30373,77 +30122,6 @@
           </a:p>
         </p:txBody>
       </p:sp>
-      <p:graphicFrame>
-        <p:nvGraphicFramePr>
-          <p:cNvPr id="145411" name="Object 4"/>
-          <p:cNvGraphicFramePr>
-            <a:graphicFrameLocks noGrp="1" noChangeAspect="1"/>
-          </p:cNvGraphicFramePr>
-          <p:nvPr>
-            <p:ph sz="half" idx="2"/>
-            <p:extLst>
-              <p:ext uri="{D42A27DB-BD31-4B8C-83A1-F6EECF244321}">
-                <p14:modId xmlns:p14="http://schemas.microsoft.com/office/powerpoint/2010/main" val="575213071"/>
-              </p:ext>
-            </p:extLst>
-          </p:nvPr>
-        </p:nvGraphicFramePr>
-        <p:xfrm>
-          <a:off x="3733623" y="2011680"/>
-          <a:ext cx="4785714" cy="867410"/>
-        </p:xfrm>
-        <a:graphic>
-          <a:graphicData uri="http://schemas.openxmlformats.org/presentationml/2006/ole">
-            <mc:AlternateContent xmlns:mc="http://schemas.openxmlformats.org/markup-compatibility/2006">
-              <mc:Choice xmlns:v="urn:schemas-microsoft-com:vml" Requires="v">
-                <p:oleObj name="Equation" r:id="rId3" imgW="2311078" imgH="418893" progId="">
-                  <p:embed/>
-                </p:oleObj>
-              </mc:Choice>
-              <mc:Fallback>
-                <p:oleObj name="Equation" r:id="rId3" imgW="2311078" imgH="418893" progId="">
-                  <p:embed/>
-                  <p:pic>
-                    <p:nvPicPr>
-                      <p:cNvPr id="0" name=""/>
-                      <p:cNvPicPr>
-                        <a:picLocks noGrp="1" noChangeAspect="1" noChangeArrowheads="1"/>
-                      </p:cNvPicPr>
-                      <p:nvPr/>
-                    </p:nvPicPr>
-                    <p:blipFill>
-                      <a:blip r:embed="rId4">
-                        <a:extLst>
-                          <a:ext uri="{28A0092B-C50C-407E-A947-70E740481C1C}">
-                            <a14:useLocalDpi xmlns:a14="http://schemas.microsoft.com/office/drawing/2010/main" val="0"/>
-                          </a:ext>
-                        </a:extLst>
-                      </a:blip>
-                      <a:srcRect/>
-                      <a:stretch>
-                        <a:fillRect/>
-                      </a:stretch>
-                    </p:blipFill>
-                    <p:spPr bwMode="auto">
-                      <a:xfrm>
-                        <a:off x="3733623" y="2011680"/>
-                        <a:ext cx="4785714" cy="867410"/>
-                      </a:xfrm>
-                      <a:prstGeom prst="rect">
-                        <a:avLst/>
-                      </a:prstGeom>
-                      <a:noFill/>
-                      <a:ln>
-                        <a:noFill/>
-                      </a:ln>
-                    </p:spPr>
-                  </p:pic>
-                </p:oleObj>
-              </mc:Fallback>
-            </mc:AlternateContent>
-          </a:graphicData>
-        </a:graphic>
-      </p:graphicFrame>
       <p:cxnSp>
         <p:nvCxnSpPr>
           <p:cNvPr id="3" name="Straight Arrow Connector 2"/>
@@ -30531,6 +30209,103 @@
           </a:p>
         </p:txBody>
       </p:sp>
+      <p:sp>
+        <p:nvSpPr>
+          <p:cNvPr id="7172" name="TextBox 7171"/>
+          <p:cNvSpPr txBox="1"/>
+          <p:nvPr/>
+        </p:nvSpPr>
+        <p:spPr>
+          <a:xfrm>
+            <a:off x="3733623" y="2011680"/>
+            <a:ext cx="6893169" cy="867410"/>
+          </a:xfrm>
+          <a:prstGeom prst="rect">
+            <a:avLst/>
+          </a:prstGeom>
+          <a:noFill/>
+        </p:spPr>
+        <p:txBody>
+          <a:bodyPr wrap="square" anchor="ctr" lIns="0" rIns="0" tIns="0" bIns="0">
+            <a:spAutoFit/>
+          </a:bodyPr>
+          <a:lstStyle/>
+          <a:p>
+            <a:r>
+              <a:rPr sz="1900">
+                <a:latin typeface="Cambria"/>
+              </a:rPr>
+              <a:t>P(x) = </a:t>
+            </a:r>
+            <a:r>
+              <a:rPr sz="1900" baseline="-25000">
+                <a:latin typeface="Cambria"/>
+              </a:rPr>
+              <a:t>n</a:t>
+            </a:r>
+            <a:r>
+              <a:rPr sz="1900">
+                <a:latin typeface="Cambria"/>
+              </a:rPr>
+              <a:t>C</a:t>
+            </a:r>
+            <a:r>
+              <a:rPr sz="1900" baseline="-25000">
+                <a:latin typeface="Cambria"/>
+              </a:rPr>
+              <a:t>x</a:t>
+            </a:r>
+            <a:r>
+              <a:rPr sz="1900">
+                <a:latin typeface="Cambria"/>
+              </a:rPr>
+              <a:t> p</a:t>
+            </a:r>
+            <a:r>
+              <a:rPr sz="1900" baseline="30000">
+                <a:latin typeface="Cambria"/>
+              </a:rPr>
+              <a:t>x</a:t>
+            </a:r>
+            <a:r>
+              <a:rPr sz="1900">
+                <a:latin typeface="Cambria"/>
+              </a:rPr>
+              <a:t> q</a:t>
+            </a:r>
+            <a:r>
+              <a:rPr sz="1900" baseline="30000">
+                <a:latin typeface="Cambria"/>
+              </a:rPr>
+              <a:t>n−x</a:t>
+            </a:r>
+            <a:r>
+              <a:rPr sz="1900">
+                <a:latin typeface="Cambria"/>
+              </a:rPr>
+              <a:t> = n! / ((n − x)! x!) · p</a:t>
+            </a:r>
+            <a:r>
+              <a:rPr sz="1900" baseline="30000">
+                <a:latin typeface="Cambria"/>
+              </a:rPr>
+              <a:t>x</a:t>
+            </a:r>
+            <a:r>
+              <a:rPr sz="1900">
+                <a:latin typeface="Cambria"/>
+              </a:rPr>
+              <a:t> q</a:t>
+            </a:r>
+            <a:r>
+              <a:rPr sz="1900" baseline="30000">
+                <a:latin typeface="Cambria"/>
+              </a:rPr>
+              <a:t>n−x</a:t>
+            </a:r>
+          </a:p>
+        </p:txBody>
+      </p:sp>
     </p:spTree>
     <p:extLst>
       <p:ext uri="{BB962C8B-B14F-4D97-AF65-F5344CB8AC3E}">
@@ -30774,10 +30549,8 @@
               <a:t>Bernoulli </a:t>
             </a:r>
             <a:r>
-              <a:rPr lang="en-US" sz="2600" dirty="0">
-                <a:sym typeface="Wingdings"/>
-              </a:rPr>
-              <a:t> probability a single coin flip comes up heads</a:t>
+              <a:rPr lang="en-US" sz="2600" dirty="0"/>
+              <a:t>→ probability a single coin flip comes up heads</a:t>
             </a:r>
           </a:p>
           <a:p>
@@ -30788,10 +30561,8 @@
               <a:defRPr/>
             </a:pPr>
             <a:r>
-              <a:rPr lang="en-US" sz="2600" dirty="0">
-                <a:sym typeface="Wingdings"/>
-              </a:rPr>
-              <a:t>Binomial  Probability that 10 coin flips yield 3 heads</a:t>
+              <a:rPr lang="en-US" sz="2600" dirty="0"/>
+              <a:t>Binomial → Probability that 10 coin flips yield 3 heads</a:t>
             </a:r>
           </a:p>
           <a:p>
@@ -30829,77 +30600,103 @@
           </a:p>
         </p:txBody>
       </p:sp>
-      <p:graphicFrame>
-        <p:nvGraphicFramePr>
-          <p:cNvPr id="147459" name="Object 4"/>
-          <p:cNvGraphicFramePr>
-            <a:graphicFrameLocks noGrp="1" noChangeAspect="1"/>
-          </p:cNvGraphicFramePr>
-          <p:nvPr>
-            <p:ph sz="half" idx="2"/>
-            <p:extLst>
-              <p:ext uri="{D42A27DB-BD31-4B8C-83A1-F6EECF244321}">
-                <p14:modId xmlns:p14="http://schemas.microsoft.com/office/powerpoint/2010/main" val="1561546922"/>
-              </p:ext>
-            </p:extLst>
-          </p:nvPr>
-        </p:nvGraphicFramePr>
-        <p:xfrm>
-          <a:off x="3703003" y="1617028"/>
-          <a:ext cx="4573752" cy="828992"/>
-        </p:xfrm>
-        <a:graphic>
-          <a:graphicData uri="http://schemas.openxmlformats.org/presentationml/2006/ole">
-            <mc:AlternateContent xmlns:mc="http://schemas.openxmlformats.org/markup-compatibility/2006">
-              <mc:Choice xmlns:v="urn:schemas-microsoft-com:vml" Requires="v">
-                <p:oleObj name="Equation" r:id="rId3" imgW="2311078" imgH="418893" progId="">
-                  <p:embed/>
-                </p:oleObj>
-              </mc:Choice>
-              <mc:Fallback>
-                <p:oleObj name="Equation" r:id="rId3" imgW="2311078" imgH="418893" progId="">
-                  <p:embed/>
-                  <p:pic>
-                    <p:nvPicPr>
-                      <p:cNvPr id="0" name=""/>
-                      <p:cNvPicPr>
-                        <a:picLocks noGrp="1" noChangeAspect="1" noChangeArrowheads="1"/>
-                      </p:cNvPicPr>
-                      <p:nvPr/>
-                    </p:nvPicPr>
-                    <p:blipFill>
-                      <a:blip r:embed="rId4">
-                        <a:extLst>
-                          <a:ext uri="{28A0092B-C50C-407E-A947-70E740481C1C}">
-                            <a14:useLocalDpi xmlns:a14="http://schemas.microsoft.com/office/drawing/2010/main" val="0"/>
-                          </a:ext>
-                        </a:extLst>
-                      </a:blip>
-                      <a:srcRect/>
-                      <a:stretch>
-                        <a:fillRect/>
-                      </a:stretch>
-                    </p:blipFill>
-                    <p:spPr bwMode="auto">
-                      <a:xfrm>
-                        <a:off x="3703003" y="1617028"/>
-                        <a:ext cx="4573752" cy="828992"/>
-                      </a:xfrm>
-                      <a:prstGeom prst="rect">
-                        <a:avLst/>
-                      </a:prstGeom>
-                      <a:noFill/>
-                      <a:ln>
-                        <a:noFill/>
-                      </a:ln>
-                    </p:spPr>
-                  </p:pic>
-                </p:oleObj>
-              </mc:Fallback>
-            </mc:AlternateContent>
-          </a:graphicData>
-        </a:graphic>
-      </p:graphicFrame>
+      <p:sp>
+        <p:nvSpPr>
+          <p:cNvPr id="7172" name="TextBox 7171"/>
+          <p:cNvSpPr txBox="1"/>
+          <p:nvPr/>
+        </p:nvSpPr>
+        <p:spPr>
+          <a:xfrm>
+            <a:off x="3703003" y="1617028"/>
+            <a:ext cx="6893169" cy="828992"/>
+          </a:xfrm>
+          <a:prstGeom prst="rect">
+            <a:avLst/>
+          </a:prstGeom>
+          <a:noFill/>
+        </p:spPr>
+        <p:txBody>
+          <a:bodyPr wrap="square" anchor="ctr" lIns="0" rIns="0" tIns="0" bIns="0">
+            <a:spAutoFit/>
+          </a:bodyPr>
+          <a:lstStyle/>
+          <a:p>
+            <a:r>
+              <a:rPr sz="1900">
+                <a:latin typeface="Cambria"/>
+              </a:rPr>
+              <a:t>P(x) = </a:t>
+            </a:r>
+            <a:r>
+              <a:rPr sz="1900" baseline="-25000">
+                <a:latin typeface="Cambria"/>
+              </a:rPr>
+              <a:t>n</a:t>
+            </a:r>
+            <a:r>
+              <a:rPr sz="1900">
+                <a:latin typeface="Cambria"/>
+              </a:rPr>
+              <a:t>C</a:t>
+            </a:r>
+            <a:r>
+              <a:rPr sz="1900" baseline="-25000">
+                <a:latin typeface="Cambria"/>
+              </a:rPr>
+              <a:t>x</a:t>
+            </a:r>
+            <a:r>
+              <a:rPr sz="1900">
+                <a:latin typeface="Cambria"/>
+              </a:rPr>
+              <a:t> p</a:t>
+            </a:r>
+            <a:r>
+              <a:rPr sz="1900" baseline="30000">
+                <a:latin typeface="Cambria"/>
+              </a:rPr>
+              <a:t>x</a:t>
+            </a:r>
+            <a:r>
+              <a:rPr sz="1900">
+                <a:latin typeface="Cambria"/>
+              </a:rPr>
+              <a:t> q</a:t>
+            </a:r>
+            <a:r>
+              <a:rPr sz="1900" baseline="30000">
+                <a:latin typeface="Cambria"/>
+              </a:rPr>
+              <a:t>n−x</a:t>
+            </a:r>
+            <a:r>
+              <a:rPr sz="1900">
+                <a:latin typeface="Cambria"/>
+              </a:rPr>
+              <a:t> = n! / ((n − x)! x!) · p</a:t>
+            </a:r>
+            <a:r>
+              <a:rPr sz="1900" baseline="30000">
+                <a:latin typeface="Cambria"/>
+              </a:rPr>
+              <a:t>x</a:t>
+            </a:r>
+            <a:r>
+              <a:rPr sz="1900">
+                <a:latin typeface="Cambria"/>
+              </a:rPr>
+              <a:t> q</a:t>
+            </a:r>
+            <a:r>
+              <a:rPr sz="1900" baseline="30000">
+                <a:latin typeface="Cambria"/>
+              </a:rPr>
+              <a:t>n−x</a:t>
+            </a:r>
+          </a:p>
+        </p:txBody>
+      </p:sp>
     </p:spTree>
     <p:extLst>
       <p:ext uri="{BB962C8B-B14F-4D97-AF65-F5344CB8AC3E}">

--- a/Day1_Probability/FW536_Day1_Afternoon Distributions I_accessible.pptx
+++ b/Day1_Probability/FW536_Day1_Afternoon Distributions I_accessible.pptx
@@ -7555,35 +7555,481 @@
           <a:chExt cx="0" cy="0"/>
         </a:xfrm>
       </p:grpSpPr>
-      <p:pic>
-        <p:nvPicPr>
-          <p:cNvPr id="2" name="Picture 1" descr="Worked solution. For Bernoulli(p), a table gives Var(X)=E[(X-mu)^2]=(1-p)p^2+p(1-p)^2=p(1-p). For bin(n,p), X is a sum of n independent Bernoulli(p), so variances add: Var(X)=Var(X1)+...+Var(Xn)=np(1-p)." title="Worked solution. For Bernoulli(p), a table gives Var(X)=E[(X-mu)^2]=(1-p)p^2+p(1"/>
-          <p:cNvPicPr>
-            <a:picLocks noChangeAspect="1"/>
-          </p:cNvPicPr>
+      <p:sp>
+        <p:nvSpPr>
+          <p:cNvPr id="2" name="TextBox 1"/>
+          <p:cNvSpPr txBox="1"/>
           <p:nvPr/>
-        </p:nvPicPr>
-        <p:blipFill rotWithShape="1">
-          <a:blip r:embed="rId2">
-            <a:extLst>
-              <a:ext uri="{28A0092B-C50C-407E-A947-70E740481C1C}">
-                <a14:useLocalDpi xmlns:a14="http://schemas.microsoft.com/office/drawing/2010/main" val="0"/>
-              </a:ext>
-            </a:extLst>
-          </a:blip>
-          <a:srcRect b="19073"/>
-          <a:stretch/>
-        </p:blipFill>
+        </p:nvSpPr>
         <p:spPr>
           <a:xfrm>
-            <a:off x="1433285" y="264885"/>
-            <a:ext cx="9533925" cy="5781352"/>
+            <a:off x="1597877" y="429477"/>
+            <a:ext cx="9204741" cy="534924"/>
           </a:xfrm>
           <a:prstGeom prst="rect">
             <a:avLst/>
           </a:prstGeom>
-        </p:spPr>
-      </p:pic>
+          <a:noFill/>
+        </p:spPr>
+        <p:txBody>
+          <a:bodyPr wrap="square" anchor="t" lIns="0" rIns="0" tIns="0" bIns="0">
+            <a:spAutoFit/>
+          </a:bodyPr>
+          <a:lstStyle/>
+          <a:p>
+            <a:r>
+              <a:rPr sz="2800" b="0">
+                <a:solidFill>
+                  <a:srgbClr val="3333CC"/>
+                </a:solidFill>
+                <a:latin typeface="Calibri"/>
+              </a:rPr>
+              <a:t>Solution</a:t>
+            </a:r>
+          </a:p>
+        </p:txBody>
+      </p:sp>
+      <p:sp>
+        <p:nvSpPr>
+          <p:cNvPr id="3" name="TextBox 2"/>
+          <p:cNvSpPr txBox="1"/>
+          <p:nvPr/>
+        </p:nvSpPr>
+        <p:spPr>
+          <a:xfrm>
+            <a:off x="1597877" y="1238721"/>
+            <a:ext cx="9204741" cy="363474"/>
+          </a:xfrm>
+          <a:prstGeom prst="rect">
+            <a:avLst/>
+          </a:prstGeom>
+          <a:noFill/>
+        </p:spPr>
+        <p:txBody>
+          <a:bodyPr wrap="square" anchor="t" lIns="0" rIns="0" tIns="0" bIns="0">
+            <a:spAutoFit/>
+          </a:bodyPr>
+          <a:lstStyle/>
+          <a:p>
+            <a:r>
+              <a:rPr sz="1800" b="0">
+                <a:latin typeface="Calibri"/>
+              </a:rPr>
+              <a:t>1. For X ~ Bernoulli(p) we use a table. (We know E(X) = p.)</a:t>
+            </a:r>
+          </a:p>
+        </p:txBody>
+      </p:sp>
+      <p:graphicFrame>
+        <p:nvGraphicFramePr>
+          <p:cNvPr id="4" name="Table 3"/>
+          <p:cNvGraphicFramePr>
+            <a:graphicFrameLocks noGrp="1"/>
+          </p:cNvGraphicFramePr>
+          <p:nvPr/>
+        </p:nvGraphicFramePr>
+        <p:xfrm>
+          <a:off x="1597877" y="1711923"/>
+          <a:ext cx="4206240" cy="952500"/>
+        </p:xfrm>
+        <a:graphic>
+          <a:graphicData uri="http://schemas.openxmlformats.org/drawingml/2006/table">
+            <a:tbl>
+              <a:tblPr firstCol="1">
+                <a:tableStyleId>{5C22544A-7EE6-4342-B048-85BDC9FD1C3A}</a:tableStyleId>
+              </a:tblPr>
+              <a:tblGrid>
+                <a:gridCol w="1402080"/>
+                <a:gridCol w="1402080"/>
+                <a:gridCol w="1402080"/>
+              </a:tblGrid>
+              <a:tr h="317500">
+                <a:tc>
+                  <a:txBody>
+                    <a:bodyPr wrap="none" lIns="27432" rIns="27432" tIns="27432" bIns="27432"/>
+                    <a:lstStyle/>
+                    <a:p>
+                      <a:pPr algn="r"/>
+                      <a:r>
+                        <a:rPr sz="1500" b="1">
+                          <a:latin typeface="Cambria"/>
+                        </a:rPr>
+                        <a:t>X</a:t>
+                      </a:r>
+                    </a:p>
+                  </a:txBody>
+                  <a:tcPr/>
+                </a:tc>
+                <a:tc>
+                  <a:txBody>
+                    <a:bodyPr wrap="none" lIns="27432" rIns="27432" tIns="27432" bIns="27432"/>
+                    <a:lstStyle/>
+                    <a:p>
+                      <a:pPr algn="ctr"/>
+                      <a:r>
+                        <a:rPr sz="1500" b="0">
+                          <a:latin typeface="Cambria"/>
+                        </a:rPr>
+                        <a:t>0</a:t>
+                      </a:r>
+                    </a:p>
+                  </a:txBody>
+                  <a:tcPr/>
+                </a:tc>
+                <a:tc>
+                  <a:txBody>
+                    <a:bodyPr wrap="none" lIns="27432" rIns="27432" tIns="27432" bIns="27432"/>
+                    <a:lstStyle/>
+                    <a:p>
+                      <a:pPr algn="ctr"/>
+                      <a:r>
+                        <a:rPr sz="1500" b="0">
+                          <a:latin typeface="Cambria"/>
+                        </a:rPr>
+                        <a:t>1</a:t>
+                      </a:r>
+                    </a:p>
+                  </a:txBody>
+                  <a:tcPr/>
+                </a:tc>
+              </a:tr>
+              <a:tr h="317500">
+                <a:tc>
+                  <a:txBody>
+                    <a:bodyPr wrap="none" lIns="27432" rIns="27432" tIns="27432" bIns="27432"/>
+                    <a:lstStyle/>
+                    <a:p>
+                      <a:pPr algn="r"/>
+                      <a:r>
+                        <a:rPr sz="1500" b="1">
+                          <a:latin typeface="Cambria"/>
+                        </a:rPr>
+                        <a:t>p(x)</a:t>
+                      </a:r>
+                    </a:p>
+                  </a:txBody>
+                  <a:tcPr/>
+                </a:tc>
+                <a:tc>
+                  <a:txBody>
+                    <a:bodyPr wrap="none" lIns="27432" rIns="27432" tIns="27432" bIns="27432"/>
+                    <a:lstStyle/>
+                    <a:p>
+                      <a:pPr algn="ctr"/>
+                      <a:r>
+                        <a:rPr sz="1500" b="0">
+                          <a:latin typeface="Cambria"/>
+                        </a:rPr>
+                        <a:t>1 − p</a:t>
+                      </a:r>
+                    </a:p>
+                  </a:txBody>
+                  <a:tcPr/>
+                </a:tc>
+                <a:tc>
+                  <a:txBody>
+                    <a:bodyPr wrap="none" lIns="27432" rIns="27432" tIns="27432" bIns="27432"/>
+                    <a:lstStyle/>
+                    <a:p>
+                      <a:pPr algn="ctr"/>
+                      <a:r>
+                        <a:rPr sz="1500" b="0">
+                          <a:latin typeface="Cambria"/>
+                        </a:rPr>
+                        <a:t>p</a:t>
+                      </a:r>
+                    </a:p>
+                  </a:txBody>
+                  <a:tcPr/>
+                </a:tc>
+              </a:tr>
+              <a:tr h="317500">
+                <a:tc>
+                  <a:txBody>
+                    <a:bodyPr wrap="none" lIns="27432" rIns="27432" tIns="27432" bIns="27432"/>
+                    <a:lstStyle/>
+                    <a:p>
+                      <a:pPr algn="r"/>
+                      <a:r>
+                        <a:rPr sz="1500" b="1">
+                          <a:latin typeface="Cambria"/>
+                        </a:rPr>
+                        <a:t>(X − μ)</a:t>
+                      </a:r>
+                      <a:r>
+                        <a:rPr sz="1500" b="1" baseline="30000">
+                          <a:latin typeface="Cambria"/>
+                        </a:rPr>
+                        <a:t>2</a:t>
+                      </a:r>
+                    </a:p>
+                  </a:txBody>
+                  <a:tcPr/>
+                </a:tc>
+                <a:tc>
+                  <a:txBody>
+                    <a:bodyPr wrap="none" lIns="27432" rIns="27432" tIns="27432" bIns="27432"/>
+                    <a:lstStyle/>
+                    <a:p>
+                      <a:pPr algn="ctr"/>
+                      <a:r>
+                        <a:rPr sz="1500" b="0">
+                          <a:latin typeface="Cambria"/>
+                        </a:rPr>
+                        <a:t>p</a:t>
+                      </a:r>
+                      <a:r>
+                        <a:rPr sz="1500" b="0" baseline="30000">
+                          <a:latin typeface="Cambria"/>
+                        </a:rPr>
+                        <a:t>2</a:t>
+                      </a:r>
+                    </a:p>
+                  </a:txBody>
+                  <a:tcPr/>
+                </a:tc>
+                <a:tc>
+                  <a:txBody>
+                    <a:bodyPr wrap="none" lIns="27432" rIns="27432" tIns="27432" bIns="27432"/>
+                    <a:lstStyle/>
+                    <a:p>
+                      <a:pPr algn="ctr"/>
+                      <a:r>
+                        <a:rPr sz="1500" b="0">
+                          <a:latin typeface="Cambria"/>
+                        </a:rPr>
+                        <a:t>(1 − p)</a:t>
+                      </a:r>
+                      <a:r>
+                        <a:rPr sz="1500" b="0" baseline="30000">
+                          <a:latin typeface="Cambria"/>
+                        </a:rPr>
+                        <a:t>2</a:t>
+                      </a:r>
+                    </a:p>
+                  </a:txBody>
+                  <a:tcPr/>
+                </a:tc>
+              </a:tr>
+            </a:tbl>
+          </a:graphicData>
+        </a:graphic>
+      </p:graphicFrame>
+      <p:sp>
+        <p:nvSpPr>
+          <p:cNvPr id="5" name="TextBox 4"/>
+          <p:cNvSpPr txBox="1"/>
+          <p:nvPr/>
+        </p:nvSpPr>
+        <p:spPr>
+          <a:xfrm>
+            <a:off x="1597877" y="2810727"/>
+            <a:ext cx="9204741" cy="346329"/>
+          </a:xfrm>
+          <a:prstGeom prst="rect">
+            <a:avLst/>
+          </a:prstGeom>
+          <a:noFill/>
+        </p:spPr>
+        <p:txBody>
+          <a:bodyPr wrap="square" anchor="t" lIns="0" rIns="0" tIns="0" bIns="0">
+            <a:spAutoFit/>
+          </a:bodyPr>
+          <a:lstStyle/>
+          <a:p>
+            <a:pPr algn="ctr"/>
+            <a:r>
+              <a:rPr sz="1700" b="0">
+                <a:latin typeface="Cambria"/>
+              </a:rPr>
+              <a:t>Var(X) = E((X − μ)</a:t>
+            </a:r>
+            <a:r>
+              <a:rPr sz="1700" b="0" baseline="30000">
+                <a:latin typeface="Cambria"/>
+              </a:rPr>
+              <a:t>2</a:t>
+            </a:r>
+            <a:r>
+              <a:rPr sz="1700" b="0">
+                <a:latin typeface="Cambria"/>
+              </a:rPr>
+              <a:t>) = (1 − p)p</a:t>
+            </a:r>
+            <a:r>
+              <a:rPr sz="1700" b="0" baseline="30000">
+                <a:latin typeface="Cambria"/>
+              </a:rPr>
+              <a:t>2</a:t>
+            </a:r>
+            <a:r>
+              <a:rPr sz="1700" b="0">
+                <a:latin typeface="Cambria"/>
+              </a:rPr>
+              <a:t> + p(1 − p)</a:t>
+            </a:r>
+            <a:r>
+              <a:rPr sz="1700" b="0" baseline="30000">
+                <a:latin typeface="Cambria"/>
+              </a:rPr>
+              <a:t>2</a:t>
+            </a:r>
+            <a:r>
+              <a:rPr sz="1700" b="0">
+                <a:latin typeface="Cambria"/>
+              </a:rPr>
+              <a:t> = p(1 − p)</a:t>
+            </a:r>
+          </a:p>
+        </p:txBody>
+      </p:sp>
+      <p:sp>
+        <p:nvSpPr>
+          <p:cNvPr id="6" name="TextBox 5"/>
+          <p:cNvSpPr txBox="1"/>
+          <p:nvPr/>
+        </p:nvSpPr>
+        <p:spPr>
+          <a:xfrm>
+            <a:off x="1597877" y="3431376"/>
+            <a:ext cx="9204741" cy="672084"/>
+          </a:xfrm>
+          <a:prstGeom prst="rect">
+            <a:avLst/>
+          </a:prstGeom>
+          <a:noFill/>
+        </p:spPr>
+        <p:txBody>
+          <a:bodyPr wrap="square" anchor="t" lIns="0" rIns="0" tIns="0" bIns="0">
+            <a:spAutoFit/>
+          </a:bodyPr>
+          <a:lstStyle/>
+          <a:p>
+            <a:r>
+              <a:rPr sz="1800" b="0">
+                <a:latin typeface="Calibri"/>
+              </a:rPr>
+              <a:t>2. X ~ bin(n, p) means X is the sum of n independent Bernoulli(p) random variables X</a:t>
+            </a:r>
+            <a:r>
+              <a:rPr sz="1800" b="0" baseline="-25000">
+                <a:latin typeface="Calibri"/>
+              </a:rPr>
+              <a:t>1</a:t>
+            </a:r>
+            <a:r>
+              <a:rPr sz="1800" b="0">
+                <a:latin typeface="Calibri"/>
+              </a:rPr>
+              <a:t>, X</a:t>
+            </a:r>
+            <a:r>
+              <a:rPr sz="1800" b="0" baseline="-25000">
+                <a:latin typeface="Calibri"/>
+              </a:rPr>
+              <a:t>2</a:t>
+            </a:r>
+            <a:r>
+              <a:rPr sz="1800" b="0">
+                <a:latin typeface="Calibri"/>
+              </a:rPr>
+              <a:t>, …, X</a:t>
+            </a:r>
+            <a:r>
+              <a:rPr sz="1800" b="0" baseline="-25000">
+                <a:latin typeface="Calibri"/>
+              </a:rPr>
+              <a:t>n</a:t>
+            </a:r>
+            <a:r>
+              <a:rPr sz="1800" b="0">
+                <a:latin typeface="Calibri"/>
+              </a:rPr>
+              <a:t>. For independent variables, the variances add. Since Var(X</a:t>
+            </a:r>
+            <a:r>
+              <a:rPr sz="1800" b="0" baseline="-25000">
+                <a:latin typeface="Calibri"/>
+              </a:rPr>
+              <a:t>j</a:t>
+            </a:r>
+            <a:r>
+              <a:rPr sz="1800" b="0">
+                <a:latin typeface="Calibri"/>
+              </a:rPr>
+              <a:t>) = p(1 − p) we have</a:t>
+            </a:r>
+          </a:p>
+        </p:txBody>
+      </p:sp>
+      <p:sp>
+        <p:nvSpPr>
+          <p:cNvPr id="7" name="TextBox 6"/>
+          <p:cNvSpPr txBox="1"/>
+          <p:nvPr/>
+        </p:nvSpPr>
+        <p:spPr>
+          <a:xfrm>
+            <a:off x="1597877" y="4249764"/>
+            <a:ext cx="9204741" cy="346329"/>
+          </a:xfrm>
+          <a:prstGeom prst="rect">
+            <a:avLst/>
+          </a:prstGeom>
+          <a:noFill/>
+        </p:spPr>
+        <p:txBody>
+          <a:bodyPr wrap="square" anchor="t" lIns="0" rIns="0" tIns="0" bIns="0">
+            <a:spAutoFit/>
+          </a:bodyPr>
+          <a:lstStyle/>
+          <a:p>
+            <a:pPr algn="ctr"/>
+            <a:r>
+              <a:rPr sz="1700" b="0">
+                <a:latin typeface="Cambria"/>
+              </a:rPr>
+              <a:t>Var(X) = Var(X</a:t>
+            </a:r>
+            <a:r>
+              <a:rPr sz="1700" b="0" baseline="-25000">
+                <a:latin typeface="Cambria"/>
+              </a:rPr>
+              <a:t>1</a:t>
+            </a:r>
+            <a:r>
+              <a:rPr sz="1700" b="0">
+                <a:latin typeface="Cambria"/>
+              </a:rPr>
+              <a:t>) + Var(X</a:t>
+            </a:r>
+            <a:r>
+              <a:rPr sz="1700" b="0" baseline="-25000">
+                <a:latin typeface="Cambria"/>
+              </a:rPr>
+              <a:t>2</a:t>
+            </a:r>
+            <a:r>
+              <a:rPr sz="1700" b="0">
+                <a:latin typeface="Cambria"/>
+              </a:rPr>
+              <a:t>) + … + Var(X</a:t>
+            </a:r>
+            <a:r>
+              <a:rPr sz="1700" b="0" baseline="-25000">
+                <a:latin typeface="Cambria"/>
+              </a:rPr>
+              <a:t>n</a:t>
+            </a:r>
+            <a:r>
+              <a:rPr sz="1700" b="0">
+                <a:latin typeface="Cambria"/>
+              </a:rPr>
+              <a:t>) = np(p − 1).</a:t>
+            </a:r>
+          </a:p>
+        </p:txBody>
+      </p:sp>
     </p:spTree>
     <p:extLst>
       <p:ext uri="{BB962C8B-B14F-4D97-AF65-F5344CB8AC3E}">
@@ -21671,60 +22117,6 @@
           <a:chExt cx="0" cy="0"/>
         </a:xfrm>
       </p:grpSpPr>
-      <p:pic>
-        <p:nvPicPr>
-          <p:cNvPr id="211971" name="Picture 3" descr="Text: for the kth success on trial n, we need k-1 successes in the first n-1 trials (binomial with parameters n-1 and p) and a success on trial n with probability p, independently." title="Text: for the kth success on trial n, we need k-1 successes in the first n-1 tri"/>
-          <p:cNvPicPr>
-            <a:picLocks noChangeAspect="1"/>
-          </p:cNvPicPr>
-          <p:nvPr/>
-        </p:nvPicPr>
-        <p:blipFill>
-          <a:blip r:embed="rId4">
-            <a:extLst>
-              <a:ext uri="{28A0092B-C50C-407E-A947-70E740481C1C}">
-                <a14:useLocalDpi xmlns:a14="http://schemas.microsoft.com/office/drawing/2010/main" val="0"/>
-              </a:ext>
-            </a:extLst>
-          </a:blip>
-          <a:srcRect/>
-          <a:stretch>
-            <a:fillRect/>
-          </a:stretch>
-        </p:blipFill>
-        <p:spPr bwMode="auto">
-          <a:xfrm>
-            <a:off x="1524000" y="2046622"/>
-            <a:ext cx="9144000" cy="2724150"/>
-          </a:xfrm>
-          <a:prstGeom prst="rect">
-            <a:avLst/>
-          </a:prstGeom>
-          <a:noFill/>
-          <a:ln>
-            <a:noFill/>
-          </a:ln>
-          <a:extLst>
-            <a:ext uri="{909E8E84-426E-40DD-AFC4-6F175D3DCCD1}">
-              <a14:hiddenFill xmlns:a14="http://schemas.microsoft.com/office/drawing/2010/main">
-                <a:solidFill>
-                  <a:srgbClr val="FFFFFF"/>
-                </a:solidFill>
-              </a14:hiddenFill>
-            </a:ext>
-            <a:ext uri="{91240B29-F687-4F45-9708-019B960494DF}">
-              <a14:hiddenLine xmlns:a14="http://schemas.microsoft.com/office/drawing/2010/main" w="9525">
-                <a:solidFill>
-                  <a:srgbClr val="000000"/>
-                </a:solidFill>
-                <a:miter lim="800000"/>
-                <a:headEnd/>
-                <a:tailEnd/>
-              </a14:hiddenLine>
-            </a:ext>
-          </a:extLst>
-        </p:spPr>
-      </p:pic>
       <p:sp>
         <p:nvSpPr>
           <p:cNvPr id="211973" name="TextBox 6"/>
@@ -22190,6 +22582,37 @@
                 <a:latin typeface="Cambria"/>
               </a:rPr>
               <a:t>r</a:t>
+            </a:r>
+          </a:p>
+        </p:txBody>
+      </p:sp>
+      <p:sp>
+        <p:nvSpPr>
+          <p:cNvPr id="211977" name="TextBox 211976"/>
+          <p:cNvSpPr txBox="1"/>
+          <p:nvPr/>
+        </p:nvSpPr>
+        <p:spPr>
+          <a:xfrm>
+            <a:off x="1688592" y="2211214"/>
+            <a:ext cx="8814816" cy="1289304"/>
+          </a:xfrm>
+          <a:prstGeom prst="rect">
+            <a:avLst/>
+          </a:prstGeom>
+          <a:noFill/>
+        </p:spPr>
+        <p:txBody>
+          <a:bodyPr wrap="square" anchor="t" lIns="0" rIns="0" tIns="0" bIns="0">
+            <a:spAutoFit/>
+          </a:bodyPr>
+          <a:lstStyle/>
+          <a:p>
+            <a:r>
+              <a:rPr sz="1800" b="0">
+                <a:latin typeface="Calibri"/>
+              </a:rPr>
+              <a:t>Now, for the kth success to occur on trial n, we must have k − 1 successes in the first n − 1 trials and a success on the nth trial. The probability of k − 1 successes in n − 1 trials has a binomial distribution with parameters n − 1 and p and the probability of success on the nth trial has probability p and these are independent of each other. We thus conclude</a:t>
             </a:r>
           </a:p>
         </p:txBody>
@@ -30886,35 +31309,180 @@
           <a:chExt cx="0" cy="0"/>
         </a:xfrm>
       </p:grpSpPr>
-      <p:pic>
-        <p:nvPicPr>
-          <p:cNvPr id="7" name="Picture 6" descr="Concept-question slide. Q1: if X~binom(n,p) and Y~binom(m,p) are independent, X+Y follows (a) binom(n+m,p), (b) binom(nm,p), (c) binom(n+m,2p), (d) other. Q2: X~binom(n,p) and Z~binom(n,q) independent, X+Z follows (a) binom(n,p+q), (b) binom(n,pq), (c) binom(2n,p+q), (d) other." title="Concept-question slide. Q1: if X~binom(n,p) and Y~binom(m,p) are independent, X+"/>
-          <p:cNvPicPr>
-            <a:picLocks noChangeAspect="1"/>
-          </p:cNvPicPr>
+      <p:sp>
+        <p:nvSpPr>
+          <p:cNvPr id="2" name="TextBox 1"/>
+          <p:cNvSpPr txBox="1"/>
           <p:nvPr/>
-        </p:nvPicPr>
-        <p:blipFill rotWithShape="1">
-          <a:blip r:embed="rId2">
-            <a:extLst>
-              <a:ext uri="{28A0092B-C50C-407E-A947-70E740481C1C}">
-                <a14:useLocalDpi xmlns:a14="http://schemas.microsoft.com/office/drawing/2010/main" val="0"/>
-              </a:ext>
-            </a:extLst>
-          </a:blip>
-          <a:srcRect b="14507"/>
-          <a:stretch/>
-        </p:blipFill>
+        </p:nvSpPr>
         <p:spPr>
           <a:xfrm>
-            <a:off x="1363335" y="0"/>
-            <a:ext cx="9758680" cy="6251510"/>
+            <a:off x="1527927" y="164592"/>
+            <a:ext cx="9429496" cy="569214"/>
           </a:xfrm>
           <a:prstGeom prst="rect">
             <a:avLst/>
           </a:prstGeom>
-        </p:spPr>
-      </p:pic>
+          <a:noFill/>
+        </p:spPr>
+        <p:txBody>
+          <a:bodyPr wrap="square" anchor="t" lIns="0" rIns="0" tIns="0" bIns="0">
+            <a:spAutoFit/>
+          </a:bodyPr>
+          <a:lstStyle/>
+          <a:p>
+            <a:r>
+              <a:rPr sz="3000" b="0">
+                <a:solidFill>
+                  <a:srgbClr val="3333CC"/>
+                </a:solidFill>
+                <a:latin typeface="Calibri"/>
+              </a:rPr>
+              <a:t>Concept Question</a:t>
+            </a:r>
+          </a:p>
+        </p:txBody>
+      </p:sp>
+      <p:sp>
+        <p:nvSpPr>
+          <p:cNvPr id="3" name="TextBox 2"/>
+          <p:cNvSpPr txBox="1"/>
+          <p:nvPr/>
+        </p:nvSpPr>
+        <p:spPr>
+          <a:xfrm>
+            <a:off x="1527927" y="1044702"/>
+            <a:ext cx="9429496" cy="397764"/>
+          </a:xfrm>
+          <a:prstGeom prst="rect">
+            <a:avLst/>
+          </a:prstGeom>
+          <a:noFill/>
+        </p:spPr>
+        <p:txBody>
+          <a:bodyPr wrap="square" anchor="t" lIns="0" rIns="0" tIns="0" bIns="0">
+            <a:spAutoFit/>
+          </a:bodyPr>
+          <a:lstStyle/>
+          <a:p>
+            <a:r>
+              <a:rPr sz="2000" b="0">
+                <a:latin typeface="Calibri"/>
+              </a:rPr>
+              <a:t>1. Let X ~ binom(n, p) and Y ~ binom(m, p) be independent. Then X + Y follows:</a:t>
+            </a:r>
+          </a:p>
+        </p:txBody>
+      </p:sp>
+      <p:sp>
+        <p:nvSpPr>
+          <p:cNvPr id="4" name="TextBox 3"/>
+          <p:cNvSpPr txBox="1"/>
+          <p:nvPr/>
+        </p:nvSpPr>
+        <p:spPr>
+          <a:xfrm>
+            <a:off x="1527927" y="1533906"/>
+            <a:ext cx="9429496" cy="740664"/>
+          </a:xfrm>
+          <a:prstGeom prst="rect">
+            <a:avLst/>
+          </a:prstGeom>
+          <a:noFill/>
+        </p:spPr>
+        <p:txBody>
+          <a:bodyPr wrap="square" anchor="t" lIns="0" rIns="0" tIns="0" bIns="0">
+            <a:spAutoFit/>
+          </a:bodyPr>
+          <a:lstStyle/>
+          <a:p>
+            <a:r>
+              <a:rPr sz="2000" b="0">
+                <a:latin typeface="Calibri"/>
+              </a:rPr>
+              <a:t>(a) binom(n + m, p)        (b) binom(nm, p)</a:t>
+            </a:r>
+          </a:p>
+          <a:p>
+            <a:r>
+              <a:rPr sz="2000" b="0">
+                <a:latin typeface="Calibri"/>
+              </a:rPr>
+              <a:t>(c) binom(n + m, 2p)      (d) other</a:t>
+            </a:r>
+          </a:p>
+        </p:txBody>
+      </p:sp>
+      <p:sp>
+        <p:nvSpPr>
+          <p:cNvPr id="5" name="TextBox 4"/>
+          <p:cNvSpPr txBox="1"/>
+          <p:nvPr/>
+        </p:nvSpPr>
+        <p:spPr>
+          <a:xfrm>
+            <a:off x="1527927" y="2585466"/>
+            <a:ext cx="9429496" cy="397764"/>
+          </a:xfrm>
+          <a:prstGeom prst="rect">
+            <a:avLst/>
+          </a:prstGeom>
+          <a:noFill/>
+        </p:spPr>
+        <p:txBody>
+          <a:bodyPr wrap="square" anchor="t" lIns="0" rIns="0" tIns="0" bIns="0">
+            <a:spAutoFit/>
+          </a:bodyPr>
+          <a:lstStyle/>
+          <a:p>
+            <a:r>
+              <a:rPr sz="2000" b="0">
+                <a:latin typeface="Calibri"/>
+              </a:rPr>
+              <a:t>2. Let X ~ binom(n, p) and Z ~ binom(n, q) be independent. Then X + Z follows:</a:t>
+            </a:r>
+          </a:p>
+        </p:txBody>
+      </p:sp>
+      <p:sp>
+        <p:nvSpPr>
+          <p:cNvPr id="6" name="TextBox 5"/>
+          <p:cNvSpPr txBox="1"/>
+          <p:nvPr/>
+        </p:nvSpPr>
+        <p:spPr>
+          <a:xfrm>
+            <a:off x="1527927" y="3074670"/>
+            <a:ext cx="9429496" cy="740664"/>
+          </a:xfrm>
+          <a:prstGeom prst="rect">
+            <a:avLst/>
+          </a:prstGeom>
+          <a:noFill/>
+        </p:spPr>
+        <p:txBody>
+          <a:bodyPr wrap="square" anchor="t" lIns="0" rIns="0" tIns="0" bIns="0">
+            <a:spAutoFit/>
+          </a:bodyPr>
+          <a:lstStyle/>
+          <a:p>
+            <a:r>
+              <a:rPr sz="2000" b="0">
+                <a:latin typeface="Calibri"/>
+              </a:rPr>
+              <a:t>(a) binom(n, p + q)        (b) binom(n, pq)</a:t>
+            </a:r>
+          </a:p>
+          <a:p>
+            <a:r>
+              <a:rPr sz="2000" b="0">
+                <a:latin typeface="Calibri"/>
+              </a:rPr>
+              <a:t>(c) binom(2n, p + q)      (d) other</a:t>
+            </a:r>
+          </a:p>
+        </p:txBody>
+      </p:sp>
     </p:spTree>
     <p:extLst>
       <p:ext uri="{BB962C8B-B14F-4D97-AF65-F5344CB8AC3E}">
@@ -30945,35 +31513,242 @@
           <a:chExt cx="0" cy="0"/>
         </a:xfrm>
       </p:grpSpPr>
-      <p:pic>
-        <p:nvPicPr>
-          <p:cNvPr id="6" name="Picture 5" descr="Same concept question with answers. Q1 answer: (a) binom(n+m,p), since each binomial is a sum of independent Bernoulli(p) variables. Q2 answer: (d) other, because combining Bernoulli(p) with Bernoulli(q) gives no named distribution." title="Same concept question with answers. Q1 answer: (a) binom(n+m,p), since each bino"/>
-          <p:cNvPicPr>
-            <a:picLocks noChangeAspect="1"/>
-          </p:cNvPicPr>
+      <p:sp>
+        <p:nvSpPr>
+          <p:cNvPr id="2" name="TextBox 1"/>
+          <p:cNvSpPr txBox="1"/>
           <p:nvPr/>
-        </p:nvPicPr>
-        <p:blipFill rotWithShape="1">
-          <a:blip r:embed="rId2">
-            <a:extLst>
-              <a:ext uri="{28A0092B-C50C-407E-A947-70E740481C1C}">
-                <a14:useLocalDpi xmlns:a14="http://schemas.microsoft.com/office/drawing/2010/main" val="0"/>
-              </a:ext>
-            </a:extLst>
-          </a:blip>
-          <a:srcRect b="3376"/>
-          <a:stretch/>
-        </p:blipFill>
+        </p:nvSpPr>
         <p:spPr>
           <a:xfrm>
-            <a:off x="1489269" y="134256"/>
-            <a:ext cx="8681098" cy="6285205"/>
+            <a:off x="1653860" y="298848"/>
+            <a:ext cx="8351914" cy="500634"/>
           </a:xfrm>
           <a:prstGeom prst="rect">
             <a:avLst/>
           </a:prstGeom>
-        </p:spPr>
-      </p:pic>
+          <a:noFill/>
+        </p:spPr>
+        <p:txBody>
+          <a:bodyPr wrap="square" anchor="t" lIns="0" rIns="0" tIns="0" bIns="0">
+            <a:spAutoFit/>
+          </a:bodyPr>
+          <a:lstStyle/>
+          <a:p>
+            <a:r>
+              <a:rPr sz="2600" b="0">
+                <a:solidFill>
+                  <a:srgbClr val="3333CC"/>
+                </a:solidFill>
+                <a:latin typeface="Calibri"/>
+              </a:rPr>
+              <a:t>Concept Question</a:t>
+            </a:r>
+          </a:p>
+        </p:txBody>
+      </p:sp>
+      <p:sp>
+        <p:nvSpPr>
+          <p:cNvPr id="3" name="TextBox 2"/>
+          <p:cNvSpPr txBox="1"/>
+          <p:nvPr/>
+        </p:nvSpPr>
+        <p:spPr>
+          <a:xfrm>
+            <a:off x="1653860" y="1000650"/>
+            <a:ext cx="8351914" cy="346329"/>
+          </a:xfrm>
+          <a:prstGeom prst="rect">
+            <a:avLst/>
+          </a:prstGeom>
+          <a:noFill/>
+        </p:spPr>
+        <p:txBody>
+          <a:bodyPr wrap="square" anchor="t" lIns="0" rIns="0" tIns="0" bIns="0">
+            <a:spAutoFit/>
+          </a:bodyPr>
+          <a:lstStyle/>
+          <a:p>
+            <a:r>
+              <a:rPr sz="1700" b="0">
+                <a:latin typeface="Calibri"/>
+              </a:rPr>
+              <a:t>1. Let X ~ binom(n, p) and Y ~ binom(m, p) be independent. Then X + Y follows:</a:t>
+            </a:r>
+          </a:p>
+        </p:txBody>
+      </p:sp>
+      <p:sp>
+        <p:nvSpPr>
+          <p:cNvPr id="4" name="TextBox 3"/>
+          <p:cNvSpPr txBox="1"/>
+          <p:nvPr/>
+        </p:nvSpPr>
+        <p:spPr>
+          <a:xfrm>
+            <a:off x="1653860" y="1420131"/>
+            <a:ext cx="8351914" cy="637794"/>
+          </a:xfrm>
+          <a:prstGeom prst="rect">
+            <a:avLst/>
+          </a:prstGeom>
+          <a:noFill/>
+        </p:spPr>
+        <p:txBody>
+          <a:bodyPr wrap="square" anchor="t" lIns="0" rIns="0" tIns="0" bIns="0">
+            <a:spAutoFit/>
+          </a:bodyPr>
+          <a:lstStyle/>
+          <a:p>
+            <a:r>
+              <a:rPr sz="1700" b="0">
+                <a:latin typeface="Calibri"/>
+              </a:rPr>
+              <a:t>(a) binom(n + m, p)        (b) binom(nm, p)</a:t>
+            </a:r>
+          </a:p>
+          <a:p>
+            <a:r>
+              <a:rPr sz="1700" b="0">
+                <a:latin typeface="Calibri"/>
+              </a:rPr>
+              <a:t>(c) binom(n + m, 2p)      (d) other</a:t>
+            </a:r>
+          </a:p>
+        </p:txBody>
+      </p:sp>
+      <p:sp>
+        <p:nvSpPr>
+          <p:cNvPr id="5" name="TextBox 4"/>
+          <p:cNvSpPr txBox="1"/>
+          <p:nvPr/>
+        </p:nvSpPr>
+        <p:spPr>
+          <a:xfrm>
+            <a:off x="1653860" y="2259093"/>
+            <a:ext cx="8351914" cy="346329"/>
+          </a:xfrm>
+          <a:prstGeom prst="rect">
+            <a:avLst/>
+          </a:prstGeom>
+          <a:noFill/>
+        </p:spPr>
+        <p:txBody>
+          <a:bodyPr wrap="square" anchor="t" lIns="0" rIns="0" tIns="0" bIns="0">
+            <a:spAutoFit/>
+          </a:bodyPr>
+          <a:lstStyle/>
+          <a:p>
+            <a:r>
+              <a:rPr sz="1700" b="0">
+                <a:latin typeface="Calibri"/>
+              </a:rPr>
+              <a:t>2. Let X ~ binom(n, p) and Z ~ binom(n, q) be independent. Then X + Z follows:</a:t>
+            </a:r>
+          </a:p>
+        </p:txBody>
+      </p:sp>
+      <p:sp>
+        <p:nvSpPr>
+          <p:cNvPr id="6" name="TextBox 5"/>
+          <p:cNvSpPr txBox="1"/>
+          <p:nvPr/>
+        </p:nvSpPr>
+        <p:spPr>
+          <a:xfrm>
+            <a:off x="1653860" y="2678574"/>
+            <a:ext cx="8351914" cy="637794"/>
+          </a:xfrm>
+          <a:prstGeom prst="rect">
+            <a:avLst/>
+          </a:prstGeom>
+          <a:noFill/>
+        </p:spPr>
+        <p:txBody>
+          <a:bodyPr wrap="square" anchor="t" lIns="0" rIns="0" tIns="0" bIns="0">
+            <a:spAutoFit/>
+          </a:bodyPr>
+          <a:lstStyle/>
+          <a:p>
+            <a:r>
+              <a:rPr sz="1700" b="0">
+                <a:latin typeface="Calibri"/>
+              </a:rPr>
+              <a:t>(a) binom(n, p + q)        (b) binom(n, pq)</a:t>
+            </a:r>
+          </a:p>
+          <a:p>
+            <a:r>
+              <a:rPr sz="1700" b="0">
+                <a:latin typeface="Calibri"/>
+              </a:rPr>
+              <a:t>(c) binom(2n, p + q)      (d) other</a:t>
+            </a:r>
+          </a:p>
+        </p:txBody>
+      </p:sp>
+      <p:sp>
+        <p:nvSpPr>
+          <p:cNvPr id="7" name="TextBox 6"/>
+          <p:cNvSpPr txBox="1"/>
+          <p:nvPr/>
+        </p:nvSpPr>
+        <p:spPr>
+          <a:xfrm>
+            <a:off x="1653860" y="3517536"/>
+            <a:ext cx="8351914" cy="569214"/>
+          </a:xfrm>
+          <a:prstGeom prst="rect">
+            <a:avLst/>
+          </a:prstGeom>
+          <a:noFill/>
+        </p:spPr>
+        <p:txBody>
+          <a:bodyPr wrap="square" anchor="t" lIns="0" rIns="0" tIns="0" bIns="0">
+            <a:spAutoFit/>
+          </a:bodyPr>
+          <a:lstStyle/>
+          <a:p>
+            <a:r>
+              <a:rPr sz="1500" b="0">
+                <a:latin typeface="Calibri"/>
+              </a:rPr>
+              <a:t>1. answer: (a). Each binomial random variable is a sum of independent Bernoulli(p) random variables, so their sum is also a sum of Bernoulli(p) r.v.'s.</a:t>
+            </a:r>
+          </a:p>
+        </p:txBody>
+      </p:sp>
+      <p:sp>
+        <p:nvSpPr>
+          <p:cNvPr id="8" name="TextBox 7"/>
+          <p:cNvSpPr txBox="1"/>
+          <p:nvPr/>
+        </p:nvSpPr>
+        <p:spPr>
+          <a:xfrm>
+            <a:off x="1653860" y="4196478"/>
+            <a:ext cx="8351914" cy="569214"/>
+          </a:xfrm>
+          <a:prstGeom prst="rect">
+            <a:avLst/>
+          </a:prstGeom>
+          <a:noFill/>
+        </p:spPr>
+        <p:txBody>
+          <a:bodyPr wrap="square" anchor="t" lIns="0" rIns="0" tIns="0" bIns="0">
+            <a:spAutoFit/>
+          </a:bodyPr>
+          <a:lstStyle/>
+          <a:p>
+            <a:r>
+              <a:rPr sz="1500" b="0">
+                <a:latin typeface="Calibri"/>
+              </a:rPr>
+              <a:t>2. answer: (d) This is different from problem 1 because we are combining Bernoulli(p) r.v.'s with Bernoulli(q) r.v.'s. This is not one of the named random variables we know about.</a:t>
+            </a:r>
+          </a:p>
+        </p:txBody>
+      </p:sp>
     </p:spTree>
     <p:extLst>
       <p:ext uri="{BB962C8B-B14F-4D97-AF65-F5344CB8AC3E}">
@@ -31004,35 +31779,6 @@
           <a:chExt cx="0" cy="0"/>
         </a:xfrm>
       </p:grpSpPr>
-      <p:pic>
-        <p:nvPicPr>
-          <p:cNvPr id="6" name="Picture 5" descr="Board questions. 1: Prove Var(X)=p(1-p) if X~Bernoulli(p). 2: Prove Var(X)=np(1-p) if X~bin(n,p). 3: X1..Xn independent with standard deviation sigma=2; find the standard deviation of their average X-bar. Solution on next slide." title="Board questions. 1: Prove Var(X)=p(1-p) if X~Bernoulli(p). 2: Prove Var(X)=np(1-"/>
-          <p:cNvPicPr>
-            <a:picLocks noChangeAspect="1"/>
-          </p:cNvPicPr>
-          <p:nvPr/>
-        </p:nvPicPr>
-        <p:blipFill rotWithShape="1">
-          <a:blip r:embed="rId2">
-            <a:extLst>
-              <a:ext uri="{28A0092B-C50C-407E-A947-70E740481C1C}">
-                <a14:useLocalDpi xmlns:a14="http://schemas.microsoft.com/office/drawing/2010/main" val="0"/>
-              </a:ext>
-            </a:extLst>
-          </a:blip>
-          <a:srcRect t="13882" b="61669"/>
-          <a:stretch/>
-        </p:blipFill>
-        <p:spPr>
-          <a:xfrm>
-            <a:off x="1302657" y="1343608"/>
-            <a:ext cx="9473412" cy="1735494"/>
-          </a:xfrm>
-          <a:prstGeom prst="rect">
-            <a:avLst/>
-          </a:prstGeom>
-        </p:spPr>
-      </p:pic>
       <p:sp>
         <p:nvSpPr>
           <p:cNvPr id="7" name="TextBox 6"/>
@@ -31191,6 +31937,68 @@
                 </a:solidFill>
               </a:rPr>
               <a:t>Group Work</a:t>
+            </a:r>
+          </a:p>
+        </p:txBody>
+      </p:sp>
+      <p:sp>
+        <p:nvSpPr>
+          <p:cNvPr id="8" name="TextBox 7"/>
+          <p:cNvSpPr txBox="1"/>
+          <p:nvPr/>
+        </p:nvSpPr>
+        <p:spPr>
+          <a:xfrm>
+            <a:off x="1467249" y="1508200"/>
+            <a:ext cx="9144228" cy="432054"/>
+          </a:xfrm>
+          <a:prstGeom prst="rect">
+            <a:avLst/>
+          </a:prstGeom>
+          <a:noFill/>
+        </p:spPr>
+        <p:txBody>
+          <a:bodyPr wrap="square" anchor="t" lIns="0" rIns="0" tIns="0" bIns="0">
+            <a:spAutoFit/>
+          </a:bodyPr>
+          <a:lstStyle/>
+          <a:p>
+            <a:r>
+              <a:rPr sz="2200" b="1">
+                <a:latin typeface="Calibri"/>
+              </a:rPr>
+              <a:t>1. Prove: if X ~ Bernoulli(p)  then  Var(X) = p(1 − p).</a:t>
+            </a:r>
+          </a:p>
+        </p:txBody>
+      </p:sp>
+      <p:sp>
+        <p:nvSpPr>
+          <p:cNvPr id="9" name="TextBox 8"/>
+          <p:cNvSpPr txBox="1"/>
+          <p:nvPr/>
+        </p:nvSpPr>
+        <p:spPr>
+          <a:xfrm>
+            <a:off x="1467249" y="2177998"/>
+            <a:ext cx="9144228" cy="432054"/>
+          </a:xfrm>
+          <a:prstGeom prst="rect">
+            <a:avLst/>
+          </a:prstGeom>
+          <a:noFill/>
+        </p:spPr>
+        <p:txBody>
+          <a:bodyPr wrap="square" anchor="t" lIns="0" rIns="0" tIns="0" bIns="0">
+            <a:spAutoFit/>
+          </a:bodyPr>
+          <a:lstStyle/>
+          <a:p>
+            <a:r>
+              <a:rPr sz="2200" b="1">
+                <a:latin typeface="Calibri"/>
+              </a:rPr>
+              <a:t>2. Prove: if X ~ bin(n, p)  then  Var(X) = n p(1 − p).</a:t>
             </a:r>
           </a:p>
         </p:txBody>

--- a/Day1_Probability/FW536_Day1_Afternoon Distributions I_accessible.pptx
+++ b/Day1_Probability/FW536_Day1_Afternoon Distributions I_accessible.pptx
@@ -9873,114 +9873,6 @@
           </a:p>
         </p:txBody>
       </p:sp>
-      <p:pic>
-        <p:nvPicPr>
-          <p:cNvPr id="2" name="Picture 1" descr="R console: 1-pbinom(1,12,0.1) returns 0.3409977, the probability of 2 or more diseased animals out of 12 when p=0.1." title="R console: 1-pbinom(1,12,0.1) returns 0.3409977, the probability of 2 or more di"/>
-          <p:cNvPicPr>
-            <a:picLocks noChangeAspect="1"/>
-          </p:cNvPicPr>
-          <p:nvPr/>
-        </p:nvPicPr>
-        <p:blipFill>
-          <a:blip r:embed="rId7">
-            <a:extLst>
-              <a:ext uri="{28A0092B-C50C-407E-A947-70E740481C1C}">
-                <a14:useLocalDpi xmlns:a14="http://schemas.microsoft.com/office/drawing/2010/main" val="0"/>
-              </a:ext>
-            </a:extLst>
-          </a:blip>
-          <a:srcRect/>
-          <a:stretch>
-            <a:fillRect/>
-          </a:stretch>
-        </p:blipFill>
-        <p:spPr bwMode="auto">
-          <a:xfrm>
-            <a:off x="4038600" y="6029325"/>
-            <a:ext cx="2743200" cy="609600"/>
-          </a:xfrm>
-          <a:prstGeom prst="rect">
-            <a:avLst/>
-          </a:prstGeom>
-          <a:noFill/>
-          <a:ln>
-            <a:noFill/>
-          </a:ln>
-          <a:extLst>
-            <a:ext uri="{909E8E84-426E-40DD-AFC4-6F175D3DCCD1}">
-              <a14:hiddenFill xmlns:a14="http://schemas.microsoft.com/office/drawing/2010/main">
-                <a:solidFill>
-                  <a:srgbClr val="FFFFFF"/>
-                </a:solidFill>
-              </a14:hiddenFill>
-            </a:ext>
-            <a:ext uri="{91240B29-F687-4F45-9708-019B960494DF}">
-              <a14:hiddenLine xmlns:a14="http://schemas.microsoft.com/office/drawing/2010/main" w="9525">
-                <a:solidFill>
-                  <a:srgbClr val="000000"/>
-                </a:solidFill>
-                <a:miter lim="800000"/>
-                <a:headEnd/>
-                <a:tailEnd/>
-              </a14:hiddenLine>
-            </a:ext>
-          </a:extLst>
-        </p:spPr>
-      </p:pic>
-      <p:pic>
-        <p:nvPicPr>
-          <p:cNvPr id="3" name="Picture 2" descr="R console: dbinom(2,12,0.1)=0.2301278; dbinom(0,12,0.1)=0.2824295; 1-dbinom(1,12,0.1)-dbinom(0,12,0.1)=0.3409977, giving P(exactly 2), P(0), and P(2 or more)." title="R console: dbinom(2,12,0.1)=0.2301278; dbinom(0,12,0.1)=0.2824295; 1-dbinom(1,12"/>
-          <p:cNvPicPr>
-            <a:picLocks noChangeAspect="1"/>
-          </p:cNvPicPr>
-          <p:nvPr/>
-        </p:nvPicPr>
-        <p:blipFill>
-          <a:blip r:embed="rId8">
-            <a:extLst>
-              <a:ext uri="{28A0092B-C50C-407E-A947-70E740481C1C}">
-                <a14:useLocalDpi xmlns:a14="http://schemas.microsoft.com/office/drawing/2010/main" val="0"/>
-              </a:ext>
-            </a:extLst>
-          </a:blip>
-          <a:srcRect/>
-          <a:stretch>
-            <a:fillRect/>
-          </a:stretch>
-        </p:blipFill>
-        <p:spPr bwMode="auto">
-          <a:xfrm>
-            <a:off x="3429000" y="3883025"/>
-            <a:ext cx="5092700" cy="1917700"/>
-          </a:xfrm>
-          <a:prstGeom prst="rect">
-            <a:avLst/>
-          </a:prstGeom>
-          <a:noFill/>
-          <a:ln>
-            <a:noFill/>
-          </a:ln>
-          <a:extLst>
-            <a:ext uri="{909E8E84-426E-40DD-AFC4-6F175D3DCCD1}">
-              <a14:hiddenFill xmlns:a14="http://schemas.microsoft.com/office/drawing/2010/main">
-                <a:solidFill>
-                  <a:srgbClr val="FFFFFF"/>
-                </a:solidFill>
-              </a14:hiddenFill>
-            </a:ext>
-            <a:ext uri="{91240B29-F687-4F45-9708-019B960494DF}">
-              <a14:hiddenLine xmlns:a14="http://schemas.microsoft.com/office/drawing/2010/main" w="9525">
-                <a:solidFill>
-                  <a:srgbClr val="000000"/>
-                </a:solidFill>
-                <a:miter lim="800000"/>
-                <a:headEnd/>
-                <a:tailEnd/>
-              </a14:hiddenLine>
-            </a:ext>
-          </a:extLst>
-        </p:spPr>
-      </p:pic>
       <p:sp>
         <p:nvSpPr>
           <p:cNvPr id="159749" name="TextBox 159748"/>
@@ -10087,6 +9979,140 @@
                 <a:latin typeface="Cambria"/>
               </a:rPr>
               <a:t> = 0.2824</a:t>
+            </a:r>
+          </a:p>
+        </p:txBody>
+      </p:sp>
+      <p:sp>
+        <p:nvSpPr>
+          <p:cNvPr id="159751" name="TextBox 159750"/>
+          <p:cNvSpPr txBox="1"/>
+          <p:nvPr/>
+        </p:nvSpPr>
+        <p:spPr>
+          <a:xfrm>
+            <a:off x="3429000" y="3883025"/>
+            <a:ext cx="5092700" cy="1917700"/>
+          </a:xfrm>
+          <a:prstGeom prst="rect">
+            <a:avLst/>
+          </a:prstGeom>
+          <a:noFill/>
+        </p:spPr>
+        <p:txBody>
+          <a:bodyPr wrap="none" anchor="t" lIns="0" rIns="0" tIns="0" bIns="0">
+            <a:spAutoFit/>
+          </a:bodyPr>
+          <a:lstStyle/>
+          <a:p>
+            <a:r>
+              <a:rPr sz="1700">
+                <a:solidFill>
+                  <a:srgbClr val="0000FF"/>
+                </a:solidFill>
+                <a:latin typeface="Consolas"/>
+              </a:rPr>
+              <a:t>&gt; dbinom(2,12,0.1)</a:t>
+            </a:r>
+          </a:p>
+          <a:p>
+            <a:r>
+              <a:rPr sz="1700">
+                <a:solidFill>
+                  <a:srgbClr val="000000"/>
+                </a:solidFill>
+                <a:latin typeface="Consolas"/>
+              </a:rPr>
+              <a:t>[1] 0.2301278</a:t>
+            </a:r>
+          </a:p>
+          <a:p>
+            <a:r>
+              <a:rPr sz="1700">
+                <a:solidFill>
+                  <a:srgbClr val="0000FF"/>
+                </a:solidFill>
+                <a:latin typeface="Consolas"/>
+              </a:rPr>
+              <a:t>&gt; dbinom(0,12,0.1)</a:t>
+            </a:r>
+          </a:p>
+          <a:p>
+            <a:r>
+              <a:rPr sz="1700">
+                <a:solidFill>
+                  <a:srgbClr val="000000"/>
+                </a:solidFill>
+                <a:latin typeface="Consolas"/>
+              </a:rPr>
+              <a:t>[1] 0.2824295</a:t>
+            </a:r>
+          </a:p>
+          <a:p>
+            <a:r>
+              <a:rPr sz="1700">
+                <a:solidFill>
+                  <a:srgbClr val="0000FF"/>
+                </a:solidFill>
+                <a:latin typeface="Consolas"/>
+              </a:rPr>
+              <a:t>&gt; 1-dbinom(1,12,0.1)-dbinom(0,12,0.1)</a:t>
+            </a:r>
+          </a:p>
+          <a:p>
+            <a:r>
+              <a:rPr sz="1700">
+                <a:solidFill>
+                  <a:srgbClr val="000000"/>
+                </a:solidFill>
+                <a:latin typeface="Consolas"/>
+              </a:rPr>
+              <a:t>[1] 0.3409977</a:t>
+            </a:r>
+          </a:p>
+        </p:txBody>
+      </p:sp>
+      <p:sp>
+        <p:nvSpPr>
+          <p:cNvPr id="159752" name="TextBox 159751"/>
+          <p:cNvSpPr txBox="1"/>
+          <p:nvPr/>
+        </p:nvSpPr>
+        <p:spPr>
+          <a:xfrm>
+            <a:off x="4038600" y="6029325"/>
+            <a:ext cx="2786888" cy="609600"/>
+          </a:xfrm>
+          <a:prstGeom prst="rect">
+            <a:avLst/>
+          </a:prstGeom>
+          <a:noFill/>
+        </p:spPr>
+        <p:txBody>
+          <a:bodyPr wrap="none" anchor="t" lIns="0" rIns="0" tIns="0" bIns="0">
+            <a:spAutoFit/>
+          </a:bodyPr>
+          <a:lstStyle/>
+          <a:p>
+            <a:r>
+              <a:rPr sz="1700">
+                <a:solidFill>
+                  <a:srgbClr val="0000FF"/>
+                </a:solidFill>
+                <a:latin typeface="Consolas"/>
+              </a:rPr>
+              <a:t>&gt; 1-pbinom(1,12,0.1)</a:t>
+            </a:r>
+          </a:p>
+          <a:p>
+            <a:r>
+              <a:rPr sz="1700">
+                <a:solidFill>
+                  <a:srgbClr val="000000"/>
+                </a:solidFill>
+                <a:latin typeface="Consolas"/>
+              </a:rPr>
+              <a:t>[1] 0.3409977</a:t>
             </a:r>
           </a:p>
         </p:txBody>
@@ -13454,30 +13480,6 @@
           </a:p>
         </p:txBody>
       </p:sp>
-      <p:pic>
-        <p:nvPicPr>
-          <p:cNvPr id="5" name="Picture 4" descr="Multinomial distribution text and formula. Equation: Pr{k | N, p} = N! / (product over i of k_i!) times product over i=1 to n of p_i^(k_i). Extends the binomial to n outcome categories." title="Multinomial distribution text and formula. Equation: Pr{k | N, p} = N! / (produc"/>
-          <p:cNvPicPr>
-            <a:picLocks noChangeAspect="1"/>
-          </p:cNvPicPr>
-          <p:nvPr/>
-        </p:nvPicPr>
-        <p:blipFill>
-          <a:blip r:embed="rId2"/>
-          <a:stretch>
-            <a:fillRect/>
-          </a:stretch>
-        </p:blipFill>
-        <p:spPr>
-          <a:xfrm>
-            <a:off x="0" y="0"/>
-            <a:ext cx="11378756" cy="6631029"/>
-          </a:xfrm>
-          <a:prstGeom prst="rect">
-            <a:avLst/>
-          </a:prstGeom>
-        </p:spPr>
-      </p:pic>
       <p:sp>
         <p:nvSpPr>
           <p:cNvPr id="7" name="TextBox 6"/>
@@ -13588,6 +13590,184 @@
                 <a:latin typeface="Cambria"/>
               </a:rPr>
               <a:t>xₖ</a:t>
+            </a:r>
+          </a:p>
+        </p:txBody>
+      </p:sp>
+      <p:sp>
+        <p:nvSpPr>
+          <p:cNvPr id="9" name="TextBox 8"/>
+          <p:cNvSpPr txBox="1"/>
+          <p:nvPr/>
+        </p:nvSpPr>
+        <p:spPr>
+          <a:xfrm>
+            <a:off x="164592" y="164592"/>
+            <a:ext cx="11049572" cy="534924"/>
+          </a:xfrm>
+          <a:prstGeom prst="rect">
+            <a:avLst/>
+          </a:prstGeom>
+          <a:noFill/>
+        </p:spPr>
+        <p:txBody>
+          <a:bodyPr wrap="square" anchor="t" lIns="0" rIns="0" tIns="0" bIns="0">
+            <a:spAutoFit/>
+          </a:bodyPr>
+          <a:lstStyle/>
+          <a:p>
+            <a:r>
+              <a:rPr sz="2800" b="1">
+                <a:latin typeface="Calibri"/>
+              </a:rPr>
+              <a:t>The multinomial distribution: more than one kind of success</a:t>
+            </a:r>
+          </a:p>
+        </p:txBody>
+      </p:sp>
+      <p:sp>
+        <p:nvSpPr>
+          <p:cNvPr id="10" name="TextBox 9"/>
+          <p:cNvSpPr txBox="1"/>
+          <p:nvPr/>
+        </p:nvSpPr>
+        <p:spPr>
+          <a:xfrm>
+            <a:off x="164592" y="973836"/>
+            <a:ext cx="11049572" cy="1683639"/>
+          </a:xfrm>
+          <a:prstGeom prst="rect">
+            <a:avLst/>
+          </a:prstGeom>
+          <a:noFill/>
+        </p:spPr>
+        <p:txBody>
+          <a:bodyPr wrap="square" anchor="t" lIns="0" rIns="0" tIns="0" bIns="0">
+            <a:spAutoFit/>
+          </a:bodyPr>
+          <a:lstStyle/>
+          <a:p>
+            <a:r>
+              <a:rPr sz="1900" b="0">
+                <a:latin typeface="Calibri"/>
+              </a:rPr>
+              <a:t>The multinomial distribution is an extension of the binomial distribution to the case of more than two (we shall assume n) kinds of outcomes, in which a single trial has probability p</a:t>
+            </a:r>
+            <a:r>
+              <a:rPr sz="1900" b="0" baseline="-25000">
+                <a:latin typeface="Calibri"/>
+              </a:rPr>
+              <a:t>i</a:t>
+            </a:r>
+            <a:r>
+              <a:rPr sz="1900" b="0">
+                <a:latin typeface="Calibri"/>
+              </a:rPr>
+              <a:t> of ending in category i. In a total of N trials, we assume that k</a:t>
+            </a:r>
+            <a:r>
+              <a:rPr sz="1900" b="0" baseline="-25000">
+                <a:latin typeface="Calibri"/>
+              </a:rPr>
+              <a:t>i</a:t>
+            </a:r>
+            <a:r>
+              <a:rPr sz="1900" b="0">
+                <a:latin typeface="Calibri"/>
+              </a:rPr>
+              <a:t> of the outcomes end in category i. If we let p denote the vector of the different probabilities of outcome and k denote the vector of the data, the probability distribution is then an extension of the binomial distribution</a:t>
+            </a:r>
+          </a:p>
+        </p:txBody>
+      </p:sp>
+      <p:sp>
+        <p:nvSpPr>
+          <p:cNvPr id="11" name="TextBox 10"/>
+          <p:cNvSpPr txBox="1"/>
+          <p:nvPr/>
+        </p:nvSpPr>
+        <p:spPr>
+          <a:xfrm>
+            <a:off x="164592" y="2968371"/>
+            <a:ext cx="11049572" cy="397764"/>
+          </a:xfrm>
+          <a:prstGeom prst="rect">
+            <a:avLst/>
+          </a:prstGeom>
+          <a:noFill/>
+        </p:spPr>
+        <p:txBody>
+          <a:bodyPr wrap="square" anchor="t" lIns="0" rIns="0" tIns="0" bIns="0">
+            <a:spAutoFit/>
+          </a:bodyPr>
+          <a:lstStyle/>
+          <a:p>
+            <a:pPr algn="ctr"/>
+            <a:r>
+              <a:rPr sz="2000" b="0">
+                <a:latin typeface="Cambria"/>
+              </a:rPr>
+              <a:t>Pr{k | N, p} = N! / (∏</a:t>
+            </a:r>
+            <a:r>
+              <a:rPr sz="2000" b="0" baseline="-25000">
+                <a:latin typeface="Cambria"/>
+              </a:rPr>
+              <a:t>i=1</a:t>
+            </a:r>
+            <a:r>
+              <a:rPr sz="2000" b="0" baseline="30000">
+                <a:latin typeface="Cambria"/>
+              </a:rPr>
+              <a:t>n</a:t>
+            </a:r>
+            <a:r>
+              <a:rPr sz="2000" b="0">
+                <a:latin typeface="Cambria"/>
+              </a:rPr>
+              <a:t> k</a:t>
+            </a:r>
+            <a:r>
+              <a:rPr sz="2000" b="0" baseline="-25000">
+                <a:latin typeface="Cambria"/>
+              </a:rPr>
+              <a:t>i</a:t>
+            </a:r>
+            <a:r>
+              <a:rPr sz="2000" b="0">
+                <a:latin typeface="Cambria"/>
+              </a:rPr>
+              <a:t>!) · ∏</a:t>
+            </a:r>
+            <a:r>
+              <a:rPr sz="2000" b="0" baseline="-25000">
+                <a:latin typeface="Cambria"/>
+              </a:rPr>
+              <a:t>i=1</a:t>
+            </a:r>
+            <a:r>
+              <a:rPr sz="2000" b="0" baseline="30000">
+                <a:latin typeface="Cambria"/>
+              </a:rPr>
+              <a:t>n</a:t>
+            </a:r>
+            <a:r>
+              <a:rPr sz="2000" b="0">
+                <a:latin typeface="Cambria"/>
+              </a:rPr>
+              <a:t> p</a:t>
+            </a:r>
+            <a:r>
+              <a:rPr sz="2000" b="0" baseline="-25000">
+                <a:latin typeface="Cambria"/>
+              </a:rPr>
+              <a:t>i</a:t>
+            </a:r>
+            <a:r>
+              <a:rPr sz="2000" b="0" baseline="30000">
+                <a:latin typeface="Cambria"/>
+              </a:rPr>
+              <a:t>kᵢ</a:t>
             </a:r>
           </a:p>
         </p:txBody>
@@ -19017,60 +19197,6 @@
           </a:p>
         </p:txBody>
       </p:sp>
-      <p:pic>
-        <p:nvPicPr>
-          <p:cNvPr id="2" name="Picture 1" descr="R console: dpois(4,3) returns 0.1680314, the Poisson probability of exactly 4 events when the mean is 3." title="R console: dpois(4,3) returns 0.1680314, the Poisson probability of exactly 4 ev"/>
-          <p:cNvPicPr>
-            <a:picLocks noChangeAspect="1"/>
-          </p:cNvPicPr>
-          <p:nvPr/>
-        </p:nvPicPr>
-        <p:blipFill>
-          <a:blip r:embed="rId5">
-            <a:extLst>
-              <a:ext uri="{28A0092B-C50C-407E-A947-70E740481C1C}">
-                <a14:useLocalDpi xmlns:a14="http://schemas.microsoft.com/office/drawing/2010/main" val="0"/>
-              </a:ext>
-            </a:extLst>
-          </a:blip>
-          <a:srcRect/>
-          <a:stretch>
-            <a:fillRect/>
-          </a:stretch>
-        </p:blipFill>
-        <p:spPr bwMode="auto">
-          <a:xfrm>
-            <a:off x="4800601" y="5246496"/>
-            <a:ext cx="2341563" cy="774700"/>
-          </a:xfrm>
-          <a:prstGeom prst="rect">
-            <a:avLst/>
-          </a:prstGeom>
-          <a:noFill/>
-          <a:ln>
-            <a:noFill/>
-          </a:ln>
-          <a:extLst>
-            <a:ext uri="{909E8E84-426E-40DD-AFC4-6F175D3DCCD1}">
-              <a14:hiddenFill xmlns:a14="http://schemas.microsoft.com/office/drawing/2010/main">
-                <a:solidFill>
-                  <a:srgbClr val="FFFFFF"/>
-                </a:solidFill>
-              </a14:hiddenFill>
-            </a:ext>
-            <a:ext uri="{91240B29-F687-4F45-9708-019B960494DF}">
-              <a14:hiddenLine xmlns:a14="http://schemas.microsoft.com/office/drawing/2010/main" w="9525">
-                <a:solidFill>
-                  <a:srgbClr val="000000"/>
-                </a:solidFill>
-                <a:miter lim="800000"/>
-                <a:headEnd/>
-                <a:tailEnd/>
-              </a14:hiddenLine>
-            </a:ext>
-          </a:extLst>
-        </p:spPr>
-      </p:pic>
       <p:sp>
         <p:nvSpPr>
           <p:cNvPr id="7172" name="TextBox 7171"/>
@@ -19146,6 +19272,51 @@
                 <a:latin typeface="Cambria"/>
               </a:rPr>
               <a:t> / 4! = 0.168</a:t>
+            </a:r>
+          </a:p>
+        </p:txBody>
+      </p:sp>
+      <p:sp>
+        <p:nvSpPr>
+          <p:cNvPr id="7173" name="TextBox 7172"/>
+          <p:cNvSpPr txBox="1"/>
+          <p:nvPr/>
+        </p:nvSpPr>
+        <p:spPr>
+          <a:xfrm>
+            <a:off x="4800601" y="5246496"/>
+            <a:ext cx="2341563" cy="774700"/>
+          </a:xfrm>
+          <a:prstGeom prst="rect">
+            <a:avLst/>
+          </a:prstGeom>
+          <a:noFill/>
+        </p:spPr>
+        <p:txBody>
+          <a:bodyPr wrap="none" anchor="t" lIns="0" rIns="0" tIns="0" bIns="0">
+            <a:spAutoFit/>
+          </a:bodyPr>
+          <a:lstStyle/>
+          <a:p>
+            <a:r>
+              <a:rPr sz="2000">
+                <a:solidFill>
+                  <a:srgbClr val="0000FF"/>
+                </a:solidFill>
+                <a:latin typeface="Consolas"/>
+              </a:rPr>
+              <a:t>&gt; dpois(4,3)</a:t>
+            </a:r>
+          </a:p>
+          <a:p>
+            <a:r>
+              <a:rPr sz="2000">
+                <a:solidFill>
+                  <a:srgbClr val="000000"/>
+                </a:solidFill>
+                <a:latin typeface="Consolas"/>
+              </a:rPr>
+              <a:t>[1] 0.1680314</a:t>
             </a:r>
           </a:p>
         </p:txBody>
@@ -19405,60 +19576,6 @@
           </a:p>
         </p:txBody>
       </p:sp>
-      <p:pic>
-        <p:nvPicPr>
-          <p:cNvPr id="2" name="Picture 1" descr="R console: dpois(0,3)+dpois(1,3)+dpois(2,3)=0.4231901 and ppois(2,3)=0.4231901, the Poisson probability of 2 or fewer events when the mean is 3." title="R console: dpois(0,3)+dpois(1,3)+dpois(2,3)=0.4231901 and ppois(2,3)=0.4231901, "/>
-          <p:cNvPicPr>
-            <a:picLocks noChangeAspect="1"/>
-          </p:cNvPicPr>
-          <p:nvPr/>
-        </p:nvPicPr>
-        <p:blipFill>
-          <a:blip r:embed="rId5">
-            <a:extLst>
-              <a:ext uri="{28A0092B-C50C-407E-A947-70E740481C1C}">
-                <a14:useLocalDpi xmlns:a14="http://schemas.microsoft.com/office/drawing/2010/main" val="0"/>
-              </a:ext>
-            </a:extLst>
-          </a:blip>
-          <a:srcRect/>
-          <a:stretch>
-            <a:fillRect/>
-          </a:stretch>
-        </p:blipFill>
-        <p:spPr bwMode="auto">
-          <a:xfrm>
-            <a:off x="6113463" y="5114925"/>
-            <a:ext cx="4495800" cy="1244600"/>
-          </a:xfrm>
-          <a:prstGeom prst="rect">
-            <a:avLst/>
-          </a:prstGeom>
-          <a:noFill/>
-          <a:ln>
-            <a:noFill/>
-          </a:ln>
-          <a:extLst>
-            <a:ext uri="{909E8E84-426E-40DD-AFC4-6F175D3DCCD1}">
-              <a14:hiddenFill xmlns:a14="http://schemas.microsoft.com/office/drawing/2010/main">
-                <a:solidFill>
-                  <a:srgbClr val="FFFFFF"/>
-                </a:solidFill>
-              </a14:hiddenFill>
-            </a:ext>
-            <a:ext uri="{91240B29-F687-4F45-9708-019B960494DF}">
-              <a14:hiddenLine xmlns:a14="http://schemas.microsoft.com/office/drawing/2010/main" w="9525">
-                <a:solidFill>
-                  <a:srgbClr val="000000"/>
-                </a:solidFill>
-                <a:miter lim="800000"/>
-                <a:headEnd/>
-                <a:tailEnd/>
-              </a14:hiddenLine>
-            </a:ext>
-          </a:extLst>
-        </p:spPr>
-      </p:pic>
       <p:sp>
         <p:nvSpPr>
           <p:cNvPr id="8196" name="TextBox 8195"/>
@@ -19534,6 +19651,73 @@
                 <a:latin typeface="Cambria"/>
               </a:rPr>
               <a:t>/2! ] = 0.423</a:t>
+            </a:r>
+          </a:p>
+        </p:txBody>
+      </p:sp>
+      <p:sp>
+        <p:nvSpPr>
+          <p:cNvPr id="8197" name="TextBox 8196"/>
+          <p:cNvSpPr txBox="1"/>
+          <p:nvPr/>
+        </p:nvSpPr>
+        <p:spPr>
+          <a:xfrm>
+            <a:off x="6113463" y="5114925"/>
+            <a:ext cx="4495800" cy="1244600"/>
+          </a:xfrm>
+          <a:prstGeom prst="rect">
+            <a:avLst/>
+          </a:prstGeom>
+          <a:noFill/>
+        </p:spPr>
+        <p:txBody>
+          <a:bodyPr wrap="none" anchor="t" lIns="0" rIns="0" tIns="0" bIns="0">
+            <a:spAutoFit/>
+          </a:bodyPr>
+          <a:lstStyle/>
+          <a:p>
+            <a:r>
+              <a:rPr sz="1600">
+                <a:solidFill>
+                  <a:srgbClr val="0000FF"/>
+                </a:solidFill>
+                <a:latin typeface="Consolas"/>
+              </a:rPr>
+              <a:t>&gt; dpois(0,3)+dpois(1,3)+dpois(2,3)</a:t>
+            </a:r>
+          </a:p>
+          <a:p>
+            <a:r>
+              <a:rPr sz="1600">
+                <a:solidFill>
+                  <a:srgbClr val="000000"/>
+                </a:solidFill>
+                <a:latin typeface="Consolas"/>
+              </a:rPr>
+              <a:t>[1] 0.4231901</a:t>
+            </a:r>
+          </a:p>
+          <a:p>
+            <a:r>
+              <a:rPr sz="1600">
+                <a:solidFill>
+                  <a:srgbClr val="0000FF"/>
+                </a:solidFill>
+                <a:latin typeface="Consolas"/>
+              </a:rPr>
+              <a:t>&gt; ppois(2,3)</a:t>
+            </a:r>
+          </a:p>
+          <a:p>
+            <a:r>
+              <a:rPr sz="1600">
+                <a:solidFill>
+                  <a:srgbClr val="000000"/>
+                </a:solidFill>
+                <a:latin typeface="Consolas"/>
+              </a:rPr>
+              <a:t>[1] 0.4231901</a:t>
             </a:r>
           </a:p>
         </p:txBody>
@@ -19836,30 +20020,6 @@
           </a:p>
         </p:txBody>
       </p:sp>
-      <p:pic>
-        <p:nvPicPr>
-          <p:cNvPr id="4" name="Picture 3" descr="R console: dpois(0,3)=0.04978707 and 1-dpois(0,3)=0.9502129, the Poisson probability of at least one event when the mean is 3." title="R console: dpois(0,3)=0.04978707 and 1-dpois(0,3)=0.9502129, the Poisson probabi"/>
-          <p:cNvPicPr>
-            <a:picLocks noChangeAspect="1"/>
-          </p:cNvPicPr>
-          <p:nvPr/>
-        </p:nvPicPr>
-        <p:blipFill>
-          <a:blip r:embed="rId3"/>
-          <a:stretch>
-            <a:fillRect/>
-          </a:stretch>
-        </p:blipFill>
-        <p:spPr>
-          <a:xfrm>
-            <a:off x="4501876" y="4392386"/>
-            <a:ext cx="3021012" cy="1883228"/>
-          </a:xfrm>
-          <a:prstGeom prst="rect">
-            <a:avLst/>
-          </a:prstGeom>
-        </p:spPr>
-      </p:pic>
       <p:sp>
         <p:nvSpPr>
           <p:cNvPr id="2" name="TextBox 1"/>
@@ -19998,6 +20158,73 @@
           </a:fontRef>
         </p:style>
       </p:cxnSp>
+      <p:sp>
+        <p:nvSpPr>
+          <p:cNvPr id="8196" name="TextBox 8195"/>
+          <p:cNvSpPr txBox="1"/>
+          <p:nvPr/>
+        </p:nvSpPr>
+        <p:spPr>
+          <a:xfrm>
+            <a:off x="4501876" y="4392386"/>
+            <a:ext cx="3021012" cy="1883228"/>
+          </a:xfrm>
+          <a:prstGeom prst="rect">
+            <a:avLst/>
+          </a:prstGeom>
+          <a:noFill/>
+        </p:spPr>
+        <p:txBody>
+          <a:bodyPr wrap="none" anchor="t" lIns="0" rIns="0" tIns="0" bIns="0">
+            <a:spAutoFit/>
+          </a:bodyPr>
+          <a:lstStyle/>
+          <a:p>
+            <a:r>
+              <a:rPr sz="2000">
+                <a:solidFill>
+                  <a:srgbClr val="0000FF"/>
+                </a:solidFill>
+                <a:latin typeface="Consolas"/>
+              </a:rPr>
+              <a:t>&gt; dpois(0,3)</a:t>
+            </a:r>
+          </a:p>
+          <a:p>
+            <a:r>
+              <a:rPr sz="2000">
+                <a:solidFill>
+                  <a:srgbClr val="000000"/>
+                </a:solidFill>
+                <a:latin typeface="Consolas"/>
+              </a:rPr>
+              <a:t>[1] 0.04978707</a:t>
+            </a:r>
+          </a:p>
+          <a:p>
+            <a:r>
+              <a:rPr sz="2000">
+                <a:solidFill>
+                  <a:srgbClr val="0000FF"/>
+                </a:solidFill>
+                <a:latin typeface="Consolas"/>
+              </a:rPr>
+              <a:t>&gt; 1-dpois(0,3)</a:t>
+            </a:r>
+          </a:p>
+          <a:p>
+            <a:r>
+              <a:rPr sz="2000">
+                <a:solidFill>
+                  <a:srgbClr val="000000"/>
+                </a:solidFill>
+                <a:latin typeface="Consolas"/>
+              </a:rPr>
+              <a:t>[1] 0.9502129</a:t>
+            </a:r>
+          </a:p>
+        </p:txBody>
+      </p:sp>
     </p:spTree>
     <p:extLst>
       <p:ext uri="{BB962C8B-B14F-4D97-AF65-F5344CB8AC3E}">
@@ -20060,60 +20287,6 @@
           </a:p>
         </p:txBody>
       </p:sp>
-      <p:pic>
-        <p:nvPicPr>
-          <p:cNvPr id="6" name="Picture 5" descr="Journal excerpt: modeling observed attacks as a Poisson process, the probability of zero attacks being seen before 1990 is 0.006, given a rate constant over the 27-year period." title="Journal excerpt: modeling observed attacks as a Poisson process, the probability"/>
-          <p:cNvPicPr>
-            <a:picLocks noChangeAspect="1"/>
-          </p:cNvPicPr>
-          <p:nvPr/>
-        </p:nvPicPr>
-        <p:blipFill>
-          <a:blip r:embed="rId3">
-            <a:extLst>
-              <a:ext uri="{28A0092B-C50C-407E-A947-70E740481C1C}">
-                <a14:useLocalDpi xmlns:a14="http://schemas.microsoft.com/office/drawing/2010/main" val="0"/>
-              </a:ext>
-            </a:extLst>
-          </a:blip>
-          <a:srcRect/>
-          <a:stretch>
-            <a:fillRect/>
-          </a:stretch>
-        </p:blipFill>
-        <p:spPr bwMode="auto">
-          <a:xfrm>
-            <a:off x="2698750" y="4857687"/>
-            <a:ext cx="6896100" cy="1803400"/>
-          </a:xfrm>
-          <a:prstGeom prst="rect">
-            <a:avLst/>
-          </a:prstGeom>
-          <a:noFill/>
-          <a:ln>
-            <a:noFill/>
-          </a:ln>
-          <a:extLst>
-            <a:ext uri="{909E8E84-426E-40DD-AFC4-6F175D3DCCD1}">
-              <a14:hiddenFill xmlns:a14="http://schemas.microsoft.com/office/drawing/2010/main">
-                <a:solidFill>
-                  <a:srgbClr val="FFFFFF"/>
-                </a:solidFill>
-              </a14:hiddenFill>
-            </a:ext>
-            <a:ext uri="{91240B29-F687-4F45-9708-019B960494DF}">
-              <a14:hiddenLine xmlns:a14="http://schemas.microsoft.com/office/drawing/2010/main" w="9525">
-                <a:solidFill>
-                  <a:srgbClr val="000000"/>
-                </a:solidFill>
-                <a:miter lim="800000"/>
-                <a:headEnd/>
-                <a:tailEnd/>
-              </a14:hiddenLine>
-            </a:ext>
-          </a:extLst>
-        </p:spPr>
-      </p:pic>
       <p:pic>
         <p:nvPicPr>
           <p:cNvPr id="197635" name="Picture 6" descr="Journal article header: 'Killer Whale Predation on Sea Otters Linking Oceanic and Nearshore Ecosystems' by Estes, Tinker, Williams and Doak, with abstract on sea otter decline from killer whale predation." title="Journal article header: 'Killer Whale Predation on Sea Otters Linking Oceanic an"/>
@@ -20168,6 +20341,37 @@
           </a:extLst>
         </p:spPr>
       </p:pic>
+      <p:sp>
+        <p:nvSpPr>
+          <p:cNvPr id="197636" name="TextBox 197635"/>
+          <p:cNvSpPr txBox="1"/>
+          <p:nvPr/>
+        </p:nvSpPr>
+        <p:spPr>
+          <a:xfrm>
+            <a:off x="2863342" y="5022279"/>
+            <a:ext cx="6566916" cy="929259"/>
+          </a:xfrm>
+          <a:prstGeom prst="rect">
+            <a:avLst/>
+          </a:prstGeom>
+          <a:noFill/>
+        </p:spPr>
+        <p:txBody>
+          <a:bodyPr wrap="square" anchor="t" lIns="0" rIns="0" tIns="0" bIns="0">
+            <a:spAutoFit/>
+          </a:bodyPr>
+          <a:lstStyle/>
+          <a:p>
+            <a:r>
+              <a:rPr sz="1700" b="0">
+                <a:latin typeface="Calibri"/>
+              </a:rPr>
+              <a:t>constant over the 27-year period. By modeling the expected number of observed attacks as a Poisson process, the probability of zero attacks being seen before 1990 is 0.006 (15).</a:t>
+            </a:r>
+          </a:p>
+        </p:txBody>
+      </p:sp>
     </p:spTree>
     <p:extLst>
       <p:ext uri="{BB962C8B-B14F-4D97-AF65-F5344CB8AC3E}">

--- a/Day1_Probability/FW536_Day1_Afternoon Distributions I_accessible.pptx
+++ b/Day1_Probability/FW536_Day1_Afternoon Distributions I_accessible.pptx
@@ -243,7 +243,7 @@
           <a:p>
             <a:fld id="{EF945995-FC3E-D540-94CA-CACDC057E48E}" type="datetimeFigureOut">
               <a:rPr lang="en-US" smtClean="0"/>
-              <a:t>9/18/25</a:t>
+              <a:t>7/16/26</a:t>
             </a:fld>
             <a:endParaRPr lang="en-US"/>
           </a:p>
@@ -3700,7 +3700,7 @@
           <a:p>
             <a:fld id="{AFF33797-E749-0F4D-9D43-8EDD7194A7C5}" type="datetimeFigureOut">
               <a:rPr lang="en-US" smtClean="0"/>
-              <a:t>9/18/25</a:t>
+              <a:t>7/16/26</a:t>
             </a:fld>
             <a:endParaRPr lang="en-US"/>
           </a:p>
@@ -3868,7 +3868,7 @@
           <a:p>
             <a:fld id="{AFF33797-E749-0F4D-9D43-8EDD7194A7C5}" type="datetimeFigureOut">
               <a:rPr lang="en-US" smtClean="0"/>
-              <a:t>9/18/25</a:t>
+              <a:t>7/16/26</a:t>
             </a:fld>
             <a:endParaRPr lang="en-US"/>
           </a:p>
@@ -4046,7 +4046,7 @@
           <a:p>
             <a:fld id="{AFF33797-E749-0F4D-9D43-8EDD7194A7C5}" type="datetimeFigureOut">
               <a:rPr lang="en-US" smtClean="0"/>
-              <a:t>9/18/25</a:t>
+              <a:t>7/16/26</a:t>
             </a:fld>
             <a:endParaRPr lang="en-US"/>
           </a:p>
@@ -5291,7 +5291,7 @@
           <a:p>
             <a:fld id="{AFF33797-E749-0F4D-9D43-8EDD7194A7C5}" type="datetimeFigureOut">
               <a:rPr lang="en-US" smtClean="0"/>
-              <a:t>9/18/25</a:t>
+              <a:t>7/16/26</a:t>
             </a:fld>
             <a:endParaRPr lang="en-US"/>
           </a:p>
@@ -5536,7 +5536,7 @@
           <a:p>
             <a:fld id="{AFF33797-E749-0F4D-9D43-8EDD7194A7C5}" type="datetimeFigureOut">
               <a:rPr lang="en-US" smtClean="0"/>
-              <a:t>9/18/25</a:t>
+              <a:t>7/16/26</a:t>
             </a:fld>
             <a:endParaRPr lang="en-US"/>
           </a:p>
@@ -5765,7 +5765,7 @@
           <a:p>
             <a:fld id="{AFF33797-E749-0F4D-9D43-8EDD7194A7C5}" type="datetimeFigureOut">
               <a:rPr lang="en-US" smtClean="0"/>
-              <a:t>9/18/25</a:t>
+              <a:t>7/16/26</a:t>
             </a:fld>
             <a:endParaRPr lang="en-US"/>
           </a:p>
@@ -6129,7 +6129,7 @@
           <a:p>
             <a:fld id="{AFF33797-E749-0F4D-9D43-8EDD7194A7C5}" type="datetimeFigureOut">
               <a:rPr lang="en-US" smtClean="0"/>
-              <a:t>9/18/25</a:t>
+              <a:t>7/16/26</a:t>
             </a:fld>
             <a:endParaRPr lang="en-US"/>
           </a:p>
@@ -6246,7 +6246,7 @@
           <a:p>
             <a:fld id="{AFF33797-E749-0F4D-9D43-8EDD7194A7C5}" type="datetimeFigureOut">
               <a:rPr lang="en-US" smtClean="0"/>
-              <a:t>9/18/25</a:t>
+              <a:t>7/16/26</a:t>
             </a:fld>
             <a:endParaRPr lang="en-US"/>
           </a:p>
@@ -6341,7 +6341,7 @@
           <a:p>
             <a:fld id="{AFF33797-E749-0F4D-9D43-8EDD7194A7C5}" type="datetimeFigureOut">
               <a:rPr lang="en-US" smtClean="0"/>
-              <a:t>9/18/25</a:t>
+              <a:t>7/16/26</a:t>
             </a:fld>
             <a:endParaRPr lang="en-US"/>
           </a:p>
@@ -6616,7 +6616,7 @@
           <a:p>
             <a:fld id="{AFF33797-E749-0F4D-9D43-8EDD7194A7C5}" type="datetimeFigureOut">
               <a:rPr lang="en-US" smtClean="0"/>
-              <a:t>9/18/25</a:t>
+              <a:t>7/16/26</a:t>
             </a:fld>
             <a:endParaRPr lang="en-US"/>
           </a:p>
@@ -6868,7 +6868,7 @@
           <a:p>
             <a:fld id="{AFF33797-E749-0F4D-9D43-8EDD7194A7C5}" type="datetimeFigureOut">
               <a:rPr lang="en-US" smtClean="0"/>
-              <a:t>9/18/25</a:t>
+              <a:t>7/16/26</a:t>
             </a:fld>
             <a:endParaRPr lang="en-US"/>
           </a:p>
@@ -7079,7 +7079,7 @@
           <a:p>
             <a:fld id="{AFF33797-E749-0F4D-9D43-8EDD7194A7C5}" type="datetimeFigureOut">
               <a:rPr lang="en-US" smtClean="0"/>
-              <a:t>9/18/25</a:t>
+              <a:t>7/16/26</a:t>
             </a:fld>
             <a:endParaRPr lang="en-US"/>
           </a:p>
@@ -7572,7 +7572,7 @@
           <a:noFill/>
         </p:spPr>
         <p:txBody>
-          <a:bodyPr wrap="square" anchor="t" lIns="0" rIns="0" tIns="0" bIns="0">
+          <a:bodyPr wrap="square" lIns="0" tIns="0" rIns="0" bIns="0" anchor="t">
             <a:spAutoFit/>
           </a:bodyPr>
           <a:lstStyle/>
@@ -7598,7 +7598,7 @@
         <p:spPr>
           <a:xfrm>
             <a:off x="1597877" y="1238721"/>
-            <a:ext cx="9204741" cy="363474"/>
+            <a:ext cx="9204741" cy="307777"/>
           </a:xfrm>
           <a:prstGeom prst="rect">
             <a:avLst/>
@@ -7606,13 +7606,13 @@
           <a:noFill/>
         </p:spPr>
         <p:txBody>
-          <a:bodyPr wrap="square" anchor="t" lIns="0" rIns="0" tIns="0" bIns="0">
+          <a:bodyPr wrap="square" lIns="0" tIns="0" rIns="0" bIns="0" anchor="t">
             <a:spAutoFit/>
           </a:bodyPr>
           <a:lstStyle/>
           <a:p>
             <a:r>
-              <a:rPr sz="1800" b="0">
+              <a:rPr sz="2000" b="0">
                 <a:latin typeface="Calibri"/>
               </a:rPr>
               <a:t>1. For X ~ Bernoulli(p) we use a table. (We know E(X) = p.)</a:t>
@@ -7630,7 +7630,7 @@
         </p:nvGraphicFramePr>
         <p:xfrm>
           <a:off x="1597877" y="1711923"/>
-          <a:ext cx="4206240" cy="952500"/>
+          <a:ext cx="4206240" cy="960120"/>
         </p:xfrm>
         <a:graphic>
           <a:graphicData uri="http://schemas.openxmlformats.org/drawingml/2006/table">
@@ -7639,14 +7639,32 @@
                 <a:tableStyleId>{5C22544A-7EE6-4342-B048-85BDC9FD1C3A}</a:tableStyleId>
               </a:tblPr>
               <a:tblGrid>
-                <a:gridCol w="1402080"/>
-                <a:gridCol w="1402080"/>
-                <a:gridCol w="1402080"/>
+                <a:gridCol w="1402080">
+                  <a:extLst>
+                    <a:ext uri="{9D8B030D-6E8A-4147-A177-3AD203B41FA5}">
+                      <a16:colId xmlns:a16="http://schemas.microsoft.com/office/drawing/2014/main" val="20000"/>
+                    </a:ext>
+                  </a:extLst>
+                </a:gridCol>
+                <a:gridCol w="1402080">
+                  <a:extLst>
+                    <a:ext uri="{9D8B030D-6E8A-4147-A177-3AD203B41FA5}">
+                      <a16:colId xmlns:a16="http://schemas.microsoft.com/office/drawing/2014/main" val="20001"/>
+                    </a:ext>
+                  </a:extLst>
+                </a:gridCol>
+                <a:gridCol w="1402080">
+                  <a:extLst>
+                    <a:ext uri="{9D8B030D-6E8A-4147-A177-3AD203B41FA5}">
+                      <a16:colId xmlns:a16="http://schemas.microsoft.com/office/drawing/2014/main" val="20002"/>
+                    </a:ext>
+                  </a:extLst>
+                </a:gridCol>
               </a:tblGrid>
               <a:tr h="317500">
                 <a:tc>
                   <a:txBody>
-                    <a:bodyPr wrap="none" lIns="27432" rIns="27432" tIns="27432" bIns="27432"/>
+                    <a:bodyPr/>
                     <a:lstStyle/>
                     <a:p>
                       <a:pPr algn="r"/>
@@ -7662,7 +7680,7 @@
                 </a:tc>
                 <a:tc>
                   <a:txBody>
-                    <a:bodyPr wrap="none" lIns="27432" rIns="27432" tIns="27432" bIns="27432"/>
+                    <a:bodyPr/>
                     <a:lstStyle/>
                     <a:p>
                       <a:pPr algn="ctr"/>
@@ -7678,7 +7696,7 @@
                 </a:tc>
                 <a:tc>
                   <a:txBody>
-                    <a:bodyPr wrap="none" lIns="27432" rIns="27432" tIns="27432" bIns="27432"/>
+                    <a:bodyPr/>
                     <a:lstStyle/>
                     <a:p>
                       <a:pPr algn="ctr"/>
@@ -7692,11 +7710,16 @@
                   </a:txBody>
                   <a:tcPr/>
                 </a:tc>
+                <a:extLst>
+                  <a:ext uri="{0D108BD9-81ED-4DB2-BD59-A6C34878D82A}">
+                    <a16:rowId xmlns:a16="http://schemas.microsoft.com/office/drawing/2014/main" val="10000"/>
+                  </a:ext>
+                </a:extLst>
               </a:tr>
               <a:tr h="317500">
                 <a:tc>
                   <a:txBody>
-                    <a:bodyPr wrap="none" lIns="27432" rIns="27432" tIns="27432" bIns="27432"/>
+                    <a:bodyPr/>
                     <a:lstStyle/>
                     <a:p>
                       <a:pPr algn="r"/>
@@ -7712,7 +7735,7 @@
                 </a:tc>
                 <a:tc>
                   <a:txBody>
-                    <a:bodyPr wrap="none" lIns="27432" rIns="27432" tIns="27432" bIns="27432"/>
+                    <a:bodyPr/>
                     <a:lstStyle/>
                     <a:p>
                       <a:pPr algn="ctr"/>
@@ -7728,7 +7751,7 @@
                 </a:tc>
                 <a:tc>
                   <a:txBody>
-                    <a:bodyPr wrap="none" lIns="27432" rIns="27432" tIns="27432" bIns="27432"/>
+                    <a:bodyPr/>
                     <a:lstStyle/>
                     <a:p>
                       <a:pPr algn="ctr"/>
@@ -7742,11 +7765,16 @@
                   </a:txBody>
                   <a:tcPr/>
                 </a:tc>
+                <a:extLst>
+                  <a:ext uri="{0D108BD9-81ED-4DB2-BD59-A6C34878D82A}">
+                    <a16:rowId xmlns:a16="http://schemas.microsoft.com/office/drawing/2014/main" val="10001"/>
+                  </a:ext>
+                </a:extLst>
               </a:tr>
               <a:tr h="317500">
                 <a:tc>
                   <a:txBody>
-                    <a:bodyPr wrap="none" lIns="27432" rIns="27432" tIns="27432" bIns="27432"/>
+                    <a:bodyPr/>
                     <a:lstStyle/>
                     <a:p>
                       <a:pPr algn="r"/>
@@ -7768,7 +7796,7 @@
                 </a:tc>
                 <a:tc>
                   <a:txBody>
-                    <a:bodyPr wrap="none" lIns="27432" rIns="27432" tIns="27432" bIns="27432"/>
+                    <a:bodyPr/>
                     <a:lstStyle/>
                     <a:p>
                       <a:pPr algn="ctr"/>
@@ -7790,7 +7818,7 @@
                 </a:tc>
                 <a:tc>
                   <a:txBody>
-                    <a:bodyPr wrap="none" lIns="27432" rIns="27432" tIns="27432" bIns="27432"/>
+                    <a:bodyPr/>
                     <a:lstStyle/>
                     <a:p>
                       <a:pPr algn="ctr"/>
@@ -7810,6 +7838,11 @@
                   </a:txBody>
                   <a:tcPr/>
                 </a:tc>
+                <a:extLst>
+                  <a:ext uri="{0D108BD9-81ED-4DB2-BD59-A6C34878D82A}">
+                    <a16:rowId xmlns:a16="http://schemas.microsoft.com/office/drawing/2014/main" val="10002"/>
+                  </a:ext>
+                </a:extLst>
               </a:tr>
             </a:tbl>
           </a:graphicData>
@@ -7823,8 +7856,8 @@
         </p:nvSpPr>
         <p:spPr>
           <a:xfrm>
-            <a:off x="1597877" y="2810727"/>
-            <a:ext cx="9204741" cy="346329"/>
+            <a:off x="1597877" y="2931498"/>
+            <a:ext cx="9204741" cy="307777"/>
           </a:xfrm>
           <a:prstGeom prst="rect">
             <a:avLst/>
@@ -7832,50 +7865,50 @@
           <a:noFill/>
         </p:spPr>
         <p:txBody>
-          <a:bodyPr wrap="square" anchor="t" lIns="0" rIns="0" tIns="0" bIns="0">
+          <a:bodyPr wrap="square" lIns="0" tIns="0" rIns="0" bIns="0" anchor="t">
             <a:spAutoFit/>
           </a:bodyPr>
           <a:lstStyle/>
           <a:p>
             <a:pPr algn="ctr"/>
             <a:r>
-              <a:rPr sz="1700" b="0">
+              <a:rPr sz="2000" b="0">
                 <a:latin typeface="Cambria"/>
               </a:rPr>
               <a:t>Var(X) = E((X − μ)</a:t>
             </a:r>
             <a:r>
-              <a:rPr sz="1700" b="0" baseline="30000">
+              <a:rPr sz="2000" b="0" baseline="30000">
                 <a:latin typeface="Cambria"/>
               </a:rPr>
               <a:t>2</a:t>
             </a:r>
             <a:r>
-              <a:rPr sz="1700" b="0">
+              <a:rPr sz="2000" b="0">
                 <a:latin typeface="Cambria"/>
               </a:rPr>
               <a:t>) = (1 − p)p</a:t>
             </a:r>
             <a:r>
-              <a:rPr sz="1700" b="0" baseline="30000">
+              <a:rPr sz="2000" b="0" baseline="30000">
                 <a:latin typeface="Cambria"/>
               </a:rPr>
               <a:t>2</a:t>
             </a:r>
             <a:r>
-              <a:rPr sz="1700" b="0">
+              <a:rPr sz="2000" b="0">
                 <a:latin typeface="Cambria"/>
               </a:rPr>
               <a:t> + p(1 − p)</a:t>
             </a:r>
             <a:r>
-              <a:rPr sz="1700" b="0" baseline="30000">
+              <a:rPr sz="2000" b="0" baseline="30000">
                 <a:latin typeface="Cambria"/>
               </a:rPr>
               <a:t>2</a:t>
             </a:r>
             <a:r>
-              <a:rPr sz="1700" b="0">
+              <a:rPr sz="2000" b="0">
                 <a:latin typeface="Cambria"/>
               </a:rPr>
               <a:t> = p(1 − p)</a:t>
@@ -7891,8 +7924,8 @@
         </p:nvSpPr>
         <p:spPr>
           <a:xfrm>
-            <a:off x="1597877" y="3431376"/>
-            <a:ext cx="9204741" cy="672084"/>
+            <a:off x="1597877" y="3741930"/>
+            <a:ext cx="9204741" cy="615553"/>
           </a:xfrm>
           <a:prstGeom prst="rect">
             <a:avLst/>
@@ -7900,61 +7933,73 @@
           <a:noFill/>
         </p:spPr>
         <p:txBody>
-          <a:bodyPr wrap="square" anchor="t" lIns="0" rIns="0" tIns="0" bIns="0">
+          <a:bodyPr wrap="square" lIns="0" tIns="0" rIns="0" bIns="0" anchor="t">
             <a:spAutoFit/>
           </a:bodyPr>
           <a:lstStyle/>
           <a:p>
             <a:r>
-              <a:rPr sz="1800" b="0">
+              <a:rPr sz="2000" b="0" dirty="0">
                 <a:latin typeface="Calibri"/>
               </a:rPr>
               <a:t>2. X ~ bin(n, p) means X is the sum of n independent Bernoulli(p) random variables X</a:t>
             </a:r>
             <a:r>
-              <a:rPr sz="1800" b="0" baseline="-25000">
+              <a:rPr sz="2000" b="0" baseline="-25000" dirty="0">
                 <a:latin typeface="Calibri"/>
               </a:rPr>
               <a:t>1</a:t>
             </a:r>
             <a:r>
-              <a:rPr sz="1800" b="0">
+              <a:rPr sz="2000" b="0" dirty="0">
                 <a:latin typeface="Calibri"/>
               </a:rPr>
               <a:t>, X</a:t>
             </a:r>
             <a:r>
-              <a:rPr sz="1800" b="0" baseline="-25000">
+              <a:rPr sz="2000" b="0" baseline="-25000" dirty="0">
                 <a:latin typeface="Calibri"/>
               </a:rPr>
               <a:t>2</a:t>
             </a:r>
             <a:r>
-              <a:rPr sz="1800" b="0">
+              <a:rPr sz="2000" b="0" dirty="0">
                 <a:latin typeface="Calibri"/>
               </a:rPr>
-              <a:t>, …, X</a:t>
-            </a:r>
-            <a:r>
-              <a:rPr sz="1800" b="0" baseline="-25000">
+              <a:t>, …, </a:t>
+            </a:r>
+            <a:r>
+              <a:rPr sz="2000" b="0" dirty="0" err="1">
                 <a:latin typeface="Calibri"/>
               </a:rPr>
+              <a:t>X</a:t>
+            </a:r>
+            <a:r>
+              <a:rPr sz="2000" b="0" baseline="-25000" dirty="0" err="1">
+                <a:latin typeface="Calibri"/>
+              </a:rPr>
               <a:t>n</a:t>
             </a:r>
             <a:r>
-              <a:rPr sz="1800" b="0">
+              <a:rPr sz="2000" b="0" dirty="0">
                 <a:latin typeface="Calibri"/>
               </a:rPr>
-              <a:t>. For independent variables, the variances add. Since Var(X</a:t>
-            </a:r>
-            <a:r>
-              <a:rPr sz="1800" b="0" baseline="-25000">
+              <a:t>. For independent variables, the variances add. Since Var(</a:t>
+            </a:r>
+            <a:r>
+              <a:rPr sz="2000" b="0" dirty="0" err="1">
                 <a:latin typeface="Calibri"/>
               </a:rPr>
+              <a:t>X</a:t>
+            </a:r>
+            <a:r>
+              <a:rPr sz="2000" b="0" baseline="-25000" dirty="0" err="1">
+                <a:latin typeface="Calibri"/>
+              </a:rPr>
               <a:t>j</a:t>
             </a:r>
             <a:r>
-              <a:rPr sz="1800" b="0">
+              <a:rPr sz="2000" b="0" dirty="0">
                 <a:latin typeface="Calibri"/>
               </a:rPr>
               <a:t>) = p(1 − p) we have</a:t>
@@ -7970,8 +8015,8 @@
         </p:nvSpPr>
         <p:spPr>
           <a:xfrm>
-            <a:off x="1597877" y="4249764"/>
-            <a:ext cx="9204741" cy="346329"/>
+            <a:off x="1597877" y="4560318"/>
+            <a:ext cx="9204741" cy="307777"/>
           </a:xfrm>
           <a:prstGeom prst="rect">
             <a:avLst/>
@@ -7979,50 +8024,50 @@
           <a:noFill/>
         </p:spPr>
         <p:txBody>
-          <a:bodyPr wrap="square" anchor="t" lIns="0" rIns="0" tIns="0" bIns="0">
+          <a:bodyPr wrap="square" lIns="0" tIns="0" rIns="0" bIns="0" anchor="t">
             <a:spAutoFit/>
           </a:bodyPr>
           <a:lstStyle/>
           <a:p>
             <a:pPr algn="ctr"/>
             <a:r>
-              <a:rPr sz="1700" b="0">
+              <a:rPr sz="2000" b="0">
                 <a:latin typeface="Cambria"/>
               </a:rPr>
               <a:t>Var(X) = Var(X</a:t>
             </a:r>
             <a:r>
-              <a:rPr sz="1700" b="0" baseline="-25000">
+              <a:rPr sz="2000" b="0" baseline="-25000">
                 <a:latin typeface="Cambria"/>
               </a:rPr>
               <a:t>1</a:t>
             </a:r>
             <a:r>
-              <a:rPr sz="1700" b="0">
+              <a:rPr sz="2000" b="0">
                 <a:latin typeface="Cambria"/>
               </a:rPr>
               <a:t>) + Var(X</a:t>
             </a:r>
             <a:r>
-              <a:rPr sz="1700" b="0" baseline="-25000">
+              <a:rPr sz="2000" b="0" baseline="-25000">
                 <a:latin typeface="Cambria"/>
               </a:rPr>
               <a:t>2</a:t>
             </a:r>
             <a:r>
-              <a:rPr sz="1700" b="0">
+              <a:rPr sz="2000" b="0">
                 <a:latin typeface="Cambria"/>
               </a:rPr>
               <a:t>) + … + Var(X</a:t>
             </a:r>
             <a:r>
-              <a:rPr sz="1700" b="0" baseline="-25000">
+              <a:rPr sz="2000" b="0" baseline="-25000">
                 <a:latin typeface="Cambria"/>
               </a:rPr>
               <a:t>n</a:t>
             </a:r>
             <a:r>
-              <a:rPr sz="1700" b="0">
+              <a:rPr sz="2000" b="0">
                 <a:latin typeface="Cambria"/>
               </a:rPr>
               <a:t>) = np(p − 1).</a:t>
@@ -8344,8 +8389,8 @@
         </p:nvSpPr>
         <p:spPr>
           <a:xfrm>
-            <a:off x="4924425" y="4114800"/>
-            <a:ext cx="2514600" cy="914400"/>
+            <a:off x="4924425" y="4264223"/>
+            <a:ext cx="2514600" cy="615553"/>
           </a:xfrm>
           <a:prstGeom prst="rect">
             <a:avLst/>
@@ -8353,13 +8398,13 @@
           <a:noFill/>
         </p:spPr>
         <p:txBody>
-          <a:bodyPr wrap="square" anchor="ctr" lIns="0" rIns="0" tIns="0" bIns="0">
+          <a:bodyPr wrap="square" lIns="0" tIns="0" rIns="0" bIns="0" anchor="ctr">
             <a:spAutoFit/>
           </a:bodyPr>
           <a:lstStyle/>
           <a:p>
             <a:r>
-              <a:rPr sz="1800">
+              <a:rPr sz="2000">
                 <a:latin typeface="Cambria"/>
               </a:rPr>
               <a:t>Mean : μ = n p</a:t>
@@ -8367,19 +8412,19 @@
           </a:p>
           <a:p>
             <a:r>
-              <a:rPr sz="1800">
+              <a:rPr sz="2000">
                 <a:latin typeface="Cambria"/>
               </a:rPr>
               <a:t>Variance : σ</a:t>
             </a:r>
             <a:r>
-              <a:rPr sz="1800" baseline="30000">
+              <a:rPr sz="2000" baseline="30000">
                 <a:latin typeface="Cambria"/>
               </a:rPr>
               <a:t>2</a:t>
             </a:r>
             <a:r>
-              <a:rPr sz="1800">
+              <a:rPr sz="2000">
                 <a:latin typeface="Cambria"/>
               </a:rPr>
               <a:t> = npq</a:t>
@@ -9658,8 +9703,8 @@
         </p:nvSpPr>
         <p:spPr>
           <a:xfrm>
-            <a:off x="3468130" y="4590536"/>
-            <a:ext cx="6893169" cy="690563"/>
+            <a:off x="3468130" y="4781929"/>
+            <a:ext cx="6893169" cy="307777"/>
           </a:xfrm>
           <a:prstGeom prst="rect">
             <a:avLst/>
@@ -9667,79 +9712,79 @@
           <a:noFill/>
         </p:spPr>
         <p:txBody>
-          <a:bodyPr wrap="square" anchor="ctr" lIns="0" rIns="0" tIns="0" bIns="0">
+          <a:bodyPr wrap="square" lIns="0" tIns="0" rIns="0" bIns="0" anchor="ctr">
             <a:spAutoFit/>
           </a:bodyPr>
           <a:lstStyle/>
           <a:p>
             <a:r>
-              <a:rPr sz="1900">
+              <a:rPr sz="2000">
                 <a:latin typeface="Cambria"/>
               </a:rPr>
               <a:t>P(x) = </a:t>
             </a:r>
             <a:r>
-              <a:rPr sz="1900" baseline="-25000">
+              <a:rPr sz="2000" baseline="-25000">
                 <a:latin typeface="Cambria"/>
               </a:rPr>
               <a:t>n</a:t>
             </a:r>
             <a:r>
-              <a:rPr sz="1900">
+              <a:rPr sz="2000">
                 <a:latin typeface="Cambria"/>
               </a:rPr>
               <a:t>C</a:t>
             </a:r>
             <a:r>
-              <a:rPr sz="1900" baseline="-25000">
+              <a:rPr sz="2000" baseline="-25000">
                 <a:latin typeface="Cambria"/>
               </a:rPr>
               <a:t>x</a:t>
             </a:r>
             <a:r>
-              <a:rPr sz="1900">
+              <a:rPr sz="2000">
                 <a:latin typeface="Cambria"/>
               </a:rPr>
               <a:t> p</a:t>
             </a:r>
             <a:r>
-              <a:rPr sz="1900" baseline="30000">
+              <a:rPr sz="2000" baseline="30000">
                 <a:latin typeface="Cambria"/>
               </a:rPr>
               <a:t>x</a:t>
             </a:r>
             <a:r>
-              <a:rPr sz="1900">
+              <a:rPr sz="2000">
                 <a:latin typeface="Cambria"/>
               </a:rPr>
               <a:t> q</a:t>
             </a:r>
             <a:r>
-              <a:rPr sz="1900" baseline="30000">
+              <a:rPr sz="2000" baseline="30000">
                 <a:latin typeface="Cambria"/>
               </a:rPr>
               <a:t>n−x</a:t>
             </a:r>
             <a:r>
-              <a:rPr sz="1900">
+              <a:rPr sz="2000">
                 <a:latin typeface="Cambria"/>
               </a:rPr>
               <a:t> = n! / ((n − x)! x!) · p</a:t>
             </a:r>
             <a:r>
-              <a:rPr sz="1900" baseline="30000">
+              <a:rPr sz="2000" baseline="30000">
                 <a:latin typeface="Cambria"/>
               </a:rPr>
               <a:t>x</a:t>
             </a:r>
             <a:r>
-              <a:rPr sz="1900">
+              <a:rPr sz="2000">
                 <a:latin typeface="Cambria"/>
               </a:rPr>
               <a:t> q</a:t>
             </a:r>
             <a:r>
-              <a:rPr sz="1900" baseline="30000">
+              <a:rPr sz="2000" baseline="30000">
                 <a:latin typeface="Cambria"/>
               </a:rPr>
               <a:t>n−x</a:t>
@@ -9858,11 +9903,7 @@
             </a:pPr>
             <a:r>
               <a:rPr lang="en-US" sz="3000" dirty="0"/>
-              <a:t>P[X</a:t>
-            </a:r>
-            <a:r>
-              <a:rPr lang="en-US" sz="3000" dirty="0"/>
-              <a:t>≥2]=1-P[X=0]-P[X=1]=0.3410</a:t>
+              <a:t>P[X≥2]=1-P[X=0]-P[X=1]=0.3410</a:t>
             </a:r>
           </a:p>
           <a:p>
@@ -9890,7 +9931,7 @@
           <a:noFill/>
         </p:spPr>
         <p:txBody>
-          <a:bodyPr wrap="square" anchor="ctr" lIns="0" rIns="0" tIns="0" bIns="0">
+          <a:bodyPr wrap="square" lIns="0" tIns="0" rIns="0" bIns="0" anchor="ctr">
             <a:spAutoFit/>
           </a:bodyPr>
           <a:lstStyle/>
@@ -9945,7 +9986,7 @@
           <a:noFill/>
         </p:spPr>
         <p:txBody>
-          <a:bodyPr wrap="square" anchor="ctr" lIns="0" rIns="0" tIns="0" bIns="0">
+          <a:bodyPr wrap="square" lIns="0" tIns="0" rIns="0" bIns="0" anchor="ctr">
             <a:spAutoFit/>
           </a:bodyPr>
           <a:lstStyle/>
@@ -10000,24 +10041,42 @@
           <a:noFill/>
         </p:spPr>
         <p:txBody>
-          <a:bodyPr wrap="none" anchor="t" lIns="0" rIns="0" tIns="0" bIns="0">
+          <a:bodyPr wrap="none" lIns="0" tIns="0" rIns="0" bIns="0" anchor="t">
             <a:spAutoFit/>
           </a:bodyPr>
           <a:lstStyle/>
           <a:p>
             <a:r>
-              <a:rPr sz="1700">
+              <a:rPr sz="1700" dirty="0">
                 <a:solidFill>
                   <a:srgbClr val="0000FF"/>
                 </a:solidFill>
                 <a:latin typeface="Consolas"/>
               </a:rPr>
-              <a:t>&gt; dbinom(2,12,0.1)</a:t>
-            </a:r>
-          </a:p>
-          <a:p>
-            <a:r>
-              <a:rPr sz="1700">
+              <a:t>&gt; </a:t>
+            </a:r>
+            <a:r>
+              <a:rPr sz="1700" dirty="0" err="1">
+                <a:solidFill>
+                  <a:srgbClr val="0000FF"/>
+                </a:solidFill>
+                <a:latin typeface="Consolas"/>
+              </a:rPr>
+              <a:t>dbinom</a:t>
+            </a:r>
+            <a:r>
+              <a:rPr sz="1700" dirty="0">
+                <a:solidFill>
+                  <a:srgbClr val="0000FF"/>
+                </a:solidFill>
+                <a:latin typeface="Consolas"/>
+              </a:rPr>
+              <a:t>(2,12,0.1)</a:t>
+            </a:r>
+          </a:p>
+          <a:p>
+            <a:r>
+              <a:rPr sz="1700" dirty="0">
                 <a:solidFill>
                   <a:srgbClr val="000000"/>
                 </a:solidFill>
@@ -10028,18 +10087,36 @@
           </a:p>
           <a:p>
             <a:r>
-              <a:rPr sz="1700">
+              <a:rPr sz="1700" dirty="0">
                 <a:solidFill>
                   <a:srgbClr val="0000FF"/>
                 </a:solidFill>
                 <a:latin typeface="Consolas"/>
               </a:rPr>
-              <a:t>&gt; dbinom(0,12,0.1)</a:t>
-            </a:r>
-          </a:p>
-          <a:p>
-            <a:r>
-              <a:rPr sz="1700">
+              <a:t>&gt; </a:t>
+            </a:r>
+            <a:r>
+              <a:rPr sz="1700" dirty="0" err="1">
+                <a:solidFill>
+                  <a:srgbClr val="0000FF"/>
+                </a:solidFill>
+                <a:latin typeface="Consolas"/>
+              </a:rPr>
+              <a:t>dbinom</a:t>
+            </a:r>
+            <a:r>
+              <a:rPr sz="1700" dirty="0">
+                <a:solidFill>
+                  <a:srgbClr val="0000FF"/>
+                </a:solidFill>
+                <a:latin typeface="Consolas"/>
+              </a:rPr>
+              <a:t>(0,12,0.1)</a:t>
+            </a:r>
+          </a:p>
+          <a:p>
+            <a:r>
+              <a:rPr sz="1700" dirty="0">
                 <a:solidFill>
                   <a:srgbClr val="000000"/>
                 </a:solidFill>
@@ -10050,18 +10127,36 @@
           </a:p>
           <a:p>
             <a:r>
-              <a:rPr sz="1700">
+              <a:rPr sz="1700" dirty="0">
                 <a:solidFill>
                   <a:srgbClr val="0000FF"/>
                 </a:solidFill>
                 <a:latin typeface="Consolas"/>
               </a:rPr>
-              <a:t>&gt; 1-dbinom(1,12,0.1)-dbinom(0,12,0.1)</a:t>
-            </a:r>
-          </a:p>
-          <a:p>
-            <a:r>
-              <a:rPr sz="1700">
+              <a:t>&gt; 1-dbinom(1,12,0.1)-</a:t>
+            </a:r>
+            <a:r>
+              <a:rPr sz="1700" dirty="0" err="1">
+                <a:solidFill>
+                  <a:srgbClr val="0000FF"/>
+                </a:solidFill>
+                <a:latin typeface="Consolas"/>
+              </a:rPr>
+              <a:t>dbinom</a:t>
+            </a:r>
+            <a:r>
+              <a:rPr sz="1700" dirty="0">
+                <a:solidFill>
+                  <a:srgbClr val="0000FF"/>
+                </a:solidFill>
+                <a:latin typeface="Consolas"/>
+              </a:rPr>
+              <a:t>(0,12,0.1)</a:t>
+            </a:r>
+          </a:p>
+          <a:p>
+            <a:r>
+              <a:rPr sz="1700" dirty="0">
                 <a:solidFill>
                   <a:srgbClr val="000000"/>
                 </a:solidFill>
@@ -10089,7 +10184,7 @@
           <a:noFill/>
         </p:spPr>
         <p:txBody>
-          <a:bodyPr wrap="none" anchor="t" lIns="0" rIns="0" tIns="0" bIns="0">
+          <a:bodyPr wrap="none" lIns="0" tIns="0" rIns="0" bIns="0" anchor="t">
             <a:spAutoFit/>
           </a:bodyPr>
           <a:lstStyle/>
@@ -10127,126 +10222,6 @@
   <p:clrMapOvr>
     <a:masterClrMapping/>
   </p:clrMapOvr>
-  <p:timing>
-    <p:tnLst>
-      <p:par>
-        <p:cTn id="1" dur="indefinite" restart="never" nodeType="tmRoot">
-          <p:childTnLst>
-            <p:seq concurrent="1" nextAc="seek">
-              <p:cTn id="2" dur="indefinite" nodeType="mainSeq">
-                <p:childTnLst>
-                  <p:par>
-                    <p:cTn id="3" fill="hold" nodeType="clickPar">
-                      <p:stCondLst>
-                        <p:cond delay="indefinite"/>
-                      </p:stCondLst>
-                      <p:childTnLst>
-                        <p:par>
-                          <p:cTn id="4" fill="hold" nodeType="withGroup">
-                            <p:stCondLst>
-                              <p:cond delay="0"/>
-                            </p:stCondLst>
-                            <p:childTnLst>
-                              <p:par>
-                                <p:cTn id="5" presetID="1" presetClass="entr" presetSubtype="0" fill="hold" nodeType="clickEffect">
-                                  <p:stCondLst>
-                                    <p:cond delay="0"/>
-                                  </p:stCondLst>
-                                  <p:childTnLst>
-                                    <p:set>
-                                      <p:cBhvr>
-                                        <p:cTn id="6" dur="1" fill="hold">
-                                          <p:stCondLst>
-                                            <p:cond delay="0"/>
-                                          </p:stCondLst>
-                                        </p:cTn>
-                                        <p:tgtEl>
-                                          <p:spTgt spid="3"/>
-                                        </p:tgtEl>
-                                        <p:attrNameLst>
-                                          <p:attrName>style.visibility</p:attrName>
-                                        </p:attrNameLst>
-                                      </p:cBhvr>
-                                      <p:to>
-                                        <p:strVal val="visible"/>
-                                      </p:to>
-                                    </p:set>
-                                  </p:childTnLst>
-                                </p:cTn>
-                              </p:par>
-                            </p:childTnLst>
-                          </p:cTn>
-                        </p:par>
-                      </p:childTnLst>
-                    </p:cTn>
-                  </p:par>
-                  <p:par>
-                    <p:cTn id="7" fill="hold" nodeType="clickPar">
-                      <p:stCondLst>
-                        <p:cond delay="indefinite"/>
-                      </p:stCondLst>
-                      <p:childTnLst>
-                        <p:par>
-                          <p:cTn id="8" fill="hold" nodeType="withGroup">
-                            <p:stCondLst>
-                              <p:cond delay="0"/>
-                            </p:stCondLst>
-                            <p:childTnLst>
-                              <p:par>
-                                <p:cTn id="9" presetID="1" presetClass="entr" presetSubtype="0" fill="hold" nodeType="clickEffect">
-                                  <p:stCondLst>
-                                    <p:cond delay="0"/>
-                                  </p:stCondLst>
-                                  <p:childTnLst>
-                                    <p:set>
-                                      <p:cBhvr>
-                                        <p:cTn id="10" dur="1" fill="hold">
-                                          <p:stCondLst>
-                                            <p:cond delay="0"/>
-                                          </p:stCondLst>
-                                        </p:cTn>
-                                        <p:tgtEl>
-                                          <p:spTgt spid="2"/>
-                                        </p:tgtEl>
-                                        <p:attrNameLst>
-                                          <p:attrName>style.visibility</p:attrName>
-                                        </p:attrNameLst>
-                                      </p:cBhvr>
-                                      <p:to>
-                                        <p:strVal val="visible"/>
-                                      </p:to>
-                                    </p:set>
-                                  </p:childTnLst>
-                                </p:cTn>
-                              </p:par>
-                            </p:childTnLst>
-                          </p:cTn>
-                        </p:par>
-                      </p:childTnLst>
-                    </p:cTn>
-                  </p:par>
-                </p:childTnLst>
-              </p:cTn>
-              <p:prevCondLst>
-                <p:cond evt="onPrev" delay="0">
-                  <p:tgtEl>
-                    <p:sldTgt/>
-                  </p:tgtEl>
-                </p:cond>
-              </p:prevCondLst>
-              <p:nextCondLst>
-                <p:cond evt="onNext" delay="0">
-                  <p:tgtEl>
-                    <p:sldTgt/>
-                  </p:tgtEl>
-                </p:cond>
-              </p:nextCondLst>
-            </p:seq>
-          </p:childTnLst>
-        </p:cTn>
-      </p:par>
-    </p:tnLst>
-  </p:timing>
 </p:sld>
 </file>
 
@@ -10854,8 +10829,8 @@
         </p:nvSpPr>
         <p:spPr>
           <a:xfrm>
-            <a:off x="3631291" y="3812333"/>
-            <a:ext cx="5908430" cy="1257300"/>
+            <a:off x="3631291" y="4256317"/>
+            <a:ext cx="5908430" cy="369332"/>
           </a:xfrm>
           <a:prstGeom prst="rect">
             <a:avLst/>
@@ -10863,31 +10838,31 @@
           <a:noFill/>
         </p:spPr>
         <p:txBody>
-          <a:bodyPr wrap="square" anchor="ctr" lIns="0" rIns="0" tIns="0" bIns="0">
+          <a:bodyPr wrap="square" lIns="0" tIns="0" rIns="0" bIns="0" anchor="ctr">
             <a:spAutoFit/>
           </a:bodyPr>
           <a:lstStyle/>
           <a:p>
             <a:r>
-              <a:rPr sz="1900" b="0">
+              <a:rPr sz="2400" b="0" dirty="0">
                 <a:latin typeface="Cambria"/>
               </a:rPr>
               <a:t>ℒ(p | k, N) = (N choose k) p</a:t>
             </a:r>
             <a:r>
-              <a:rPr sz="1900" b="0" baseline="30000">
+              <a:rPr sz="2400" b="0" baseline="30000" dirty="0">
                 <a:latin typeface="Cambria"/>
               </a:rPr>
               <a:t>k</a:t>
             </a:r>
             <a:r>
-              <a:rPr sz="1900" b="0">
+              <a:rPr sz="2400" b="0" dirty="0">
                 <a:latin typeface="Cambria"/>
               </a:rPr>
               <a:t> (1 − p)</a:t>
             </a:r>
             <a:r>
-              <a:rPr sz="1900" b="0" baseline="30000">
+              <a:rPr sz="2400" b="0" baseline="30000" dirty="0">
                 <a:latin typeface="Cambria"/>
               </a:rPr>
               <a:t>N − k</a:t>
@@ -11114,8 +11089,8 @@
         </p:nvSpPr>
         <p:spPr>
           <a:xfrm>
-            <a:off x="3265715" y="2063230"/>
-            <a:ext cx="5908430" cy="1257300"/>
+            <a:off x="3265715" y="2507214"/>
+            <a:ext cx="5908430" cy="369332"/>
           </a:xfrm>
           <a:prstGeom prst="rect">
             <a:avLst/>
@@ -11123,31 +11098,31 @@
           <a:noFill/>
         </p:spPr>
         <p:txBody>
-          <a:bodyPr wrap="square" anchor="ctr" lIns="0" rIns="0" tIns="0" bIns="0">
+          <a:bodyPr wrap="square" lIns="0" tIns="0" rIns="0" bIns="0" anchor="ctr">
             <a:spAutoFit/>
           </a:bodyPr>
           <a:lstStyle/>
           <a:p>
             <a:r>
-              <a:rPr sz="1900" b="0">
+              <a:rPr sz="2400" b="0" dirty="0">
                 <a:latin typeface="Cambria"/>
               </a:rPr>
               <a:t>ℒ(p | k, N) = (N choose k) p</a:t>
             </a:r>
             <a:r>
-              <a:rPr sz="1900" b="0" baseline="30000">
+              <a:rPr sz="2400" b="0" baseline="30000" dirty="0">
                 <a:latin typeface="Cambria"/>
               </a:rPr>
               <a:t>k</a:t>
             </a:r>
             <a:r>
-              <a:rPr sz="1900" b="0">
+              <a:rPr sz="2400" b="0" dirty="0">
                 <a:latin typeface="Cambria"/>
               </a:rPr>
               <a:t> (1 − p)</a:t>
             </a:r>
             <a:r>
-              <a:rPr sz="1900" b="0" baseline="30000">
+              <a:rPr sz="2400" b="0" baseline="30000" dirty="0">
                 <a:latin typeface="Cambria"/>
               </a:rPr>
               <a:t>N − k</a:t>
@@ -11457,15 +11432,7 @@
             </a:pPr>
             <a:r>
               <a:rPr lang="en-US" dirty="0"/>
-              <a:t>We usually work with the log-likelihood. Can you find that? </a:t>
-            </a:r>
-            <a:r>
-              <a:rPr lang="en-US" dirty="0"/>
-              <a:t>→ </a:t>
-            </a:r>
-            <a:r>
-              <a:rPr lang="en-US" dirty="0"/>
-              <a:t>log(a*b) = log(a) + log(b), log(a</a:t>
+              <a:t>We usually work with the log-likelihood. Can you find that? → log(a*b) = log(a) + log(b), log(a</a:t>
             </a:r>
             <a:r>
               <a:rPr lang="en-US" baseline="30000" dirty="0"/>
@@ -11746,8 +11713,8 @@
         </p:nvSpPr>
         <p:spPr>
           <a:xfrm>
-            <a:off x="3612357" y="2019300"/>
-            <a:ext cx="5908430" cy="1257300"/>
+            <a:off x="3612357" y="2463284"/>
+            <a:ext cx="5908430" cy="369332"/>
           </a:xfrm>
           <a:prstGeom prst="rect">
             <a:avLst/>
@@ -11755,31 +11722,31 @@
           <a:noFill/>
         </p:spPr>
         <p:txBody>
-          <a:bodyPr wrap="square" anchor="ctr" lIns="0" rIns="0" tIns="0" bIns="0">
+          <a:bodyPr wrap="square" lIns="0" tIns="0" rIns="0" bIns="0" anchor="ctr">
             <a:spAutoFit/>
           </a:bodyPr>
           <a:lstStyle/>
           <a:p>
             <a:r>
-              <a:rPr sz="1900" b="0">
+              <a:rPr sz="2400" b="0">
                 <a:latin typeface="Cambria"/>
               </a:rPr>
               <a:t>ℒ(p | k, N) = (N choose k) p</a:t>
             </a:r>
             <a:r>
-              <a:rPr sz="1900" b="0" baseline="30000">
+              <a:rPr sz="2400" b="0" baseline="30000">
                 <a:latin typeface="Cambria"/>
               </a:rPr>
               <a:t>k</a:t>
             </a:r>
             <a:r>
-              <a:rPr sz="1900" b="0">
+              <a:rPr sz="2400" b="0">
                 <a:latin typeface="Cambria"/>
               </a:rPr>
               <a:t> (1 − p)</a:t>
             </a:r>
             <a:r>
-              <a:rPr sz="1900" b="0" baseline="30000">
+              <a:rPr sz="2400" b="0" baseline="30000">
                 <a:latin typeface="Cambria"/>
               </a:rPr>
               <a:t>N − k</a:t>
@@ -11795,8 +11762,8 @@
         </p:nvSpPr>
         <p:spPr>
           <a:xfrm>
-            <a:off x="1936750" y="4538568"/>
-            <a:ext cx="8581292" cy="1155700"/>
+            <a:off x="1936750" y="4931752"/>
+            <a:ext cx="8581292" cy="369332"/>
           </a:xfrm>
           <a:prstGeom prst="rect">
             <a:avLst/>
@@ -11804,13 +11771,13 @@
           <a:noFill/>
         </p:spPr>
         <p:txBody>
-          <a:bodyPr wrap="square" anchor="ctr" lIns="0" rIns="0" tIns="0" bIns="0">
+          <a:bodyPr wrap="square" lIns="0" tIns="0" rIns="0" bIns="0" anchor="ctr">
             <a:spAutoFit/>
           </a:bodyPr>
           <a:lstStyle/>
           <a:p>
             <a:r>
-              <a:rPr sz="1900" b="0">
+              <a:rPr sz="2400" b="0">
                 <a:latin typeface="Cambria"/>
               </a:rPr>
               <a:t>L(p | k, N) = log(N choose k) + k log(p) + (N − k) log(1 − p)</a:t>
@@ -11828,129 +11795,6 @@
   <p:clrMapOvr>
     <a:masterClrMapping/>
   </p:clrMapOvr>
-  <p:timing>
-    <p:tnLst>
-      <p:par>
-        <p:cTn id="1" dur="indefinite" restart="never" nodeType="tmRoot">
-          <p:childTnLst>
-            <p:seq concurrent="1" nextAc="seek">
-              <p:cTn id="2" dur="indefinite" nodeType="mainSeq">
-                <p:childTnLst>
-                  <p:par>
-                    <p:cTn id="3" fill="hold" nodeType="clickPar">
-                      <p:stCondLst>
-                        <p:cond delay="indefinite"/>
-                      </p:stCondLst>
-                      <p:childTnLst>
-                        <p:par>
-                          <p:cTn id="4" fill="hold" nodeType="withGroup">
-                            <p:stCondLst>
-                              <p:cond delay="0"/>
-                            </p:stCondLst>
-                            <p:childTnLst>
-                              <p:par>
-                                <p:cTn id="5" presetID="1" presetClass="entr" presetSubtype="0" fill="hold" nodeType="clickEffect">
-                                  <p:stCondLst>
-                                    <p:cond delay="0"/>
-                                  </p:stCondLst>
-                                  <p:childTnLst>
-                                    <p:set>
-                                      <p:cBhvr>
-                                        <p:cTn id="6" dur="1" fill="hold">
-                                          <p:stCondLst>
-                                            <p:cond delay="0"/>
-                                          </p:stCondLst>
-                                        </p:cTn>
-                                        <p:tgtEl>
-                                          <p:spTgt spid="4"/>
-                                        </p:tgtEl>
-                                        <p:attrNameLst>
-                                          <p:attrName>style.visibility</p:attrName>
-                                        </p:attrNameLst>
-                                      </p:cBhvr>
-                                      <p:to>
-                                        <p:strVal val="visible"/>
-                                      </p:to>
-                                    </p:set>
-                                  </p:childTnLst>
-                                </p:cTn>
-                              </p:par>
-                            </p:childTnLst>
-                          </p:cTn>
-                        </p:par>
-                      </p:childTnLst>
-                    </p:cTn>
-                  </p:par>
-                  <p:par>
-                    <p:cTn id="7" fill="hold" nodeType="clickPar">
-                      <p:stCondLst>
-                        <p:cond delay="indefinite"/>
-                      </p:stCondLst>
-                      <p:childTnLst>
-                        <p:par>
-                          <p:cTn id="8" fill="hold" nodeType="withGroup">
-                            <p:stCondLst>
-                              <p:cond delay="0"/>
-                            </p:stCondLst>
-                            <p:childTnLst>
-                              <p:par>
-                                <p:cTn id="9" presetID="1" presetClass="entr" presetSubtype="0" fill="hold" grpId="0" nodeType="clickEffect">
-                                  <p:stCondLst>
-                                    <p:cond delay="0"/>
-                                  </p:stCondLst>
-                                  <p:childTnLst>
-                                    <p:set>
-                                      <p:cBhvr>
-                                        <p:cTn id="10" dur="1" fill="hold">
-                                          <p:stCondLst>
-                                            <p:cond delay="0"/>
-                                          </p:stCondLst>
-                                        </p:cTn>
-                                        <p:tgtEl>
-                                          <p:spTgt spid="5"/>
-                                        </p:tgtEl>
-                                        <p:attrNameLst>
-                                          <p:attrName>style.visibility</p:attrName>
-                                        </p:attrNameLst>
-                                      </p:cBhvr>
-                                      <p:to>
-                                        <p:strVal val="visible"/>
-                                      </p:to>
-                                    </p:set>
-                                  </p:childTnLst>
-                                </p:cTn>
-                              </p:par>
-                            </p:childTnLst>
-                          </p:cTn>
-                        </p:par>
-                      </p:childTnLst>
-                    </p:cTn>
-                  </p:par>
-                </p:childTnLst>
-              </p:cTn>
-              <p:prevCondLst>
-                <p:cond evt="onPrev" delay="0">
-                  <p:tgtEl>
-                    <p:sldTgt/>
-                  </p:tgtEl>
-                </p:cond>
-              </p:prevCondLst>
-              <p:nextCondLst>
-                <p:cond evt="onNext" delay="0">
-                  <p:tgtEl>
-                    <p:sldTgt/>
-                  </p:tgtEl>
-                </p:cond>
-              </p:nextCondLst>
-            </p:seq>
-          </p:childTnLst>
-        </p:cTn>
-      </p:par>
-    </p:tnLst>
-    <p:bldLst>
-      <p:bldP spid="5" grpId="0"/>
-    </p:bldLst>
-  </p:timing>
 </p:sld>
 </file>
 
@@ -12127,8 +11971,8 @@
         </p:nvSpPr>
         <p:spPr>
           <a:xfrm>
-            <a:off x="1465071" y="2303105"/>
-            <a:ext cx="8581292" cy="1155700"/>
+            <a:off x="1465071" y="2696289"/>
+            <a:ext cx="8581292" cy="369332"/>
           </a:xfrm>
           <a:prstGeom prst="rect">
             <a:avLst/>
@@ -12136,13 +11980,13 @@
           <a:noFill/>
         </p:spPr>
         <p:txBody>
-          <a:bodyPr wrap="square" anchor="ctr" lIns="0" rIns="0" tIns="0" bIns="0">
+          <a:bodyPr wrap="square" lIns="0" tIns="0" rIns="0" bIns="0" anchor="ctr">
             <a:spAutoFit/>
           </a:bodyPr>
           <a:lstStyle/>
           <a:p>
             <a:r>
-              <a:rPr sz="1900" b="0">
+              <a:rPr sz="2400" b="0" dirty="0">
                 <a:latin typeface="Cambria"/>
               </a:rPr>
               <a:t>L(p | k, N) = log(N choose k) + k log(p) + (N − k) log(1 − p)</a:t>
@@ -13463,139 +13307,6 @@
       </p:grpSpPr>
       <p:sp>
         <p:nvSpPr>
-          <p:cNvPr id="3" name="Text Placeholder 2"/>
-          <p:cNvSpPr>
-            <a:spLocks noGrp="1"/>
-          </p:cNvSpPr>
-          <p:nvPr>
-            <p:ph type="body" sz="half" idx="1"/>
-          </p:nvPr>
-        </p:nvSpPr>
-        <p:spPr/>
-        <p:txBody>
-          <a:bodyPr/>
-          <a:lstStyle/>
-          <a:p>
-            <a:endParaRPr lang="en-US"/>
-          </a:p>
-        </p:txBody>
-      </p:sp>
-      <p:sp>
-        <p:nvSpPr>
-          <p:cNvPr id="7" name="TextBox 6"/>
-          <p:cNvSpPr txBox="1"/>
-          <p:nvPr/>
-        </p:nvSpPr>
-        <p:spPr>
-          <a:xfrm>
-            <a:off x="8654780" y="4852386"/>
-            <a:ext cx="3178114" cy="523220"/>
-          </a:xfrm>
-          <a:prstGeom prst="rect">
-            <a:avLst/>
-          </a:prstGeom>
-          <a:noFill/>
-        </p:spPr>
-        <p:txBody>
-          <a:bodyPr wrap="none" rtlCol="0">
-            <a:spAutoFit/>
-          </a:bodyPr>
-          <a:lstStyle/>
-          <a:p>
-            <a:r>
-              <a:rPr lang="en-US" sz="2800" dirty="0"/>
-              <a:t>Alternatively written</a:t>
-            </a:r>
-          </a:p>
-        </p:txBody>
-      </p:sp>
-      <p:sp>
-        <p:nvSpPr>
-          <p:cNvPr id="8" name="TextBox 7"/>
-          <p:cNvSpPr txBox="1"/>
-          <p:nvPr/>
-        </p:nvSpPr>
-        <p:spPr>
-          <a:xfrm>
-            <a:off x="8605352" y="5330867"/>
-            <a:ext cx="3358048" cy="952500"/>
-          </a:xfrm>
-          <a:prstGeom prst="rect">
-            <a:avLst/>
-          </a:prstGeom>
-          <a:noFill/>
-        </p:spPr>
-        <p:txBody>
-          <a:bodyPr wrap="square" anchor="ctr" lIns="0" rIns="0" tIns="0" bIns="0">
-            <a:spAutoFit/>
-          </a:bodyPr>
-          <a:lstStyle/>
-          <a:p>
-            <a:r>
-              <a:rPr sz="1500" b="0">
-                <a:latin typeface="Cambria"/>
-              </a:rPr>
-              <a:t>n! / (x</a:t>
-            </a:r>
-            <a:r>
-              <a:rPr sz="1500" b="0" baseline="-25000">
-                <a:latin typeface="Cambria"/>
-              </a:rPr>
-              <a:t>1</a:t>
-            </a:r>
-            <a:r>
-              <a:rPr sz="1500" b="0">
-                <a:latin typeface="Cambria"/>
-              </a:rPr>
-              <a:t>! ⋯ x</a:t>
-            </a:r>
-            <a:r>
-              <a:rPr sz="1500" b="0" baseline="-25000">
-                <a:latin typeface="Cambria"/>
-              </a:rPr>
-              <a:t>k</a:t>
-            </a:r>
-            <a:r>
-              <a:rPr sz="1500" b="0">
-                <a:latin typeface="Cambria"/>
-              </a:rPr>
-              <a:t>!) · p</a:t>
-            </a:r>
-            <a:r>
-              <a:rPr sz="1500" b="0" baseline="-25000">
-                <a:latin typeface="Cambria"/>
-              </a:rPr>
-              <a:t>1</a:t>
-            </a:r>
-            <a:r>
-              <a:rPr sz="1500" b="0" baseline="30000">
-                <a:latin typeface="Cambria"/>
-              </a:rPr>
-              <a:t>x₁</a:t>
-            </a:r>
-            <a:r>
-              <a:rPr sz="1500" b="0">
-                <a:latin typeface="Cambria"/>
-              </a:rPr>
-              <a:t> ⋯ p</a:t>
-            </a:r>
-            <a:r>
-              <a:rPr sz="1500" b="0" baseline="-25000">
-                <a:latin typeface="Cambria"/>
-              </a:rPr>
-              <a:t>k</a:t>
-            </a:r>
-            <a:r>
-              <a:rPr sz="1500" b="0" baseline="30000">
-                <a:latin typeface="Cambria"/>
-              </a:rPr>
-              <a:t>xₖ</a:t>
-            </a:r>
-          </a:p>
-        </p:txBody>
-      </p:sp>
-      <p:sp>
-        <p:nvSpPr>
           <p:cNvPr id="9" name="TextBox 8"/>
           <p:cNvSpPr txBox="1"/>
           <p:nvPr/>
@@ -13611,7 +13322,7 @@
           <a:noFill/>
         </p:spPr>
         <p:txBody>
-          <a:bodyPr wrap="square" anchor="t" lIns="0" rIns="0" tIns="0" bIns="0">
+          <a:bodyPr wrap="square" lIns="0" tIns="0" rIns="0" bIns="0" anchor="t">
             <a:spAutoFit/>
           </a:bodyPr>
           <a:lstStyle/>
@@ -13634,7 +13345,7 @@
         <p:spPr>
           <a:xfrm>
             <a:off x="164592" y="973836"/>
-            <a:ext cx="11049572" cy="1683639"/>
+            <a:ext cx="11049572" cy="1477328"/>
           </a:xfrm>
           <a:prstGeom prst="rect">
             <a:avLst/>
@@ -13642,40 +13353,100 @@
           <a:noFill/>
         </p:spPr>
         <p:txBody>
-          <a:bodyPr wrap="square" anchor="t" lIns="0" rIns="0" tIns="0" bIns="0">
+          <a:bodyPr wrap="square" lIns="0" tIns="0" rIns="0" bIns="0" anchor="t">
             <a:spAutoFit/>
           </a:bodyPr>
           <a:lstStyle/>
           <a:p>
             <a:r>
-              <a:rPr sz="1900" b="0">
+              <a:rPr sz="2400" b="0" dirty="0">
                 <a:latin typeface="Calibri"/>
               </a:rPr>
-              <a:t>The multinomial distribution is an extension of the binomial distribution to the case of more than two (we shall assume n) kinds of outcomes, in which a single trial has probability p</a:t>
-            </a:r>
-            <a:r>
-              <a:rPr sz="1900" b="0" baseline="-25000">
+              <a:t>The multinomial distribution is an extension of the binomial distribution to the case of </a:t>
+            </a:r>
+            <a:r>
+              <a:rPr sz="2400" b="0" u="sng" dirty="0">
                 <a:latin typeface="Calibri"/>
               </a:rPr>
+              <a:t>more than two (we shall assume n) kinds of outcomes</a:t>
+            </a:r>
+            <a:r>
+              <a:rPr sz="2400" b="0" dirty="0">
+                <a:latin typeface="Calibri"/>
+              </a:rPr>
+              <a:t>, in which a </a:t>
+            </a:r>
+            <a:r>
+              <a:rPr sz="2400" b="0" u="sng" dirty="0">
+                <a:latin typeface="Calibri"/>
+              </a:rPr>
+              <a:t>single trial has probability p</a:t>
+            </a:r>
+            <a:r>
+              <a:rPr sz="2400" b="0" u="sng" baseline="-25000" dirty="0">
+                <a:latin typeface="Calibri"/>
+              </a:rPr>
               <a:t>i</a:t>
             </a:r>
             <a:r>
-              <a:rPr sz="1900" b="0">
+              <a:rPr sz="2400" b="0" u="sng" dirty="0">
                 <a:latin typeface="Calibri"/>
               </a:rPr>
-              <a:t> of ending in category i. In a total of N trials, we assume that k</a:t>
-            </a:r>
-            <a:r>
-              <a:rPr sz="1900" b="0" baseline="-25000">
+              <a:t> of ending in category </a:t>
+            </a:r>
+            <a:r>
+              <a:rPr sz="2400" b="0" u="sng" dirty="0" err="1">
                 <a:latin typeface="Calibri"/>
               </a:rPr>
               <a:t>i</a:t>
             </a:r>
             <a:r>
-              <a:rPr sz="1900" b="0">
+              <a:rPr sz="2400" b="0" dirty="0">
                 <a:latin typeface="Calibri"/>
               </a:rPr>
-              <a:t> of the outcomes end in category i. If we let p denote the vector of the different probabilities of outcome and k denote the vector of the data, the probability distribution is then an extension of the binomial distribution</a:t>
+              <a:t>. In a total of </a:t>
+            </a:r>
+            <a:r>
+              <a:rPr sz="2400" b="0" u="sng" dirty="0">
+                <a:latin typeface="Calibri"/>
+              </a:rPr>
+              <a:t>N trials</a:t>
+            </a:r>
+            <a:r>
+              <a:rPr sz="2400" b="0" dirty="0">
+                <a:latin typeface="Calibri"/>
+              </a:rPr>
+              <a:t>, we assume that </a:t>
+            </a:r>
+            <a:r>
+              <a:rPr sz="2400" b="0" u="sng" dirty="0">
+                <a:latin typeface="Calibri"/>
+              </a:rPr>
+              <a:t>k</a:t>
+            </a:r>
+            <a:r>
+              <a:rPr sz="2400" b="0" u="sng" baseline="-25000" dirty="0">
+                <a:latin typeface="Calibri"/>
+              </a:rPr>
+              <a:t>i</a:t>
+            </a:r>
+            <a:r>
+              <a:rPr sz="2400" b="0" u="sng" dirty="0">
+                <a:latin typeface="Calibri"/>
+              </a:rPr>
+              <a:t> of the outcomes end in category </a:t>
+            </a:r>
+            <a:r>
+              <a:rPr sz="2400" b="0" u="sng" dirty="0" err="1">
+                <a:latin typeface="Calibri"/>
+              </a:rPr>
+              <a:t>i</a:t>
+            </a:r>
+            <a:r>
+              <a:rPr sz="2400" b="0" dirty="0">
+                <a:latin typeface="Calibri"/>
+              </a:rPr>
+              <a:t>. </a:t>
             </a:r>
           </a:p>
         </p:txBody>
@@ -13689,7 +13460,7 @@
         <p:spPr>
           <a:xfrm>
             <a:off x="164592" y="2968371"/>
-            <a:ext cx="11049572" cy="397764"/>
+            <a:ext cx="11049572" cy="430887"/>
           </a:xfrm>
           <a:prstGeom prst="rect">
             <a:avLst/>
@@ -13697,77 +13468,107 @@
           <a:noFill/>
         </p:spPr>
         <p:txBody>
-          <a:bodyPr wrap="square" anchor="t" lIns="0" rIns="0" tIns="0" bIns="0">
+          <a:bodyPr wrap="square" lIns="0" tIns="0" rIns="0" bIns="0" anchor="t">
             <a:spAutoFit/>
           </a:bodyPr>
           <a:lstStyle/>
           <a:p>
             <a:pPr algn="ctr"/>
             <a:r>
-              <a:rPr sz="2000" b="0">
+              <a:rPr sz="2800" b="0" dirty="0" err="1">
                 <a:latin typeface="Cambria"/>
               </a:rPr>
-              <a:t>Pr{k | N, p} = N! / (∏</a:t>
-            </a:r>
-            <a:r>
-              <a:rPr sz="2000" b="0" baseline="-25000">
+              <a:t>Pr</a:t>
+            </a:r>
+            <a:r>
+              <a:rPr sz="2800" b="0" dirty="0">
                 <a:latin typeface="Cambria"/>
               </a:rPr>
-              <a:t>i=1</a:t>
-            </a:r>
-            <a:r>
-              <a:rPr sz="2000" b="0" baseline="30000">
+              <a:t>{k | N, p} = N! / (∏</a:t>
+            </a:r>
+            <a:r>
+              <a:rPr sz="2800" b="0" baseline="-25000" dirty="0" err="1">
                 <a:latin typeface="Cambria"/>
               </a:rPr>
+              <a:t>i</a:t>
+            </a:r>
+            <a:r>
+              <a:rPr sz="2800" b="0" baseline="-25000" dirty="0">
+                <a:latin typeface="Cambria"/>
+              </a:rPr>
+              <a:t>=1</a:t>
+            </a:r>
+            <a:r>
+              <a:rPr sz="2800" b="0" baseline="30000" dirty="0">
+                <a:latin typeface="Cambria"/>
+              </a:rPr>
               <a:t>n</a:t>
             </a:r>
             <a:r>
-              <a:rPr sz="2000" b="0">
+              <a:rPr sz="2800" b="0" dirty="0">
                 <a:latin typeface="Cambria"/>
               </a:rPr>
               <a:t> k</a:t>
             </a:r>
             <a:r>
-              <a:rPr sz="2000" b="0" baseline="-25000">
+              <a:rPr sz="2800" b="0" baseline="-25000" dirty="0">
                 <a:latin typeface="Cambria"/>
               </a:rPr>
               <a:t>i</a:t>
             </a:r>
             <a:r>
-              <a:rPr sz="2000" b="0">
+              <a:rPr sz="2800" b="0" dirty="0">
                 <a:latin typeface="Cambria"/>
               </a:rPr>
               <a:t>!) · ∏</a:t>
             </a:r>
             <a:r>
-              <a:rPr sz="2000" b="0" baseline="-25000">
+              <a:rPr sz="2800" b="0" baseline="-25000" dirty="0" err="1">
                 <a:latin typeface="Cambria"/>
               </a:rPr>
-              <a:t>i=1</a:t>
-            </a:r>
-            <a:r>
-              <a:rPr sz="2000" b="0" baseline="30000">
+              <a:t>i</a:t>
+            </a:r>
+            <a:r>
+              <a:rPr sz="2800" b="0" baseline="-25000" dirty="0">
                 <a:latin typeface="Cambria"/>
               </a:rPr>
+              <a:t>=1</a:t>
+            </a:r>
+            <a:r>
+              <a:rPr sz="2800" b="0" baseline="30000" dirty="0">
+                <a:latin typeface="Cambria"/>
+              </a:rPr>
               <a:t>n</a:t>
             </a:r>
             <a:r>
-              <a:rPr sz="2000" b="0">
+              <a:rPr sz="2800" b="0" dirty="0">
                 <a:latin typeface="Cambria"/>
               </a:rPr>
-              <a:t> p</a:t>
-            </a:r>
-            <a:r>
-              <a:rPr sz="2000" b="0" baseline="-25000">
+              <a:t> </a:t>
+            </a:r>
+            <a:r>
+              <a:rPr sz="2800" b="0" dirty="0" err="1">
                 <a:latin typeface="Cambria"/>
               </a:rPr>
+              <a:t>p</a:t>
+            </a:r>
+            <a:r>
+              <a:rPr sz="2800" b="0" baseline="-25000" dirty="0" err="1">
+                <a:latin typeface="Cambria"/>
+              </a:rPr>
               <a:t>i</a:t>
             </a:r>
             <a:r>
-              <a:rPr sz="2000" b="0" baseline="30000">
+              <a:rPr sz="2800" b="0" baseline="30000" dirty="0" err="1">
                 <a:latin typeface="Cambria"/>
               </a:rPr>
-              <a:t>kᵢ</a:t>
+              <a:t>k</a:t>
+            </a:r>
+            <a:r>
+              <a:rPr sz="2800" b="0" baseline="30000" dirty="0">
+                <a:latin typeface="Cambria"/>
+              </a:rPr>
+              <a:t>ᵢ</a:t>
             </a:r>
           </a:p>
         </p:txBody>
@@ -14737,8 +14538,8 @@
         </p:nvSpPr>
         <p:spPr>
           <a:xfrm>
-            <a:off x="1099295" y="2277675"/>
-            <a:ext cx="3516923" cy="1193056"/>
+            <a:off x="1099295" y="2720314"/>
+            <a:ext cx="3516923" cy="307777"/>
           </a:xfrm>
           <a:prstGeom prst="rect">
             <a:avLst/>
@@ -14746,47 +14547,68 @@
           <a:noFill/>
         </p:spPr>
         <p:txBody>
-          <a:bodyPr wrap="square" anchor="ctr" lIns="0" rIns="0" tIns="0" bIns="0">
+          <a:bodyPr wrap="square" lIns="0" tIns="0" rIns="0" bIns="0" anchor="ctr">
             <a:spAutoFit/>
           </a:bodyPr>
           <a:lstStyle/>
           <a:p>
             <a:r>
-              <a:rPr sz="1900" b="0">
+              <a:rPr sz="2000" b="0" dirty="0">
                 <a:latin typeface="Cambria"/>
               </a:rPr>
               <a:t>p</a:t>
             </a:r>
             <a:r>
-              <a:rPr sz="1900" b="0" baseline="-25000">
+              <a:rPr sz="2000" b="0" baseline="-25000" dirty="0">
                 <a:latin typeface="Cambria"/>
               </a:rPr>
               <a:t>k</a:t>
             </a:r>
             <a:r>
-              <a:rPr sz="1900" b="0">
+              <a:rPr sz="2000" b="0" dirty="0">
                 <a:latin typeface="Cambria"/>
               </a:rPr>
-              <a:t>(t) = (λt)</a:t>
-            </a:r>
-            <a:r>
-              <a:rPr sz="1900" b="0" baseline="30000">
+              <a:t>(t) = (</a:t>
+            </a:r>
+            <a:r>
+              <a:rPr sz="2000" b="0" dirty="0" err="1">
                 <a:latin typeface="Cambria"/>
               </a:rPr>
+              <a:t>λt</a:t>
+            </a:r>
+            <a:r>
+              <a:rPr sz="2000" b="0" dirty="0">
+                <a:latin typeface="Cambria"/>
+              </a:rPr>
+              <a:t>)</a:t>
+            </a:r>
+            <a:r>
+              <a:rPr sz="2000" b="0" baseline="30000" dirty="0">
+                <a:latin typeface="Cambria"/>
+              </a:rPr>
               <a:t>k</a:t>
             </a:r>
             <a:r>
-              <a:rPr sz="1900" b="0">
+              <a:rPr sz="2000" b="0" dirty="0">
                 <a:latin typeface="Cambria"/>
               </a:rPr>
               <a:t> / k! · e</a:t>
             </a:r>
             <a:r>
-              <a:rPr sz="1900" b="0" baseline="30000">
+              <a:rPr sz="2000" b="0" baseline="30000" dirty="0">
                 <a:latin typeface="Cambria"/>
               </a:rPr>
-              <a:t>−λt</a:t>
-            </a:r>
+              <a:t>−</a:t>
+            </a:r>
+            <a:r>
+              <a:rPr sz="2000" b="0" baseline="30000" dirty="0" err="1">
+                <a:latin typeface="Cambria"/>
+              </a:rPr>
+              <a:t>λt</a:t>
+            </a:r>
+            <a:endParaRPr sz="2000" b="0" baseline="30000" dirty="0">
+              <a:latin typeface="Cambria"/>
+            </a:endParaRPr>
           </a:p>
         </p:txBody>
       </p:sp>
@@ -14798,8 +14620,8 @@
         </p:nvSpPr>
         <p:spPr>
           <a:xfrm>
-            <a:off x="7117699" y="2509997"/>
-            <a:ext cx="4845701" cy="744537"/>
+            <a:off x="7117699" y="2728377"/>
+            <a:ext cx="4845701" cy="307777"/>
           </a:xfrm>
           <a:prstGeom prst="rect">
             <a:avLst/>
@@ -14807,37 +14629,37 @@
           <a:noFill/>
         </p:spPr>
         <p:txBody>
-          <a:bodyPr wrap="square" anchor="ctr" lIns="0" rIns="0" tIns="0" bIns="0">
+          <a:bodyPr wrap="square" lIns="0" tIns="0" rIns="0" bIns="0" anchor="ctr">
             <a:spAutoFit/>
           </a:bodyPr>
           <a:lstStyle/>
           <a:p>
             <a:r>
-              <a:rPr sz="1700" b="0">
+              <a:rPr sz="2000" b="0">
                 <a:latin typeface="Cambria"/>
               </a:rPr>
               <a:t>P(k events in interval) = e</a:t>
             </a:r>
             <a:r>
-              <a:rPr sz="1700" b="0" baseline="30000">
+              <a:rPr sz="2000" b="0" baseline="30000">
                 <a:latin typeface="Cambria"/>
               </a:rPr>
               <a:t>−λ</a:t>
             </a:r>
             <a:r>
-              <a:rPr sz="1700" b="0">
+              <a:rPr sz="2000" b="0">
                 <a:latin typeface="Cambria"/>
               </a:rPr>
               <a:t> · λ</a:t>
             </a:r>
             <a:r>
-              <a:rPr sz="1700" b="0" baseline="30000">
+              <a:rPr sz="2000" b="0" baseline="30000">
                 <a:latin typeface="Cambria"/>
               </a:rPr>
               <a:t>k</a:t>
             </a:r>
             <a:r>
-              <a:rPr sz="1700" b="0">
+              <a:rPr sz="2000" b="0">
                 <a:latin typeface="Cambria"/>
               </a:rPr>
               <a:t> / k!</a:t>
@@ -14853,8 +14675,8 @@
         </p:nvSpPr>
         <p:spPr>
           <a:xfrm>
-            <a:off x="4397471" y="2509997"/>
-            <a:ext cx="3094892" cy="728412"/>
+            <a:off x="4397471" y="2720314"/>
+            <a:ext cx="3094892" cy="307777"/>
           </a:xfrm>
           <a:prstGeom prst="rect">
             <a:avLst/>
@@ -14862,37 +14684,37 @@
           <a:noFill/>
         </p:spPr>
         <p:txBody>
-          <a:bodyPr wrap="square" anchor="ctr" lIns="0" rIns="0" tIns="0" bIns="0">
+          <a:bodyPr wrap="square" lIns="0" tIns="0" rIns="0" bIns="0" anchor="ctr">
             <a:spAutoFit/>
           </a:bodyPr>
           <a:lstStyle/>
           <a:p>
             <a:r>
-              <a:rPr sz="1900">
+              <a:rPr sz="2000">
                 <a:latin typeface="Cambria"/>
               </a:rPr>
               <a:t>P(X = x) = μ</a:t>
             </a:r>
             <a:r>
-              <a:rPr sz="1900" baseline="30000">
+              <a:rPr sz="2000" baseline="30000">
                 <a:latin typeface="Cambria"/>
               </a:rPr>
               <a:t>x</a:t>
             </a:r>
             <a:r>
-              <a:rPr sz="1900">
+              <a:rPr sz="2000">
                 <a:latin typeface="Cambria"/>
               </a:rPr>
               <a:t> e</a:t>
             </a:r>
             <a:r>
-              <a:rPr sz="1900" baseline="30000">
+              <a:rPr sz="2000" baseline="30000">
                 <a:latin typeface="Cambria"/>
               </a:rPr>
               <a:t>−μ</a:t>
             </a:r>
             <a:r>
-              <a:rPr sz="1900">
+              <a:rPr sz="2000">
                 <a:latin typeface="Cambria"/>
               </a:rPr>
               <a:t> / x!</a:t>
@@ -14908,8 +14730,8 @@
         </p:nvSpPr>
         <p:spPr>
           <a:xfrm>
-            <a:off x="4297990" y="4872555"/>
-            <a:ext cx="3616658" cy="947220"/>
+            <a:off x="4297990" y="5038388"/>
+            <a:ext cx="3616658" cy="615553"/>
           </a:xfrm>
           <a:prstGeom prst="rect">
             <a:avLst/>
@@ -14917,25 +14739,46 @@
           <a:noFill/>
         </p:spPr>
         <p:txBody>
-          <a:bodyPr wrap="square" anchor="ctr" lIns="0" rIns="0" tIns="0" bIns="0">
+          <a:bodyPr wrap="square" lIns="0" tIns="0" rIns="0" bIns="0" anchor="ctr">
             <a:spAutoFit/>
           </a:bodyPr>
           <a:lstStyle/>
           <a:p>
             <a:r>
-              <a:rPr sz="1800">
+              <a:rPr sz="2000" dirty="0">
                 <a:latin typeface="Cambria"/>
               </a:rPr>
-              <a:t>Mean : μ (rate per interval)</a:t>
-            </a:r>
-          </a:p>
-          <a:p>
-            <a:r>
-              <a:rPr sz="1800">
+              <a:t>Mean : </a:t>
+            </a:r>
+            <a:r>
+              <a:rPr sz="2000" dirty="0" err="1">
                 <a:latin typeface="Cambria"/>
               </a:rPr>
-              <a:t>Variance : μ</a:t>
-            </a:r>
+              <a:t>μ</a:t>
+            </a:r>
+            <a:r>
+              <a:rPr sz="2000" dirty="0">
+                <a:latin typeface="Cambria"/>
+              </a:rPr>
+              <a:t> (rate per interval)</a:t>
+            </a:r>
+          </a:p>
+          <a:p>
+            <a:r>
+              <a:rPr sz="2000" dirty="0">
+                <a:latin typeface="Cambria"/>
+              </a:rPr>
+              <a:t>Variance : </a:t>
+            </a:r>
+            <a:r>
+              <a:rPr sz="2000" dirty="0" err="1">
+                <a:latin typeface="Cambria"/>
+              </a:rPr>
+              <a:t>μ</a:t>
+            </a:r>
+            <a:endParaRPr sz="2000" dirty="0">
+              <a:latin typeface="Cambria"/>
+            </a:endParaRPr>
           </a:p>
         </p:txBody>
       </p:sp>
@@ -14949,126 +14792,6 @@
   <p:clrMapOvr>
     <a:masterClrMapping/>
   </p:clrMapOvr>
-  <p:timing>
-    <p:tnLst>
-      <p:par>
-        <p:cTn id="1" dur="indefinite" restart="never" nodeType="tmRoot">
-          <p:childTnLst>
-            <p:seq concurrent="1" nextAc="seek">
-              <p:cTn id="2" dur="indefinite" nodeType="mainSeq">
-                <p:childTnLst>
-                  <p:par>
-                    <p:cTn id="3" fill="hold" nodeType="clickPar">
-                      <p:stCondLst>
-                        <p:cond delay="indefinite"/>
-                      </p:stCondLst>
-                      <p:childTnLst>
-                        <p:par>
-                          <p:cTn id="4" fill="hold" nodeType="withGroup">
-                            <p:stCondLst>
-                              <p:cond delay="0"/>
-                            </p:stCondLst>
-                            <p:childTnLst>
-                              <p:par>
-                                <p:cTn id="5" presetID="1" presetClass="entr" presetSubtype="0" fill="hold" nodeType="clickEffect">
-                                  <p:stCondLst>
-                                    <p:cond delay="0"/>
-                                  </p:stCondLst>
-                                  <p:childTnLst>
-                                    <p:set>
-                                      <p:cBhvr>
-                                        <p:cTn id="6" dur="1" fill="hold">
-                                          <p:stCondLst>
-                                            <p:cond delay="0"/>
-                                          </p:stCondLst>
-                                        </p:cTn>
-                                        <p:tgtEl>
-                                          <p:spTgt spid="189443"/>
-                                        </p:tgtEl>
-                                        <p:attrNameLst>
-                                          <p:attrName>style.visibility</p:attrName>
-                                        </p:attrNameLst>
-                                      </p:cBhvr>
-                                      <p:to>
-                                        <p:strVal val="visible"/>
-                                      </p:to>
-                                    </p:set>
-                                  </p:childTnLst>
-                                </p:cTn>
-                              </p:par>
-                            </p:childTnLst>
-                          </p:cTn>
-                        </p:par>
-                      </p:childTnLst>
-                    </p:cTn>
-                  </p:par>
-                  <p:par>
-                    <p:cTn id="7" fill="hold" nodeType="clickPar">
-                      <p:stCondLst>
-                        <p:cond delay="indefinite"/>
-                      </p:stCondLst>
-                      <p:childTnLst>
-                        <p:par>
-                          <p:cTn id="8" fill="hold" nodeType="withGroup">
-                            <p:stCondLst>
-                              <p:cond delay="0"/>
-                            </p:stCondLst>
-                            <p:childTnLst>
-                              <p:par>
-                                <p:cTn id="9" presetID="1" presetClass="entr" presetSubtype="0" fill="hold" nodeType="clickEffect">
-                                  <p:stCondLst>
-                                    <p:cond delay="0"/>
-                                  </p:stCondLst>
-                                  <p:childTnLst>
-                                    <p:set>
-                                      <p:cBhvr>
-                                        <p:cTn id="10" dur="1" fill="hold">
-                                          <p:stCondLst>
-                                            <p:cond delay="0"/>
-                                          </p:stCondLst>
-                                        </p:cTn>
-                                        <p:tgtEl>
-                                          <p:spTgt spid="2"/>
-                                        </p:tgtEl>
-                                        <p:attrNameLst>
-                                          <p:attrName>style.visibility</p:attrName>
-                                        </p:attrNameLst>
-                                      </p:cBhvr>
-                                      <p:to>
-                                        <p:strVal val="visible"/>
-                                      </p:to>
-                                    </p:set>
-                                  </p:childTnLst>
-                                </p:cTn>
-                              </p:par>
-                            </p:childTnLst>
-                          </p:cTn>
-                        </p:par>
-                      </p:childTnLst>
-                    </p:cTn>
-                  </p:par>
-                </p:childTnLst>
-              </p:cTn>
-              <p:prevCondLst>
-                <p:cond evt="onPrev" delay="0">
-                  <p:tgtEl>
-                    <p:sldTgt/>
-                  </p:tgtEl>
-                </p:cond>
-              </p:prevCondLst>
-              <p:nextCondLst>
-                <p:cond evt="onNext" delay="0">
-                  <p:tgtEl>
-                    <p:sldTgt/>
-                  </p:tgtEl>
-                </p:cond>
-              </p:nextCondLst>
-            </p:seq>
-          </p:childTnLst>
-        </p:cTn>
-      </p:par>
-    </p:tnLst>
-  </p:timing>
 </p:sld>
 </file>
 
@@ -15379,8 +15102,8 @@
           </p:nvSpPr>
           <p:spPr bwMode="auto">
             <a:xfrm>
-              <a:off x="1369276" y="4106041"/>
-              <a:ext cx="9001125" cy="400050"/>
+              <a:off x="1936377" y="4106041"/>
+              <a:ext cx="7866924" cy="337274"/>
             </a:xfrm>
             <a:prstGeom prst="rect">
               <a:avLst/>
@@ -15591,38 +15314,33 @@
                 <a:buNone/>
               </a:pPr>
               <a:r>
-                <a:rPr lang="en-US" altLang="en-US" sz="2000" dirty="0"/>
+                <a:rPr lang="en-US" altLang="en-US" sz="2400" dirty="0"/>
                 <a:t>Where o(</a:t>
               </a:r>
               <a:r>
-                <a:rPr lang="en-US" altLang="en-US" sz="2000" dirty="0" err="1"/>
+                <a:rPr lang="en-US" altLang="en-US" sz="2400" dirty="0" err="1"/>
                 <a:t>dt</a:t>
               </a:r>
               <a:r>
-                <a:rPr lang="en-US" altLang="en-US" sz="2000" dirty="0"/>
+                <a:rPr lang="en-US" altLang="en-US" sz="2400" dirty="0"/>
                 <a:t>) represents higher order term of </a:t>
               </a:r>
               <a:r>
-                <a:rPr lang="en-US" altLang="en-US" sz="2000" dirty="0" err="1"/>
+                <a:rPr lang="en-US" altLang="en-US" sz="2400" dirty="0" err="1"/>
                 <a:t>dt</a:t>
               </a:r>
               <a:r>
-                <a:rPr lang="en-US" altLang="en-US" sz="2000" dirty="0"/>
+                <a:rPr lang="en-US" altLang="en-US" sz="2400" dirty="0"/>
                 <a:t> that can be ignored as </a:t>
               </a:r>
               <a:r>
-                <a:rPr lang="en-US" altLang="en-US" sz="2000" dirty="0" err="1"/>
+                <a:rPr lang="en-US" altLang="en-US" sz="2400" dirty="0" err="1"/>
                 <a:t>dt</a:t>
               </a:r>
               <a:r>
-                <a:rPr lang="en-US" altLang="en-US" sz="2000" dirty="0"/>
-                <a:t> </a:t>
+                <a:rPr lang="en-US" altLang="en-US" sz="2400" dirty="0"/>
+                <a:t> → 0</a:t>
               </a:r>
-              <a:r>
-                <a:rPr lang="en-US" altLang="en-US" sz="2000" dirty="0"/>
-                <a:t>→ 0</a:t>
-              </a:r>
-              <a:endParaRPr lang="en-US" altLang="en-US" sz="2000" dirty="0"/>
             </a:p>
           </p:txBody>
         </p:sp>
@@ -15674,7 +15392,7 @@
             <a:lstStyle/>
             <a:p>
               <a:pPr algn="ctr"/>
-              <a:endParaRPr lang="en-US" dirty="0"/>
+              <a:endParaRPr lang="en-US" sz="2400" dirty="0"/>
             </a:p>
           </p:txBody>
         </p:sp>
@@ -15726,7 +15444,7 @@
             <a:lstStyle/>
             <a:p>
               <a:pPr algn="ctr"/>
-              <a:endParaRPr lang="en-US" dirty="0"/>
+              <a:endParaRPr lang="en-US" sz="2400" dirty="0"/>
             </a:p>
           </p:txBody>
         </p:sp>
@@ -15778,7 +15496,7 @@
             <a:lstStyle/>
             <a:p>
               <a:pPr algn="ctr"/>
-              <a:endParaRPr lang="en-US" dirty="0"/>
+              <a:endParaRPr lang="en-US" sz="2400" dirty="0"/>
             </a:p>
           </p:txBody>
         </p:sp>
@@ -15830,7 +15548,7 @@
             <a:lstStyle/>
             <a:p>
               <a:pPr algn="ctr"/>
-              <a:endParaRPr lang="en-US" dirty="0"/>
+              <a:endParaRPr lang="en-US" sz="2400" dirty="0"/>
             </a:p>
           </p:txBody>
         </p:sp>
@@ -15843,8 +15561,8 @@
         </p:nvSpPr>
         <p:spPr>
           <a:xfrm>
-            <a:off x="2728913" y="2347914"/>
-            <a:ext cx="6172200" cy="1431925"/>
+            <a:off x="2728913" y="2694545"/>
+            <a:ext cx="6172200" cy="738664"/>
           </a:xfrm>
           <a:prstGeom prst="rect">
             <a:avLst/>
@@ -15852,33 +15570,61 @@
           <a:noFill/>
         </p:spPr>
         <p:txBody>
-          <a:bodyPr wrap="square" anchor="ctr" lIns="0" rIns="0" tIns="0" bIns="0">
+          <a:bodyPr wrap="square" lIns="0" tIns="0" rIns="0" bIns="0" anchor="ctr">
             <a:spAutoFit/>
           </a:bodyPr>
           <a:lstStyle/>
           <a:p>
             <a:r>
-              <a:rPr sz="1900" b="0">
+              <a:rPr sz="2400" b="0" dirty="0" err="1">
                 <a:latin typeface="Cambria"/>
               </a:rPr>
-              <a:t>Pr{no event in the next dt} = 1 − λdt + o(dt)</a:t>
-            </a:r>
-          </a:p>
-          <a:p>
-            <a:r>
-              <a:rPr sz="1900" b="0">
+              <a:t>Pr</a:t>
+            </a:r>
+            <a:r>
+              <a:rPr sz="2400" b="0" dirty="0">
                 <a:latin typeface="Cambria"/>
               </a:rPr>
-              <a:t>Pr{1 event in the next dt} = λdt + o(dt)</a:t>
-            </a:r>
-          </a:p>
-          <a:p>
-            <a:r>
-              <a:rPr sz="1900" b="0">
+              <a:t>{no event in the next dt} = 1 − </a:t>
+            </a:r>
+            <a:r>
+              <a:rPr sz="2400" b="0" dirty="0" err="1">
                 <a:latin typeface="Cambria"/>
               </a:rPr>
-              <a:t>Pr{more than one event in the next dt} = o(dt)</a:t>
-            </a:r>
+              <a:t>λdt</a:t>
+            </a:r>
+            <a:r>
+              <a:rPr sz="2400" b="0" dirty="0">
+                <a:latin typeface="Cambria"/>
+              </a:rPr>
+              <a:t> </a:t>
+            </a:r>
+            <a:endParaRPr lang="en-US" sz="2400" b="0" dirty="0">
+              <a:latin typeface="Cambria"/>
+            </a:endParaRPr>
+          </a:p>
+          <a:p>
+            <a:r>
+              <a:rPr sz="2400" b="0" dirty="0" err="1">
+                <a:latin typeface="Cambria"/>
+              </a:rPr>
+              <a:t>Pr</a:t>
+            </a:r>
+            <a:r>
+              <a:rPr sz="2400" b="0" dirty="0">
+                <a:latin typeface="Cambria"/>
+              </a:rPr>
+              <a:t>{1 event in the next dt} = </a:t>
+            </a:r>
+            <a:r>
+              <a:rPr sz="2400" b="0" dirty="0" err="1">
+                <a:latin typeface="Cambria"/>
+              </a:rPr>
+              <a:t>λdt</a:t>
+            </a:r>
+            <a:endParaRPr sz="2400" b="0" dirty="0">
+              <a:latin typeface="Cambria"/>
+            </a:endParaRPr>
           </a:p>
         </p:txBody>
       </p:sp>
@@ -16415,8 +16161,8 @@
         </p:nvSpPr>
         <p:spPr>
           <a:xfrm>
-            <a:off x="4640426" y="4125439"/>
-            <a:ext cx="2278063" cy="1050925"/>
+            <a:off x="4640426" y="4466235"/>
+            <a:ext cx="2278063" cy="369332"/>
           </a:xfrm>
           <a:prstGeom prst="rect">
             <a:avLst/>
@@ -16424,31 +16170,31 @@
           <a:noFill/>
         </p:spPr>
         <p:txBody>
-          <a:bodyPr wrap="square" anchor="ctr" lIns="0" rIns="0" tIns="0" bIns="0">
+          <a:bodyPr wrap="square" lIns="0" tIns="0" rIns="0" bIns="0" anchor="ctr">
             <a:spAutoFit/>
           </a:bodyPr>
           <a:lstStyle/>
           <a:p>
             <a:r>
-              <a:rPr sz="2000" b="0">
+              <a:rPr sz="2400" b="0">
                 <a:latin typeface="Cambria"/>
               </a:rPr>
               <a:t>dp</a:t>
             </a:r>
             <a:r>
-              <a:rPr sz="2000" b="0" baseline="-25000">
+              <a:rPr sz="2400" b="0" baseline="-25000">
                 <a:latin typeface="Cambria"/>
               </a:rPr>
               <a:t>0</a:t>
             </a:r>
             <a:r>
-              <a:rPr sz="2000" b="0">
+              <a:rPr sz="2400" b="0">
                 <a:latin typeface="Cambria"/>
               </a:rPr>
               <a:t> / dt = −λ p</a:t>
             </a:r>
             <a:r>
-              <a:rPr sz="2000" b="0" baseline="-25000">
+              <a:rPr sz="2400" b="0" baseline="-25000">
                 <a:latin typeface="Cambria"/>
               </a:rPr>
               <a:t>0</a:t>
@@ -16464,8 +16210,8 @@
         </p:nvSpPr>
         <p:spPr>
           <a:xfrm>
-            <a:off x="4159900" y="5897173"/>
-            <a:ext cx="2963863" cy="582613"/>
+            <a:off x="4159900" y="6003813"/>
+            <a:ext cx="2963863" cy="369332"/>
           </a:xfrm>
           <a:prstGeom prst="rect">
             <a:avLst/>
@@ -16473,25 +16219,25 @@
           <a:noFill/>
         </p:spPr>
         <p:txBody>
-          <a:bodyPr wrap="square" anchor="ctr" lIns="0" rIns="0" tIns="0" bIns="0">
+          <a:bodyPr wrap="square" lIns="0" tIns="0" rIns="0" bIns="0" anchor="ctr">
             <a:spAutoFit/>
           </a:bodyPr>
           <a:lstStyle/>
           <a:p>
             <a:r>
-              <a:rPr sz="2600" b="0">
+              <a:rPr sz="2400" b="0">
                 <a:latin typeface="Cambria"/>
               </a:rPr>
               <a:t>p</a:t>
             </a:r>
             <a:r>
-              <a:rPr sz="2600" b="0" baseline="-25000">
+              <a:rPr sz="2400" b="0" baseline="-25000">
                 <a:latin typeface="Cambria"/>
               </a:rPr>
               <a:t>0</a:t>
             </a:r>
             <a:r>
-              <a:rPr sz="2600" b="0">
+              <a:rPr sz="2400" b="0">
                 <a:latin typeface="Cambria"/>
               </a:rPr>
               <a:t>(t) = exp(−λt)</a:t>
@@ -16507,8 +16253,8 @@
         </p:nvSpPr>
         <p:spPr>
           <a:xfrm>
-            <a:off x="3207885" y="2832085"/>
-            <a:ext cx="5671456" cy="658406"/>
+            <a:off x="3207885" y="2976622"/>
+            <a:ext cx="5671456" cy="369332"/>
           </a:xfrm>
           <a:prstGeom prst="rect">
             <a:avLst/>
@@ -16516,40 +16262,52 @@
           <a:noFill/>
         </p:spPr>
         <p:txBody>
-          <a:bodyPr wrap="square" anchor="ctr" lIns="0" rIns="0" tIns="0" bIns="0">
+          <a:bodyPr wrap="square" lIns="0" tIns="0" rIns="0" bIns="0" anchor="ctr">
             <a:spAutoFit/>
           </a:bodyPr>
           <a:lstStyle/>
           <a:p>
             <a:r>
-              <a:rPr sz="2300" b="0">
+              <a:rPr sz="2400" b="0" dirty="0">
                 <a:latin typeface="Cambria"/>
               </a:rPr>
               <a:t>p</a:t>
             </a:r>
             <a:r>
-              <a:rPr sz="2300" b="0" baseline="-25000">
+              <a:rPr sz="2400" b="0" baseline="-25000" dirty="0">
                 <a:latin typeface="Cambria"/>
               </a:rPr>
               <a:t>0</a:t>
             </a:r>
             <a:r>
-              <a:rPr sz="2300" b="0">
+              <a:rPr sz="2400" b="0" dirty="0">
                 <a:latin typeface="Cambria"/>
               </a:rPr>
               <a:t>(t + dt) = p</a:t>
             </a:r>
             <a:r>
-              <a:rPr sz="2300" b="0" baseline="-25000">
+              <a:rPr sz="2400" b="0" baseline="-25000" dirty="0">
                 <a:latin typeface="Cambria"/>
               </a:rPr>
               <a:t>0</a:t>
             </a:r>
             <a:r>
-              <a:rPr sz="2300" b="0">
+              <a:rPr sz="2400" b="0" dirty="0">
                 <a:latin typeface="Cambria"/>
               </a:rPr>
-              <a:t>(t)(1 − λdt − o(dt))</a:t>
+              <a:t>(t)(1 − </a:t>
+            </a:r>
+            <a:r>
+              <a:rPr sz="2400" b="0" dirty="0" err="1">
+                <a:latin typeface="Cambria"/>
+              </a:rPr>
+              <a:t>λdt</a:t>
+            </a:r>
+            <a:r>
+              <a:rPr sz="2400" b="0" dirty="0">
+                <a:latin typeface="Cambria"/>
+              </a:rPr>
+              <a:t>)</a:t>
             </a:r>
           </a:p>
         </p:txBody>
@@ -16564,126 +16322,6 @@
   <p:clrMapOvr>
     <a:masterClrMapping/>
   </p:clrMapOvr>
-  <p:timing>
-    <p:tnLst>
-      <p:par>
-        <p:cTn id="1" dur="indefinite" restart="never" nodeType="tmRoot">
-          <p:childTnLst>
-            <p:seq concurrent="1" nextAc="seek">
-              <p:cTn id="2" dur="indefinite" nodeType="mainSeq">
-                <p:childTnLst>
-                  <p:par>
-                    <p:cTn id="3" fill="hold" nodeType="clickPar">
-                      <p:stCondLst>
-                        <p:cond delay="indefinite"/>
-                      </p:stCondLst>
-                      <p:childTnLst>
-                        <p:par>
-                          <p:cTn id="4" fill="hold" nodeType="withGroup">
-                            <p:stCondLst>
-                              <p:cond delay="0"/>
-                            </p:stCondLst>
-                            <p:childTnLst>
-                              <p:par>
-                                <p:cTn id="5" presetID="1" presetClass="entr" presetSubtype="0" fill="hold" nodeType="clickEffect">
-                                  <p:stCondLst>
-                                    <p:cond delay="0"/>
-                                  </p:stCondLst>
-                                  <p:childTnLst>
-                                    <p:set>
-                                      <p:cBhvr>
-                                        <p:cTn id="6" dur="1" fill="hold">
-                                          <p:stCondLst>
-                                            <p:cond delay="0"/>
-                                          </p:stCondLst>
-                                        </p:cTn>
-                                        <p:tgtEl>
-                                          <p:spTgt spid="9"/>
-                                        </p:tgtEl>
-                                        <p:attrNameLst>
-                                          <p:attrName>style.visibility</p:attrName>
-                                        </p:attrNameLst>
-                                      </p:cBhvr>
-                                      <p:to>
-                                        <p:strVal val="visible"/>
-                                      </p:to>
-                                    </p:set>
-                                  </p:childTnLst>
-                                </p:cTn>
-                              </p:par>
-                            </p:childTnLst>
-                          </p:cTn>
-                        </p:par>
-                      </p:childTnLst>
-                    </p:cTn>
-                  </p:par>
-                  <p:par>
-                    <p:cTn id="7" fill="hold" nodeType="clickPar">
-                      <p:stCondLst>
-                        <p:cond delay="indefinite"/>
-                      </p:stCondLst>
-                      <p:childTnLst>
-                        <p:par>
-                          <p:cTn id="8" fill="hold" nodeType="withGroup">
-                            <p:stCondLst>
-                              <p:cond delay="0"/>
-                            </p:stCondLst>
-                            <p:childTnLst>
-                              <p:par>
-                                <p:cTn id="9" presetID="1" presetClass="entr" presetSubtype="0" fill="hold" nodeType="clickEffect">
-                                  <p:stCondLst>
-                                    <p:cond delay="0"/>
-                                  </p:stCondLst>
-                                  <p:childTnLst>
-                                    <p:set>
-                                      <p:cBhvr>
-                                        <p:cTn id="10" dur="1" fill="hold">
-                                          <p:stCondLst>
-                                            <p:cond delay="0"/>
-                                          </p:stCondLst>
-                                        </p:cTn>
-                                        <p:tgtEl>
-                                          <p:spTgt spid="10"/>
-                                        </p:tgtEl>
-                                        <p:attrNameLst>
-                                          <p:attrName>style.visibility</p:attrName>
-                                        </p:attrNameLst>
-                                      </p:cBhvr>
-                                      <p:to>
-                                        <p:strVal val="visible"/>
-                                      </p:to>
-                                    </p:set>
-                                  </p:childTnLst>
-                                </p:cTn>
-                              </p:par>
-                            </p:childTnLst>
-                          </p:cTn>
-                        </p:par>
-                      </p:childTnLst>
-                    </p:cTn>
-                  </p:par>
-                </p:childTnLst>
-              </p:cTn>
-              <p:prevCondLst>
-                <p:cond evt="onPrev" delay="0">
-                  <p:tgtEl>
-                    <p:sldTgt/>
-                  </p:tgtEl>
-                </p:cond>
-              </p:prevCondLst>
-              <p:nextCondLst>
-                <p:cond evt="onNext" delay="0">
-                  <p:tgtEl>
-                    <p:sldTgt/>
-                  </p:tgtEl>
-                </p:cond>
-              </p:nextCondLst>
-            </p:seq>
-          </p:childTnLst>
-        </p:cTn>
-      </p:par>
-    </p:tnLst>
-  </p:timing>
 </p:sld>
 </file>
 
@@ -16972,8 +16610,8 @@
         </p:nvSpPr>
         <p:spPr>
           <a:xfrm>
-            <a:off x="5916613" y="1713463"/>
-            <a:ext cx="3516923" cy="1095375"/>
+            <a:off x="5916613" y="2076484"/>
+            <a:ext cx="3516923" cy="369332"/>
           </a:xfrm>
           <a:prstGeom prst="rect">
             <a:avLst/>
@@ -16981,47 +16619,68 @@
           <a:noFill/>
         </p:spPr>
         <p:txBody>
-          <a:bodyPr wrap="square" anchor="ctr" lIns="0" rIns="0" tIns="0" bIns="0">
+          <a:bodyPr wrap="square" lIns="0" tIns="0" rIns="0" bIns="0" anchor="ctr">
             <a:spAutoFit/>
           </a:bodyPr>
           <a:lstStyle/>
           <a:p>
             <a:r>
-              <a:rPr sz="1900" b="0">
+              <a:rPr sz="2400" b="0" dirty="0">
                 <a:latin typeface="Cambria"/>
               </a:rPr>
               <a:t>p</a:t>
             </a:r>
             <a:r>
-              <a:rPr sz="1900" b="0" baseline="-25000">
+              <a:rPr sz="2400" b="0" baseline="-25000" dirty="0">
                 <a:latin typeface="Cambria"/>
               </a:rPr>
               <a:t>k</a:t>
             </a:r>
             <a:r>
-              <a:rPr sz="1900" b="0">
+              <a:rPr sz="2400" b="0" dirty="0">
                 <a:latin typeface="Cambria"/>
               </a:rPr>
-              <a:t>(t) = (λt)</a:t>
-            </a:r>
-            <a:r>
-              <a:rPr sz="1900" b="0" baseline="30000">
+              <a:t>(t) = (</a:t>
+            </a:r>
+            <a:r>
+              <a:rPr sz="2400" b="0" dirty="0" err="1">
                 <a:latin typeface="Cambria"/>
               </a:rPr>
+              <a:t>λt</a:t>
+            </a:r>
+            <a:r>
+              <a:rPr sz="2400" b="0" dirty="0">
+                <a:latin typeface="Cambria"/>
+              </a:rPr>
+              <a:t>)</a:t>
+            </a:r>
+            <a:r>
+              <a:rPr sz="2400" b="0" baseline="30000" dirty="0">
+                <a:latin typeface="Cambria"/>
+              </a:rPr>
               <a:t>k</a:t>
             </a:r>
             <a:r>
-              <a:rPr sz="1900" b="0">
+              <a:rPr sz="2400" b="0" dirty="0">
                 <a:latin typeface="Cambria"/>
               </a:rPr>
               <a:t> / k! · e</a:t>
             </a:r>
             <a:r>
-              <a:rPr sz="1900" b="0" baseline="30000">
+              <a:rPr sz="2400" b="0" baseline="30000" dirty="0">
                 <a:latin typeface="Cambria"/>
               </a:rPr>
-              <a:t>−λt</a:t>
-            </a:r>
+              <a:t>−</a:t>
+            </a:r>
+            <a:r>
+              <a:rPr sz="2400" b="0" baseline="30000" dirty="0" err="1">
+                <a:latin typeface="Cambria"/>
+              </a:rPr>
+              <a:t>λt</a:t>
+            </a:r>
+            <a:endParaRPr sz="2400" b="0" baseline="30000" dirty="0">
+              <a:latin typeface="Cambria"/>
+            </a:endParaRPr>
           </a:p>
         </p:txBody>
       </p:sp>
@@ -17033,8 +16692,8 @@
         </p:nvSpPr>
         <p:spPr>
           <a:xfrm>
-            <a:off x="2335213" y="3158089"/>
-            <a:ext cx="6235700" cy="704850"/>
+            <a:off x="2335213" y="3325848"/>
+            <a:ext cx="6235700" cy="369332"/>
           </a:xfrm>
           <a:prstGeom prst="rect">
             <a:avLst/>
@@ -17042,31 +16701,31 @@
           <a:noFill/>
         </p:spPr>
         <p:txBody>
-          <a:bodyPr wrap="square" anchor="ctr" lIns="0" rIns="0" tIns="0" bIns="0">
+          <a:bodyPr wrap="square" lIns="0" tIns="0" rIns="0" bIns="0" anchor="ctr">
             <a:spAutoFit/>
           </a:bodyPr>
           <a:lstStyle/>
           <a:p>
             <a:r>
-              <a:rPr sz="2300" b="0">
+              <a:rPr sz="2400" b="0">
                 <a:latin typeface="Cambria"/>
               </a:rPr>
               <a:t>Pr{no event in 0 to t} = p</a:t>
             </a:r>
             <a:r>
-              <a:rPr sz="2300" b="0" baseline="-25000">
+              <a:rPr sz="2400" b="0" baseline="-25000">
                 <a:latin typeface="Cambria"/>
               </a:rPr>
               <a:t>0</a:t>
             </a:r>
             <a:r>
-              <a:rPr sz="2300" b="0">
+              <a:rPr sz="2400" b="0">
                 <a:latin typeface="Cambria"/>
               </a:rPr>
               <a:t>(t) = e</a:t>
             </a:r>
             <a:r>
-              <a:rPr sz="2300" b="0" baseline="30000">
+              <a:rPr sz="2400" b="0" baseline="30000">
                 <a:latin typeface="Cambria"/>
               </a:rPr>
               <a:t>−λt</a:t>
@@ -17756,7 +17415,7 @@
           <a:noFill/>
         </p:spPr>
         <p:txBody>
-          <a:bodyPr wrap="square" anchor="ctr" lIns="0" rIns="0" tIns="0" bIns="0">
+          <a:bodyPr wrap="square" lIns="0" tIns="0" rIns="0" bIns="0" anchor="ctr">
             <a:spAutoFit/>
           </a:bodyPr>
           <a:lstStyle/>
@@ -17817,7 +17476,7 @@
           <a:noFill/>
         </p:spPr>
         <p:txBody>
-          <a:bodyPr wrap="square" anchor="ctr" lIns="0" rIns="0" tIns="0" bIns="0">
+          <a:bodyPr wrap="square" lIns="0" tIns="0" rIns="0" bIns="0" anchor="ctr">
             <a:spAutoFit/>
           </a:bodyPr>
           <a:lstStyle/>
@@ -17872,7 +17531,7 @@
           <a:noFill/>
         </p:spPr>
         <p:txBody>
-          <a:bodyPr wrap="square" anchor="ctr" lIns="0" rIns="0" tIns="0" bIns="0">
+          <a:bodyPr wrap="square" lIns="0" tIns="0" rIns="0" bIns="0" anchor="ctr">
             <a:spAutoFit/>
           </a:bodyPr>
           <a:lstStyle/>
@@ -17927,7 +17586,7 @@
           <a:noFill/>
         </p:spPr>
         <p:txBody>
-          <a:bodyPr wrap="square" anchor="ctr" lIns="0" rIns="0" tIns="0" bIns="0">
+          <a:bodyPr wrap="square" lIns="0" tIns="0" rIns="0" bIns="0" anchor="ctr">
             <a:spAutoFit/>
           </a:bodyPr>
           <a:lstStyle/>
@@ -17959,126 +17618,6 @@
   <p:clrMapOvr>
     <a:masterClrMapping/>
   </p:clrMapOvr>
-  <p:timing>
-    <p:tnLst>
-      <p:par>
-        <p:cTn id="1" dur="indefinite" restart="never" nodeType="tmRoot">
-          <p:childTnLst>
-            <p:seq concurrent="1" nextAc="seek">
-              <p:cTn id="2" dur="indefinite" nodeType="mainSeq">
-                <p:childTnLst>
-                  <p:par>
-                    <p:cTn id="3" fill="hold" nodeType="clickPar">
-                      <p:stCondLst>
-                        <p:cond delay="indefinite"/>
-                      </p:stCondLst>
-                      <p:childTnLst>
-                        <p:par>
-                          <p:cTn id="4" fill="hold" nodeType="withGroup">
-                            <p:stCondLst>
-                              <p:cond delay="0"/>
-                            </p:stCondLst>
-                            <p:childTnLst>
-                              <p:par>
-                                <p:cTn id="5" presetID="1" presetClass="entr" presetSubtype="0" fill="hold" nodeType="clickEffect">
-                                  <p:stCondLst>
-                                    <p:cond delay="0"/>
-                                  </p:stCondLst>
-                                  <p:childTnLst>
-                                    <p:set>
-                                      <p:cBhvr>
-                                        <p:cTn id="6" dur="1" fill="hold">
-                                          <p:stCondLst>
-                                            <p:cond delay="0"/>
-                                          </p:stCondLst>
-                                        </p:cTn>
-                                        <p:tgtEl>
-                                          <p:spTgt spid="189443"/>
-                                        </p:tgtEl>
-                                        <p:attrNameLst>
-                                          <p:attrName>style.visibility</p:attrName>
-                                        </p:attrNameLst>
-                                      </p:cBhvr>
-                                      <p:to>
-                                        <p:strVal val="visible"/>
-                                      </p:to>
-                                    </p:set>
-                                  </p:childTnLst>
-                                </p:cTn>
-                              </p:par>
-                            </p:childTnLst>
-                          </p:cTn>
-                        </p:par>
-                      </p:childTnLst>
-                    </p:cTn>
-                  </p:par>
-                  <p:par>
-                    <p:cTn id="7" fill="hold" nodeType="clickPar">
-                      <p:stCondLst>
-                        <p:cond delay="indefinite"/>
-                      </p:stCondLst>
-                      <p:childTnLst>
-                        <p:par>
-                          <p:cTn id="8" fill="hold" nodeType="withGroup">
-                            <p:stCondLst>
-                              <p:cond delay="0"/>
-                            </p:stCondLst>
-                            <p:childTnLst>
-                              <p:par>
-                                <p:cTn id="9" presetID="1" presetClass="entr" presetSubtype="0" fill="hold" nodeType="clickEffect">
-                                  <p:stCondLst>
-                                    <p:cond delay="0"/>
-                                  </p:stCondLst>
-                                  <p:childTnLst>
-                                    <p:set>
-                                      <p:cBhvr>
-                                        <p:cTn id="10" dur="1" fill="hold">
-                                          <p:stCondLst>
-                                            <p:cond delay="0"/>
-                                          </p:stCondLst>
-                                        </p:cTn>
-                                        <p:tgtEl>
-                                          <p:spTgt spid="2"/>
-                                        </p:tgtEl>
-                                        <p:attrNameLst>
-                                          <p:attrName>style.visibility</p:attrName>
-                                        </p:attrNameLst>
-                                      </p:cBhvr>
-                                      <p:to>
-                                        <p:strVal val="visible"/>
-                                      </p:to>
-                                    </p:set>
-                                  </p:childTnLst>
-                                </p:cTn>
-                              </p:par>
-                            </p:childTnLst>
-                          </p:cTn>
-                        </p:par>
-                      </p:childTnLst>
-                    </p:cTn>
-                  </p:par>
-                </p:childTnLst>
-              </p:cTn>
-              <p:prevCondLst>
-                <p:cond evt="onPrev" delay="0">
-                  <p:tgtEl>
-                    <p:sldTgt/>
-                  </p:tgtEl>
-                </p:cond>
-              </p:prevCondLst>
-              <p:nextCondLst>
-                <p:cond evt="onNext" delay="0">
-                  <p:tgtEl>
-                    <p:sldTgt/>
-                  </p:tgtEl>
-                </p:cond>
-              </p:nextCondLst>
-            </p:seq>
-          </p:childTnLst>
-        </p:cTn>
-      </p:par>
-    </p:tnLst>
-  </p:timing>
 </p:sld>
 </file>
 
@@ -18973,7 +18512,7 @@
           <a:noFill/>
         </p:spPr>
         <p:txBody>
-          <a:bodyPr wrap="square" anchor="ctr" lIns="0" rIns="0" tIns="0" bIns="0">
+          <a:bodyPr wrap="square" lIns="0" tIns="0" rIns="0" bIns="0" anchor="ctr">
             <a:spAutoFit/>
           </a:bodyPr>
           <a:lstStyle/>
@@ -19021,81 +18560,6 @@
   <p:clrMapOvr>
     <a:masterClrMapping/>
   </p:clrMapOvr>
-  <p:timing>
-    <p:tnLst>
-      <p:par>
-        <p:cTn id="1" dur="indefinite" restart="never" nodeType="tmRoot">
-          <p:childTnLst>
-            <p:seq concurrent="1" nextAc="seek">
-              <p:cTn id="2" dur="indefinite" nodeType="mainSeq">
-                <p:childTnLst>
-                  <p:par>
-                    <p:cTn id="3" fill="hold">
-                      <p:stCondLst>
-                        <p:cond delay="indefinite"/>
-                      </p:stCondLst>
-                      <p:childTnLst>
-                        <p:par>
-                          <p:cTn id="4" fill="hold">
-                            <p:stCondLst>
-                              <p:cond delay="0"/>
-                            </p:stCondLst>
-                            <p:childTnLst>
-                              <p:par>
-                                <p:cTn id="5" presetID="1" presetClass="entr" presetSubtype="0" fill="hold" nodeType="clickEffect">
-                                  <p:stCondLst>
-                                    <p:cond delay="0"/>
-                                  </p:stCondLst>
-                                  <p:childTnLst>
-                                    <p:set>
-                                      <p:cBhvr>
-                                        <p:cTn id="6" dur="1" fill="hold">
-                                          <p:stCondLst>
-                                            <p:cond delay="0"/>
-                                          </p:stCondLst>
-                                        </p:cTn>
-                                        <p:tgtEl>
-                                          <p:spTgt spid="4"/>
-                                        </p:tgtEl>
-                                        <p:attrNameLst>
-                                          <p:attrName>style.visibility</p:attrName>
-                                        </p:attrNameLst>
-                                      </p:cBhvr>
-                                      <p:to>
-                                        <p:strVal val="visible"/>
-                                      </p:to>
-                                    </p:set>
-                                  </p:childTnLst>
-                                </p:cTn>
-                              </p:par>
-                            </p:childTnLst>
-                          </p:cTn>
-                        </p:par>
-                      </p:childTnLst>
-                    </p:cTn>
-                  </p:par>
-                </p:childTnLst>
-              </p:cTn>
-              <p:prevCondLst>
-                <p:cond evt="onPrev" delay="0">
-                  <p:tgtEl>
-                    <p:sldTgt/>
-                  </p:tgtEl>
-                </p:cond>
-              </p:prevCondLst>
-              <p:nextCondLst>
-                <p:cond evt="onNext" delay="0">
-                  <p:tgtEl>
-                    <p:sldTgt/>
-                  </p:tgtEl>
-                </p:cond>
-              </p:nextCondLst>
-            </p:seq>
-          </p:childTnLst>
-        </p:cTn>
-      </p:par>
-    </p:tnLst>
-  </p:timing>
 </p:sld>
 </file>
 
@@ -19205,8 +18669,8 @@
         </p:nvSpPr>
         <p:spPr>
           <a:xfrm>
-            <a:off x="3200400" y="3895533"/>
-            <a:ext cx="6189784" cy="1055688"/>
+            <a:off x="3200400" y="4238711"/>
+            <a:ext cx="6189784" cy="369332"/>
           </a:xfrm>
           <a:prstGeom prst="rect">
             <a:avLst/>
@@ -19214,61 +18678,61 @@
           <a:noFill/>
         </p:spPr>
         <p:txBody>
-          <a:bodyPr wrap="square" anchor="ctr" lIns="0" rIns="0" tIns="0" bIns="0">
+          <a:bodyPr wrap="square" lIns="0" tIns="0" rIns="0" bIns="0" anchor="ctr">
             <a:spAutoFit/>
           </a:bodyPr>
           <a:lstStyle/>
           <a:p>
             <a:r>
-              <a:rPr sz="1900">
+              <a:rPr sz="2400">
                 <a:latin typeface="Cambria"/>
               </a:rPr>
               <a:t>P[X = 4] = μ</a:t>
             </a:r>
             <a:r>
-              <a:rPr sz="1900" baseline="30000">
+              <a:rPr sz="2400" baseline="30000">
                 <a:latin typeface="Cambria"/>
               </a:rPr>
               <a:t>x</a:t>
             </a:r>
             <a:r>
-              <a:rPr sz="1900">
+              <a:rPr sz="2400">
                 <a:latin typeface="Cambria"/>
               </a:rPr>
               <a:t> e</a:t>
             </a:r>
             <a:r>
-              <a:rPr sz="1900" baseline="30000">
+              <a:rPr sz="2400" baseline="30000">
                 <a:latin typeface="Cambria"/>
               </a:rPr>
               <a:t>−μ</a:t>
             </a:r>
             <a:r>
-              <a:rPr sz="1900">
+              <a:rPr sz="2400">
                 <a:latin typeface="Cambria"/>
               </a:rPr>
               <a:t> / x! = 3</a:t>
             </a:r>
             <a:r>
-              <a:rPr sz="1900" baseline="30000">
+              <a:rPr sz="2400" baseline="30000">
                 <a:latin typeface="Cambria"/>
               </a:rPr>
               <a:t>4</a:t>
             </a:r>
             <a:r>
-              <a:rPr sz="1900">
+              <a:rPr sz="2400">
                 <a:latin typeface="Cambria"/>
               </a:rPr>
               <a:t> e</a:t>
             </a:r>
             <a:r>
-              <a:rPr sz="1900" baseline="30000">
+              <a:rPr sz="2400" baseline="30000">
                 <a:latin typeface="Cambria"/>
               </a:rPr>
               <a:t>−3</a:t>
             </a:r>
             <a:r>
-              <a:rPr sz="1900">
+              <a:rPr sz="2400">
                 <a:latin typeface="Cambria"/>
               </a:rPr>
               <a:t> / 4! = 0.168</a:t>
@@ -19293,7 +18757,7 @@
           <a:noFill/>
         </p:spPr>
         <p:txBody>
-          <a:bodyPr wrap="none" anchor="t" lIns="0" rIns="0" tIns="0" bIns="0">
+          <a:bodyPr wrap="none" lIns="0" tIns="0" rIns="0" bIns="0" anchor="t">
             <a:spAutoFit/>
           </a:bodyPr>
           <a:lstStyle/>
@@ -19331,126 +18795,6 @@
   <p:clrMapOvr>
     <a:masterClrMapping/>
   </p:clrMapOvr>
-  <p:timing>
-    <p:tnLst>
-      <p:par>
-        <p:cTn id="1" dur="indefinite" restart="never" nodeType="tmRoot">
-          <p:childTnLst>
-            <p:seq concurrent="1" nextAc="seek">
-              <p:cTn id="2" dur="indefinite" nodeType="mainSeq">
-                <p:childTnLst>
-                  <p:par>
-                    <p:cTn id="3" fill="hold" nodeType="clickPar">
-                      <p:stCondLst>
-                        <p:cond delay="indefinite"/>
-                      </p:stCondLst>
-                      <p:childTnLst>
-                        <p:par>
-                          <p:cTn id="4" fill="hold" nodeType="withGroup">
-                            <p:stCondLst>
-                              <p:cond delay="0"/>
-                            </p:stCondLst>
-                            <p:childTnLst>
-                              <p:par>
-                                <p:cTn id="5" presetID="1" presetClass="entr" presetSubtype="0" fill="hold" nodeType="clickEffect">
-                                  <p:stCondLst>
-                                    <p:cond delay="0"/>
-                                  </p:stCondLst>
-                                  <p:childTnLst>
-                                    <p:set>
-                                      <p:cBhvr>
-                                        <p:cTn id="6" dur="1" fill="hold">
-                                          <p:stCondLst>
-                                            <p:cond delay="0"/>
-                                          </p:stCondLst>
-                                        </p:cTn>
-                                        <p:tgtEl>
-                                          <p:spTgt spid="7172"/>
-                                        </p:tgtEl>
-                                        <p:attrNameLst>
-                                          <p:attrName>style.visibility</p:attrName>
-                                        </p:attrNameLst>
-                                      </p:cBhvr>
-                                      <p:to>
-                                        <p:strVal val="visible"/>
-                                      </p:to>
-                                    </p:set>
-                                  </p:childTnLst>
-                                </p:cTn>
-                              </p:par>
-                            </p:childTnLst>
-                          </p:cTn>
-                        </p:par>
-                      </p:childTnLst>
-                    </p:cTn>
-                  </p:par>
-                  <p:par>
-                    <p:cTn id="7" fill="hold" nodeType="clickPar">
-                      <p:stCondLst>
-                        <p:cond delay="indefinite"/>
-                      </p:stCondLst>
-                      <p:childTnLst>
-                        <p:par>
-                          <p:cTn id="8" fill="hold" nodeType="withGroup">
-                            <p:stCondLst>
-                              <p:cond delay="0"/>
-                            </p:stCondLst>
-                            <p:childTnLst>
-                              <p:par>
-                                <p:cTn id="9" presetID="1" presetClass="entr" presetSubtype="0" fill="hold" nodeType="clickEffect">
-                                  <p:stCondLst>
-                                    <p:cond delay="0"/>
-                                  </p:stCondLst>
-                                  <p:childTnLst>
-                                    <p:set>
-                                      <p:cBhvr>
-                                        <p:cTn id="10" dur="1" fill="hold">
-                                          <p:stCondLst>
-                                            <p:cond delay="0"/>
-                                          </p:stCondLst>
-                                        </p:cTn>
-                                        <p:tgtEl>
-                                          <p:spTgt spid="2"/>
-                                        </p:tgtEl>
-                                        <p:attrNameLst>
-                                          <p:attrName>style.visibility</p:attrName>
-                                        </p:attrNameLst>
-                                      </p:cBhvr>
-                                      <p:to>
-                                        <p:strVal val="visible"/>
-                                      </p:to>
-                                    </p:set>
-                                  </p:childTnLst>
-                                </p:cTn>
-                              </p:par>
-                            </p:childTnLst>
-                          </p:cTn>
-                        </p:par>
-                      </p:childTnLst>
-                    </p:cTn>
-                  </p:par>
-                </p:childTnLst>
-              </p:cTn>
-              <p:prevCondLst>
-                <p:cond evt="onPrev" delay="0">
-                  <p:tgtEl>
-                    <p:sldTgt/>
-                  </p:tgtEl>
-                </p:cond>
-              </p:prevCondLst>
-              <p:nextCondLst>
-                <p:cond evt="onNext" delay="0">
-                  <p:tgtEl>
-                    <p:sldTgt/>
-                  </p:tgtEl>
-                </p:cond>
-              </p:nextCondLst>
-            </p:seq>
-          </p:childTnLst>
-        </p:cTn>
-      </p:par>
-    </p:tnLst>
-  </p:timing>
 </p:sld>
 </file>
 
@@ -19567,11 +18911,7 @@
             </a:pPr>
             <a:r>
               <a:rPr lang="en-US" altLang="en-US" dirty="0"/>
-              <a:t>P[X</a:t>
-            </a:r>
-            <a:r>
-              <a:rPr lang="en-US" altLang="en-US" dirty="0"/>
-              <a:t>≤2]=P[X=0]+P[X=1]+P[X=2]=</a:t>
+              <a:t>P[X≤2]=P[X=0]+P[X=1]+P[X=2]=</a:t>
             </a:r>
           </a:p>
         </p:txBody>
@@ -19584,8 +18924,8 @@
         </p:nvSpPr>
         <p:spPr>
           <a:xfrm>
-            <a:off x="1524000" y="5334001"/>
-            <a:ext cx="6752492" cy="804863"/>
+            <a:off x="1929830" y="4089400"/>
+            <a:ext cx="6752492" cy="369332"/>
           </a:xfrm>
           <a:prstGeom prst="rect">
             <a:avLst/>
@@ -19593,61 +18933,61 @@
           <a:noFill/>
         </p:spPr>
         <p:txBody>
-          <a:bodyPr wrap="square" anchor="ctr" lIns="0" rIns="0" tIns="0" bIns="0">
+          <a:bodyPr wrap="square" lIns="0" tIns="0" rIns="0" bIns="0" anchor="ctr">
             <a:spAutoFit/>
           </a:bodyPr>
           <a:lstStyle/>
           <a:p>
             <a:r>
-              <a:rPr sz="1900">
+              <a:rPr sz="2400">
                 <a:latin typeface="Cambria"/>
               </a:rPr>
               <a:t>P[X ≤ 2] = e</a:t>
             </a:r>
             <a:r>
-              <a:rPr sz="1900" baseline="30000">
+              <a:rPr sz="2400" baseline="30000">
                 <a:latin typeface="Cambria"/>
               </a:rPr>
               <a:t>−3</a:t>
             </a:r>
             <a:r>
-              <a:rPr sz="1900">
+              <a:rPr sz="2400">
                 <a:latin typeface="Cambria"/>
               </a:rPr>
               <a:t> [ 3</a:t>
             </a:r>
             <a:r>
-              <a:rPr sz="1900" baseline="30000">
+              <a:rPr sz="2400" baseline="30000">
                 <a:latin typeface="Cambria"/>
               </a:rPr>
               <a:t>0</a:t>
             </a:r>
             <a:r>
-              <a:rPr sz="1900">
+              <a:rPr sz="2400">
                 <a:latin typeface="Cambria"/>
               </a:rPr>
               <a:t>/0! + 3</a:t>
             </a:r>
             <a:r>
-              <a:rPr sz="1900" baseline="30000">
+              <a:rPr sz="2400" baseline="30000">
                 <a:latin typeface="Cambria"/>
               </a:rPr>
               <a:t>1</a:t>
             </a:r>
             <a:r>
-              <a:rPr sz="1900">
+              <a:rPr sz="2400">
                 <a:latin typeface="Cambria"/>
               </a:rPr>
               <a:t>/1! + 3</a:t>
             </a:r>
             <a:r>
-              <a:rPr sz="1900" baseline="30000">
+              <a:rPr sz="2400" baseline="30000">
                 <a:latin typeface="Cambria"/>
               </a:rPr>
               <a:t>2</a:t>
             </a:r>
             <a:r>
-              <a:rPr sz="1900">
+              <a:rPr sz="2400">
                 <a:latin typeface="Cambria"/>
               </a:rPr>
               <a:t>/2! ] = 0.423</a:t>
@@ -19672,7 +19012,7 @@
           <a:noFill/>
         </p:spPr>
         <p:txBody>
-          <a:bodyPr wrap="none" anchor="t" lIns="0" rIns="0" tIns="0" bIns="0">
+          <a:bodyPr wrap="none" lIns="0" tIns="0" rIns="0" bIns="0" anchor="t">
             <a:spAutoFit/>
           </a:bodyPr>
           <a:lstStyle/>
@@ -19732,175 +19072,6 @@
   <p:clrMapOvr>
     <a:masterClrMapping/>
   </p:clrMapOvr>
-  <p:timing>
-    <p:tnLst>
-      <p:par>
-        <p:cTn id="1" dur="indefinite" restart="never" nodeType="tmRoot">
-          <p:childTnLst>
-            <p:seq concurrent="1" nextAc="seek">
-              <p:cTn id="2" dur="indefinite" nodeType="mainSeq">
-                <p:childTnLst>
-                  <p:par>
-                    <p:cTn id="3" fill="hold" nodeType="clickPar">
-                      <p:stCondLst>
-                        <p:cond delay="indefinite"/>
-                      </p:stCondLst>
-                      <p:childTnLst>
-                        <p:par>
-                          <p:cTn id="4" fill="hold" nodeType="withGroup">
-                            <p:stCondLst>
-                              <p:cond delay="0"/>
-                            </p:stCondLst>
-                            <p:childTnLst>
-                              <p:par>
-                                <p:cTn id="5" presetID="1" presetClass="entr" presetSubtype="0" fill="hold" nodeType="clickEffect">
-                                  <p:stCondLst>
-                                    <p:cond delay="0"/>
-                                  </p:stCondLst>
-                                  <p:childTnLst>
-                                    <p:set>
-                                      <p:cBhvr>
-                                        <p:cTn id="6" dur="1" fill="hold">
-                                          <p:stCondLst>
-                                            <p:cond delay="0"/>
-                                          </p:stCondLst>
-                                        </p:cTn>
-                                        <p:tgtEl>
-                                          <p:spTgt spid="8195">
-                                            <p:txEl>
-                                              <p:pRg st="4" end="4"/>
-                                            </p:txEl>
-                                          </p:spTgt>
-                                        </p:tgtEl>
-                                        <p:attrNameLst>
-                                          <p:attrName>style.visibility</p:attrName>
-                                        </p:attrNameLst>
-                                      </p:cBhvr>
-                                      <p:to>
-                                        <p:strVal val="visible"/>
-                                      </p:to>
-                                    </p:set>
-                                  </p:childTnLst>
-                                </p:cTn>
-                              </p:par>
-                            </p:childTnLst>
-                          </p:cTn>
-                        </p:par>
-                      </p:childTnLst>
-                    </p:cTn>
-                  </p:par>
-                  <p:par>
-                    <p:cTn id="7" fill="hold" nodeType="clickPar">
-                      <p:stCondLst>
-                        <p:cond delay="indefinite"/>
-                      </p:stCondLst>
-                      <p:childTnLst>
-                        <p:par>
-                          <p:cTn id="8" fill="hold" nodeType="withGroup">
-                            <p:stCondLst>
-                              <p:cond delay="0"/>
-                            </p:stCondLst>
-                            <p:childTnLst>
-                              <p:par>
-                                <p:cTn id="9" presetID="1" presetClass="entr" presetSubtype="0" fill="hold" nodeType="clickEffect">
-                                  <p:stCondLst>
-                                    <p:cond delay="0"/>
-                                  </p:stCondLst>
-                                  <p:childTnLst>
-                                    <p:set>
-                                      <p:cBhvr>
-                                        <p:cTn id="10" dur="1" fill="hold">
-                                          <p:stCondLst>
-                                            <p:cond delay="0"/>
-                                          </p:stCondLst>
-                                        </p:cTn>
-                                        <p:tgtEl>
-                                          <p:spTgt spid="8196"/>
-                                        </p:tgtEl>
-                                        <p:attrNameLst>
-                                          <p:attrName>style.visibility</p:attrName>
-                                        </p:attrNameLst>
-                                      </p:cBhvr>
-                                      <p:to>
-                                        <p:strVal val="visible"/>
-                                      </p:to>
-                                    </p:set>
-                                  </p:childTnLst>
-                                </p:cTn>
-                              </p:par>
-                            </p:childTnLst>
-                          </p:cTn>
-                        </p:par>
-                      </p:childTnLst>
-                    </p:cTn>
-                  </p:par>
-                  <p:par>
-                    <p:cTn id="11" fill="hold" nodeType="clickPar">
-                      <p:stCondLst>
-                        <p:cond delay="indefinite"/>
-                      </p:stCondLst>
-                      <p:childTnLst>
-                        <p:par>
-                          <p:cTn id="12" fill="hold" nodeType="withGroup">
-                            <p:stCondLst>
-                              <p:cond delay="0"/>
-                            </p:stCondLst>
-                            <p:childTnLst>
-                              <p:par>
-                                <p:cTn id="13" presetID="1" presetClass="entr" presetSubtype="0" fill="hold" nodeType="clickEffect">
-                                  <p:stCondLst>
-                                    <p:cond delay="0"/>
-                                  </p:stCondLst>
-                                  <p:childTnLst>
-                                    <p:set>
-                                      <p:cBhvr>
-                                        <p:cTn id="14" dur="1" fill="hold">
-                                          <p:stCondLst>
-                                            <p:cond delay="0"/>
-                                          </p:stCondLst>
-                                        </p:cTn>
-                                        <p:tgtEl>
-                                          <p:spTgt spid="2"/>
-                                        </p:tgtEl>
-                                        <p:attrNameLst>
-                                          <p:attrName>style.visibility</p:attrName>
-                                        </p:attrNameLst>
-                                      </p:cBhvr>
-                                      <p:to>
-                                        <p:strVal val="visible"/>
-                                      </p:to>
-                                    </p:set>
-                                  </p:childTnLst>
-                                </p:cTn>
-                              </p:par>
-                            </p:childTnLst>
-                          </p:cTn>
-                        </p:par>
-                      </p:childTnLst>
-                    </p:cTn>
-                  </p:par>
-                </p:childTnLst>
-              </p:cTn>
-              <p:prevCondLst>
-                <p:cond evt="onPrev" delay="0">
-                  <p:tgtEl>
-                    <p:sldTgt/>
-                  </p:tgtEl>
-                </p:cond>
-              </p:prevCondLst>
-              <p:nextCondLst>
-                <p:cond evt="onNext" delay="0">
-                  <p:tgtEl>
-                    <p:sldTgt/>
-                  </p:tgtEl>
-                </p:cond>
-              </p:nextCondLst>
-            </p:seq>
-          </p:childTnLst>
-        </p:cTn>
-      </p:par>
-    </p:tnLst>
-  </p:timing>
 </p:sld>
 </file>
 
@@ -20028,7 +19199,7 @@
         </p:nvSpPr>
         <p:spPr>
           <a:xfrm>
-            <a:off x="9446483" y="4687669"/>
+            <a:off x="8992245" y="4392386"/>
             <a:ext cx="2341862" cy="707886"/>
           </a:xfrm>
           <a:prstGeom prst="rect">
@@ -20061,7 +19232,7 @@
         </p:nvCxnSpPr>
         <p:spPr>
           <a:xfrm flipH="1">
-            <a:off x="7522888" y="5041612"/>
+            <a:off x="7068650" y="4746329"/>
             <a:ext cx="1923595" cy="0"/>
           </a:xfrm>
           <a:prstGeom prst="straightConnector1">
@@ -20097,7 +19268,7 @@
         </p:nvSpPr>
         <p:spPr>
           <a:xfrm>
-            <a:off x="9738763" y="5450864"/>
+            <a:off x="8992245" y="5040164"/>
             <a:ext cx="2341862" cy="707886"/>
           </a:xfrm>
           <a:prstGeom prst="rect">
@@ -20130,7 +19301,7 @@
         </p:nvCxnSpPr>
         <p:spPr>
           <a:xfrm flipH="1">
-            <a:off x="7815168" y="5804807"/>
+            <a:off x="7068650" y="5394107"/>
             <a:ext cx="1923595" cy="0"/>
           </a:xfrm>
           <a:prstGeom prst="straightConnector1">
@@ -20175,7 +19346,7 @@
           <a:noFill/>
         </p:spPr>
         <p:txBody>
-          <a:bodyPr wrap="none" anchor="t" lIns="0" rIns="0" tIns="0" bIns="0">
+          <a:bodyPr wrap="none" lIns="0" tIns="0" rIns="0" bIns="0" anchor="t">
             <a:spAutoFit/>
           </a:bodyPr>
           <a:lstStyle/>
@@ -20296,7 +19467,7 @@
           <p:nvPr/>
         </p:nvPicPr>
         <p:blipFill>
-          <a:blip r:embed="rId4">
+          <a:blip r:embed="rId3">
             <a:extLst>
               <a:ext uri="{28A0092B-C50C-407E-A947-70E740481C1C}">
                 <a14:useLocalDpi xmlns:a14="http://schemas.microsoft.com/office/drawing/2010/main" val="0"/>
@@ -20358,7 +19529,7 @@
           <a:noFill/>
         </p:spPr>
         <p:txBody>
-          <a:bodyPr wrap="square" anchor="t" lIns="0" rIns="0" tIns="0" bIns="0">
+          <a:bodyPr wrap="square" lIns="0" tIns="0" rIns="0" bIns="0" anchor="t">
             <a:spAutoFit/>
           </a:bodyPr>
           <a:lstStyle/>
@@ -20382,81 +19553,6 @@
   <p:clrMapOvr>
     <a:masterClrMapping/>
   </p:clrMapOvr>
-  <p:timing>
-    <p:tnLst>
-      <p:par>
-        <p:cTn id="1" dur="indefinite" restart="never" nodeType="tmRoot">
-          <p:childTnLst>
-            <p:seq concurrent="1" nextAc="seek">
-              <p:cTn id="2" dur="indefinite" nodeType="mainSeq">
-                <p:childTnLst>
-                  <p:par>
-                    <p:cTn id="3" fill="hold" nodeType="clickPar">
-                      <p:stCondLst>
-                        <p:cond delay="indefinite"/>
-                      </p:stCondLst>
-                      <p:childTnLst>
-                        <p:par>
-                          <p:cTn id="4" fill="hold" nodeType="withGroup">
-                            <p:stCondLst>
-                              <p:cond delay="0"/>
-                            </p:stCondLst>
-                            <p:childTnLst>
-                              <p:par>
-                                <p:cTn id="5" presetID="1" presetClass="entr" presetSubtype="0" fill="hold" nodeType="clickEffect">
-                                  <p:stCondLst>
-                                    <p:cond delay="0"/>
-                                  </p:stCondLst>
-                                  <p:childTnLst>
-                                    <p:set>
-                                      <p:cBhvr>
-                                        <p:cTn id="6" dur="1" fill="hold">
-                                          <p:stCondLst>
-                                            <p:cond delay="0"/>
-                                          </p:stCondLst>
-                                        </p:cTn>
-                                        <p:tgtEl>
-                                          <p:spTgt spid="6"/>
-                                        </p:tgtEl>
-                                        <p:attrNameLst>
-                                          <p:attrName>style.visibility</p:attrName>
-                                        </p:attrNameLst>
-                                      </p:cBhvr>
-                                      <p:to>
-                                        <p:strVal val="visible"/>
-                                      </p:to>
-                                    </p:set>
-                                  </p:childTnLst>
-                                </p:cTn>
-                              </p:par>
-                            </p:childTnLst>
-                          </p:cTn>
-                        </p:par>
-                      </p:childTnLst>
-                    </p:cTn>
-                  </p:par>
-                </p:childTnLst>
-              </p:cTn>
-              <p:prevCondLst>
-                <p:cond evt="onPrev" delay="0">
-                  <p:tgtEl>
-                    <p:sldTgt/>
-                  </p:tgtEl>
-                </p:cond>
-              </p:prevCondLst>
-              <p:nextCondLst>
-                <p:cond evt="onNext" delay="0">
-                  <p:tgtEl>
-                    <p:sldTgt/>
-                  </p:tgtEl>
-                </p:cond>
-              </p:nextCondLst>
-            </p:seq>
-          </p:childTnLst>
-        </p:cTn>
-      </p:par>
-    </p:tnLst>
-  </p:timing>
 </p:sld>
 </file>
 
@@ -20574,13 +19670,8 @@
             </a:r>
             <a:r>
               <a:rPr lang="en-US" altLang="en-US" dirty="0"/>
-              <a:t> </a:t>
-            </a:r>
-            <a:r>
-              <a:rPr lang="en-US" altLang="en-US" dirty="0"/>
-              <a:t>→ Onward to negative binomial!</a:t>
-            </a:r>
-            <a:endParaRPr lang="en-US" altLang="en-US" dirty="0"/>
+              <a:t> → Onward to negative binomial!</a:t>
+            </a:r>
           </a:p>
         </p:txBody>
       </p:sp>
@@ -20913,8 +20004,8 @@
         </p:nvSpPr>
         <p:spPr>
           <a:xfrm>
-            <a:off x="4572000" y="1961731"/>
-            <a:ext cx="3516923" cy="1095375"/>
+            <a:off x="4145094" y="2324752"/>
+            <a:ext cx="3516923" cy="369332"/>
           </a:xfrm>
           <a:prstGeom prst="rect">
             <a:avLst/>
@@ -20922,43 +20013,43 @@
           <a:noFill/>
         </p:spPr>
         <p:txBody>
-          <a:bodyPr wrap="square" anchor="ctr" lIns="0" rIns="0" tIns="0" bIns="0">
+          <a:bodyPr wrap="square" lIns="0" tIns="0" rIns="0" bIns="0" anchor="ctr">
             <a:spAutoFit/>
           </a:bodyPr>
           <a:lstStyle/>
           <a:p>
             <a:r>
-              <a:rPr sz="1900" b="0">
+              <a:rPr sz="2400" b="0">
                 <a:latin typeface="Cambria"/>
               </a:rPr>
               <a:t>p</a:t>
             </a:r>
             <a:r>
-              <a:rPr sz="1900" b="0" baseline="-25000">
+              <a:rPr sz="2400" b="0" baseline="-25000">
                 <a:latin typeface="Cambria"/>
               </a:rPr>
               <a:t>k</a:t>
             </a:r>
             <a:r>
-              <a:rPr sz="1900" b="0">
+              <a:rPr sz="2400" b="0">
                 <a:latin typeface="Cambria"/>
               </a:rPr>
               <a:t>(t) = (λt)</a:t>
             </a:r>
             <a:r>
-              <a:rPr sz="1900" b="0" baseline="30000">
+              <a:rPr sz="2400" b="0" baseline="30000">
                 <a:latin typeface="Cambria"/>
               </a:rPr>
               <a:t>k</a:t>
             </a:r>
             <a:r>
-              <a:rPr sz="1900" b="0">
+              <a:rPr sz="2400" b="0">
                 <a:latin typeface="Cambria"/>
               </a:rPr>
               <a:t> / k! · e</a:t>
             </a:r>
             <a:r>
-              <a:rPr sz="1900" b="0" baseline="30000">
+              <a:rPr sz="2400" b="0" baseline="30000">
                 <a:latin typeface="Cambria"/>
               </a:rPr>
               <a:t>−λt</a:t>
@@ -20974,8 +20065,8 @@
         </p:nvSpPr>
         <p:spPr>
           <a:xfrm>
-            <a:off x="5903556" y="5027477"/>
-            <a:ext cx="5064369" cy="546100"/>
+            <a:off x="5903556" y="5115861"/>
+            <a:ext cx="5064369" cy="369332"/>
           </a:xfrm>
           <a:prstGeom prst="rect">
             <a:avLst/>
@@ -20983,55 +20074,67 @@
           <a:noFill/>
         </p:spPr>
         <p:txBody>
-          <a:bodyPr wrap="square" anchor="ctr" lIns="0" rIns="0" tIns="0" bIns="0">
+          <a:bodyPr wrap="square" lIns="0" tIns="0" rIns="0" bIns="0" anchor="ctr">
             <a:spAutoFit/>
           </a:bodyPr>
           <a:lstStyle/>
           <a:p>
             <a:r>
-              <a:rPr sz="1900" b="0">
+              <a:rPr sz="2400" b="0" dirty="0">
                 <a:latin typeface="Cambria"/>
               </a:rPr>
               <a:t>L(p | {X</a:t>
             </a:r>
             <a:r>
-              <a:rPr sz="1900" b="0" baseline="-25000">
+              <a:rPr sz="2400" b="0" baseline="-25000" dirty="0">
                 <a:latin typeface="Cambria"/>
               </a:rPr>
               <a:t>i</a:t>
             </a:r>
             <a:r>
-              <a:rPr sz="1900" b="0">
+              <a:rPr sz="2400" b="0" dirty="0">
                 <a:latin typeface="Cambria"/>
               </a:rPr>
-              <a:t>}) = Σ</a:t>
-            </a:r>
-            <a:r>
-              <a:rPr sz="1900" b="0" baseline="-25000">
+              <a:t>}) = </a:t>
+            </a:r>
+            <a:r>
+              <a:rPr sz="2400" b="0" dirty="0" err="1">
                 <a:latin typeface="Cambria"/>
               </a:rPr>
-              <a:t>i=1</a:t>
-            </a:r>
-            <a:r>
-              <a:rPr sz="1900" b="0" baseline="30000">
+              <a:t>Σ</a:t>
+            </a:r>
+            <a:r>
+              <a:rPr sz="2400" b="0" baseline="-25000" dirty="0" err="1">
                 <a:latin typeface="Cambria"/>
               </a:rPr>
+              <a:t>i</a:t>
+            </a:r>
+            <a:r>
+              <a:rPr sz="2400" b="0" baseline="-25000" dirty="0">
+                <a:latin typeface="Cambria"/>
+              </a:rPr>
+              <a:t>=1</a:t>
+            </a:r>
+            <a:r>
+              <a:rPr sz="2400" b="0" baseline="30000" dirty="0">
+                <a:latin typeface="Cambria"/>
+              </a:rPr>
               <a:t>n</a:t>
             </a:r>
             <a:r>
-              <a:rPr sz="1900" b="0">
+              <a:rPr sz="2400" b="0" dirty="0">
                 <a:latin typeface="Cambria"/>
               </a:rPr>
               <a:t> log( f(X</a:t>
             </a:r>
             <a:r>
-              <a:rPr sz="1900" b="0" baseline="-25000">
+              <a:rPr sz="2400" b="0" baseline="-25000" dirty="0">
                 <a:latin typeface="Cambria"/>
               </a:rPr>
               <a:t>i</a:t>
             </a:r>
             <a:r>
-              <a:rPr sz="1900" b="0">
+              <a:rPr sz="2400" b="0" dirty="0">
                 <a:latin typeface="Cambria"/>
               </a:rPr>
               <a:t> | p) )</a:t>
@@ -21047,8 +20150,8 @@
         </p:nvSpPr>
         <p:spPr>
           <a:xfrm>
-            <a:off x="1226975" y="5024047"/>
-            <a:ext cx="4079630" cy="538163"/>
+            <a:off x="1226975" y="5108462"/>
+            <a:ext cx="4079630" cy="369332"/>
           </a:xfrm>
           <a:prstGeom prst="rect">
             <a:avLst/>
@@ -21056,55 +20159,55 @@
           <a:noFill/>
         </p:spPr>
         <p:txBody>
-          <a:bodyPr wrap="square" anchor="ctr" lIns="0" rIns="0" tIns="0" bIns="0">
+          <a:bodyPr wrap="square" lIns="0" tIns="0" rIns="0" bIns="0" anchor="ctr">
             <a:spAutoFit/>
           </a:bodyPr>
           <a:lstStyle/>
           <a:p>
             <a:r>
-              <a:rPr sz="1900" b="0">
+              <a:rPr sz="2400" b="0">
                 <a:latin typeface="Cambria"/>
               </a:rPr>
               <a:t>ℒ(p | {X</a:t>
             </a:r>
             <a:r>
-              <a:rPr sz="1900" b="0" baseline="-25000">
+              <a:rPr sz="2400" b="0" baseline="-25000">
                 <a:latin typeface="Cambria"/>
               </a:rPr>
               <a:t>i</a:t>
             </a:r>
             <a:r>
-              <a:rPr sz="1900" b="0">
+              <a:rPr sz="2400" b="0">
                 <a:latin typeface="Cambria"/>
               </a:rPr>
               <a:t>}) = ∏</a:t>
             </a:r>
             <a:r>
-              <a:rPr sz="1900" b="0" baseline="-25000">
+              <a:rPr sz="2400" b="0" baseline="-25000">
                 <a:latin typeface="Cambria"/>
               </a:rPr>
               <a:t>i=1</a:t>
             </a:r>
             <a:r>
-              <a:rPr sz="1900" b="0" baseline="30000">
+              <a:rPr sz="2400" b="0" baseline="30000">
                 <a:latin typeface="Cambria"/>
               </a:rPr>
               <a:t>n</a:t>
             </a:r>
             <a:r>
-              <a:rPr sz="1900" b="0">
+              <a:rPr sz="2400" b="0">
                 <a:latin typeface="Cambria"/>
               </a:rPr>
               <a:t> f(X</a:t>
             </a:r>
             <a:r>
-              <a:rPr sz="1900" b="0" baseline="-25000">
+              <a:rPr sz="2400" b="0" baseline="-25000">
                 <a:latin typeface="Cambria"/>
               </a:rPr>
               <a:t>i</a:t>
             </a:r>
             <a:r>
-              <a:rPr sz="1900" b="0">
+              <a:rPr sz="2400" b="0">
                 <a:latin typeface="Cambria"/>
               </a:rPr>
               <a:t> | p)</a:t>
@@ -21122,157 +20225,6 @@
   <p:clrMapOvr>
     <a:masterClrMapping/>
   </p:clrMapOvr>
-  <p:timing>
-    <p:tnLst>
-      <p:par>
-        <p:cTn id="1" dur="indefinite" restart="never" nodeType="tmRoot">
-          <p:childTnLst>
-            <p:seq concurrent="1" nextAc="seek">
-              <p:cTn id="2" dur="indefinite" nodeType="mainSeq">
-                <p:childTnLst>
-                  <p:par>
-                    <p:cTn id="3" fill="hold" nodeType="clickPar">
-                      <p:stCondLst>
-                        <p:cond delay="indefinite"/>
-                      </p:stCondLst>
-                      <p:childTnLst>
-                        <p:par>
-                          <p:cTn id="4" fill="hold" nodeType="withGroup">
-                            <p:stCondLst>
-                              <p:cond delay="0"/>
-                            </p:stCondLst>
-                            <p:childTnLst>
-                              <p:par>
-                                <p:cTn id="5" presetID="1" presetClass="entr" presetSubtype="0" fill="hold" nodeType="clickEffect">
-                                  <p:stCondLst>
-                                    <p:cond delay="0"/>
-                                  </p:stCondLst>
-                                  <p:childTnLst>
-                                    <p:set>
-                                      <p:cBhvr>
-                                        <p:cTn id="6" dur="1" fill="hold">
-                                          <p:stCondLst>
-                                            <p:cond delay="0"/>
-                                          </p:stCondLst>
-                                        </p:cTn>
-                                        <p:tgtEl>
-                                          <p:spTgt spid="11267">
-                                            <p:txEl>
-                                              <p:pRg st="4" end="4"/>
-                                            </p:txEl>
-                                          </p:spTgt>
-                                        </p:tgtEl>
-                                        <p:attrNameLst>
-                                          <p:attrName>style.visibility</p:attrName>
-                                        </p:attrNameLst>
-                                      </p:cBhvr>
-                                      <p:to>
-                                        <p:strVal val="visible"/>
-                                      </p:to>
-                                    </p:set>
-                                  </p:childTnLst>
-                                </p:cTn>
-                              </p:par>
-                            </p:childTnLst>
-                          </p:cTn>
-                        </p:par>
-                      </p:childTnLst>
-                    </p:cTn>
-                  </p:par>
-                  <p:par>
-                    <p:cTn id="7" fill="hold" nodeType="clickPar">
-                      <p:stCondLst>
-                        <p:cond delay="indefinite"/>
-                      </p:stCondLst>
-                      <p:childTnLst>
-                        <p:par>
-                          <p:cTn id="8" fill="hold" nodeType="withGroup">
-                            <p:stCondLst>
-                              <p:cond delay="0"/>
-                            </p:stCondLst>
-                            <p:childTnLst>
-                              <p:par>
-                                <p:cTn id="9" presetID="1" presetClass="entr" presetSubtype="0" fill="hold" nodeType="clickEffect">
-                                  <p:stCondLst>
-                                    <p:cond delay="0"/>
-                                  </p:stCondLst>
-                                  <p:childTnLst>
-                                    <p:set>
-                                      <p:cBhvr>
-                                        <p:cTn id="10" dur="1" fill="hold">
-                                          <p:stCondLst>
-                                            <p:cond delay="0"/>
-                                          </p:stCondLst>
-                                        </p:cTn>
-                                        <p:tgtEl>
-                                          <p:spTgt spid="6"/>
-                                        </p:tgtEl>
-                                        <p:attrNameLst>
-                                          <p:attrName>style.visibility</p:attrName>
-                                        </p:attrNameLst>
-                                      </p:cBhvr>
-                                      <p:to>
-                                        <p:strVal val="visible"/>
-                                      </p:to>
-                                    </p:set>
-                                  </p:childTnLst>
-                                </p:cTn>
-                              </p:par>
-                              <p:par>
-                                <p:cTn id="11" presetID="1" presetClass="entr" presetSubtype="0" fill="hold" nodeType="withEffect">
-                                  <p:stCondLst>
-                                    <p:cond delay="0"/>
-                                  </p:stCondLst>
-                                  <p:childTnLst>
-                                    <p:set>
-                                      <p:cBhvr>
-                                        <p:cTn id="12" dur="1" fill="hold">
-                                          <p:stCondLst>
-                                            <p:cond delay="0"/>
-                                          </p:stCondLst>
-                                        </p:cTn>
-                                        <p:tgtEl>
-                                          <p:spTgt spid="5"/>
-                                        </p:tgtEl>
-                                        <p:attrNameLst>
-                                          <p:attrName>style.visibility</p:attrName>
-                                        </p:attrNameLst>
-                                      </p:cBhvr>
-                                      <p:to>
-                                        <p:strVal val="visible"/>
-                                      </p:to>
-                                    </p:set>
-                                  </p:childTnLst>
-                                </p:cTn>
-                              </p:par>
-                            </p:childTnLst>
-                          </p:cTn>
-                        </p:par>
-                      </p:childTnLst>
-                    </p:cTn>
-                  </p:par>
-                </p:childTnLst>
-              </p:cTn>
-              <p:prevCondLst>
-                <p:cond evt="onPrev" delay="0">
-                  <p:tgtEl>
-                    <p:sldTgt/>
-                  </p:tgtEl>
-                </p:cond>
-              </p:prevCondLst>
-              <p:nextCondLst>
-                <p:cond evt="onNext" delay="0">
-                  <p:tgtEl>
-                    <p:sldTgt/>
-                  </p:tgtEl>
-                </p:cond>
-              </p:nextCondLst>
-            </p:seq>
-          </p:childTnLst>
-        </p:cTn>
-      </p:par>
-    </p:tnLst>
-  </p:timing>
 </p:sld>
 </file>
 
@@ -21540,235 +20492,104 @@
       </p:sp>
       <p:sp>
         <p:nvSpPr>
-          <p:cNvPr id="143363" name="Rectangle 4"/>
-          <p:cNvSpPr>
-            <a:spLocks noChangeArrowheads="1"/>
-          </p:cNvSpPr>
+          <p:cNvPr id="143365" name="TextBox 143364"/>
+          <p:cNvSpPr txBox="1"/>
           <p:nvPr/>
         </p:nvSpPr>
-        <p:spPr bwMode="auto">
+        <p:spPr>
           <a:xfrm>
-            <a:off x="1994852" y="3242628"/>
-            <a:ext cx="1525587" cy="1055052"/>
+            <a:off x="1873955" y="2577448"/>
+            <a:ext cx="10056299" cy="1477328"/>
           </a:xfrm>
           <a:prstGeom prst="rect">
             <a:avLst/>
           </a:prstGeom>
           <a:noFill/>
-          <a:ln w="57150">
-            <a:solidFill>
-              <a:srgbClr val="FF0000"/>
-            </a:solidFill>
-            <a:round/>
-            <a:headEnd/>
-            <a:tailEnd type="triangle" w="med" len="med"/>
-          </a:ln>
-          <a:effectLst/>
-          <a:extLst>
-            <a:ext uri="{909E8E84-426E-40DD-AFC4-6F175D3DCCD1}">
-              <a14:hiddenFill xmlns:a14="http://schemas.microsoft.com/office/drawing/2010/main">
-                <a:solidFill>
-                  <a:srgbClr val="FFFFFF"/>
-                </a:solidFill>
-              </a14:hiddenFill>
-            </a:ext>
-            <a:ext uri="{AF507438-7753-43E0-B8FC-AC1667EBCBE1}">
-              <a14:hiddenEffects xmlns:a14="http://schemas.microsoft.com/office/drawing/2010/main">
-                <a:effectLst>
-                  <a:outerShdw dist="35921" dir="2700000" algn="ctr" rotWithShape="0">
-                    <a:schemeClr val="bg2"/>
-                  </a:outerShdw>
-                </a:effectLst>
-              </a14:hiddenEffects>
-            </a:ext>
-          </a:extLst>
         </p:spPr>
         <p:txBody>
-          <a:bodyPr wrap="none"/>
-          <a:lstStyle>
-            <a:lvl1pPr>
-              <a:spcBef>
-                <a:spcPct val="20000"/>
-              </a:spcBef>
-              <a:buClr>
-                <a:schemeClr val="folHlink"/>
-              </a:buClr>
-              <a:buSzPct val="60000"/>
-              <a:buFont typeface="Wingdings" charset="2"/>
-              <a:buChar char="n"/>
-              <a:defRPr sz="3200">
-                <a:solidFill>
-                  <a:schemeClr val="tx1"/>
-                </a:solidFill>
-                <a:latin typeface="Tahoma" charset="0"/>
-              </a:defRPr>
-            </a:lvl1pPr>
-            <a:lvl2pPr marL="742950" indent="-285750">
-              <a:spcBef>
-                <a:spcPct val="20000"/>
-              </a:spcBef>
-              <a:buClr>
-                <a:schemeClr val="hlink"/>
-              </a:buClr>
-              <a:buSzPct val="55000"/>
-              <a:buFont typeface="Wingdings" charset="2"/>
-              <a:buChar char="n"/>
-              <a:defRPr sz="2800">
-                <a:solidFill>
-                  <a:schemeClr val="tx1"/>
-                </a:solidFill>
-                <a:latin typeface="Tahoma" charset="0"/>
-              </a:defRPr>
-            </a:lvl2pPr>
-            <a:lvl3pPr marL="1143000" indent="-228600">
-              <a:spcBef>
-                <a:spcPct val="20000"/>
-              </a:spcBef>
-              <a:buClr>
-                <a:schemeClr val="folHlink"/>
-              </a:buClr>
-              <a:buSzPct val="50000"/>
-              <a:buFont typeface="Wingdings" charset="2"/>
-              <a:buChar char="n"/>
-              <a:defRPr sz="2400">
-                <a:solidFill>
-                  <a:schemeClr val="tx1"/>
-                </a:solidFill>
-                <a:latin typeface="Tahoma" charset="0"/>
-              </a:defRPr>
-            </a:lvl3pPr>
-            <a:lvl4pPr marL="1600200" indent="-228600">
-              <a:spcBef>
-                <a:spcPct val="20000"/>
-              </a:spcBef>
-              <a:buClr>
-                <a:schemeClr val="accent2"/>
-              </a:buClr>
-              <a:buSzPct val="55000"/>
-              <a:buFont typeface="Wingdings" charset="2"/>
-              <a:buChar char="n"/>
-              <a:defRPr sz="2000">
-                <a:solidFill>
-                  <a:schemeClr val="tx1"/>
-                </a:solidFill>
-                <a:latin typeface="Tahoma" charset="0"/>
-              </a:defRPr>
-            </a:lvl4pPr>
-            <a:lvl5pPr marL="2057400" indent="-228600">
-              <a:spcBef>
-                <a:spcPct val="20000"/>
-              </a:spcBef>
-              <a:buClr>
-                <a:schemeClr val="accent1"/>
-              </a:buClr>
-              <a:buSzPct val="50000"/>
-              <a:buFont typeface="Wingdings" charset="2"/>
-              <a:buChar char="n"/>
-              <a:defRPr sz="2000">
-                <a:solidFill>
-                  <a:schemeClr val="tx1"/>
-                </a:solidFill>
-                <a:latin typeface="Tahoma" charset="0"/>
-              </a:defRPr>
-            </a:lvl5pPr>
-            <a:lvl6pPr marL="2514600" indent="-228600" eaLnBrk="0" fontAlgn="base" hangingPunct="0">
-              <a:spcBef>
-                <a:spcPct val="20000"/>
-              </a:spcBef>
-              <a:spcAft>
-                <a:spcPct val="0"/>
-              </a:spcAft>
-              <a:buClr>
-                <a:schemeClr val="accent1"/>
-              </a:buClr>
-              <a:buSzPct val="50000"/>
-              <a:buFont typeface="Wingdings" charset="2"/>
-              <a:buChar char="n"/>
-              <a:defRPr sz="2000">
-                <a:solidFill>
-                  <a:schemeClr val="tx1"/>
-                </a:solidFill>
-                <a:latin typeface="Tahoma" charset="0"/>
-              </a:defRPr>
-            </a:lvl6pPr>
-            <a:lvl7pPr marL="2971800" indent="-228600" eaLnBrk="0" fontAlgn="base" hangingPunct="0">
-              <a:spcBef>
-                <a:spcPct val="20000"/>
-              </a:spcBef>
-              <a:spcAft>
-                <a:spcPct val="0"/>
-              </a:spcAft>
-              <a:buClr>
-                <a:schemeClr val="accent1"/>
-              </a:buClr>
-              <a:buSzPct val="50000"/>
-              <a:buFont typeface="Wingdings" charset="2"/>
-              <a:buChar char="n"/>
-              <a:defRPr sz="2000">
-                <a:solidFill>
-                  <a:schemeClr val="tx1"/>
-                </a:solidFill>
-                <a:latin typeface="Tahoma" charset="0"/>
-              </a:defRPr>
-            </a:lvl7pPr>
-            <a:lvl8pPr marL="3429000" indent="-228600" eaLnBrk="0" fontAlgn="base" hangingPunct="0">
-              <a:spcBef>
-                <a:spcPct val="20000"/>
-              </a:spcBef>
-              <a:spcAft>
-                <a:spcPct val="0"/>
-              </a:spcAft>
-              <a:buClr>
-                <a:schemeClr val="accent1"/>
-              </a:buClr>
-              <a:buSzPct val="50000"/>
-              <a:buFont typeface="Wingdings" charset="2"/>
-              <a:buChar char="n"/>
-              <a:defRPr sz="2000">
-                <a:solidFill>
-                  <a:schemeClr val="tx1"/>
-                </a:solidFill>
-                <a:latin typeface="Tahoma" charset="0"/>
-              </a:defRPr>
-            </a:lvl8pPr>
-            <a:lvl9pPr marL="3886200" indent="-228600" eaLnBrk="0" fontAlgn="base" hangingPunct="0">
-              <a:spcBef>
-                <a:spcPct val="20000"/>
-              </a:spcBef>
-              <a:spcAft>
-                <a:spcPct val="0"/>
-              </a:spcAft>
-              <a:buClr>
-                <a:schemeClr val="accent1"/>
-              </a:buClr>
-              <a:buSzPct val="50000"/>
-              <a:buFont typeface="Wingdings" charset="2"/>
-              <a:buChar char="n"/>
-              <a:defRPr sz="2000">
-                <a:solidFill>
-                  <a:schemeClr val="tx1"/>
-                </a:solidFill>
-                <a:latin typeface="Tahoma" charset="0"/>
-              </a:defRPr>
-            </a:lvl9pPr>
-          </a:lstStyle>
-          <a:p>
-            <a:pPr algn="ctr" eaLnBrk="1" hangingPunct="1">
-              <a:spcBef>
-                <a:spcPct val="0"/>
-              </a:spcBef>
-              <a:buClrTx/>
-              <a:buSzTx/>
-              <a:buFontTx/>
-              <a:buNone/>
-            </a:pPr>
-            <a:endParaRPr lang="en-US" altLang="en-US"/>
+          <a:bodyPr wrap="square" lIns="0" tIns="0" rIns="0" bIns="0" anchor="ctr">
+            <a:spAutoFit/>
+          </a:bodyPr>
+          <a:lstStyle/>
+          <a:p>
+            <a:r>
+              <a:rPr lang="en-US" sz="2400" dirty="0">
+                <a:latin typeface="Cambria"/>
+              </a:rPr>
+              <a:t>N or </a:t>
+            </a:r>
+            <a:r>
+              <a:rPr sz="2400" dirty="0">
+                <a:latin typeface="Cambria"/>
+              </a:rPr>
+              <a:t>n            The number of times a trial is repeated</a:t>
+            </a:r>
+          </a:p>
+          <a:p>
+            <a:r>
+              <a:rPr sz="2400" dirty="0">
+                <a:latin typeface="Cambria"/>
+              </a:rPr>
+              <a:t>p = P(S)     The probability of a success in a single trial</a:t>
+            </a:r>
+          </a:p>
+          <a:p>
+            <a:r>
+              <a:rPr sz="2400" dirty="0">
+                <a:latin typeface="Cambria"/>
+              </a:rPr>
+              <a:t>q = P(F)     The probability of a failure in a single trial, q = 1 − p</a:t>
+            </a:r>
+          </a:p>
+          <a:p>
+            <a:r>
+              <a:rPr lang="en-US" sz="2400" dirty="0">
+                <a:latin typeface="Cambria"/>
+              </a:rPr>
+              <a:t>x or k</a:t>
+            </a:r>
+            <a:r>
+              <a:rPr sz="2400" dirty="0">
+                <a:latin typeface="Cambria"/>
+              </a:rPr>
+              <a:t>            The number of successes on n trials (x = 0, 1, .., n)</a:t>
+            </a:r>
           </a:p>
         </p:txBody>
       </p:sp>
-      <p:sp>
-        <p:nvSpPr>
-          <p:cNvPr id="143364" name="TextBox 5"/>
+    </p:spTree>
+    <p:extLst>
+      <p:ext uri="{BB962C8B-B14F-4D97-AF65-F5344CB8AC3E}">
+        <p14:creationId xmlns:p14="http://schemas.microsoft.com/office/powerpoint/2010/main" val="1667011880"/>
+      </p:ext>
+    </p:extLst>
+  </p:cSld>
+  <p:clrMapOvr>
+    <a:masterClrMapping/>
+  </p:clrMapOvr>
+</p:sld>
+</file>
+
+<file path=ppt/slides/slide40.xml><?xml version="1.0" encoding="utf-8"?>
+<p:sld xmlns:a="http://schemas.openxmlformats.org/drawingml/2006/main" xmlns:r="http://schemas.openxmlformats.org/officeDocument/2006/relationships" xmlns:p="http://schemas.openxmlformats.org/presentationml/2006/main">
+  <p:cSld>
+    <p:spTree>
+      <p:nvGrpSpPr>
+        <p:cNvPr id="1" name=""/>
+        <p:cNvGrpSpPr/>
+        <p:nvPr/>
+      </p:nvGrpSpPr>
+      <p:grpSpPr>
+        <a:xfrm>
+          <a:off x="0" y="0"/>
+          <a:ext cx="0" cy="0"/>
+          <a:chOff x="0" y="0"/>
+          <a:chExt cx="0" cy="0"/>
+        </a:xfrm>
+      </p:grpSpPr>
+      <p:sp>
+        <p:nvSpPr>
+          <p:cNvPr id="211973" name="TextBox 6"/>
           <p:cNvSpPr txBox="1">
             <a:spLocks noChangeArrowheads="1"/>
           </p:cNvSpPr>
@@ -21776,8 +20597,8 @@
         </p:nvSpPr>
         <p:spPr bwMode="auto">
           <a:xfrm>
-            <a:off x="814979" y="3283568"/>
-            <a:ext cx="955711" cy="830997"/>
+            <a:off x="3141663" y="4437929"/>
+            <a:ext cx="5472112" cy="461962"/>
           </a:xfrm>
           <a:prstGeom prst="rect">
             <a:avLst/>
@@ -21988,140 +20809,22 @@
               <a:buNone/>
             </a:pPr>
             <a:r>
-              <a:rPr lang="en-US" altLang="en-US" sz="2400" dirty="0">
-                <a:solidFill>
-                  <a:srgbClr val="FF0000"/>
-                </a:solidFill>
-              </a:rPr>
-              <a:t>New</a:t>
-            </a:r>
-          </a:p>
-          <a:p>
-            <a:pPr algn="ctr" eaLnBrk="1" hangingPunct="1">
-              <a:spcBef>
-                <a:spcPct val="0"/>
-              </a:spcBef>
-              <a:buClrTx/>
-              <a:buSzTx/>
-              <a:buFontTx/>
-              <a:buNone/>
-            </a:pPr>
-            <a:r>
-              <a:rPr lang="en-US" altLang="en-US" sz="2400" dirty="0">
-                <a:solidFill>
-                  <a:srgbClr val="FF0000"/>
-                </a:solidFill>
-              </a:rPr>
-              <a:t>terms</a:t>
+              <a:rPr lang="en-US" altLang="en-US" sz="2400" dirty="0"/>
+              <a:t>Try to derive it based on this argument</a:t>
             </a:r>
           </a:p>
         </p:txBody>
       </p:sp>
       <p:sp>
         <p:nvSpPr>
-          <p:cNvPr id="3" name="TextBox 2"/>
+          <p:cNvPr id="2" name="TextBox 1"/>
           <p:cNvSpPr txBox="1"/>
           <p:nvPr/>
         </p:nvSpPr>
         <p:spPr>
           <a:xfrm>
-            <a:off x="1770690" y="5044827"/>
-            <a:ext cx="1100138" cy="523220"/>
-          </a:xfrm>
-          <a:prstGeom prst="rect">
-            <a:avLst/>
-          </a:prstGeom>
-        </p:spPr>
-        <p:style>
-          <a:lnRef idx="2">
-            <a:schemeClr val="dk1"/>
-          </a:lnRef>
-          <a:fillRef idx="1">
-            <a:schemeClr val="lt1"/>
-          </a:fillRef>
-          <a:effectRef idx="0">
-            <a:schemeClr val="dk1"/>
-          </a:effectRef>
-          <a:fontRef idx="minor">
-            <a:schemeClr val="dk1"/>
-          </a:fontRef>
-        </p:style>
-        <p:txBody>
-          <a:bodyPr wrap="square">
-            <a:spAutoFit/>
-          </a:bodyPr>
-          <a:lstStyle/>
-          <a:p>
-            <a:pPr algn="ctr" eaLnBrk="1" hangingPunct="1">
-              <a:defRPr/>
-            </a:pPr>
-            <a:r>
-              <a:rPr lang="en-US" sz="2800" dirty="0"/>
-              <a:t>Also </a:t>
-            </a:r>
-            <a:r>
-              <a:rPr lang="en-US" sz="2800" i="1" dirty="0"/>
-              <a:t>k</a:t>
-            </a:r>
-          </a:p>
-        </p:txBody>
-      </p:sp>
-      <p:sp>
-        <p:nvSpPr>
-          <p:cNvPr id="9" name="TextBox 8"/>
-          <p:cNvSpPr txBox="1"/>
-          <p:nvPr/>
-        </p:nvSpPr>
-        <p:spPr>
-          <a:xfrm>
-            <a:off x="1702562" y="2104292"/>
-            <a:ext cx="1119217" cy="523220"/>
-          </a:xfrm>
-          <a:prstGeom prst="rect">
-            <a:avLst/>
-          </a:prstGeom>
-        </p:spPr>
-        <p:style>
-          <a:lnRef idx="2">
-            <a:schemeClr val="dk1"/>
-          </a:lnRef>
-          <a:fillRef idx="1">
-            <a:schemeClr val="lt1"/>
-          </a:fillRef>
-          <a:effectRef idx="0">
-            <a:schemeClr val="dk1"/>
-          </a:effectRef>
-          <a:fontRef idx="minor">
-            <a:schemeClr val="dk1"/>
-          </a:fontRef>
-        </p:style>
-        <p:txBody>
-          <a:bodyPr wrap="none">
-            <a:spAutoFit/>
-          </a:bodyPr>
-          <a:lstStyle/>
-          <a:p>
-            <a:pPr algn="ctr" eaLnBrk="1" hangingPunct="1">
-              <a:defRPr/>
-            </a:pPr>
-            <a:r>
-              <a:rPr lang="en-US" sz="2800" dirty="0"/>
-              <a:t>Also N</a:t>
-            </a:r>
-            <a:endParaRPr lang="en-US" sz="2800" i="1" dirty="0"/>
-          </a:p>
-        </p:txBody>
-      </p:sp>
-      <p:sp>
-        <p:nvSpPr>
-          <p:cNvPr id="143365" name="TextBox 143364"/>
-          <p:cNvSpPr txBox="1"/>
-          <p:nvPr/>
-        </p:nvSpPr>
-        <p:spPr>
-          <a:xfrm>
-            <a:off x="2101534" y="2770188"/>
-            <a:ext cx="8801398" cy="2033032"/>
+            <a:off x="0" y="5823612"/>
+            <a:ext cx="5666203" cy="830997"/>
           </a:xfrm>
           <a:prstGeom prst="rect">
             <a:avLst/>
@@ -22129,40 +20832,283 @@
           <a:noFill/>
         </p:spPr>
         <p:txBody>
-          <a:bodyPr wrap="square" anchor="ctr" lIns="0" rIns="0" tIns="0" bIns="0">
+          <a:bodyPr wrap="square" rtlCol="0">
             <a:spAutoFit/>
           </a:bodyPr>
           <a:lstStyle/>
           <a:p>
             <a:r>
-              <a:rPr sz="1700">
+              <a:rPr lang="en-US" sz="2400" dirty="0"/>
+              <a:t>How do we turn this into “failures”, now k, until r successes? k-&gt;r; N-&gt; </a:t>
+            </a:r>
+            <a:r>
+              <a:rPr lang="en-US" sz="2400" dirty="0" err="1"/>
+              <a:t>k+r</a:t>
+            </a:r>
+            <a:r>
+              <a:rPr lang="en-US" sz="2400" dirty="0"/>
+              <a:t>; </a:t>
+            </a:r>
+          </a:p>
+        </p:txBody>
+      </p:sp>
+      <p:sp>
+        <p:nvSpPr>
+          <p:cNvPr id="10" name="Rectangle 2"/>
+          <p:cNvSpPr txBox="1">
+            <a:spLocks noChangeArrowheads="1"/>
+          </p:cNvSpPr>
+          <p:nvPr/>
+        </p:nvSpPr>
+        <p:spPr>
+          <a:xfrm>
+            <a:off x="1524000" y="34630"/>
+            <a:ext cx="8707438" cy="1143000"/>
+          </a:xfrm>
+          <a:prstGeom prst="rect">
+            <a:avLst/>
+          </a:prstGeom>
+        </p:spPr>
+        <p:txBody>
+          <a:bodyPr vert="horz" lIns="91440" tIns="45720" rIns="91440" bIns="45720" rtlCol="0" anchor="ctr">
+            <a:normAutofit/>
+          </a:bodyPr>
+          <a:lstStyle>
+            <a:lvl1pPr algn="l" defTabSz="914400" rtl="0" eaLnBrk="1" latinLnBrk="0" hangingPunct="1">
+              <a:lnSpc>
+                <a:spcPct val="90000"/>
+              </a:lnSpc>
+              <a:spcBef>
+                <a:spcPct val="0"/>
+              </a:spcBef>
+              <a:buNone/>
+              <a:defRPr sz="4400" kern="1200">
+                <a:solidFill>
+                  <a:schemeClr val="tx1"/>
+                </a:solidFill>
+                <a:latin typeface="+mj-lt"/>
+                <a:ea typeface="+mj-ea"/>
+                <a:cs typeface="+mj-cs"/>
+              </a:defRPr>
+            </a:lvl1pPr>
+          </a:lstStyle>
+          <a:p>
+            <a:pPr algn="ctr">
+              <a:defRPr/>
+            </a:pPr>
+            <a:r>
+              <a:rPr lang="en-US" sz="4000"/>
+              <a:t>The Negative Binomial Distribution</a:t>
+            </a:r>
+            <a:br>
+              <a:rPr lang="en-US" sz="4000"/>
+            </a:br>
+            <a:r>
+              <a:rPr lang="en-US" sz="2400"/>
+              <a:t>(1) # failures/trials before fixed number of successes</a:t>
+            </a:r>
+            <a:endParaRPr lang="en-US" sz="2400" dirty="0"/>
+          </a:p>
+        </p:txBody>
+      </p:sp>
+      <p:sp>
+        <p:nvSpPr>
+          <p:cNvPr id="211974" name="TextBox 211973"/>
+          <p:cNvSpPr txBox="1"/>
+          <p:nvPr/>
+        </p:nvSpPr>
+        <p:spPr>
+          <a:xfrm>
+            <a:off x="1535113" y="1390986"/>
+            <a:ext cx="9706707" cy="427037"/>
+          </a:xfrm>
+          <a:prstGeom prst="rect">
+            <a:avLst/>
+          </a:prstGeom>
+          <a:noFill/>
+        </p:spPr>
+        <p:txBody>
+          <a:bodyPr wrap="square" lIns="0" tIns="0" rIns="0" bIns="0" anchor="ctr">
+            <a:spAutoFit/>
+          </a:bodyPr>
+          <a:lstStyle/>
+          <a:p>
+            <a:r>
+              <a:rPr sz="1900" b="0">
                 <a:latin typeface="Cambria"/>
               </a:rPr>
-              <a:t>n            The number of times a trial is repeated</a:t>
-            </a:r>
-          </a:p>
-          <a:p>
-            <a:r>
-              <a:rPr sz="1700">
+              <a:t>Pr{N = n | k, p} = Probability that the kth success occurs on trial n</a:t>
+            </a:r>
+          </a:p>
+        </p:txBody>
+      </p:sp>
+      <p:sp>
+        <p:nvSpPr>
+          <p:cNvPr id="211975" name="TextBox 211974"/>
+          <p:cNvSpPr txBox="1"/>
+          <p:nvPr/>
+        </p:nvSpPr>
+        <p:spPr>
+          <a:xfrm>
+            <a:off x="1174322" y="5159237"/>
+            <a:ext cx="10428287" cy="307777"/>
+          </a:xfrm>
+          <a:prstGeom prst="rect">
+            <a:avLst/>
+          </a:prstGeom>
+          <a:noFill/>
+        </p:spPr>
+        <p:txBody>
+          <a:bodyPr wrap="square" lIns="0" tIns="0" rIns="0" bIns="0" anchor="ctr">
+            <a:spAutoFit/>
+          </a:bodyPr>
+          <a:lstStyle/>
+          <a:p>
+            <a:r>
+              <a:rPr sz="2000" b="0" dirty="0" err="1">
                 <a:latin typeface="Cambria"/>
               </a:rPr>
-              <a:t>p = P(S)     The probability of a success in a single trial</a:t>
-            </a:r>
-          </a:p>
-          <a:p>
-            <a:r>
-              <a:rPr sz="1700">
+              <a:t>Pr</a:t>
+            </a:r>
+            <a:r>
+              <a:rPr sz="2000" b="0" dirty="0">
                 <a:latin typeface="Cambria"/>
               </a:rPr>
-              <a:t>q = P(F)     The probability of a failure in a single trial, q = 1 − p</a:t>
-            </a:r>
-          </a:p>
-          <a:p>
-            <a:r>
-              <a:rPr sz="1700">
+              <a:t>{N = n | k, p} = (n−1 choose k−1) p</a:t>
+            </a:r>
+            <a:r>
+              <a:rPr sz="2000" b="0" baseline="30000" dirty="0">
                 <a:latin typeface="Cambria"/>
               </a:rPr>
-              <a:t>x            The number of successes on n trials (x = 0, 1, .., n)</a:t>
+              <a:t>k−1</a:t>
+            </a:r>
+            <a:r>
+              <a:rPr sz="2000" b="0" dirty="0">
+                <a:latin typeface="Cambria"/>
+              </a:rPr>
+              <a:t> (1 − p)</a:t>
+            </a:r>
+            <a:r>
+              <a:rPr sz="2000" b="0" baseline="30000" dirty="0">
+                <a:latin typeface="Cambria"/>
+              </a:rPr>
+              <a:t>n − k</a:t>
+            </a:r>
+            <a:r>
+              <a:rPr sz="2000" b="0" dirty="0">
+                <a:latin typeface="Cambria"/>
+              </a:rPr>
+              <a:t> p = (n−1 choose k−1) p</a:t>
+            </a:r>
+            <a:r>
+              <a:rPr sz="2000" b="0" baseline="30000" dirty="0">
+                <a:latin typeface="Cambria"/>
+              </a:rPr>
+              <a:t>k</a:t>
+            </a:r>
+            <a:r>
+              <a:rPr sz="2000" b="0" dirty="0">
+                <a:latin typeface="Cambria"/>
+              </a:rPr>
+              <a:t> (1 − p)</a:t>
+            </a:r>
+            <a:r>
+              <a:rPr sz="2000" b="0" baseline="30000" dirty="0">
+                <a:latin typeface="Cambria"/>
+              </a:rPr>
+              <a:t>n − k</a:t>
+            </a:r>
+          </a:p>
+        </p:txBody>
+      </p:sp>
+      <p:sp>
+        <p:nvSpPr>
+          <p:cNvPr id="211976" name="TextBox 211975"/>
+          <p:cNvSpPr txBox="1"/>
+          <p:nvPr/>
+        </p:nvSpPr>
+        <p:spPr>
+          <a:xfrm>
+            <a:off x="5877719" y="6085223"/>
+            <a:ext cx="6000161" cy="307777"/>
+          </a:xfrm>
+          <a:prstGeom prst="rect">
+            <a:avLst/>
+          </a:prstGeom>
+          <a:noFill/>
+        </p:spPr>
+        <p:txBody>
+          <a:bodyPr wrap="square" lIns="0" tIns="0" rIns="0" bIns="0" anchor="ctr">
+            <a:spAutoFit/>
+          </a:bodyPr>
+          <a:lstStyle/>
+          <a:p>
+            <a:r>
+              <a:rPr sz="2000" b="0" dirty="0">
+                <a:latin typeface="Cambria"/>
+              </a:rPr>
+              <a:t>f(k; r, p) ≡ </a:t>
+            </a:r>
+            <a:r>
+              <a:rPr sz="2000" b="0" dirty="0" err="1">
+                <a:latin typeface="Cambria"/>
+              </a:rPr>
+              <a:t>Pr</a:t>
+            </a:r>
+            <a:r>
+              <a:rPr sz="2000" b="0" dirty="0">
+                <a:latin typeface="Cambria"/>
+              </a:rPr>
+              <a:t>(X = k) = (k+r−1 choose r−1) (1 − p)</a:t>
+            </a:r>
+            <a:r>
+              <a:rPr sz="2000" b="0" baseline="30000" dirty="0">
+                <a:latin typeface="Cambria"/>
+              </a:rPr>
+              <a:t>k</a:t>
+            </a:r>
+            <a:r>
+              <a:rPr sz="2000" b="0" dirty="0">
+                <a:latin typeface="Cambria"/>
+              </a:rPr>
+              <a:t> p</a:t>
+            </a:r>
+            <a:r>
+              <a:rPr sz="2000" b="0" baseline="30000" dirty="0">
+                <a:latin typeface="Cambria"/>
+              </a:rPr>
+              <a:t>r</a:t>
+            </a:r>
+          </a:p>
+        </p:txBody>
+      </p:sp>
+      <p:sp>
+        <p:nvSpPr>
+          <p:cNvPr id="211977" name="TextBox 211976"/>
+          <p:cNvSpPr txBox="1"/>
+          <p:nvPr/>
+        </p:nvSpPr>
+        <p:spPr>
+          <a:xfrm>
+            <a:off x="1252123" y="2111727"/>
+            <a:ext cx="9422231" cy="1846659"/>
+          </a:xfrm>
+          <a:prstGeom prst="rect">
+            <a:avLst/>
+          </a:prstGeom>
+          <a:noFill/>
+        </p:spPr>
+        <p:txBody>
+          <a:bodyPr wrap="square" lIns="0" tIns="0" rIns="0" bIns="0" anchor="t">
+            <a:spAutoFit/>
+          </a:bodyPr>
+          <a:lstStyle/>
+          <a:p>
+            <a:r>
+              <a:rPr sz="2400" b="0" dirty="0">
+                <a:latin typeface="Calibri"/>
+              </a:rPr>
+              <a:t>Now, for the kth success to occur on trial n, we must have k − 1 successes in the first n − 1 trials and a success on the nth trial. The probability of k − 1 successes in n − 1 trials has a binomial distribution with parameters n − 1 and p and the probability of success on the nth trial has probability p and these are independent of each other. We thus conclude</a:t>
             </a:r>
           </a:p>
         </p:txBody>
@@ -22170,141 +21116,17 @@
     </p:spTree>
     <p:extLst>
       <p:ext uri="{BB962C8B-B14F-4D97-AF65-F5344CB8AC3E}">
-        <p14:creationId xmlns:p14="http://schemas.microsoft.com/office/powerpoint/2010/main" val="1667011880"/>
+        <p14:creationId xmlns:p14="http://schemas.microsoft.com/office/powerpoint/2010/main" val="1255430821"/>
       </p:ext>
     </p:extLst>
   </p:cSld>
   <p:clrMapOvr>
     <a:masterClrMapping/>
   </p:clrMapOvr>
-  <p:timing>
-    <p:tnLst>
-      <p:par>
-        <p:cTn id="1" dur="indefinite" restart="never" nodeType="tmRoot">
-          <p:childTnLst>
-            <p:seq concurrent="1" nextAc="seek">
-              <p:cTn id="2" dur="indefinite" nodeType="mainSeq">
-                <p:childTnLst>
-                  <p:par>
-                    <p:cTn id="3" fill="hold" nodeType="clickPar">
-                      <p:stCondLst>
-                        <p:cond delay="indefinite"/>
-                      </p:stCondLst>
-                      <p:childTnLst>
-                        <p:par>
-                          <p:cTn id="4" fill="hold" nodeType="withGroup">
-                            <p:stCondLst>
-                              <p:cond delay="0"/>
-                            </p:stCondLst>
-                            <p:childTnLst>
-                              <p:par>
-                                <p:cTn id="5" presetID="1" presetClass="entr" presetSubtype="0" fill="hold" grpId="0" nodeType="clickEffect">
-                                  <p:stCondLst>
-                                    <p:cond delay="0"/>
-                                  </p:stCondLst>
-                                  <p:childTnLst>
-                                    <p:set>
-                                      <p:cBhvr>
-                                        <p:cTn id="6" dur="1" fill="hold">
-                                          <p:stCondLst>
-                                            <p:cond delay="0"/>
-                                          </p:stCondLst>
-                                        </p:cTn>
-                                        <p:tgtEl>
-                                          <p:spTgt spid="3"/>
-                                        </p:tgtEl>
-                                        <p:attrNameLst>
-                                          <p:attrName>style.visibility</p:attrName>
-                                        </p:attrNameLst>
-                                      </p:cBhvr>
-                                      <p:to>
-                                        <p:strVal val="visible"/>
-                                      </p:to>
-                                    </p:set>
-                                  </p:childTnLst>
-                                </p:cTn>
-                              </p:par>
-                            </p:childTnLst>
-                          </p:cTn>
-                        </p:par>
-                      </p:childTnLst>
-                    </p:cTn>
-                  </p:par>
-                  <p:par>
-                    <p:cTn id="7" fill="hold" nodeType="clickPar">
-                      <p:stCondLst>
-                        <p:cond delay="indefinite"/>
-                      </p:stCondLst>
-                      <p:childTnLst>
-                        <p:par>
-                          <p:cTn id="8" fill="hold" nodeType="withGroup">
-                            <p:stCondLst>
-                              <p:cond delay="0"/>
-                            </p:stCondLst>
-                            <p:childTnLst>
-                              <p:par>
-                                <p:cTn id="9" presetID="1" presetClass="entr" presetSubtype="0" fill="hold" grpId="0" nodeType="clickEffect">
-                                  <p:stCondLst>
-                                    <p:cond delay="0"/>
-                                  </p:stCondLst>
-                                  <p:childTnLst>
-                                    <p:set>
-                                      <p:cBhvr>
-                                        <p:cTn id="10" dur="1" fill="hold">
-                                          <p:stCondLst>
-                                            <p:cond delay="0"/>
-                                          </p:stCondLst>
-                                        </p:cTn>
-                                        <p:tgtEl>
-                                          <p:spTgt spid="9"/>
-                                        </p:tgtEl>
-                                        <p:attrNameLst>
-                                          <p:attrName>style.visibility</p:attrName>
-                                        </p:attrNameLst>
-                                      </p:cBhvr>
-                                      <p:to>
-                                        <p:strVal val="visible"/>
-                                      </p:to>
-                                    </p:set>
-                                  </p:childTnLst>
-                                </p:cTn>
-                              </p:par>
-                            </p:childTnLst>
-                          </p:cTn>
-                        </p:par>
-                      </p:childTnLst>
-                    </p:cTn>
-                  </p:par>
-                </p:childTnLst>
-              </p:cTn>
-              <p:prevCondLst>
-                <p:cond evt="onPrev" delay="0">
-                  <p:tgtEl>
-                    <p:sldTgt/>
-                  </p:tgtEl>
-                </p:cond>
-              </p:prevCondLst>
-              <p:nextCondLst>
-                <p:cond evt="onNext" delay="0">
-                  <p:tgtEl>
-                    <p:sldTgt/>
-                  </p:tgtEl>
-                </p:cond>
-              </p:nextCondLst>
-            </p:seq>
-          </p:childTnLst>
-        </p:cTn>
-      </p:par>
-    </p:tnLst>
-    <p:bldLst>
-      <p:bldP spid="3" grpId="0" animBg="1"/>
-      <p:bldP spid="9" grpId="0" animBg="1"/>
-    </p:bldLst>
-  </p:timing>
 </p:sld>
 </file>
 
-<file path=ppt/slides/slide40.xml><?xml version="1.0" encoding="utf-8"?>
+<file path=ppt/slides/slide41.xml><?xml version="1.0" encoding="utf-8"?>
 <p:sld xmlns:a="http://schemas.openxmlformats.org/drawingml/2006/main" xmlns:r="http://schemas.openxmlformats.org/officeDocument/2006/relationships" xmlns:p="http://schemas.openxmlformats.org/presentationml/2006/main">
   <p:cSld>
     <p:spTree>
@@ -22323,7 +21145,727 @@
       </p:grpSpPr>
       <p:sp>
         <p:nvSpPr>
-          <p:cNvPr id="211973" name="TextBox 6"/>
+          <p:cNvPr id="15362" name="Rectangle 2"/>
+          <p:cNvSpPr>
+            <a:spLocks noGrp="1" noChangeArrowheads="1"/>
+          </p:cNvSpPr>
+          <p:nvPr>
+            <p:ph type="title"/>
+          </p:nvPr>
+        </p:nvSpPr>
+        <p:spPr>
+          <a:xfrm>
+            <a:off x="1524000" y="6920"/>
+            <a:ext cx="8707438" cy="1143000"/>
+          </a:xfrm>
+        </p:spPr>
+        <p:txBody>
+          <a:bodyPr/>
+          <a:lstStyle/>
+          <a:p>
+            <a:pPr algn="ctr" eaLnBrk="1" hangingPunct="1">
+              <a:defRPr/>
+            </a:pPr>
+            <a:r>
+              <a:rPr lang="en-US" sz="4000" dirty="0"/>
+              <a:t>The Negative Binomial Distribution</a:t>
+            </a:r>
+            <a:br>
+              <a:rPr lang="en-US" sz="4000" dirty="0"/>
+            </a:br>
+            <a:r>
+              <a:rPr lang="en-US" sz="2400" dirty="0"/>
+              <a:t>(2) Poisson with a variable rate parameter </a:t>
+            </a:r>
+          </a:p>
+        </p:txBody>
+      </p:sp>
+      <p:sp>
+        <p:nvSpPr>
+          <p:cNvPr id="2" name="Text Placeholder 1"/>
+          <p:cNvSpPr>
+            <a:spLocks noGrp="1"/>
+          </p:cNvSpPr>
+          <p:nvPr>
+            <p:ph type="body" sz="half" idx="1"/>
+          </p:nvPr>
+        </p:nvSpPr>
+        <p:spPr>
+          <a:xfrm>
+            <a:off x="1798638" y="1378520"/>
+            <a:ext cx="8793162" cy="2667000"/>
+          </a:xfrm>
+        </p:spPr>
+        <p:txBody>
+          <a:bodyPr>
+            <a:normAutofit lnSpcReduction="10000"/>
+          </a:bodyPr>
+          <a:lstStyle/>
+          <a:p>
+            <a:pPr>
+              <a:defRPr/>
+            </a:pPr>
+            <a:r>
+              <a:rPr lang="en-US" dirty="0"/>
+              <a:t>Start with Poisson</a:t>
+            </a:r>
+          </a:p>
+          <a:p>
+            <a:pPr>
+              <a:defRPr/>
+            </a:pPr>
+            <a:endParaRPr lang="en-US" dirty="0"/>
+          </a:p>
+          <a:p>
+            <a:pPr>
+              <a:defRPr/>
+            </a:pPr>
+            <a:endParaRPr lang="en-US" dirty="0"/>
+          </a:p>
+          <a:p>
+            <a:pPr>
+              <a:defRPr/>
+            </a:pPr>
+            <a:r>
+              <a:rPr lang="en-US" dirty="0"/>
+              <a:t>But let’s give lambda a continuous probability (continuous distributions come soon!) and then integrate over all possible values of lambda (this is called “marginalizing”)</a:t>
+            </a:r>
+          </a:p>
+        </p:txBody>
+      </p:sp>
+      <p:sp>
+        <p:nvSpPr>
+          <p:cNvPr id="4" name="TextBox 3"/>
+          <p:cNvSpPr txBox="1"/>
+          <p:nvPr/>
+        </p:nvSpPr>
+        <p:spPr>
+          <a:xfrm>
+            <a:off x="1718295" y="5974765"/>
+            <a:ext cx="1297791" cy="461665"/>
+          </a:xfrm>
+          <a:prstGeom prst="rect">
+            <a:avLst/>
+          </a:prstGeom>
+          <a:noFill/>
+        </p:spPr>
+        <p:txBody>
+          <a:bodyPr wrap="none" rtlCol="0">
+            <a:spAutoFit/>
+          </a:bodyPr>
+          <a:lstStyle/>
+          <a:p>
+            <a:r>
+              <a:rPr lang="en-US" sz="2400"/>
+              <a:t>Because:</a:t>
+            </a:r>
+          </a:p>
+        </p:txBody>
+      </p:sp>
+      <p:sp>
+        <p:nvSpPr>
+          <p:cNvPr id="214021" name="TextBox 214020"/>
+          <p:cNvSpPr txBox="1"/>
+          <p:nvPr/>
+        </p:nvSpPr>
+        <p:spPr>
+          <a:xfrm>
+            <a:off x="5081752" y="1641529"/>
+            <a:ext cx="6471138" cy="369332"/>
+          </a:xfrm>
+          <a:prstGeom prst="rect">
+            <a:avLst/>
+          </a:prstGeom>
+          <a:noFill/>
+        </p:spPr>
+        <p:txBody>
+          <a:bodyPr wrap="square" lIns="0" tIns="0" rIns="0" bIns="0" anchor="ctr">
+            <a:spAutoFit/>
+          </a:bodyPr>
+          <a:lstStyle/>
+          <a:p>
+            <a:r>
+              <a:rPr sz="2400" b="0">
+                <a:latin typeface="Cambria"/>
+              </a:rPr>
+              <a:t>Pr{k events in [0, t] | λ} = (λt)</a:t>
+            </a:r>
+            <a:r>
+              <a:rPr sz="2400" b="0" baseline="30000">
+                <a:latin typeface="Cambria"/>
+              </a:rPr>
+              <a:t>k</a:t>
+            </a:r>
+            <a:r>
+              <a:rPr sz="2400" b="0">
+                <a:latin typeface="Cambria"/>
+              </a:rPr>
+              <a:t> / k! · e</a:t>
+            </a:r>
+            <a:r>
+              <a:rPr sz="2400" b="0" baseline="30000">
+                <a:latin typeface="Cambria"/>
+              </a:rPr>
+              <a:t>−λt</a:t>
+            </a:r>
+          </a:p>
+        </p:txBody>
+      </p:sp>
+      <p:sp>
+        <p:nvSpPr>
+          <p:cNvPr id="214022" name="TextBox 214021"/>
+          <p:cNvSpPr txBox="1"/>
+          <p:nvPr/>
+        </p:nvSpPr>
+        <p:spPr>
+          <a:xfrm>
+            <a:off x="2353531" y="4548993"/>
+            <a:ext cx="7877907" cy="369332"/>
+          </a:xfrm>
+          <a:prstGeom prst="rect">
+            <a:avLst/>
+          </a:prstGeom>
+          <a:noFill/>
+        </p:spPr>
+        <p:txBody>
+          <a:bodyPr wrap="square" lIns="0" tIns="0" rIns="0" bIns="0" anchor="ctr">
+            <a:spAutoFit/>
+          </a:bodyPr>
+          <a:lstStyle/>
+          <a:p>
+            <a:r>
+              <a:rPr sz="2400" b="0">
+                <a:latin typeface="Cambria"/>
+              </a:rPr>
+              <a:t>Pr{k events in [0, t]} = ∫</a:t>
+            </a:r>
+            <a:r>
+              <a:rPr sz="2400" b="0" baseline="-25000">
+                <a:latin typeface="Cambria"/>
+              </a:rPr>
+              <a:t>0</a:t>
+            </a:r>
+            <a:r>
+              <a:rPr sz="2400" b="0" baseline="30000">
+                <a:latin typeface="Cambria"/>
+              </a:rPr>
+              <a:t>∞</a:t>
+            </a:r>
+            <a:r>
+              <a:rPr sz="2400" b="0">
+                <a:latin typeface="Cambria"/>
+              </a:rPr>
+              <a:t> (λt)</a:t>
+            </a:r>
+            <a:r>
+              <a:rPr sz="2400" b="0" baseline="30000">
+                <a:latin typeface="Cambria"/>
+              </a:rPr>
+              <a:t>k</a:t>
+            </a:r>
+            <a:r>
+              <a:rPr sz="2400" b="0">
+                <a:latin typeface="Cambria"/>
+              </a:rPr>
+              <a:t> / k! · e</a:t>
+            </a:r>
+            <a:r>
+              <a:rPr sz="2400" b="0" baseline="30000">
+                <a:latin typeface="Cambria"/>
+              </a:rPr>
+              <a:t>−λt</a:t>
+            </a:r>
+            <a:r>
+              <a:rPr sz="2400" b="0">
+                <a:latin typeface="Cambria"/>
+              </a:rPr>
+              <a:t> · f(λ) dλ</a:t>
+            </a:r>
+          </a:p>
+        </p:txBody>
+      </p:sp>
+      <p:sp>
+        <p:nvSpPr>
+          <p:cNvPr id="214023" name="TextBox 214022"/>
+          <p:cNvSpPr txBox="1"/>
+          <p:nvPr/>
+        </p:nvSpPr>
+        <p:spPr>
+          <a:xfrm>
+            <a:off x="3150334" y="5974765"/>
+            <a:ext cx="7033846" cy="369332"/>
+          </a:xfrm>
+          <a:prstGeom prst="rect">
+            <a:avLst/>
+          </a:prstGeom>
+          <a:noFill/>
+        </p:spPr>
+        <p:txBody>
+          <a:bodyPr wrap="square" lIns="0" tIns="0" rIns="0" bIns="0" anchor="ctr">
+            <a:spAutoFit/>
+          </a:bodyPr>
+          <a:lstStyle/>
+          <a:p>
+            <a:r>
+              <a:rPr sz="2400" b="0" dirty="0" err="1">
+                <a:latin typeface="Cambria"/>
+              </a:rPr>
+              <a:t>p</a:t>
+            </a:r>
+            <a:r>
+              <a:rPr sz="2400" b="0" baseline="-25000" dirty="0" err="1">
+                <a:latin typeface="Cambria"/>
+              </a:rPr>
+              <a:t>X</a:t>
+            </a:r>
+            <a:r>
+              <a:rPr sz="2400" b="0" dirty="0">
+                <a:latin typeface="Cambria"/>
+              </a:rPr>
+              <a:t>(x) = ∫</a:t>
+            </a:r>
+            <a:r>
+              <a:rPr sz="2400" b="0" baseline="-25000" dirty="0">
+                <a:latin typeface="Cambria"/>
+              </a:rPr>
+              <a:t>y</a:t>
+            </a:r>
+            <a:r>
+              <a:rPr sz="2400" b="0" dirty="0">
+                <a:latin typeface="Cambria"/>
+              </a:rPr>
+              <a:t> </a:t>
+            </a:r>
+            <a:r>
+              <a:rPr sz="2400" b="0" dirty="0" err="1">
+                <a:latin typeface="Cambria"/>
+              </a:rPr>
+              <a:t>p</a:t>
+            </a:r>
+            <a:r>
+              <a:rPr sz="2400" b="0" baseline="-25000" dirty="0" err="1">
+                <a:latin typeface="Cambria"/>
+              </a:rPr>
+              <a:t>X,Y</a:t>
+            </a:r>
+            <a:r>
+              <a:rPr sz="2400" b="0" dirty="0">
+                <a:latin typeface="Cambria"/>
+              </a:rPr>
+              <a:t>(x, y) </a:t>
+            </a:r>
+            <a:r>
+              <a:rPr sz="2400" b="0" dirty="0" err="1">
+                <a:latin typeface="Cambria"/>
+              </a:rPr>
+              <a:t>dy</a:t>
+            </a:r>
+            <a:r>
+              <a:rPr sz="2400" b="0" dirty="0">
+                <a:latin typeface="Cambria"/>
+              </a:rPr>
+              <a:t> = ∫</a:t>
+            </a:r>
+            <a:r>
+              <a:rPr sz="2400" b="0" baseline="-25000" dirty="0">
+                <a:latin typeface="Cambria"/>
+              </a:rPr>
+              <a:t>y</a:t>
+            </a:r>
+            <a:r>
+              <a:rPr sz="2400" b="0" dirty="0">
+                <a:latin typeface="Cambria"/>
+              </a:rPr>
+              <a:t> </a:t>
+            </a:r>
+            <a:r>
+              <a:rPr sz="2400" b="0" dirty="0" err="1">
+                <a:latin typeface="Cambria"/>
+              </a:rPr>
+              <a:t>p</a:t>
+            </a:r>
+            <a:r>
+              <a:rPr sz="2400" b="0" baseline="-25000" dirty="0" err="1">
+                <a:latin typeface="Cambria"/>
+              </a:rPr>
+              <a:t>X|Y</a:t>
+            </a:r>
+            <a:r>
+              <a:rPr sz="2400" b="0" dirty="0">
+                <a:latin typeface="Cambria"/>
+              </a:rPr>
+              <a:t>(x | y) </a:t>
+            </a:r>
+            <a:r>
+              <a:rPr sz="2400" b="0" dirty="0" err="1">
+                <a:latin typeface="Cambria"/>
+              </a:rPr>
+              <a:t>p</a:t>
+            </a:r>
+            <a:r>
+              <a:rPr sz="2400" b="0" baseline="-25000" dirty="0" err="1">
+                <a:latin typeface="Cambria"/>
+              </a:rPr>
+              <a:t>Y</a:t>
+            </a:r>
+            <a:r>
+              <a:rPr sz="2400" b="0" dirty="0">
+                <a:latin typeface="Cambria"/>
+              </a:rPr>
+              <a:t>(y) </a:t>
+            </a:r>
+            <a:r>
+              <a:rPr sz="2400" b="0" dirty="0" err="1">
+                <a:latin typeface="Cambria"/>
+              </a:rPr>
+              <a:t>dy</a:t>
+            </a:r>
+            <a:endParaRPr sz="2400" b="0" dirty="0">
+              <a:latin typeface="Cambria"/>
+            </a:endParaRPr>
+          </a:p>
+        </p:txBody>
+      </p:sp>
+    </p:spTree>
+    <p:extLst>
+      <p:ext uri="{BB962C8B-B14F-4D97-AF65-F5344CB8AC3E}">
+        <p14:creationId xmlns:p14="http://schemas.microsoft.com/office/powerpoint/2010/main" val="123193495"/>
+      </p:ext>
+    </p:extLst>
+  </p:cSld>
+  <p:clrMapOvr>
+    <a:masterClrMapping/>
+  </p:clrMapOvr>
+</p:sld>
+</file>
+
+<file path=ppt/slides/slide42.xml><?xml version="1.0" encoding="utf-8"?>
+<p:sld xmlns:a="http://schemas.openxmlformats.org/drawingml/2006/main" xmlns:r="http://schemas.openxmlformats.org/officeDocument/2006/relationships" xmlns:p="http://schemas.openxmlformats.org/presentationml/2006/main">
+  <p:cSld>
+    <p:spTree>
+      <p:nvGrpSpPr>
+        <p:cNvPr id="1" name=""/>
+        <p:cNvGrpSpPr/>
+        <p:nvPr/>
+      </p:nvGrpSpPr>
+      <p:grpSpPr>
+        <a:xfrm>
+          <a:off x="0" y="0"/>
+          <a:ext cx="0" cy="0"/>
+          <a:chOff x="0" y="0"/>
+          <a:chExt cx="0" cy="0"/>
+        </a:xfrm>
+      </p:grpSpPr>
+      <p:sp>
+        <p:nvSpPr>
+          <p:cNvPr id="17410" name="Rectangle 2"/>
+          <p:cNvSpPr>
+            <a:spLocks noGrp="1" noChangeArrowheads="1"/>
+          </p:cNvSpPr>
+          <p:nvPr>
+            <p:ph type="title"/>
+          </p:nvPr>
+        </p:nvSpPr>
+        <p:spPr>
+          <a:xfrm>
+            <a:off x="1828801" y="381000"/>
+            <a:ext cx="8639175" cy="1143000"/>
+          </a:xfrm>
+        </p:spPr>
+        <p:txBody>
+          <a:bodyPr/>
+          <a:lstStyle/>
+          <a:p>
+            <a:pPr algn="ctr" eaLnBrk="1" hangingPunct="1">
+              <a:defRPr/>
+            </a:pPr>
+            <a:r>
+              <a:rPr lang="en-US"/>
+              <a:t>Quick note </a:t>
+            </a:r>
+            <a:r>
+              <a:rPr lang="en-US" dirty="0"/>
+              <a:t>on Gamma function</a:t>
+            </a:r>
+          </a:p>
+        </p:txBody>
+      </p:sp>
+      <p:sp>
+        <p:nvSpPr>
+          <p:cNvPr id="17411" name="Rectangle 3"/>
+          <p:cNvSpPr>
+            <a:spLocks noGrp="1" noChangeArrowheads="1"/>
+          </p:cNvSpPr>
+          <p:nvPr>
+            <p:ph type="body" sz="half" idx="1"/>
+          </p:nvPr>
+        </p:nvSpPr>
+        <p:spPr>
+          <a:xfrm>
+            <a:off x="2706688" y="2017713"/>
+            <a:ext cx="7275512" cy="4114800"/>
+          </a:xfrm>
+        </p:spPr>
+        <p:txBody>
+          <a:bodyPr/>
+          <a:lstStyle/>
+          <a:p>
+            <a:pPr eaLnBrk="1" hangingPunct="1">
+              <a:defRPr/>
+            </a:pPr>
+            <a:r>
+              <a:rPr lang="en-US" dirty="0"/>
+              <a:t>Continuous version of factorial</a:t>
+            </a:r>
+          </a:p>
+          <a:p>
+            <a:pPr eaLnBrk="1" hangingPunct="1">
+              <a:defRPr/>
+            </a:pPr>
+            <a:r>
+              <a:rPr lang="en-US" dirty="0"/>
+              <a:t>For integers, </a:t>
+            </a:r>
+            <a:r>
+              <a:rPr lang="en-US" i="1" dirty="0"/>
+              <a:t>z</a:t>
+            </a:r>
+            <a:r>
+              <a:rPr lang="en-US" dirty="0"/>
+              <a:t>,</a:t>
+            </a:r>
+          </a:p>
+          <a:p>
+            <a:pPr eaLnBrk="1" hangingPunct="1">
+              <a:defRPr/>
+            </a:pPr>
+            <a:r>
+              <a:rPr lang="en-US" dirty="0"/>
+              <a:t>In general</a:t>
+            </a:r>
+          </a:p>
+          <a:p>
+            <a:pPr eaLnBrk="1" hangingPunct="1">
+              <a:defRPr/>
+            </a:pPr>
+            <a:endParaRPr lang="en-US" dirty="0"/>
+          </a:p>
+          <a:p>
+            <a:pPr eaLnBrk="1" hangingPunct="1">
+              <a:defRPr/>
+            </a:pPr>
+            <a:r>
+              <a:rPr lang="en-US" dirty="0"/>
+              <a:t>Defined (for z &gt; 0): </a:t>
+            </a:r>
+          </a:p>
+        </p:txBody>
+      </p:sp>
+      <p:sp>
+        <p:nvSpPr>
+          <p:cNvPr id="17412" name="TextBox 17411"/>
+          <p:cNvSpPr txBox="1"/>
+          <p:nvPr/>
+        </p:nvSpPr>
+        <p:spPr>
+          <a:xfrm>
+            <a:off x="5791200" y="2514600"/>
+            <a:ext cx="2552700" cy="520700"/>
+          </a:xfrm>
+          <a:prstGeom prst="rect">
+            <a:avLst/>
+          </a:prstGeom>
+          <a:noFill/>
+        </p:spPr>
+        <p:txBody>
+          <a:bodyPr wrap="square" lIns="0" tIns="0" rIns="0" bIns="0" anchor="ctr">
+            <a:spAutoFit/>
+          </a:bodyPr>
+          <a:lstStyle/>
+          <a:p>
+            <a:r>
+              <a:rPr sz="2400" b="0">
+                <a:latin typeface="Cambria"/>
+              </a:rPr>
+              <a:t>Γ(z) = (z − 1)!</a:t>
+            </a:r>
+          </a:p>
+        </p:txBody>
+      </p:sp>
+      <p:sp>
+        <p:nvSpPr>
+          <p:cNvPr id="17413" name="TextBox 17412"/>
+          <p:cNvSpPr txBox="1"/>
+          <p:nvPr/>
+        </p:nvSpPr>
+        <p:spPr>
+          <a:xfrm>
+            <a:off x="5072063" y="3035300"/>
+            <a:ext cx="2997200" cy="685800"/>
+          </a:xfrm>
+          <a:prstGeom prst="rect">
+            <a:avLst/>
+          </a:prstGeom>
+          <a:noFill/>
+        </p:spPr>
+        <p:txBody>
+          <a:bodyPr wrap="square" lIns="0" tIns="0" rIns="0" bIns="0" anchor="ctr">
+            <a:spAutoFit/>
+          </a:bodyPr>
+          <a:lstStyle/>
+          <a:p>
+            <a:r>
+              <a:rPr sz="2500" b="0">
+                <a:latin typeface="Cambria"/>
+              </a:rPr>
+              <a:t>Γ(z + 1) = z Γ(z)</a:t>
+            </a:r>
+          </a:p>
+        </p:txBody>
+      </p:sp>
+      <p:sp>
+        <p:nvSpPr>
+          <p:cNvPr id="17414" name="TextBox 17413"/>
+          <p:cNvSpPr txBox="1"/>
+          <p:nvPr/>
+        </p:nvSpPr>
+        <p:spPr>
+          <a:xfrm>
+            <a:off x="3363913" y="4738687"/>
+            <a:ext cx="3416300" cy="369332"/>
+          </a:xfrm>
+          <a:prstGeom prst="rect">
+            <a:avLst/>
+          </a:prstGeom>
+          <a:noFill/>
+        </p:spPr>
+        <p:txBody>
+          <a:bodyPr wrap="square" lIns="0" tIns="0" rIns="0" bIns="0" anchor="ctr">
+            <a:spAutoFit/>
+          </a:bodyPr>
+          <a:lstStyle/>
+          <a:p>
+            <a:r>
+              <a:rPr sz="2400" b="0">
+                <a:latin typeface="Cambria"/>
+              </a:rPr>
+              <a:t>Γ(z) = ∫</a:t>
+            </a:r>
+            <a:r>
+              <a:rPr sz="2400" b="0" baseline="-25000">
+                <a:latin typeface="Cambria"/>
+              </a:rPr>
+              <a:t>0</a:t>
+            </a:r>
+            <a:r>
+              <a:rPr sz="2400" b="0" baseline="30000">
+                <a:latin typeface="Cambria"/>
+              </a:rPr>
+              <a:t>∞</a:t>
+            </a:r>
+            <a:r>
+              <a:rPr sz="2400" b="0">
+                <a:latin typeface="Cambria"/>
+              </a:rPr>
+              <a:t> s</a:t>
+            </a:r>
+            <a:r>
+              <a:rPr sz="2400" b="0" baseline="30000">
+                <a:latin typeface="Cambria"/>
+              </a:rPr>
+              <a:t>z−1</a:t>
+            </a:r>
+            <a:r>
+              <a:rPr sz="2400" b="0">
+                <a:latin typeface="Cambria"/>
+              </a:rPr>
+              <a:t> e</a:t>
+            </a:r>
+            <a:r>
+              <a:rPr sz="2400" b="0" baseline="30000">
+                <a:latin typeface="Cambria"/>
+              </a:rPr>
+              <a:t>−s</a:t>
+            </a:r>
+            <a:r>
+              <a:rPr sz="2400" b="0">
+                <a:latin typeface="Cambria"/>
+              </a:rPr>
+              <a:t> ds</a:t>
+            </a:r>
+          </a:p>
+        </p:txBody>
+      </p:sp>
+    </p:spTree>
+    <p:extLst>
+      <p:ext uri="{BB962C8B-B14F-4D97-AF65-F5344CB8AC3E}">
+        <p14:creationId xmlns:p14="http://schemas.microsoft.com/office/powerpoint/2010/main" val="1486909550"/>
+      </p:ext>
+    </p:extLst>
+  </p:cSld>
+  <p:clrMapOvr>
+    <a:masterClrMapping/>
+  </p:clrMapOvr>
+</p:sld>
+</file>
+
+<file path=ppt/slides/slide43.xml><?xml version="1.0" encoding="utf-8"?>
+<p:sld xmlns:a="http://schemas.openxmlformats.org/drawingml/2006/main" xmlns:r="http://schemas.openxmlformats.org/officeDocument/2006/relationships" xmlns:p="http://schemas.openxmlformats.org/presentationml/2006/main">
+  <p:cSld>
+    <p:spTree>
+      <p:nvGrpSpPr>
+        <p:cNvPr id="1" name=""/>
+        <p:cNvGrpSpPr/>
+        <p:nvPr/>
+      </p:nvGrpSpPr>
+      <p:grpSpPr>
+        <a:xfrm>
+          <a:off x="0" y="0"/>
+          <a:ext cx="0" cy="0"/>
+          <a:chOff x="0" y="0"/>
+          <a:chExt cx="0" cy="0"/>
+        </a:xfrm>
+      </p:grpSpPr>
+      <p:sp>
+        <p:nvSpPr>
+          <p:cNvPr id="15362" name="Rectangle 2"/>
+          <p:cNvSpPr>
+            <a:spLocks noGrp="1" noChangeArrowheads="1"/>
+          </p:cNvSpPr>
+          <p:nvPr>
+            <p:ph type="title"/>
+          </p:nvPr>
+        </p:nvSpPr>
+        <p:spPr>
+          <a:xfrm>
+            <a:off x="1524000" y="-76200"/>
+            <a:ext cx="8707438" cy="1143000"/>
+          </a:xfrm>
+        </p:spPr>
+        <p:txBody>
+          <a:bodyPr/>
+          <a:lstStyle/>
+          <a:p>
+            <a:pPr algn="ctr" eaLnBrk="1" hangingPunct="1">
+              <a:defRPr/>
+            </a:pPr>
+            <a:r>
+              <a:rPr lang="en-US" sz="4000" dirty="0"/>
+              <a:t>The Negative Binomial Distribution</a:t>
+            </a:r>
+            <a:br>
+              <a:rPr lang="en-US" sz="4000" dirty="0"/>
+            </a:br>
+            <a:r>
+              <a:rPr lang="en-US" sz="2400" dirty="0"/>
+              <a:t>(2) Poisson with a variable rate parameter </a:t>
+            </a:r>
+          </a:p>
+        </p:txBody>
+      </p:sp>
+      <p:sp>
+        <p:nvSpPr>
+          <p:cNvPr id="220162" name="TextBox 7"/>
           <p:cNvSpPr txBox="1">
             <a:spLocks noChangeArrowheads="1"/>
           </p:cNvSpPr>
@@ -22331,8 +21873,8 @@
         </p:nvSpPr>
         <p:spPr bwMode="auto">
           <a:xfrm>
-            <a:off x="3141663" y="4437929"/>
-            <a:ext cx="5472112" cy="461962"/>
+            <a:off x="1139218" y="2516189"/>
+            <a:ext cx="9837373" cy="461665"/>
           </a:xfrm>
           <a:prstGeom prst="rect">
             <a:avLst/>
@@ -22543,22 +22085,32 @@
               <a:buNone/>
             </a:pPr>
             <a:r>
-              <a:rPr lang="en-US" altLang="en-US" sz="2400"/>
-              <a:t>Try to derive it based on this argument</a:t>
+              <a:rPr lang="en-US" altLang="en-US" sz="2400" dirty="0">
+                <a:solidFill>
+                  <a:srgbClr val="000000"/>
+                </a:solidFill>
+              </a:rPr>
+              <a:t>Common parameterization in ecology with the mean as a parameter:</a:t>
             </a:r>
           </a:p>
         </p:txBody>
       </p:sp>
       <p:sp>
         <p:nvSpPr>
-          <p:cNvPr id="2" name="TextBox 1"/>
+          <p:cNvPr id="2" name="TextBox 1">
+            <a:extLst>
+              <a:ext uri="{FF2B5EF4-FFF2-40B4-BE49-F238E27FC236}">
+                <a16:creationId xmlns:a16="http://schemas.microsoft.com/office/drawing/2014/main" id="{CD7B4B51-8AF6-F8EA-03D4-2A3C1E59E5EB}"/>
+              </a:ext>
+            </a:extLst>
+          </p:cNvPr>
           <p:cNvSpPr txBox="1"/>
           <p:nvPr/>
         </p:nvSpPr>
         <p:spPr>
           <a:xfrm>
-            <a:off x="12107" y="6085223"/>
-            <a:ext cx="5666203" cy="830997"/>
+            <a:off x="1524000" y="4882764"/>
+            <a:ext cx="9731575" cy="830997"/>
           </a:xfrm>
           <a:prstGeom prst="rect">
             <a:avLst/>
@@ -22566,87 +22118,60 @@
           <a:noFill/>
         </p:spPr>
         <p:txBody>
-          <a:bodyPr wrap="square" rtlCol="0">
+          <a:bodyPr wrap="none" rtlCol="0">
             <a:spAutoFit/>
           </a:bodyPr>
           <a:lstStyle/>
           <a:p>
             <a:r>
               <a:rPr lang="en-US" sz="2400" dirty="0"/>
-              <a:t>How do we turn this into “failures”, X=k, until r successes?</a:t>
-            </a:r>
+              <a:t>We model </a:t>
+            </a:r>
+            <a:r>
+              <a:rPr lang="en-US" sz="2400" i="1" dirty="0"/>
+              <a:t>N </a:t>
+            </a:r>
+            <a:r>
+              <a:rPr lang="en-US" sz="2400" dirty="0" err="1"/>
+              <a:t>overdispersed</a:t>
+            </a:r>
+            <a:r>
+              <a:rPr lang="en-US" sz="2400" dirty="0"/>
+              <a:t> counts as function of mean, </a:t>
+            </a:r>
+            <a:r>
+              <a:rPr lang="en-US" sz="2400" i="1" dirty="0"/>
+              <a:t>m</a:t>
+            </a:r>
+            <a:r>
+              <a:rPr lang="en-US" sz="2400" dirty="0"/>
+              <a:t>, and dispersion, </a:t>
+            </a:r>
+            <a:r>
+              <a:rPr lang="en-US" sz="2400" i="1" dirty="0"/>
+              <a:t>k </a:t>
+            </a:r>
+          </a:p>
+          <a:p>
+            <a:pPr algn="ctr"/>
+            <a:r>
+              <a:rPr lang="en-US" sz="2400" i="1" dirty="0"/>
+              <a:t>(not to be confused with prior uses of k)</a:t>
+            </a:r>
+            <a:endParaRPr lang="en-US" sz="2400" dirty="0"/>
           </a:p>
         </p:txBody>
       </p:sp>
       <p:sp>
         <p:nvSpPr>
-          <p:cNvPr id="10" name="Rectangle 2"/>
-          <p:cNvSpPr txBox="1">
-            <a:spLocks noChangeArrowheads="1"/>
-          </p:cNvSpPr>
+          <p:cNvPr id="220163" name="TextBox 220162"/>
+          <p:cNvSpPr txBox="1"/>
           <p:nvPr/>
         </p:nvSpPr>
         <p:spPr>
           <a:xfrm>
-            <a:off x="1524000" y="34630"/>
-            <a:ext cx="8707438" cy="1143000"/>
-          </a:xfrm>
-          <a:prstGeom prst="rect">
-            <a:avLst/>
-          </a:prstGeom>
-        </p:spPr>
-        <p:txBody>
-          <a:bodyPr vert="horz" lIns="91440" tIns="45720" rIns="91440" bIns="45720" rtlCol="0" anchor="ctr">
-            <a:normAutofit/>
-          </a:bodyPr>
-          <a:lstStyle>
-            <a:lvl1pPr algn="l" defTabSz="914400" rtl="0" eaLnBrk="1" latinLnBrk="0" hangingPunct="1">
-              <a:lnSpc>
-                <a:spcPct val="90000"/>
-              </a:lnSpc>
-              <a:spcBef>
-                <a:spcPct val="0"/>
-              </a:spcBef>
-              <a:buNone/>
-              <a:defRPr sz="4400" kern="1200">
-                <a:solidFill>
-                  <a:schemeClr val="tx1"/>
-                </a:solidFill>
-                <a:latin typeface="+mj-lt"/>
-                <a:ea typeface="+mj-ea"/>
-                <a:cs typeface="+mj-cs"/>
-              </a:defRPr>
-            </a:lvl1pPr>
-          </a:lstStyle>
-          <a:p>
-            <a:pPr algn="ctr">
-              <a:defRPr/>
-            </a:pPr>
-            <a:r>
-              <a:rPr lang="en-US" sz="4000"/>
-              <a:t>The Negative Binomial Distribution</a:t>
-            </a:r>
-            <a:br>
-              <a:rPr lang="en-US" sz="4000"/>
-            </a:br>
-            <a:r>
-              <a:rPr lang="en-US" sz="2400"/>
-              <a:t>(1) # failures/trials before fixed number of successes</a:t>
-            </a:r>
-            <a:endParaRPr lang="en-US" sz="2400" dirty="0"/>
-          </a:p>
-        </p:txBody>
-      </p:sp>
-      <p:sp>
-        <p:nvSpPr>
-          <p:cNvPr id="211974" name="TextBox 211973"/>
-          <p:cNvSpPr txBox="1"/>
-          <p:nvPr/>
-        </p:nvSpPr>
-        <p:spPr>
-          <a:xfrm>
-            <a:off x="1535113" y="1390986"/>
-            <a:ext cx="9706707" cy="427037"/>
+            <a:off x="1749778" y="3510815"/>
+            <a:ext cx="9662645" cy="369332"/>
           </a:xfrm>
           <a:prstGeom prst="rect">
             <a:avLst/>
@@ -22654,169 +22179,46 @@
           <a:noFill/>
         </p:spPr>
         <p:txBody>
-          <a:bodyPr wrap="square" anchor="ctr" lIns="0" rIns="0" tIns="0" bIns="0">
+          <a:bodyPr wrap="square" lIns="0" tIns="0" rIns="0" bIns="0" anchor="ctr">
             <a:spAutoFit/>
           </a:bodyPr>
           <a:lstStyle/>
           <a:p>
             <a:r>
-              <a:rPr sz="1900" b="0">
+              <a:rPr sz="2400" b="0">
                 <a:latin typeface="Cambria"/>
               </a:rPr>
-              <a:t>Pr{N = n | k, p} = Probability that the kth success occurs on trial n</a:t>
-            </a:r>
-          </a:p>
-        </p:txBody>
-      </p:sp>
-      <p:sp>
-        <p:nvSpPr>
-          <p:cNvPr id="211975" name="TextBox 211974"/>
-          <p:cNvSpPr txBox="1"/>
-          <p:nvPr/>
-        </p:nvSpPr>
-        <p:spPr>
-          <a:xfrm>
-            <a:off x="1535113" y="4892484"/>
-            <a:ext cx="10428287" cy="955675"/>
-          </a:xfrm>
-          <a:prstGeom prst="rect">
-            <a:avLst/>
-          </a:prstGeom>
-          <a:noFill/>
-        </p:spPr>
-        <p:txBody>
-          <a:bodyPr wrap="square" anchor="ctr" lIns="0" rIns="0" tIns="0" bIns="0">
-            <a:spAutoFit/>
-          </a:bodyPr>
-          <a:lstStyle/>
-          <a:p>
-            <a:r>
-              <a:rPr sz="1600" b="0">
+              <a:t>Pr{N = n} ≡ p</a:t>
+            </a:r>
+            <a:r>
+              <a:rPr sz="2400" b="0" baseline="-25000">
                 <a:latin typeface="Cambria"/>
               </a:rPr>
-              <a:t>Pr{N = n | k, p} = (n−1 choose k−1) p</a:t>
-            </a:r>
-            <a:r>
-              <a:rPr sz="1600" b="0" baseline="30000">
+              <a:t>n</a:t>
+            </a:r>
+            <a:r>
+              <a:rPr sz="2400" b="0">
                 <a:latin typeface="Cambria"/>
               </a:rPr>
-              <a:t>k−1</a:t>
-            </a:r>
-            <a:r>
-              <a:rPr sz="1600" b="0">
+              <a:t>(m, k) = Γ(k + n) / (n! Γ(k)) · (k / (k + m))</a:t>
+            </a:r>
+            <a:r>
+              <a:rPr sz="2400" b="0" baseline="30000">
                 <a:latin typeface="Cambria"/>
               </a:rPr>
-              <a:t> (1 − p)</a:t>
-            </a:r>
-            <a:r>
-              <a:rPr sz="1600" b="0" baseline="30000">
+              <a:t>k</a:t>
+            </a:r>
+            <a:r>
+              <a:rPr sz="2400" b="0">
                 <a:latin typeface="Cambria"/>
               </a:rPr>
-              <a:t>n − k</a:t>
-            </a:r>
-            <a:r>
-              <a:rPr sz="1600" b="0">
+              <a:t> · (m / (k + m))</a:t>
+            </a:r>
+            <a:r>
+              <a:rPr sz="2400" b="0" baseline="30000">
                 <a:latin typeface="Cambria"/>
               </a:rPr>
-              <a:t> p = (n−1 choose k−1) p</a:t>
-            </a:r>
-            <a:r>
-              <a:rPr sz="1600" b="0" baseline="30000">
-                <a:latin typeface="Cambria"/>
-              </a:rPr>
-              <a:t>k</a:t>
-            </a:r>
-            <a:r>
-              <a:rPr sz="1600" b="0">
-                <a:latin typeface="Cambria"/>
-              </a:rPr>
-              <a:t> (1 − p)</a:t>
-            </a:r>
-            <a:r>
-              <a:rPr sz="1600" b="0" baseline="30000">
-                <a:latin typeface="Cambria"/>
-              </a:rPr>
-              <a:t>n − k</a:t>
-            </a:r>
-          </a:p>
-        </p:txBody>
-      </p:sp>
-      <p:sp>
-        <p:nvSpPr>
-          <p:cNvPr id="211976" name="TextBox 211975"/>
-          <p:cNvSpPr txBox="1"/>
-          <p:nvPr/>
-        </p:nvSpPr>
-        <p:spPr>
-          <a:xfrm>
-            <a:off x="5963239" y="5922241"/>
-            <a:ext cx="6000161" cy="955675"/>
-          </a:xfrm>
-          <a:prstGeom prst="rect">
-            <a:avLst/>
-          </a:prstGeom>
-          <a:noFill/>
-        </p:spPr>
-        <p:txBody>
-          <a:bodyPr wrap="square" anchor="ctr" lIns="0" rIns="0" tIns="0" bIns="0">
-            <a:spAutoFit/>
-          </a:bodyPr>
-          <a:lstStyle/>
-          <a:p>
-            <a:r>
-              <a:rPr sz="1500" b="0">
-                <a:latin typeface="Cambria"/>
-              </a:rPr>
-              <a:t>f(k; r, p) ≡ Pr(X = k) = (k+r−1 choose r−1) (1 − p)</a:t>
-            </a:r>
-            <a:r>
-              <a:rPr sz="1500" b="0" baseline="30000">
-                <a:latin typeface="Cambria"/>
-              </a:rPr>
-              <a:t>k</a:t>
-            </a:r>
-            <a:r>
-              <a:rPr sz="1500" b="0">
-                <a:latin typeface="Cambria"/>
-              </a:rPr>
-              <a:t> p</a:t>
-            </a:r>
-            <a:r>
-              <a:rPr sz="1500" b="0" baseline="30000">
-                <a:latin typeface="Cambria"/>
-              </a:rPr>
-              <a:t>r</a:t>
-            </a:r>
-          </a:p>
-        </p:txBody>
-      </p:sp>
-      <p:sp>
-        <p:nvSpPr>
-          <p:cNvPr id="211977" name="TextBox 211976"/>
-          <p:cNvSpPr txBox="1"/>
-          <p:nvPr/>
-        </p:nvSpPr>
-        <p:spPr>
-          <a:xfrm>
-            <a:off x="1688592" y="2211214"/>
-            <a:ext cx="8814816" cy="1289304"/>
-          </a:xfrm>
-          <a:prstGeom prst="rect">
-            <a:avLst/>
-          </a:prstGeom>
-          <a:noFill/>
-        </p:spPr>
-        <p:txBody>
-          <a:bodyPr wrap="square" anchor="t" lIns="0" rIns="0" tIns="0" bIns="0">
-            <a:spAutoFit/>
-          </a:bodyPr>
-          <a:lstStyle/>
-          <a:p>
-            <a:r>
-              <a:rPr sz="1800" b="0">
-                <a:latin typeface="Calibri"/>
-              </a:rPr>
-              <a:t>Now, for the kth success to occur on trial n, we must have k − 1 successes in the first n − 1 trials and a success on the nth trial. The probability of k − 1 successes in n − 1 trials has a binomial distribution with parameters n − 1 and p and the probability of success on the nth trial has probability p and these are independent of each other. We thus conclude</a:t>
+              <a:t>n</a:t>
             </a:r>
           </a:p>
         </p:txBody>
@@ -22824,185 +22226,17 @@
     </p:spTree>
     <p:extLst>
       <p:ext uri="{BB962C8B-B14F-4D97-AF65-F5344CB8AC3E}">
-        <p14:creationId xmlns:p14="http://schemas.microsoft.com/office/powerpoint/2010/main" val="1255430821"/>
+        <p14:creationId xmlns:p14="http://schemas.microsoft.com/office/powerpoint/2010/main" val="570665033"/>
       </p:ext>
     </p:extLst>
   </p:cSld>
   <p:clrMapOvr>
     <a:masterClrMapping/>
   </p:clrMapOvr>
-  <p:timing>
-    <p:tnLst>
-      <p:par>
-        <p:cTn id="1" dur="indefinite" restart="never" nodeType="tmRoot">
-          <p:childTnLst>
-            <p:seq concurrent="1" nextAc="seek">
-              <p:cTn id="2" dur="indefinite" nodeType="mainSeq">
-                <p:childTnLst>
-                  <p:par>
-                    <p:cTn id="3" fill="hold" nodeType="clickPar">
-                      <p:stCondLst>
-                        <p:cond delay="indefinite"/>
-                      </p:stCondLst>
-                      <p:childTnLst>
-                        <p:par>
-                          <p:cTn id="4" fill="hold" nodeType="withGroup">
-                            <p:stCondLst>
-                              <p:cond delay="0"/>
-                            </p:stCondLst>
-                            <p:childTnLst>
-                              <p:par>
-                                <p:cTn id="5" presetID="1" presetClass="entr" presetSubtype="0" fill="hold" nodeType="clickEffect">
-                                  <p:stCondLst>
-                                    <p:cond delay="0"/>
-                                  </p:stCondLst>
-                                  <p:childTnLst>
-                                    <p:set>
-                                      <p:cBhvr>
-                                        <p:cTn id="6" dur="1" fill="hold">
-                                          <p:stCondLst>
-                                            <p:cond delay="0"/>
-                                          </p:stCondLst>
-                                        </p:cTn>
-                                        <p:tgtEl>
-                                          <p:spTgt spid="6"/>
-                                        </p:tgtEl>
-                                        <p:attrNameLst>
-                                          <p:attrName>style.visibility</p:attrName>
-                                        </p:attrNameLst>
-                                      </p:cBhvr>
-                                      <p:to>
-                                        <p:strVal val="visible"/>
-                                      </p:to>
-                                    </p:set>
-                                  </p:childTnLst>
-                                </p:cTn>
-                              </p:par>
-                            </p:childTnLst>
-                          </p:cTn>
-                        </p:par>
-                      </p:childTnLst>
-                    </p:cTn>
-                  </p:par>
-                  <p:par>
-                    <p:cTn id="7" fill="hold">
-                      <p:stCondLst>
-                        <p:cond delay="indefinite"/>
-                      </p:stCondLst>
-                      <p:childTnLst>
-                        <p:par>
-                          <p:cTn id="8" fill="hold">
-                            <p:stCondLst>
-                              <p:cond delay="0"/>
-                            </p:stCondLst>
-                            <p:childTnLst>
-                              <p:par>
-                                <p:cTn id="9" presetID="1" presetClass="entr" presetSubtype="0" fill="hold" grpId="0" nodeType="clickEffect">
-                                  <p:stCondLst>
-                                    <p:cond delay="0"/>
-                                  </p:stCondLst>
-                                  <p:childTnLst>
-                                    <p:set>
-                                      <p:cBhvr>
-                                        <p:cTn id="10" dur="1" fill="hold">
-                                          <p:stCondLst>
-                                            <p:cond delay="0"/>
-                                          </p:stCondLst>
-                                        </p:cTn>
-                                        <p:tgtEl>
-                                          <p:spTgt spid="2"/>
-                                        </p:tgtEl>
-                                        <p:attrNameLst>
-                                          <p:attrName>style.visibility</p:attrName>
-                                        </p:attrNameLst>
-                                      </p:cBhvr>
-                                      <p:to>
-                                        <p:strVal val="visible"/>
-                                      </p:to>
-                                    </p:set>
-                                  </p:childTnLst>
-                                </p:cTn>
-                              </p:par>
-                            </p:childTnLst>
-                          </p:cTn>
-                        </p:par>
-                      </p:childTnLst>
-                    </p:cTn>
-                  </p:par>
-                  <p:par>
-                    <p:cTn id="11" fill="hold">
-                      <p:stCondLst>
-                        <p:cond delay="indefinite"/>
-                      </p:stCondLst>
-                      <p:childTnLst>
-                        <p:par>
-                          <p:cTn id="12" fill="hold">
-                            <p:stCondLst>
-                              <p:cond delay="0"/>
-                            </p:stCondLst>
-                            <p:childTnLst>
-                              <p:par>
-                                <p:cTn id="13" presetID="1" presetClass="entr" presetSubtype="0" fill="hold" nodeType="clickEffect">
-                                  <p:stCondLst>
-                                    <p:cond delay="0"/>
-                                  </p:stCondLst>
-                                  <p:childTnLst>
-                                    <p:set>
-                                      <p:cBhvr>
-                                        <p:cTn id="14" dur="1" fill="hold">
-                                          <p:stCondLst>
-                                            <p:cond delay="0"/>
-                                          </p:stCondLst>
-                                        </p:cTn>
-                                        <p:tgtEl>
-                                          <p:spTgt spid="3"/>
-                                        </p:tgtEl>
-                                        <p:attrNameLst>
-                                          <p:attrName>style.visibility</p:attrName>
-                                        </p:attrNameLst>
-                                      </p:cBhvr>
-                                      <p:to>
-                                        <p:strVal val="visible"/>
-                                      </p:to>
-                                    </p:set>
-                                  </p:childTnLst>
-                                </p:cTn>
-                              </p:par>
-                            </p:childTnLst>
-                          </p:cTn>
-                        </p:par>
-                      </p:childTnLst>
-                    </p:cTn>
-                  </p:par>
-                </p:childTnLst>
-              </p:cTn>
-              <p:prevCondLst>
-                <p:cond evt="onPrev" delay="0">
-                  <p:tgtEl>
-                    <p:sldTgt/>
-                  </p:tgtEl>
-                </p:cond>
-              </p:prevCondLst>
-              <p:nextCondLst>
-                <p:cond evt="onNext" delay="0">
-                  <p:tgtEl>
-                    <p:sldTgt/>
-                  </p:tgtEl>
-                </p:cond>
-              </p:nextCondLst>
-            </p:seq>
-          </p:childTnLst>
-        </p:cTn>
-      </p:par>
-    </p:tnLst>
-    <p:bldLst>
-      <p:bldP spid="2" grpId="0"/>
-    </p:bldLst>
-  </p:timing>
 </p:sld>
 </file>
 
-<file path=ppt/slides/slide41.xml><?xml version="1.0" encoding="utf-8"?>
+<file path=ppt/slides/slide44.xml><?xml version="1.0" encoding="utf-8"?>
 <p:sld xmlns:a="http://schemas.openxmlformats.org/drawingml/2006/main" xmlns:r="http://schemas.openxmlformats.org/officeDocument/2006/relationships" xmlns:p="http://schemas.openxmlformats.org/presentationml/2006/main">
   <p:cSld>
     <p:spTree>
@@ -23031,7 +22265,7 @@
         </p:nvSpPr>
         <p:spPr>
           <a:xfrm>
-            <a:off x="1524000" y="6920"/>
+            <a:off x="1524000" y="-76200"/>
             <a:ext cx="8707438" cy="1143000"/>
           </a:xfrm>
         </p:spPr>
@@ -23058,927 +22292,7 @@
       </p:sp>
       <p:sp>
         <p:nvSpPr>
-          <p:cNvPr id="2" name="Text Placeholder 1"/>
-          <p:cNvSpPr>
-            <a:spLocks noGrp="1"/>
-          </p:cNvSpPr>
-          <p:nvPr>
-            <p:ph type="body" sz="half" idx="1"/>
-          </p:nvPr>
-        </p:nvSpPr>
-        <p:spPr>
-          <a:xfrm>
-            <a:off x="1798638" y="1378520"/>
-            <a:ext cx="8793162" cy="2667000"/>
-          </a:xfrm>
-        </p:spPr>
-        <p:txBody>
-          <a:bodyPr>
-            <a:normAutofit lnSpcReduction="10000"/>
-          </a:bodyPr>
-          <a:lstStyle/>
-          <a:p>
-            <a:pPr>
-              <a:defRPr/>
-            </a:pPr>
-            <a:r>
-              <a:rPr lang="en-US" dirty="0"/>
-              <a:t>Start with Poisson</a:t>
-            </a:r>
-          </a:p>
-          <a:p>
-            <a:pPr>
-              <a:defRPr/>
-            </a:pPr>
-            <a:endParaRPr lang="en-US" dirty="0"/>
-          </a:p>
-          <a:p>
-            <a:pPr>
-              <a:defRPr/>
-            </a:pPr>
-            <a:endParaRPr lang="en-US" dirty="0"/>
-          </a:p>
-          <a:p>
-            <a:pPr>
-              <a:defRPr/>
-            </a:pPr>
-            <a:r>
-              <a:rPr lang="en-US" dirty="0"/>
-              <a:t>But let’s give lambda a continuous probability (continuous distributions come soon!) and then integrate over all possible values of lambda (this is called “marginalizing”)</a:t>
-            </a:r>
-          </a:p>
-        </p:txBody>
-      </p:sp>
-      <p:sp>
-        <p:nvSpPr>
-          <p:cNvPr id="4" name="TextBox 3"/>
-          <p:cNvSpPr txBox="1"/>
-          <p:nvPr/>
-        </p:nvSpPr>
-        <p:spPr>
-          <a:xfrm>
-            <a:off x="1735548" y="5974765"/>
-            <a:ext cx="1017971" cy="369332"/>
-          </a:xfrm>
-          <a:prstGeom prst="rect">
-            <a:avLst/>
-          </a:prstGeom>
-          <a:noFill/>
-        </p:spPr>
-        <p:txBody>
-          <a:bodyPr wrap="none" rtlCol="0">
-            <a:spAutoFit/>
-          </a:bodyPr>
-          <a:lstStyle/>
-          <a:p>
-            <a:r>
-              <a:rPr lang="en-US"/>
-              <a:t>Because:</a:t>
-            </a:r>
-          </a:p>
-        </p:txBody>
-      </p:sp>
-      <p:sp>
-        <p:nvSpPr>
-          <p:cNvPr id="214021" name="TextBox 214020"/>
-          <p:cNvSpPr txBox="1"/>
-          <p:nvPr/>
-        </p:nvSpPr>
-        <p:spPr>
-          <a:xfrm>
-            <a:off x="5081752" y="1149920"/>
-            <a:ext cx="6471138" cy="1352550"/>
-          </a:xfrm>
-          <a:prstGeom prst="rect">
-            <a:avLst/>
-          </a:prstGeom>
-          <a:noFill/>
-        </p:spPr>
-        <p:txBody>
-          <a:bodyPr wrap="square" anchor="ctr" lIns="0" rIns="0" tIns="0" bIns="0">
-            <a:spAutoFit/>
-          </a:bodyPr>
-          <a:lstStyle/>
-          <a:p>
-            <a:r>
-              <a:rPr sz="1900" b="0">
-                <a:latin typeface="Cambria"/>
-              </a:rPr>
-              <a:t>Pr{k events in [0, t] | λ} = (λt)</a:t>
-            </a:r>
-            <a:r>
-              <a:rPr sz="1900" b="0" baseline="30000">
-                <a:latin typeface="Cambria"/>
-              </a:rPr>
-              <a:t>k</a:t>
-            </a:r>
-            <a:r>
-              <a:rPr sz="1900" b="0">
-                <a:latin typeface="Cambria"/>
-              </a:rPr>
-              <a:t> / k! · e</a:t>
-            </a:r>
-            <a:r>
-              <a:rPr sz="1900" b="0" baseline="30000">
-                <a:latin typeface="Cambria"/>
-              </a:rPr>
-              <a:t>−λt</a:t>
-            </a:r>
-          </a:p>
-        </p:txBody>
-      </p:sp>
-      <p:sp>
-        <p:nvSpPr>
-          <p:cNvPr id="214022" name="TextBox 214021"/>
-          <p:cNvSpPr txBox="1"/>
-          <p:nvPr/>
-        </p:nvSpPr>
-        <p:spPr>
-          <a:xfrm>
-            <a:off x="3134519" y="4045520"/>
-            <a:ext cx="7877907" cy="1377950"/>
-          </a:xfrm>
-          <a:prstGeom prst="rect">
-            <a:avLst/>
-          </a:prstGeom>
-          <a:noFill/>
-        </p:spPr>
-        <p:txBody>
-          <a:bodyPr wrap="square" anchor="ctr" lIns="0" rIns="0" tIns="0" bIns="0">
-            <a:spAutoFit/>
-          </a:bodyPr>
-          <a:lstStyle/>
-          <a:p>
-            <a:r>
-              <a:rPr sz="1900" b="0">
-                <a:latin typeface="Cambria"/>
-              </a:rPr>
-              <a:t>Pr{k events in [0, t]} = ∫</a:t>
-            </a:r>
-            <a:r>
-              <a:rPr sz="1900" b="0" baseline="-25000">
-                <a:latin typeface="Cambria"/>
-              </a:rPr>
-              <a:t>0</a:t>
-            </a:r>
-            <a:r>
-              <a:rPr sz="1900" b="0" baseline="30000">
-                <a:latin typeface="Cambria"/>
-              </a:rPr>
-              <a:t>∞</a:t>
-            </a:r>
-            <a:r>
-              <a:rPr sz="1900" b="0">
-                <a:latin typeface="Cambria"/>
-              </a:rPr>
-              <a:t> (λt)</a:t>
-            </a:r>
-            <a:r>
-              <a:rPr sz="1900" b="0" baseline="30000">
-                <a:latin typeface="Cambria"/>
-              </a:rPr>
-              <a:t>k</a:t>
-            </a:r>
-            <a:r>
-              <a:rPr sz="1900" b="0">
-                <a:latin typeface="Cambria"/>
-              </a:rPr>
-              <a:t> / k! · e</a:t>
-            </a:r>
-            <a:r>
-              <a:rPr sz="1900" b="0" baseline="30000">
-                <a:latin typeface="Cambria"/>
-              </a:rPr>
-              <a:t>−λt</a:t>
-            </a:r>
-            <a:r>
-              <a:rPr sz="1900" b="0">
-                <a:latin typeface="Cambria"/>
-              </a:rPr>
-              <a:t> · f(λ) dλ</a:t>
-            </a:r>
-          </a:p>
-        </p:txBody>
-      </p:sp>
-      <p:sp>
-        <p:nvSpPr>
-          <p:cNvPr id="214023" name="TextBox 214022"/>
-          <p:cNvSpPr txBox="1"/>
-          <p:nvPr/>
-        </p:nvSpPr>
-        <p:spPr>
-          <a:xfrm>
-            <a:off x="2753519" y="5791131"/>
-            <a:ext cx="7033846" cy="736600"/>
-          </a:xfrm>
-          <a:prstGeom prst="rect">
-            <a:avLst/>
-          </a:prstGeom>
-          <a:noFill/>
-        </p:spPr>
-        <p:txBody>
-          <a:bodyPr wrap="square" anchor="ctr" lIns="0" rIns="0" tIns="0" bIns="0">
-            <a:spAutoFit/>
-          </a:bodyPr>
-          <a:lstStyle/>
-          <a:p>
-            <a:r>
-              <a:rPr sz="1900" b="0">
-                <a:latin typeface="Cambria"/>
-              </a:rPr>
-              <a:t>p</a:t>
-            </a:r>
-            <a:r>
-              <a:rPr sz="1900" b="0" baseline="-25000">
-                <a:latin typeface="Cambria"/>
-              </a:rPr>
-              <a:t>X</a:t>
-            </a:r>
-            <a:r>
-              <a:rPr sz="1900" b="0">
-                <a:latin typeface="Cambria"/>
-              </a:rPr>
-              <a:t>(x) = ∫</a:t>
-            </a:r>
-            <a:r>
-              <a:rPr sz="1900" b="0" baseline="-25000">
-                <a:latin typeface="Cambria"/>
-              </a:rPr>
-              <a:t>y</a:t>
-            </a:r>
-            <a:r>
-              <a:rPr sz="1900" b="0">
-                <a:latin typeface="Cambria"/>
-              </a:rPr>
-              <a:t> p</a:t>
-            </a:r>
-            <a:r>
-              <a:rPr sz="1900" b="0" baseline="-25000">
-                <a:latin typeface="Cambria"/>
-              </a:rPr>
-              <a:t>X,Y</a:t>
-            </a:r>
-            <a:r>
-              <a:rPr sz="1900" b="0">
-                <a:latin typeface="Cambria"/>
-              </a:rPr>
-              <a:t>(x, y) dy = ∫</a:t>
-            </a:r>
-            <a:r>
-              <a:rPr sz="1900" b="0" baseline="-25000">
-                <a:latin typeface="Cambria"/>
-              </a:rPr>
-              <a:t>y</a:t>
-            </a:r>
-            <a:r>
-              <a:rPr sz="1900" b="0">
-                <a:latin typeface="Cambria"/>
-              </a:rPr>
-              <a:t> p</a:t>
-            </a:r>
-            <a:r>
-              <a:rPr sz="1900" b="0" baseline="-25000">
-                <a:latin typeface="Cambria"/>
-              </a:rPr>
-              <a:t>X|Y</a:t>
-            </a:r>
-            <a:r>
-              <a:rPr sz="1900" b="0">
-                <a:latin typeface="Cambria"/>
-              </a:rPr>
-              <a:t>(x | y) p</a:t>
-            </a:r>
-            <a:r>
-              <a:rPr sz="1900" b="0" baseline="-25000">
-                <a:latin typeface="Cambria"/>
-              </a:rPr>
-              <a:t>Y</a:t>
-            </a:r>
-            <a:r>
-              <a:rPr sz="1900" b="0">
-                <a:latin typeface="Cambria"/>
-              </a:rPr>
-              <a:t>(y) dy</a:t>
-            </a:r>
-          </a:p>
-        </p:txBody>
-      </p:sp>
-    </p:spTree>
-    <p:extLst>
-      <p:ext uri="{BB962C8B-B14F-4D97-AF65-F5344CB8AC3E}">
-        <p14:creationId xmlns:p14="http://schemas.microsoft.com/office/powerpoint/2010/main" val="123193495"/>
-      </p:ext>
-    </p:extLst>
-  </p:cSld>
-  <p:clrMapOvr>
-    <a:masterClrMapping/>
-  </p:clrMapOvr>
-</p:sld>
-</file>
-
-<file path=ppt/slides/slide42.xml><?xml version="1.0" encoding="utf-8"?>
-<p:sld xmlns:a="http://schemas.openxmlformats.org/drawingml/2006/main" xmlns:r="http://schemas.openxmlformats.org/officeDocument/2006/relationships" xmlns:p="http://schemas.openxmlformats.org/presentationml/2006/main">
-  <p:cSld>
-    <p:spTree>
-      <p:nvGrpSpPr>
-        <p:cNvPr id="1" name=""/>
-        <p:cNvGrpSpPr/>
-        <p:nvPr/>
-      </p:nvGrpSpPr>
-      <p:grpSpPr>
-        <a:xfrm>
-          <a:off x="0" y="0"/>
-          <a:ext cx="0" cy="0"/>
-          <a:chOff x="0" y="0"/>
-          <a:chExt cx="0" cy="0"/>
-        </a:xfrm>
-      </p:grpSpPr>
-      <p:sp>
-        <p:nvSpPr>
-          <p:cNvPr id="17410" name="Rectangle 2"/>
-          <p:cNvSpPr>
-            <a:spLocks noGrp="1" noChangeArrowheads="1"/>
-          </p:cNvSpPr>
-          <p:nvPr>
-            <p:ph type="title"/>
-          </p:nvPr>
-        </p:nvSpPr>
-        <p:spPr>
-          <a:xfrm>
-            <a:off x="1828801" y="381000"/>
-            <a:ext cx="8639175" cy="1143000"/>
-          </a:xfrm>
-        </p:spPr>
-        <p:txBody>
-          <a:bodyPr/>
-          <a:lstStyle/>
-          <a:p>
-            <a:pPr algn="ctr" eaLnBrk="1" hangingPunct="1">
-              <a:defRPr/>
-            </a:pPr>
-            <a:r>
-              <a:rPr lang="en-US"/>
-              <a:t>Quick note </a:t>
-            </a:r>
-            <a:r>
-              <a:rPr lang="en-US" dirty="0"/>
-              <a:t>on Gamma function</a:t>
-            </a:r>
-          </a:p>
-        </p:txBody>
-      </p:sp>
-      <p:sp>
-        <p:nvSpPr>
-          <p:cNvPr id="17411" name="Rectangle 3"/>
-          <p:cNvSpPr>
-            <a:spLocks noGrp="1" noChangeArrowheads="1"/>
-          </p:cNvSpPr>
-          <p:nvPr>
-            <p:ph type="body" sz="half" idx="1"/>
-          </p:nvPr>
-        </p:nvSpPr>
-        <p:spPr>
-          <a:xfrm>
-            <a:off x="2706688" y="2017713"/>
-            <a:ext cx="7275512" cy="4114800"/>
-          </a:xfrm>
-        </p:spPr>
-        <p:txBody>
-          <a:bodyPr/>
-          <a:lstStyle/>
-          <a:p>
-            <a:pPr eaLnBrk="1" hangingPunct="1">
-              <a:defRPr/>
-            </a:pPr>
-            <a:r>
-              <a:rPr lang="en-US" dirty="0"/>
-              <a:t>Continuous version of factorial</a:t>
-            </a:r>
-          </a:p>
-          <a:p>
-            <a:pPr eaLnBrk="1" hangingPunct="1">
-              <a:defRPr/>
-            </a:pPr>
-            <a:r>
-              <a:rPr lang="en-US" dirty="0"/>
-              <a:t>For integers, </a:t>
-            </a:r>
-            <a:r>
-              <a:rPr lang="en-US" i="1" dirty="0"/>
-              <a:t>z</a:t>
-            </a:r>
-            <a:r>
-              <a:rPr lang="en-US" dirty="0"/>
-              <a:t>,</a:t>
-            </a:r>
-          </a:p>
-          <a:p>
-            <a:pPr eaLnBrk="1" hangingPunct="1">
-              <a:defRPr/>
-            </a:pPr>
-            <a:r>
-              <a:rPr lang="en-US" dirty="0"/>
-              <a:t>In general</a:t>
-            </a:r>
-          </a:p>
-          <a:p>
-            <a:pPr eaLnBrk="1" hangingPunct="1">
-              <a:defRPr/>
-            </a:pPr>
-            <a:endParaRPr lang="en-US" dirty="0"/>
-          </a:p>
-          <a:p>
-            <a:pPr eaLnBrk="1" hangingPunct="1">
-              <a:defRPr/>
-            </a:pPr>
-            <a:r>
-              <a:rPr lang="en-US" dirty="0"/>
-              <a:t>Defined (for z &gt; 0): </a:t>
-            </a:r>
-          </a:p>
-        </p:txBody>
-      </p:sp>
-      <p:sp>
-        <p:nvSpPr>
-          <p:cNvPr id="17412" name="TextBox 17411"/>
-          <p:cNvSpPr txBox="1"/>
-          <p:nvPr/>
-        </p:nvSpPr>
-        <p:spPr>
-          <a:xfrm>
-            <a:off x="5791200" y="2514600"/>
-            <a:ext cx="2552700" cy="520700"/>
-          </a:xfrm>
-          <a:prstGeom prst="rect">
-            <a:avLst/>
-          </a:prstGeom>
-          <a:noFill/>
-        </p:spPr>
-        <p:txBody>
-          <a:bodyPr wrap="square" anchor="ctr" lIns="0" rIns="0" tIns="0" bIns="0">
-            <a:spAutoFit/>
-          </a:bodyPr>
-          <a:lstStyle/>
-          <a:p>
-            <a:r>
-              <a:rPr sz="2400" b="0">
-                <a:latin typeface="Cambria"/>
-              </a:rPr>
-              <a:t>Γ(z) = (z − 1)!</a:t>
-            </a:r>
-          </a:p>
-        </p:txBody>
-      </p:sp>
-      <p:sp>
-        <p:nvSpPr>
-          <p:cNvPr id="17413" name="TextBox 17412"/>
-          <p:cNvSpPr txBox="1"/>
-          <p:nvPr/>
-        </p:nvSpPr>
-        <p:spPr>
-          <a:xfrm>
-            <a:off x="5072063" y="3035300"/>
-            <a:ext cx="2997200" cy="685800"/>
-          </a:xfrm>
-          <a:prstGeom prst="rect">
-            <a:avLst/>
-          </a:prstGeom>
-          <a:noFill/>
-        </p:spPr>
-        <p:txBody>
-          <a:bodyPr wrap="square" anchor="ctr" lIns="0" rIns="0" tIns="0" bIns="0">
-            <a:spAutoFit/>
-          </a:bodyPr>
-          <a:lstStyle/>
-          <a:p>
-            <a:r>
-              <a:rPr sz="2500" b="0">
-                <a:latin typeface="Cambria"/>
-              </a:rPr>
-              <a:t>Γ(z + 1) = z Γ(z)</a:t>
-            </a:r>
-          </a:p>
-        </p:txBody>
-      </p:sp>
-      <p:sp>
-        <p:nvSpPr>
-          <p:cNvPr id="17414" name="TextBox 17413"/>
-          <p:cNvSpPr txBox="1"/>
-          <p:nvPr/>
-        </p:nvSpPr>
-        <p:spPr>
-          <a:xfrm>
-            <a:off x="6361113" y="3963988"/>
-            <a:ext cx="3416300" cy="1816100"/>
-          </a:xfrm>
-          <a:prstGeom prst="rect">
-            <a:avLst/>
-          </a:prstGeom>
-          <a:noFill/>
-        </p:spPr>
-        <p:txBody>
-          <a:bodyPr wrap="square" anchor="ctr" lIns="0" rIns="0" tIns="0" bIns="0">
-            <a:spAutoFit/>
-          </a:bodyPr>
-          <a:lstStyle/>
-          <a:p>
-            <a:r>
-              <a:rPr sz="2200" b="0">
-                <a:latin typeface="Cambria"/>
-              </a:rPr>
-              <a:t>Γ(z) = ∫</a:t>
-            </a:r>
-            <a:r>
-              <a:rPr sz="2200" b="0" baseline="-25000">
-                <a:latin typeface="Cambria"/>
-              </a:rPr>
-              <a:t>0</a:t>
-            </a:r>
-            <a:r>
-              <a:rPr sz="2200" b="0" baseline="30000">
-                <a:latin typeface="Cambria"/>
-              </a:rPr>
-              <a:t>∞</a:t>
-            </a:r>
-            <a:r>
-              <a:rPr sz="2200" b="0">
-                <a:latin typeface="Cambria"/>
-              </a:rPr>
-              <a:t> s</a:t>
-            </a:r>
-            <a:r>
-              <a:rPr sz="2200" b="0" baseline="30000">
-                <a:latin typeface="Cambria"/>
-              </a:rPr>
-              <a:t>z−1</a:t>
-            </a:r>
-            <a:r>
-              <a:rPr sz="2200" b="0">
-                <a:latin typeface="Cambria"/>
-              </a:rPr>
-              <a:t> e</a:t>
-            </a:r>
-            <a:r>
-              <a:rPr sz="2200" b="0" baseline="30000">
-                <a:latin typeface="Cambria"/>
-              </a:rPr>
-              <a:t>−s</a:t>
-            </a:r>
-            <a:r>
-              <a:rPr sz="2200" b="0">
-                <a:latin typeface="Cambria"/>
-              </a:rPr>
-              <a:t> ds</a:t>
-            </a:r>
-          </a:p>
-        </p:txBody>
-      </p:sp>
-    </p:spTree>
-    <p:extLst>
-      <p:ext uri="{BB962C8B-B14F-4D97-AF65-F5344CB8AC3E}">
-        <p14:creationId xmlns:p14="http://schemas.microsoft.com/office/powerpoint/2010/main" val="1486909550"/>
-      </p:ext>
-    </p:extLst>
-  </p:cSld>
-  <p:clrMapOvr>
-    <a:masterClrMapping/>
-  </p:clrMapOvr>
-  <p:timing>
-    <p:tnLst>
-      <p:par>
-        <p:cTn id="1" dur="indefinite" restart="never" nodeType="tmRoot">
-          <p:childTnLst>
-            <p:seq concurrent="1" nextAc="seek">
-              <p:cTn id="2" dur="indefinite" nodeType="mainSeq">
-                <p:childTnLst>
-                  <p:par>
-                    <p:cTn id="3" fill="hold" nodeType="clickPar">
-                      <p:stCondLst>
-                        <p:cond delay="indefinite"/>
-                      </p:stCondLst>
-                      <p:childTnLst>
-                        <p:par>
-                          <p:cTn id="4" fill="hold" nodeType="withGroup">
-                            <p:stCondLst>
-                              <p:cond delay="0"/>
-                            </p:stCondLst>
-                            <p:childTnLst>
-                              <p:par>
-                                <p:cTn id="5" presetID="1" presetClass="entr" presetSubtype="0" fill="hold" nodeType="clickEffect">
-                                  <p:stCondLst>
-                                    <p:cond delay="0"/>
-                                  </p:stCondLst>
-                                  <p:childTnLst>
-                                    <p:set>
-                                      <p:cBhvr>
-                                        <p:cTn id="6" dur="1" fill="hold">
-                                          <p:stCondLst>
-                                            <p:cond delay="0"/>
-                                          </p:stCondLst>
-                                        </p:cTn>
-                                        <p:tgtEl>
-                                          <p:spTgt spid="17411">
-                                            <p:txEl>
-                                              <p:pRg st="1" end="1"/>
-                                            </p:txEl>
-                                          </p:spTgt>
-                                        </p:tgtEl>
-                                        <p:attrNameLst>
-                                          <p:attrName>style.visibility</p:attrName>
-                                        </p:attrNameLst>
-                                      </p:cBhvr>
-                                      <p:to>
-                                        <p:strVal val="visible"/>
-                                      </p:to>
-                                    </p:set>
-                                  </p:childTnLst>
-                                </p:cTn>
-                              </p:par>
-                              <p:par>
-                                <p:cTn id="7" presetID="1" presetClass="entr" presetSubtype="0" fill="hold" nodeType="withEffect">
-                                  <p:stCondLst>
-                                    <p:cond delay="0"/>
-                                  </p:stCondLst>
-                                  <p:childTnLst>
-                                    <p:set>
-                                      <p:cBhvr>
-                                        <p:cTn id="8" dur="1" fill="hold">
-                                          <p:stCondLst>
-                                            <p:cond delay="0"/>
-                                          </p:stCondLst>
-                                        </p:cTn>
-                                        <p:tgtEl>
-                                          <p:spTgt spid="3"/>
-                                        </p:tgtEl>
-                                        <p:attrNameLst>
-                                          <p:attrName>style.visibility</p:attrName>
-                                        </p:attrNameLst>
-                                      </p:cBhvr>
-                                      <p:to>
-                                        <p:strVal val="visible"/>
-                                      </p:to>
-                                    </p:set>
-                                  </p:childTnLst>
-                                </p:cTn>
-                              </p:par>
-                            </p:childTnLst>
-                          </p:cTn>
-                        </p:par>
-                      </p:childTnLst>
-                    </p:cTn>
-                  </p:par>
-                  <p:par>
-                    <p:cTn id="9" fill="hold" nodeType="clickPar">
-                      <p:stCondLst>
-                        <p:cond delay="indefinite"/>
-                      </p:stCondLst>
-                      <p:childTnLst>
-                        <p:par>
-                          <p:cTn id="10" fill="hold" nodeType="withGroup">
-                            <p:stCondLst>
-                              <p:cond delay="0"/>
-                            </p:stCondLst>
-                            <p:childTnLst>
-                              <p:par>
-                                <p:cTn id="11" presetID="1" presetClass="entr" presetSubtype="0" fill="hold" nodeType="clickEffect">
-                                  <p:stCondLst>
-                                    <p:cond delay="0"/>
-                                  </p:stCondLst>
-                                  <p:childTnLst>
-                                    <p:set>
-                                      <p:cBhvr>
-                                        <p:cTn id="12" dur="1" fill="hold">
-                                          <p:stCondLst>
-                                            <p:cond delay="0"/>
-                                          </p:stCondLst>
-                                        </p:cTn>
-                                        <p:tgtEl>
-                                          <p:spTgt spid="17411">
-                                            <p:txEl>
-                                              <p:pRg st="2" end="2"/>
-                                            </p:txEl>
-                                          </p:spTgt>
-                                        </p:tgtEl>
-                                        <p:attrNameLst>
-                                          <p:attrName>style.visibility</p:attrName>
-                                        </p:attrNameLst>
-                                      </p:cBhvr>
-                                      <p:to>
-                                        <p:strVal val="visible"/>
-                                      </p:to>
-                                    </p:set>
-                                  </p:childTnLst>
-                                </p:cTn>
-                              </p:par>
-                            </p:childTnLst>
-                          </p:cTn>
-                        </p:par>
-                      </p:childTnLst>
-                    </p:cTn>
-                  </p:par>
-                  <p:par>
-                    <p:cTn id="13" fill="hold" nodeType="clickPar">
-                      <p:stCondLst>
-                        <p:cond delay="indefinite"/>
-                      </p:stCondLst>
-                      <p:childTnLst>
-                        <p:par>
-                          <p:cTn id="14" fill="hold" nodeType="withGroup">
-                            <p:stCondLst>
-                              <p:cond delay="0"/>
-                            </p:stCondLst>
-                            <p:childTnLst>
-                              <p:par>
-                                <p:cTn id="15" presetID="1" presetClass="entr" presetSubtype="0" fill="hold" nodeType="clickEffect">
-                                  <p:stCondLst>
-                                    <p:cond delay="0"/>
-                                  </p:stCondLst>
-                                  <p:childTnLst>
-                                    <p:set>
-                                      <p:cBhvr>
-                                        <p:cTn id="16" dur="1" fill="hold">
-                                          <p:stCondLst>
-                                            <p:cond delay="0"/>
-                                          </p:stCondLst>
-                                        </p:cTn>
-                                        <p:tgtEl>
-                                          <p:spTgt spid="17411">
-                                            <p:txEl>
-                                              <p:pRg st="4" end="4"/>
-                                            </p:txEl>
-                                          </p:spTgt>
-                                        </p:tgtEl>
-                                        <p:attrNameLst>
-                                          <p:attrName>style.visibility</p:attrName>
-                                        </p:attrNameLst>
-                                      </p:cBhvr>
-                                      <p:to>
-                                        <p:strVal val="visible"/>
-                                      </p:to>
-                                    </p:set>
-                                  </p:childTnLst>
-                                </p:cTn>
-                              </p:par>
-                              <p:par>
-                                <p:cTn id="17" presetID="1" presetClass="entr" presetSubtype="0" fill="hold" nodeType="withEffect">
-                                  <p:stCondLst>
-                                    <p:cond delay="0"/>
-                                  </p:stCondLst>
-                                  <p:childTnLst>
-                                    <p:set>
-                                      <p:cBhvr>
-                                        <p:cTn id="18" dur="1" fill="hold">
-                                          <p:stCondLst>
-                                            <p:cond delay="0"/>
-                                          </p:stCondLst>
-                                        </p:cTn>
-                                        <p:tgtEl>
-                                          <p:spTgt spid="4"/>
-                                        </p:tgtEl>
-                                        <p:attrNameLst>
-                                          <p:attrName>style.visibility</p:attrName>
-                                        </p:attrNameLst>
-                                      </p:cBhvr>
-                                      <p:to>
-                                        <p:strVal val="visible"/>
-                                      </p:to>
-                                    </p:set>
-                                  </p:childTnLst>
-                                </p:cTn>
-                              </p:par>
-                            </p:childTnLst>
-                          </p:cTn>
-                        </p:par>
-                      </p:childTnLst>
-                    </p:cTn>
-                  </p:par>
-                  <p:par>
-                    <p:cTn id="19" fill="hold" nodeType="clickPar">
-                      <p:stCondLst>
-                        <p:cond delay="indefinite"/>
-                      </p:stCondLst>
-                      <p:childTnLst>
-                        <p:par>
-                          <p:cTn id="20" fill="hold" nodeType="withGroup">
-                            <p:stCondLst>
-                              <p:cond delay="0"/>
-                            </p:stCondLst>
-                            <p:childTnLst>
-                              <p:par>
-                                <p:cTn id="21" presetID="1" presetClass="entr" presetSubtype="0" fill="hold" nodeType="clickEffect">
-                                  <p:stCondLst>
-                                    <p:cond delay="0"/>
-                                  </p:stCondLst>
-                                  <p:childTnLst>
-                                    <p:set>
-                                      <p:cBhvr>
-                                        <p:cTn id="22" dur="1" fill="hold">
-                                          <p:stCondLst>
-                                            <p:cond delay="0"/>
-                                          </p:stCondLst>
-                                        </p:cTn>
-                                        <p:tgtEl>
-                                          <p:spTgt spid="5"/>
-                                        </p:tgtEl>
-                                        <p:attrNameLst>
-                                          <p:attrName>style.visibility</p:attrName>
-                                        </p:attrNameLst>
-                                      </p:cBhvr>
-                                      <p:to>
-                                        <p:strVal val="visible"/>
-                                      </p:to>
-                                    </p:set>
-                                  </p:childTnLst>
-                                </p:cTn>
-                              </p:par>
-                            </p:childTnLst>
-                          </p:cTn>
-                        </p:par>
-                      </p:childTnLst>
-                    </p:cTn>
-                  </p:par>
-                </p:childTnLst>
-              </p:cTn>
-              <p:prevCondLst>
-                <p:cond evt="onPrev" delay="0">
-                  <p:tgtEl>
-                    <p:sldTgt/>
-                  </p:tgtEl>
-                </p:cond>
-              </p:prevCondLst>
-              <p:nextCondLst>
-                <p:cond evt="onNext" delay="0">
-                  <p:tgtEl>
-                    <p:sldTgt/>
-                  </p:tgtEl>
-                </p:cond>
-              </p:nextCondLst>
-            </p:seq>
-          </p:childTnLst>
-        </p:cTn>
-      </p:par>
-    </p:tnLst>
-  </p:timing>
-</p:sld>
-</file>
-
-<file path=ppt/slides/slide43.xml><?xml version="1.0" encoding="utf-8"?>
-<p:sld xmlns:a="http://schemas.openxmlformats.org/drawingml/2006/main" xmlns:r="http://schemas.openxmlformats.org/officeDocument/2006/relationships" xmlns:p="http://schemas.openxmlformats.org/presentationml/2006/main">
-  <p:cSld>
-    <p:spTree>
-      <p:nvGrpSpPr>
-        <p:cNvPr id="1" name=""/>
-        <p:cNvGrpSpPr/>
-        <p:nvPr/>
-      </p:nvGrpSpPr>
-      <p:grpSpPr>
-        <a:xfrm>
-          <a:off x="0" y="0"/>
-          <a:ext cx="0" cy="0"/>
-          <a:chOff x="0" y="0"/>
-          <a:chExt cx="0" cy="0"/>
-        </a:xfrm>
-      </p:grpSpPr>
-      <p:sp>
-        <p:nvSpPr>
-          <p:cNvPr id="15362" name="Rectangle 2"/>
-          <p:cNvSpPr>
-            <a:spLocks noGrp="1" noChangeArrowheads="1"/>
-          </p:cNvSpPr>
-          <p:nvPr>
-            <p:ph type="title"/>
-          </p:nvPr>
-        </p:nvSpPr>
-        <p:spPr>
-          <a:xfrm>
-            <a:off x="1524000" y="-76200"/>
-            <a:ext cx="8707438" cy="1143000"/>
-          </a:xfrm>
-        </p:spPr>
-        <p:txBody>
-          <a:bodyPr/>
-          <a:lstStyle/>
-          <a:p>
-            <a:pPr algn="ctr" eaLnBrk="1" hangingPunct="1">
-              <a:defRPr/>
-            </a:pPr>
-            <a:r>
-              <a:rPr lang="en-US" sz="4000" dirty="0"/>
-              <a:t>The Negative Binomial Distribution</a:t>
-            </a:r>
-            <a:br>
-              <a:rPr lang="en-US" sz="4000" dirty="0"/>
-            </a:br>
-            <a:r>
-              <a:rPr lang="en-US" sz="2400" dirty="0"/>
-              <a:t>(2) Poisson with a variable rate parameter </a:t>
-            </a:r>
-          </a:p>
-        </p:txBody>
-      </p:sp>
-      <p:sp>
-        <p:nvSpPr>
-          <p:cNvPr id="220162" name="TextBox 7"/>
+          <p:cNvPr id="222212" name="TextBox 8"/>
           <p:cNvSpPr txBox="1">
             <a:spLocks noChangeArrowheads="1"/>
           </p:cNvSpPr>
@@ -23986,8 +22300,8 @@
         </p:nvSpPr>
         <p:spPr bwMode="auto">
           <a:xfrm>
-            <a:off x="1139218" y="2516189"/>
-            <a:ext cx="9837373" cy="461665"/>
+            <a:off x="3292475" y="2478088"/>
+            <a:ext cx="5170488" cy="461962"/>
           </a:xfrm>
           <a:prstGeom prst="rect">
             <a:avLst/>
@@ -24198,207 +22512,15 @@
               <a:buNone/>
             </a:pPr>
             <a:r>
-              <a:rPr lang="en-US" altLang="en-US" sz="2400" dirty="0">
-                <a:solidFill>
-                  <a:srgbClr val="000000"/>
-                </a:solidFill>
-              </a:rPr>
-              <a:t>Common parameterization in ecology with the mean as a parameter:</a:t>
+              <a:rPr lang="en-US" altLang="en-US" sz="2400"/>
+              <a:t>What is the probability of no events?</a:t>
             </a:r>
           </a:p>
         </p:txBody>
       </p:sp>
       <p:sp>
         <p:nvSpPr>
-          <p:cNvPr id="2" name="TextBox 1">
-            <a:extLst>
-              <a:ext uri="{FF2B5EF4-FFF2-40B4-BE49-F238E27FC236}">
-                <a16:creationId xmlns:a16="http://schemas.microsoft.com/office/drawing/2014/main" id="{CD7B4B51-8AF6-F8EA-03D4-2A3C1E59E5EB}"/>
-              </a:ext>
-            </a:extLst>
-          </p:cNvPr>
-          <p:cNvSpPr txBox="1"/>
-          <p:nvPr/>
-        </p:nvSpPr>
-        <p:spPr>
-          <a:xfrm>
-            <a:off x="1749778" y="4865511"/>
-            <a:ext cx="9662645" cy="461665"/>
-          </a:xfrm>
-          <a:prstGeom prst="rect">
-            <a:avLst/>
-          </a:prstGeom>
-          <a:noFill/>
-        </p:spPr>
-        <p:txBody>
-          <a:bodyPr wrap="none" rtlCol="0">
-            <a:spAutoFit/>
-          </a:bodyPr>
-          <a:lstStyle/>
-          <a:p>
-            <a:r>
-              <a:rPr lang="en-US" sz="2400" dirty="0"/>
-              <a:t>We model </a:t>
-            </a:r>
-            <a:r>
-              <a:rPr lang="en-US" sz="2400" i="1" dirty="0"/>
-              <a:t>N </a:t>
-            </a:r>
-            <a:r>
-              <a:rPr lang="en-US" sz="2400" dirty="0" err="1"/>
-              <a:t>overdispersed</a:t>
-            </a:r>
-            <a:r>
-              <a:rPr lang="en-US" sz="2400" dirty="0"/>
-              <a:t> counts as function of mean, </a:t>
-            </a:r>
-            <a:r>
-              <a:rPr lang="en-US" sz="2400" i="1" dirty="0"/>
-              <a:t>m</a:t>
-            </a:r>
-            <a:r>
-              <a:rPr lang="en-US" sz="2400" dirty="0"/>
-              <a:t>, and dispersion, </a:t>
-            </a:r>
-            <a:r>
-              <a:rPr lang="en-US" sz="2400" i="1" dirty="0"/>
-              <a:t>k</a:t>
-            </a:r>
-            <a:endParaRPr lang="en-US" sz="2400" dirty="0"/>
-          </a:p>
-        </p:txBody>
-      </p:sp>
-      <p:sp>
-        <p:nvSpPr>
-          <p:cNvPr id="220163" name="TextBox 220162"/>
-          <p:cNvSpPr txBox="1"/>
-          <p:nvPr/>
-        </p:nvSpPr>
-        <p:spPr>
-          <a:xfrm>
-            <a:off x="2852351" y="3120729"/>
-            <a:ext cx="9111049" cy="1070272"/>
-          </a:xfrm>
-          <a:prstGeom prst="rect">
-            <a:avLst/>
-          </a:prstGeom>
-          <a:noFill/>
-        </p:spPr>
-        <p:txBody>
-          <a:bodyPr wrap="square" anchor="ctr" lIns="0" rIns="0" tIns="0" bIns="0">
-            <a:spAutoFit/>
-          </a:bodyPr>
-          <a:lstStyle/>
-          <a:p>
-            <a:r>
-              <a:rPr sz="1600" b="0">
-                <a:latin typeface="Cambria"/>
-              </a:rPr>
-              <a:t>Pr{N = n} ≡ p</a:t>
-            </a:r>
-            <a:r>
-              <a:rPr sz="1600" b="0" baseline="-25000">
-                <a:latin typeface="Cambria"/>
-              </a:rPr>
-              <a:t>n</a:t>
-            </a:r>
-            <a:r>
-              <a:rPr sz="1600" b="0">
-                <a:latin typeface="Cambria"/>
-              </a:rPr>
-              <a:t>(m, k) = Γ(k + n) / (n! Γ(k)) · (k / (k + m))</a:t>
-            </a:r>
-            <a:r>
-              <a:rPr sz="1600" b="0" baseline="30000">
-                <a:latin typeface="Cambria"/>
-              </a:rPr>
-              <a:t>k</a:t>
-            </a:r>
-            <a:r>
-              <a:rPr sz="1600" b="0">
-                <a:latin typeface="Cambria"/>
-              </a:rPr>
-              <a:t> · (m / (k + m))</a:t>
-            </a:r>
-            <a:r>
-              <a:rPr sz="1600" b="0" baseline="30000">
-                <a:latin typeface="Cambria"/>
-              </a:rPr>
-              <a:t>n</a:t>
-            </a:r>
-          </a:p>
-        </p:txBody>
-      </p:sp>
-    </p:spTree>
-    <p:extLst>
-      <p:ext uri="{BB962C8B-B14F-4D97-AF65-F5344CB8AC3E}">
-        <p14:creationId xmlns:p14="http://schemas.microsoft.com/office/powerpoint/2010/main" val="570665033"/>
-      </p:ext>
-    </p:extLst>
-  </p:cSld>
-  <p:clrMapOvr>
-    <a:masterClrMapping/>
-  </p:clrMapOvr>
-</p:sld>
-</file>
-
-<file path=ppt/slides/slide44.xml><?xml version="1.0" encoding="utf-8"?>
-<p:sld xmlns:a="http://schemas.openxmlformats.org/drawingml/2006/main" xmlns:r="http://schemas.openxmlformats.org/officeDocument/2006/relationships" xmlns:p="http://schemas.openxmlformats.org/presentationml/2006/main">
-  <p:cSld>
-    <p:spTree>
-      <p:nvGrpSpPr>
-        <p:cNvPr id="1" name=""/>
-        <p:cNvGrpSpPr/>
-        <p:nvPr/>
-      </p:nvGrpSpPr>
-      <p:grpSpPr>
-        <a:xfrm>
-          <a:off x="0" y="0"/>
-          <a:ext cx="0" cy="0"/>
-          <a:chOff x="0" y="0"/>
-          <a:chExt cx="0" cy="0"/>
-        </a:xfrm>
-      </p:grpSpPr>
-      <p:sp>
-        <p:nvSpPr>
-          <p:cNvPr id="15362" name="Rectangle 2"/>
-          <p:cNvSpPr>
-            <a:spLocks noGrp="1" noChangeArrowheads="1"/>
-          </p:cNvSpPr>
-          <p:nvPr>
-            <p:ph type="title"/>
-          </p:nvPr>
-        </p:nvSpPr>
-        <p:spPr>
-          <a:xfrm>
-            <a:off x="1524000" y="-76200"/>
-            <a:ext cx="8707438" cy="1143000"/>
-          </a:xfrm>
-        </p:spPr>
-        <p:txBody>
-          <a:bodyPr/>
-          <a:lstStyle/>
-          <a:p>
-            <a:pPr algn="ctr" eaLnBrk="1" hangingPunct="1">
-              <a:defRPr/>
-            </a:pPr>
-            <a:r>
-              <a:rPr lang="en-US" sz="4000" dirty="0"/>
-              <a:t>The Negative Binomial Distribution</a:t>
-            </a:r>
-            <a:br>
-              <a:rPr lang="en-US" sz="4000" dirty="0"/>
-            </a:br>
-            <a:r>
-              <a:rPr lang="en-US" sz="2400" dirty="0"/>
-              <a:t>(2) Poisson with a variable rate parameter </a:t>
-            </a:r>
-          </a:p>
-        </p:txBody>
-      </p:sp>
-      <p:sp>
-        <p:nvSpPr>
-          <p:cNvPr id="222212" name="TextBox 8"/>
+          <p:cNvPr id="14" name="TextBox 13"/>
           <p:cNvSpPr txBox="1">
             <a:spLocks noChangeArrowheads="1"/>
           </p:cNvSpPr>
@@ -24406,8 +22528,8 @@
         </p:nvSpPr>
         <p:spPr bwMode="auto">
           <a:xfrm>
-            <a:off x="3292475" y="2478088"/>
-            <a:ext cx="5170488" cy="461962"/>
+            <a:off x="2201864" y="4724401"/>
+            <a:ext cx="7813675" cy="461963"/>
           </a:xfrm>
           <a:prstGeom prst="rect">
             <a:avLst/>
@@ -24619,265 +22741,98 @@
             </a:pPr>
             <a:r>
               <a:rPr lang="en-US" altLang="en-US" sz="2400"/>
-              <a:t>What is the probability of no events?</a:t>
+              <a:t>This probability can be large if </a:t>
+            </a:r>
+            <a:r>
+              <a:rPr lang="en-US" altLang="en-US" sz="2400" i="1"/>
+              <a:t>k </a:t>
+            </a:r>
+            <a:r>
+              <a:rPr lang="en-US" altLang="en-US" sz="2400"/>
+              <a:t>is small even if </a:t>
+            </a:r>
+            <a:r>
+              <a:rPr lang="en-US" altLang="en-US" sz="2400" i="1"/>
+              <a:t>m </a:t>
+            </a:r>
+            <a:r>
+              <a:rPr lang="en-US" altLang="en-US" sz="2400"/>
+              <a:t>is big</a:t>
             </a:r>
           </a:p>
         </p:txBody>
       </p:sp>
       <p:sp>
         <p:nvSpPr>
-          <p:cNvPr id="14" name="TextBox 13"/>
-          <p:cNvSpPr txBox="1">
-            <a:spLocks noChangeArrowheads="1"/>
-          </p:cNvSpPr>
+          <p:cNvPr id="222213" name="TextBox 222212"/>
+          <p:cNvSpPr txBox="1"/>
           <p:nvPr/>
         </p:nvSpPr>
-        <p:spPr bwMode="auto">
+        <p:spPr>
           <a:xfrm>
-            <a:off x="2201864" y="4724401"/>
-            <a:ext cx="7813675" cy="461963"/>
+            <a:off x="1897811" y="1645722"/>
+            <a:ext cx="10065590" cy="369332"/>
           </a:xfrm>
           <a:prstGeom prst="rect">
             <a:avLst/>
           </a:prstGeom>
           <a:noFill/>
-          <a:ln>
-            <a:noFill/>
-          </a:ln>
-          <a:extLst>
-            <a:ext uri="{909E8E84-426E-40DD-AFC4-6F175D3DCCD1}">
-              <a14:hiddenFill xmlns:a14="http://schemas.microsoft.com/office/drawing/2010/main">
-                <a:solidFill>
-                  <a:srgbClr val="FFFFFF"/>
-                </a:solidFill>
-              </a14:hiddenFill>
-            </a:ext>
-            <a:ext uri="{91240B29-F687-4F45-9708-019B960494DF}">
-              <a14:hiddenLine xmlns:a14="http://schemas.microsoft.com/office/drawing/2010/main" w="9525">
-                <a:solidFill>
-                  <a:srgbClr val="000000"/>
-                </a:solidFill>
-                <a:miter lim="800000"/>
-                <a:headEnd/>
-                <a:tailEnd/>
-              </a14:hiddenLine>
-            </a:ext>
-          </a:extLst>
         </p:spPr>
         <p:txBody>
-          <a:bodyPr wrap="none">
+          <a:bodyPr wrap="square" lIns="0" tIns="0" rIns="0" bIns="0" anchor="ctr">
             <a:spAutoFit/>
           </a:bodyPr>
-          <a:lstStyle>
-            <a:lvl1pPr>
-              <a:spcBef>
-                <a:spcPct val="20000"/>
-              </a:spcBef>
-              <a:buClr>
-                <a:schemeClr val="folHlink"/>
-              </a:buClr>
-              <a:buSzPct val="60000"/>
-              <a:buFont typeface="Wingdings" charset="2"/>
-              <a:buChar char="n"/>
-              <a:defRPr sz="3200">
-                <a:solidFill>
-                  <a:schemeClr val="tx1"/>
-                </a:solidFill>
-                <a:latin typeface="Tahoma" charset="0"/>
-              </a:defRPr>
-            </a:lvl1pPr>
-            <a:lvl2pPr marL="742950" indent="-285750">
-              <a:spcBef>
-                <a:spcPct val="20000"/>
-              </a:spcBef>
-              <a:buClr>
-                <a:schemeClr val="hlink"/>
-              </a:buClr>
-              <a:buSzPct val="55000"/>
-              <a:buFont typeface="Wingdings" charset="2"/>
-              <a:buChar char="n"/>
-              <a:defRPr sz="2800">
-                <a:solidFill>
-                  <a:schemeClr val="tx1"/>
-                </a:solidFill>
-                <a:latin typeface="Tahoma" charset="0"/>
-              </a:defRPr>
-            </a:lvl2pPr>
-            <a:lvl3pPr marL="1143000" indent="-228600">
-              <a:spcBef>
-                <a:spcPct val="20000"/>
-              </a:spcBef>
-              <a:buClr>
-                <a:schemeClr val="folHlink"/>
-              </a:buClr>
-              <a:buSzPct val="50000"/>
-              <a:buFont typeface="Wingdings" charset="2"/>
-              <a:buChar char="n"/>
-              <a:defRPr sz="2400">
-                <a:solidFill>
-                  <a:schemeClr val="tx1"/>
-                </a:solidFill>
-                <a:latin typeface="Tahoma" charset="0"/>
-              </a:defRPr>
-            </a:lvl3pPr>
-            <a:lvl4pPr marL="1600200" indent="-228600">
-              <a:spcBef>
-                <a:spcPct val="20000"/>
-              </a:spcBef>
-              <a:buClr>
-                <a:schemeClr val="accent2"/>
-              </a:buClr>
-              <a:buSzPct val="55000"/>
-              <a:buFont typeface="Wingdings" charset="2"/>
-              <a:buChar char="n"/>
-              <a:defRPr sz="2000">
-                <a:solidFill>
-                  <a:schemeClr val="tx1"/>
-                </a:solidFill>
-                <a:latin typeface="Tahoma" charset="0"/>
-              </a:defRPr>
-            </a:lvl4pPr>
-            <a:lvl5pPr marL="2057400" indent="-228600">
-              <a:spcBef>
-                <a:spcPct val="20000"/>
-              </a:spcBef>
-              <a:buClr>
-                <a:schemeClr val="accent1"/>
-              </a:buClr>
-              <a:buSzPct val="50000"/>
-              <a:buFont typeface="Wingdings" charset="2"/>
-              <a:buChar char="n"/>
-              <a:defRPr sz="2000">
-                <a:solidFill>
-                  <a:schemeClr val="tx1"/>
-                </a:solidFill>
-                <a:latin typeface="Tahoma" charset="0"/>
-              </a:defRPr>
-            </a:lvl5pPr>
-            <a:lvl6pPr marL="2514600" indent="-228600" eaLnBrk="0" fontAlgn="base" hangingPunct="0">
-              <a:spcBef>
-                <a:spcPct val="20000"/>
-              </a:spcBef>
-              <a:spcAft>
-                <a:spcPct val="0"/>
-              </a:spcAft>
-              <a:buClr>
-                <a:schemeClr val="accent1"/>
-              </a:buClr>
-              <a:buSzPct val="50000"/>
-              <a:buFont typeface="Wingdings" charset="2"/>
-              <a:buChar char="n"/>
-              <a:defRPr sz="2000">
-                <a:solidFill>
-                  <a:schemeClr val="tx1"/>
-                </a:solidFill>
-                <a:latin typeface="Tahoma" charset="0"/>
-              </a:defRPr>
-            </a:lvl6pPr>
-            <a:lvl7pPr marL="2971800" indent="-228600" eaLnBrk="0" fontAlgn="base" hangingPunct="0">
-              <a:spcBef>
-                <a:spcPct val="20000"/>
-              </a:spcBef>
-              <a:spcAft>
-                <a:spcPct val="0"/>
-              </a:spcAft>
-              <a:buClr>
-                <a:schemeClr val="accent1"/>
-              </a:buClr>
-              <a:buSzPct val="50000"/>
-              <a:buFont typeface="Wingdings" charset="2"/>
-              <a:buChar char="n"/>
-              <a:defRPr sz="2000">
-                <a:solidFill>
-                  <a:schemeClr val="tx1"/>
-                </a:solidFill>
-                <a:latin typeface="Tahoma" charset="0"/>
-              </a:defRPr>
-            </a:lvl7pPr>
-            <a:lvl8pPr marL="3429000" indent="-228600" eaLnBrk="0" fontAlgn="base" hangingPunct="0">
-              <a:spcBef>
-                <a:spcPct val="20000"/>
-              </a:spcBef>
-              <a:spcAft>
-                <a:spcPct val="0"/>
-              </a:spcAft>
-              <a:buClr>
-                <a:schemeClr val="accent1"/>
-              </a:buClr>
-              <a:buSzPct val="50000"/>
-              <a:buFont typeface="Wingdings" charset="2"/>
-              <a:buChar char="n"/>
-              <a:defRPr sz="2000">
-                <a:solidFill>
-                  <a:schemeClr val="tx1"/>
-                </a:solidFill>
-                <a:latin typeface="Tahoma" charset="0"/>
-              </a:defRPr>
-            </a:lvl8pPr>
-            <a:lvl9pPr marL="3886200" indent="-228600" eaLnBrk="0" fontAlgn="base" hangingPunct="0">
-              <a:spcBef>
-                <a:spcPct val="20000"/>
-              </a:spcBef>
-              <a:spcAft>
-                <a:spcPct val="0"/>
-              </a:spcAft>
-              <a:buClr>
-                <a:schemeClr val="accent1"/>
-              </a:buClr>
-              <a:buSzPct val="50000"/>
-              <a:buFont typeface="Wingdings" charset="2"/>
-              <a:buChar char="n"/>
-              <a:defRPr sz="2000">
-                <a:solidFill>
-                  <a:schemeClr val="tx1"/>
-                </a:solidFill>
-                <a:latin typeface="Tahoma" charset="0"/>
-              </a:defRPr>
-            </a:lvl9pPr>
-          </a:lstStyle>
-          <a:p>
-            <a:pPr algn="ctr" eaLnBrk="1" hangingPunct="1">
-              <a:spcBef>
-                <a:spcPct val="0"/>
-              </a:spcBef>
-              <a:buClrTx/>
-              <a:buSzTx/>
-              <a:buFontTx/>
-              <a:buNone/>
-            </a:pPr>
-            <a:r>
-              <a:rPr lang="en-US" altLang="en-US" sz="2400"/>
-              <a:t>This probability can be large if </a:t>
-            </a:r>
-            <a:r>
-              <a:rPr lang="en-US" altLang="en-US" sz="2400" i="1"/>
-              <a:t>k </a:t>
-            </a:r>
-            <a:r>
-              <a:rPr lang="en-US" altLang="en-US" sz="2400"/>
-              <a:t>is small even if </a:t>
-            </a:r>
-            <a:r>
-              <a:rPr lang="en-US" altLang="en-US" sz="2400" i="1"/>
-              <a:t>m </a:t>
-            </a:r>
-            <a:r>
-              <a:rPr lang="en-US" altLang="en-US" sz="2400"/>
-              <a:t>is big</a:t>
+          <a:lstStyle/>
+          <a:p>
+            <a:r>
+              <a:rPr sz="2400" b="0">
+                <a:latin typeface="Cambria"/>
+              </a:rPr>
+              <a:t>Pr{N = n} ≡ p</a:t>
+            </a:r>
+            <a:r>
+              <a:rPr sz="2400" b="0" baseline="-25000">
+                <a:latin typeface="Cambria"/>
+              </a:rPr>
+              <a:t>n</a:t>
+            </a:r>
+            <a:r>
+              <a:rPr sz="2400" b="0">
+                <a:latin typeface="Cambria"/>
+              </a:rPr>
+              <a:t>(m, k) = Γ(k + n) / (n! Γ(k)) · (k / (k + m))</a:t>
+            </a:r>
+            <a:r>
+              <a:rPr sz="2400" b="0" baseline="30000">
+                <a:latin typeface="Cambria"/>
+              </a:rPr>
+              <a:t>k</a:t>
+            </a:r>
+            <a:r>
+              <a:rPr sz="2400" b="0">
+                <a:latin typeface="Cambria"/>
+              </a:rPr>
+              <a:t> · (m / (k + m))</a:t>
+            </a:r>
+            <a:r>
+              <a:rPr sz="2400" b="0" baseline="30000">
+                <a:latin typeface="Cambria"/>
+              </a:rPr>
+              <a:t>n</a:t>
             </a:r>
           </a:p>
         </p:txBody>
       </p:sp>
       <p:sp>
         <p:nvSpPr>
-          <p:cNvPr id="222213" name="TextBox 222212"/>
+          <p:cNvPr id="222214" name="TextBox 222213"/>
           <p:cNvSpPr txBox="1"/>
           <p:nvPr/>
         </p:nvSpPr>
         <p:spPr>
           <a:xfrm>
-            <a:off x="2943225" y="1360488"/>
-            <a:ext cx="9020175" cy="939800"/>
+            <a:off x="4337538" y="3462893"/>
+            <a:ext cx="3516923" cy="369332"/>
           </a:xfrm>
           <a:prstGeom prst="rect">
             <a:avLst/>
@@ -24885,92 +22840,31 @@
           <a:noFill/>
         </p:spPr>
         <p:txBody>
-          <a:bodyPr wrap="square" anchor="ctr" lIns="0" rIns="0" tIns="0" bIns="0">
+          <a:bodyPr wrap="square" lIns="0" tIns="0" rIns="0" bIns="0" anchor="ctr">
             <a:spAutoFit/>
           </a:bodyPr>
           <a:lstStyle/>
           <a:p>
             <a:r>
-              <a:rPr sz="1600" b="0">
+              <a:rPr sz="2400" b="0" dirty="0">
                 <a:latin typeface="Cambria"/>
               </a:rPr>
-              <a:t>Pr{N = n} ≡ p</a:t>
-            </a:r>
-            <a:r>
-              <a:rPr sz="1600" b="0" baseline="-25000">
+              <a:t>p</a:t>
+            </a:r>
+            <a:r>
+              <a:rPr sz="2400" b="0" baseline="-25000" dirty="0">
                 <a:latin typeface="Cambria"/>
               </a:rPr>
-              <a:t>n</a:t>
-            </a:r>
-            <a:r>
-              <a:rPr sz="1600" b="0">
+              <a:t>0</a:t>
+            </a:r>
+            <a:r>
+              <a:rPr sz="2400" b="0" dirty="0">
                 <a:latin typeface="Cambria"/>
               </a:rPr>
-              <a:t>(m, k) = Γ(k + n) / (n! Γ(k)) · (k / (k + m))</a:t>
-            </a:r>
-            <a:r>
-              <a:rPr sz="1600" b="0" baseline="30000">
-                <a:latin typeface="Cambria"/>
-              </a:rPr>
-              <a:t>k</a:t>
-            </a:r>
-            <a:r>
-              <a:rPr sz="1600" b="0">
-                <a:latin typeface="Cambria"/>
-              </a:rPr>
-              <a:t> · (m / (k + m))</a:t>
-            </a:r>
-            <a:r>
-              <a:rPr sz="1600" b="0" baseline="30000">
-                <a:latin typeface="Cambria"/>
-              </a:rPr>
-              <a:t>n</a:t>
-            </a:r>
-          </a:p>
-        </p:txBody>
-      </p:sp>
-      <p:sp>
-        <p:nvSpPr>
-          <p:cNvPr id="222214" name="TextBox 222213"/>
-          <p:cNvSpPr txBox="1"/>
-          <p:nvPr/>
-        </p:nvSpPr>
-        <p:spPr>
-          <a:xfrm>
-            <a:off x="4724400" y="3117850"/>
-            <a:ext cx="3516923" cy="1066800"/>
-          </a:xfrm>
-          <a:prstGeom prst="rect">
-            <a:avLst/>
-          </a:prstGeom>
-          <a:noFill/>
-        </p:spPr>
-        <p:txBody>
-          <a:bodyPr wrap="square" anchor="ctr" lIns="0" rIns="0" tIns="0" bIns="0">
-            <a:spAutoFit/>
-          </a:bodyPr>
-          <a:lstStyle/>
-          <a:p>
-            <a:r>
-              <a:rPr sz="1900" b="0">
-                <a:latin typeface="Cambria"/>
-              </a:rPr>
-              <a:t>p</a:t>
-            </a:r>
-            <a:r>
-              <a:rPr sz="1900" b="0" baseline="-25000">
-                <a:latin typeface="Cambria"/>
-              </a:rPr>
-              <a:t>0</a:t>
-            </a:r>
-            <a:r>
-              <a:rPr sz="1900" b="0">
-                <a:latin typeface="Cambria"/>
-              </a:rPr>
               <a:t>(m, k) = (k / (k + m))</a:t>
             </a:r>
             <a:r>
-              <a:rPr sz="1900" b="0" baseline="30000">
+              <a:rPr sz="2400" b="0" baseline="30000" dirty="0">
                 <a:latin typeface="Cambria"/>
               </a:rPr>
               <a:t>k</a:t>
@@ -24988,129 +22882,6 @@
   <p:clrMapOvr>
     <a:masterClrMapping/>
   </p:clrMapOvr>
-  <p:timing>
-    <p:tnLst>
-      <p:par>
-        <p:cTn id="1" dur="indefinite" restart="never" nodeType="tmRoot">
-          <p:childTnLst>
-            <p:seq concurrent="1" nextAc="seek">
-              <p:cTn id="2" dur="indefinite" nodeType="mainSeq">
-                <p:childTnLst>
-                  <p:par>
-                    <p:cTn id="3" fill="hold" nodeType="clickPar">
-                      <p:stCondLst>
-                        <p:cond delay="indefinite"/>
-                      </p:stCondLst>
-                      <p:childTnLst>
-                        <p:par>
-                          <p:cTn id="4" fill="hold" nodeType="withGroup">
-                            <p:stCondLst>
-                              <p:cond delay="0"/>
-                            </p:stCondLst>
-                            <p:childTnLst>
-                              <p:par>
-                                <p:cTn id="5" presetID="1" presetClass="entr" presetSubtype="0" fill="hold" nodeType="clickEffect">
-                                  <p:stCondLst>
-                                    <p:cond delay="0"/>
-                                  </p:stCondLst>
-                                  <p:childTnLst>
-                                    <p:set>
-                                      <p:cBhvr>
-                                        <p:cTn id="6" dur="1" fill="hold">
-                                          <p:stCondLst>
-                                            <p:cond delay="0"/>
-                                          </p:stCondLst>
-                                        </p:cTn>
-                                        <p:tgtEl>
-                                          <p:spTgt spid="6"/>
-                                        </p:tgtEl>
-                                        <p:attrNameLst>
-                                          <p:attrName>style.visibility</p:attrName>
-                                        </p:attrNameLst>
-                                      </p:cBhvr>
-                                      <p:to>
-                                        <p:strVal val="visible"/>
-                                      </p:to>
-                                    </p:set>
-                                  </p:childTnLst>
-                                </p:cTn>
-                              </p:par>
-                            </p:childTnLst>
-                          </p:cTn>
-                        </p:par>
-                      </p:childTnLst>
-                    </p:cTn>
-                  </p:par>
-                  <p:par>
-                    <p:cTn id="7" fill="hold" nodeType="clickPar">
-                      <p:stCondLst>
-                        <p:cond delay="indefinite"/>
-                      </p:stCondLst>
-                      <p:childTnLst>
-                        <p:par>
-                          <p:cTn id="8" fill="hold" nodeType="withGroup">
-                            <p:stCondLst>
-                              <p:cond delay="0"/>
-                            </p:stCondLst>
-                            <p:childTnLst>
-                              <p:par>
-                                <p:cTn id="9" presetID="1" presetClass="entr" presetSubtype="0" fill="hold" grpId="0" nodeType="clickEffect">
-                                  <p:stCondLst>
-                                    <p:cond delay="0"/>
-                                  </p:stCondLst>
-                                  <p:childTnLst>
-                                    <p:set>
-                                      <p:cBhvr>
-                                        <p:cTn id="10" dur="1" fill="hold">
-                                          <p:stCondLst>
-                                            <p:cond delay="0"/>
-                                          </p:stCondLst>
-                                        </p:cTn>
-                                        <p:tgtEl>
-                                          <p:spTgt spid="14"/>
-                                        </p:tgtEl>
-                                        <p:attrNameLst>
-                                          <p:attrName>style.visibility</p:attrName>
-                                        </p:attrNameLst>
-                                      </p:cBhvr>
-                                      <p:to>
-                                        <p:strVal val="visible"/>
-                                      </p:to>
-                                    </p:set>
-                                  </p:childTnLst>
-                                </p:cTn>
-                              </p:par>
-                            </p:childTnLst>
-                          </p:cTn>
-                        </p:par>
-                      </p:childTnLst>
-                    </p:cTn>
-                  </p:par>
-                </p:childTnLst>
-              </p:cTn>
-              <p:prevCondLst>
-                <p:cond evt="onPrev" delay="0">
-                  <p:tgtEl>
-                    <p:sldTgt/>
-                  </p:tgtEl>
-                </p:cond>
-              </p:prevCondLst>
-              <p:nextCondLst>
-                <p:cond evt="onNext" delay="0">
-                  <p:tgtEl>
-                    <p:sldTgt/>
-                  </p:tgtEl>
-                </p:cond>
-              </p:nextCondLst>
-            </p:seq>
-          </p:childTnLst>
-        </p:cTn>
-      </p:par>
-    </p:tnLst>
-    <p:bldLst>
-      <p:bldP spid="14" grpId="0"/>
-    </p:bldLst>
-  </p:timing>
 </p:sld>
 </file>
 
@@ -30853,7 +28624,7 @@
           <a:noFill/>
         </p:spPr>
         <p:txBody>
-          <a:bodyPr wrap="square" anchor="ctr" lIns="0" rIns="0" tIns="0" bIns="0">
+          <a:bodyPr wrap="square" lIns="0" tIns="0" rIns="0" bIns="0" anchor="ctr">
             <a:spAutoFit/>
           </a:bodyPr>
           <a:lstStyle/>
@@ -31173,11 +28944,7 @@
             </a:pPr>
             <a:r>
               <a:rPr lang="en-US" sz="2600" dirty="0"/>
-              <a:t>Bernoulli </a:t>
-            </a:r>
-            <a:r>
-              <a:rPr lang="en-US" sz="2600" dirty="0"/>
-              <a:t>→ probability a single coin flip comes up heads</a:t>
+              <a:t>Bernoulli → probability a single coin flip comes up heads</a:t>
             </a:r>
           </a:p>
           <a:p>
@@ -31244,7 +29011,7 @@
           <a:noFill/>
         </p:spPr>
         <p:txBody>
-          <a:bodyPr wrap="square" anchor="ctr" lIns="0" rIns="0" tIns="0" bIns="0">
+          <a:bodyPr wrap="square" lIns="0" tIns="0" rIns="0" bIns="0" anchor="ctr">
             <a:spAutoFit/>
           </a:bodyPr>
           <a:lstStyle/>
@@ -31530,7 +29297,7 @@
           <a:noFill/>
         </p:spPr>
         <p:txBody>
-          <a:bodyPr wrap="square" anchor="t" lIns="0" rIns="0" tIns="0" bIns="0">
+          <a:bodyPr wrap="square" lIns="0" tIns="0" rIns="0" bIns="0" anchor="t">
             <a:spAutoFit/>
           </a:bodyPr>
           <a:lstStyle/>
@@ -31556,7 +29323,7 @@
         <p:spPr>
           <a:xfrm>
             <a:off x="1527927" y="1044702"/>
-            <a:ext cx="9429496" cy="397764"/>
+            <a:ext cx="9429496" cy="861774"/>
           </a:xfrm>
           <a:prstGeom prst="rect">
             <a:avLst/>
@@ -31564,16 +29331,40 @@
           <a:noFill/>
         </p:spPr>
         <p:txBody>
-          <a:bodyPr wrap="square" anchor="t" lIns="0" rIns="0" tIns="0" bIns="0">
+          <a:bodyPr wrap="square" lIns="0" tIns="0" rIns="0" bIns="0" anchor="t">
             <a:spAutoFit/>
           </a:bodyPr>
           <a:lstStyle/>
           <a:p>
             <a:r>
-              <a:rPr sz="2000" b="0">
+              <a:rPr sz="2800" b="0" dirty="0">
                 <a:latin typeface="Calibri"/>
               </a:rPr>
-              <a:t>1. Let X ~ binom(n, p) and Y ~ binom(m, p) be independent. Then X + Y follows:</a:t>
+              <a:t>1. Let X ~ </a:t>
+            </a:r>
+            <a:r>
+              <a:rPr sz="2800" b="0" dirty="0" err="1">
+                <a:latin typeface="Calibri"/>
+              </a:rPr>
+              <a:t>binom</a:t>
+            </a:r>
+            <a:r>
+              <a:rPr sz="2800" b="0" dirty="0">
+                <a:latin typeface="Calibri"/>
+              </a:rPr>
+              <a:t>(n, p) and Y ~ </a:t>
+            </a:r>
+            <a:r>
+              <a:rPr sz="2800" b="0" dirty="0" err="1">
+                <a:latin typeface="Calibri"/>
+              </a:rPr>
+              <a:t>binom</a:t>
+            </a:r>
+            <a:r>
+              <a:rPr sz="2800" b="0" dirty="0">
+                <a:latin typeface="Calibri"/>
+              </a:rPr>
+              <a:t>(m, p) be independent. Then X + Y follows:</a:t>
             </a:r>
           </a:p>
         </p:txBody>
@@ -31586,8 +29377,8 @@
         </p:nvSpPr>
         <p:spPr>
           <a:xfrm>
-            <a:off x="1527927" y="1533906"/>
-            <a:ext cx="9429496" cy="740664"/>
+            <a:off x="1527927" y="2069160"/>
+            <a:ext cx="9429496" cy="861774"/>
           </a:xfrm>
           <a:prstGeom prst="rect">
             <a:avLst/>
@@ -31595,24 +29386,60 @@
           <a:noFill/>
         </p:spPr>
         <p:txBody>
-          <a:bodyPr wrap="square" anchor="t" lIns="0" rIns="0" tIns="0" bIns="0">
+          <a:bodyPr wrap="square" lIns="0" tIns="0" rIns="0" bIns="0" anchor="t">
             <a:spAutoFit/>
           </a:bodyPr>
           <a:lstStyle/>
           <a:p>
             <a:r>
-              <a:rPr sz="2000" b="0">
+              <a:rPr sz="2800" b="0" dirty="0">
                 <a:latin typeface="Calibri"/>
               </a:rPr>
-              <a:t>(a) binom(n + m, p)        (b) binom(nm, p)</a:t>
-            </a:r>
-          </a:p>
-          <a:p>
-            <a:r>
-              <a:rPr sz="2000" b="0">
+              <a:t>(a) </a:t>
+            </a:r>
+            <a:r>
+              <a:rPr sz="2800" b="0" dirty="0" err="1">
                 <a:latin typeface="Calibri"/>
               </a:rPr>
-              <a:t>(c) binom(n + m, 2p)      (d) other</a:t>
+              <a:t>binom</a:t>
+            </a:r>
+            <a:r>
+              <a:rPr sz="2800" b="0" dirty="0">
+                <a:latin typeface="Calibri"/>
+              </a:rPr>
+              <a:t>(n + m, p)        (b) </a:t>
+            </a:r>
+            <a:r>
+              <a:rPr sz="2800" b="0" dirty="0" err="1">
+                <a:latin typeface="Calibri"/>
+              </a:rPr>
+              <a:t>binom</a:t>
+            </a:r>
+            <a:r>
+              <a:rPr sz="2800" b="0" dirty="0">
+                <a:latin typeface="Calibri"/>
+              </a:rPr>
+              <a:t>(nm, p)</a:t>
+            </a:r>
+          </a:p>
+          <a:p>
+            <a:r>
+              <a:rPr sz="2800" b="0" dirty="0">
+                <a:latin typeface="Calibri"/>
+              </a:rPr>
+              <a:t>(c) </a:t>
+            </a:r>
+            <a:r>
+              <a:rPr sz="2800" b="0" dirty="0" err="1">
+                <a:latin typeface="Calibri"/>
+              </a:rPr>
+              <a:t>binom</a:t>
+            </a:r>
+            <a:r>
+              <a:rPr sz="2800" b="0" dirty="0">
+                <a:latin typeface="Calibri"/>
+              </a:rPr>
+              <a:t>(n + m, 2p)      (d) other</a:t>
             </a:r>
           </a:p>
         </p:txBody>
@@ -31625,8 +29452,8 @@
         </p:nvSpPr>
         <p:spPr>
           <a:xfrm>
-            <a:off x="1527927" y="2585466"/>
-            <a:ext cx="9429496" cy="397764"/>
+            <a:off x="1527927" y="3684180"/>
+            <a:ext cx="9429496" cy="861774"/>
           </a:xfrm>
           <a:prstGeom prst="rect">
             <a:avLst/>
@@ -31634,16 +29461,40 @@
           <a:noFill/>
         </p:spPr>
         <p:txBody>
-          <a:bodyPr wrap="square" anchor="t" lIns="0" rIns="0" tIns="0" bIns="0">
+          <a:bodyPr wrap="square" lIns="0" tIns="0" rIns="0" bIns="0" anchor="t">
             <a:spAutoFit/>
           </a:bodyPr>
           <a:lstStyle/>
           <a:p>
             <a:r>
-              <a:rPr sz="2000" b="0">
+              <a:rPr sz="2800" b="0" dirty="0">
                 <a:latin typeface="Calibri"/>
               </a:rPr>
-              <a:t>2. Let X ~ binom(n, p) and Z ~ binom(n, q) be independent. Then X + Z follows:</a:t>
+              <a:t>2. Let X ~ </a:t>
+            </a:r>
+            <a:r>
+              <a:rPr sz="2800" b="0" dirty="0" err="1">
+                <a:latin typeface="Calibri"/>
+              </a:rPr>
+              <a:t>binom</a:t>
+            </a:r>
+            <a:r>
+              <a:rPr sz="2800" b="0" dirty="0">
+                <a:latin typeface="Calibri"/>
+              </a:rPr>
+              <a:t>(n, p) and Z ~ </a:t>
+            </a:r>
+            <a:r>
+              <a:rPr sz="2800" b="0" dirty="0" err="1">
+                <a:latin typeface="Calibri"/>
+              </a:rPr>
+              <a:t>binom</a:t>
+            </a:r>
+            <a:r>
+              <a:rPr sz="2800" b="0" dirty="0">
+                <a:latin typeface="Calibri"/>
+              </a:rPr>
+              <a:t>(n, q) be independent. Then X + Z follows:</a:t>
             </a:r>
           </a:p>
         </p:txBody>
@@ -31656,8 +29507,8 @@
         </p:nvSpPr>
         <p:spPr>
           <a:xfrm>
-            <a:off x="1527927" y="3074670"/>
-            <a:ext cx="9429496" cy="740664"/>
+            <a:off x="1527927" y="4725048"/>
+            <a:ext cx="9429496" cy="861774"/>
           </a:xfrm>
           <a:prstGeom prst="rect">
             <a:avLst/>
@@ -31665,24 +29516,72 @@
           <a:noFill/>
         </p:spPr>
         <p:txBody>
-          <a:bodyPr wrap="square" anchor="t" lIns="0" rIns="0" tIns="0" bIns="0">
+          <a:bodyPr wrap="square" lIns="0" tIns="0" rIns="0" bIns="0" anchor="t">
             <a:spAutoFit/>
           </a:bodyPr>
           <a:lstStyle/>
           <a:p>
             <a:r>
-              <a:rPr sz="2000" b="0">
+              <a:rPr sz="2800" b="0" dirty="0">
                 <a:latin typeface="Calibri"/>
               </a:rPr>
-              <a:t>(a) binom(n, p + q)        (b) binom(n, pq)</a:t>
-            </a:r>
-          </a:p>
-          <a:p>
-            <a:r>
-              <a:rPr sz="2000" b="0">
+              <a:t>(a) </a:t>
+            </a:r>
+            <a:r>
+              <a:rPr sz="2800" b="0" dirty="0" err="1">
                 <a:latin typeface="Calibri"/>
               </a:rPr>
-              <a:t>(c) binom(2n, p + q)      (d) other</a:t>
+              <a:t>binom</a:t>
+            </a:r>
+            <a:r>
+              <a:rPr sz="2800" b="0" dirty="0">
+                <a:latin typeface="Calibri"/>
+              </a:rPr>
+              <a:t>(n, p + q)        (b) </a:t>
+            </a:r>
+            <a:r>
+              <a:rPr sz="2800" b="0" dirty="0" err="1">
+                <a:latin typeface="Calibri"/>
+              </a:rPr>
+              <a:t>binom</a:t>
+            </a:r>
+            <a:r>
+              <a:rPr sz="2800" b="0" dirty="0">
+                <a:latin typeface="Calibri"/>
+              </a:rPr>
+              <a:t>(n, </a:t>
+            </a:r>
+            <a:r>
+              <a:rPr sz="2800" b="0" dirty="0" err="1">
+                <a:latin typeface="Calibri"/>
+              </a:rPr>
+              <a:t>pq</a:t>
+            </a:r>
+            <a:r>
+              <a:rPr sz="2800" b="0" dirty="0">
+                <a:latin typeface="Calibri"/>
+              </a:rPr>
+              <a:t>)</a:t>
+            </a:r>
+          </a:p>
+          <a:p>
+            <a:r>
+              <a:rPr sz="2800" b="0" dirty="0">
+                <a:latin typeface="Calibri"/>
+              </a:rPr>
+              <a:t>(c) </a:t>
+            </a:r>
+            <a:r>
+              <a:rPr sz="2800" b="0" dirty="0" err="1">
+                <a:latin typeface="Calibri"/>
+              </a:rPr>
+              <a:t>binom</a:t>
+            </a:r>
+            <a:r>
+              <a:rPr sz="2800" b="0" dirty="0">
+                <a:latin typeface="Calibri"/>
+              </a:rPr>
+              <a:t>(2n, p + q)      (d) other</a:t>
             </a:r>
           </a:p>
         </p:txBody>
@@ -31734,7 +29633,7 @@
           <a:noFill/>
         </p:spPr>
         <p:txBody>
-          <a:bodyPr wrap="square" anchor="t" lIns="0" rIns="0" tIns="0" bIns="0">
+          <a:bodyPr wrap="square" lIns="0" tIns="0" rIns="0" bIns="0" anchor="t">
             <a:spAutoFit/>
           </a:bodyPr>
           <a:lstStyle/>
@@ -31760,7 +29659,7 @@
         <p:spPr>
           <a:xfrm>
             <a:off x="1653860" y="1000650"/>
-            <a:ext cx="8351914" cy="346329"/>
+            <a:ext cx="8351914" cy="861774"/>
           </a:xfrm>
           <a:prstGeom prst="rect">
             <a:avLst/>
@@ -31768,16 +29667,40 @@
           <a:noFill/>
         </p:spPr>
         <p:txBody>
-          <a:bodyPr wrap="square" anchor="t" lIns="0" rIns="0" tIns="0" bIns="0">
+          <a:bodyPr wrap="square" lIns="0" tIns="0" rIns="0" bIns="0" anchor="t">
             <a:spAutoFit/>
           </a:bodyPr>
           <a:lstStyle/>
           <a:p>
             <a:r>
-              <a:rPr sz="1700" b="0">
+              <a:rPr sz="2800" b="0" dirty="0">
                 <a:latin typeface="Calibri"/>
               </a:rPr>
-              <a:t>1. Let X ~ binom(n, p) and Y ~ binom(m, p) be independent. Then X + Y follows:</a:t>
+              <a:t>1. Let X ~ </a:t>
+            </a:r>
+            <a:r>
+              <a:rPr sz="2800" b="0" dirty="0" err="1">
+                <a:latin typeface="Calibri"/>
+              </a:rPr>
+              <a:t>binom</a:t>
+            </a:r>
+            <a:r>
+              <a:rPr sz="2800" b="0" dirty="0">
+                <a:latin typeface="Calibri"/>
+              </a:rPr>
+              <a:t>(n, p) and Y ~ </a:t>
+            </a:r>
+            <a:r>
+              <a:rPr sz="2800" b="0" dirty="0" err="1">
+                <a:latin typeface="Calibri"/>
+              </a:rPr>
+              <a:t>binom</a:t>
+            </a:r>
+            <a:r>
+              <a:rPr sz="2800" b="0" dirty="0">
+                <a:latin typeface="Calibri"/>
+              </a:rPr>
+              <a:t>(m, p) be independent. Then X + Y follows:</a:t>
             </a:r>
           </a:p>
         </p:txBody>
@@ -31790,8 +29713,8 @@
         </p:nvSpPr>
         <p:spPr>
           <a:xfrm>
-            <a:off x="1653860" y="1420131"/>
-            <a:ext cx="8351914" cy="637794"/>
+            <a:off x="1653860" y="1910780"/>
+            <a:ext cx="8351914" cy="861774"/>
           </a:xfrm>
           <a:prstGeom prst="rect">
             <a:avLst/>
@@ -31799,24 +29722,60 @@
           <a:noFill/>
         </p:spPr>
         <p:txBody>
-          <a:bodyPr wrap="square" anchor="t" lIns="0" rIns="0" tIns="0" bIns="0">
+          <a:bodyPr wrap="square" lIns="0" tIns="0" rIns="0" bIns="0" anchor="t">
             <a:spAutoFit/>
           </a:bodyPr>
           <a:lstStyle/>
           <a:p>
             <a:r>
-              <a:rPr sz="1700" b="0">
+              <a:rPr sz="2800" b="0" dirty="0">
                 <a:latin typeface="Calibri"/>
               </a:rPr>
-              <a:t>(a) binom(n + m, p)        (b) binom(nm, p)</a:t>
-            </a:r>
-          </a:p>
-          <a:p>
-            <a:r>
-              <a:rPr sz="1700" b="0">
+              <a:t>(a) </a:t>
+            </a:r>
+            <a:r>
+              <a:rPr sz="2800" b="0" dirty="0" err="1">
                 <a:latin typeface="Calibri"/>
               </a:rPr>
-              <a:t>(c) binom(n + m, 2p)      (d) other</a:t>
+              <a:t>binom</a:t>
+            </a:r>
+            <a:r>
+              <a:rPr sz="2800" b="0" dirty="0">
+                <a:latin typeface="Calibri"/>
+              </a:rPr>
+              <a:t>(n + m, p)        (b) </a:t>
+            </a:r>
+            <a:r>
+              <a:rPr sz="2800" b="0" dirty="0" err="1">
+                <a:latin typeface="Calibri"/>
+              </a:rPr>
+              <a:t>binom</a:t>
+            </a:r>
+            <a:r>
+              <a:rPr sz="2800" b="0" dirty="0">
+                <a:latin typeface="Calibri"/>
+              </a:rPr>
+              <a:t>(nm, p)</a:t>
+            </a:r>
+          </a:p>
+          <a:p>
+            <a:r>
+              <a:rPr sz="2800" b="0" dirty="0">
+                <a:latin typeface="Calibri"/>
+              </a:rPr>
+              <a:t>(c) </a:t>
+            </a:r>
+            <a:r>
+              <a:rPr sz="2800" b="0" dirty="0" err="1">
+                <a:latin typeface="Calibri"/>
+              </a:rPr>
+              <a:t>binom</a:t>
+            </a:r>
+            <a:r>
+              <a:rPr sz="2800" b="0" dirty="0">
+                <a:latin typeface="Calibri"/>
+              </a:rPr>
+              <a:t>(n + m, 2p)      (d) other</a:t>
             </a:r>
           </a:p>
         </p:txBody>
@@ -31829,8 +29788,8 @@
         </p:nvSpPr>
         <p:spPr>
           <a:xfrm>
-            <a:off x="1653860" y="2259093"/>
-            <a:ext cx="8351914" cy="346329"/>
+            <a:off x="1653860" y="3285000"/>
+            <a:ext cx="8351914" cy="861774"/>
           </a:xfrm>
           <a:prstGeom prst="rect">
             <a:avLst/>
@@ -31838,16 +29797,40 @@
           <a:noFill/>
         </p:spPr>
         <p:txBody>
-          <a:bodyPr wrap="square" anchor="t" lIns="0" rIns="0" tIns="0" bIns="0">
+          <a:bodyPr wrap="square" lIns="0" tIns="0" rIns="0" bIns="0" anchor="t">
             <a:spAutoFit/>
           </a:bodyPr>
           <a:lstStyle/>
           <a:p>
             <a:r>
-              <a:rPr sz="1700" b="0">
+              <a:rPr sz="2800" b="0" dirty="0">
                 <a:latin typeface="Calibri"/>
               </a:rPr>
-              <a:t>2. Let X ~ binom(n, p) and Z ~ binom(n, q) be independent. Then X + Z follows:</a:t>
+              <a:t>2. Let X ~ </a:t>
+            </a:r>
+            <a:r>
+              <a:rPr sz="2800" b="0" dirty="0" err="1">
+                <a:latin typeface="Calibri"/>
+              </a:rPr>
+              <a:t>binom</a:t>
+            </a:r>
+            <a:r>
+              <a:rPr sz="2800" b="0" dirty="0">
+                <a:latin typeface="Calibri"/>
+              </a:rPr>
+              <a:t>(n, p) and Z ~ </a:t>
+            </a:r>
+            <a:r>
+              <a:rPr sz="2800" b="0" dirty="0" err="1">
+                <a:latin typeface="Calibri"/>
+              </a:rPr>
+              <a:t>binom</a:t>
+            </a:r>
+            <a:r>
+              <a:rPr sz="2800" b="0" dirty="0">
+                <a:latin typeface="Calibri"/>
+              </a:rPr>
+              <a:t>(n, q) be independent. Then X + Z follows:</a:t>
             </a:r>
           </a:p>
         </p:txBody>
@@ -31860,8 +29843,8 @@
         </p:nvSpPr>
         <p:spPr>
           <a:xfrm>
-            <a:off x="1653860" y="2678574"/>
-            <a:ext cx="8351914" cy="637794"/>
+            <a:off x="1653860" y="4239739"/>
+            <a:ext cx="8351914" cy="861774"/>
           </a:xfrm>
           <a:prstGeom prst="rect">
             <a:avLst/>
@@ -31869,24 +29852,72 @@
           <a:noFill/>
         </p:spPr>
         <p:txBody>
-          <a:bodyPr wrap="square" anchor="t" lIns="0" rIns="0" tIns="0" bIns="0">
+          <a:bodyPr wrap="square" lIns="0" tIns="0" rIns="0" bIns="0" anchor="t">
             <a:spAutoFit/>
           </a:bodyPr>
           <a:lstStyle/>
           <a:p>
             <a:r>
-              <a:rPr sz="1700" b="0">
+              <a:rPr sz="2800" b="0" dirty="0">
                 <a:latin typeface="Calibri"/>
               </a:rPr>
-              <a:t>(a) binom(n, p + q)        (b) binom(n, pq)</a:t>
-            </a:r>
-          </a:p>
-          <a:p>
-            <a:r>
-              <a:rPr sz="1700" b="0">
+              <a:t>(a) </a:t>
+            </a:r>
+            <a:r>
+              <a:rPr sz="2800" b="0" dirty="0" err="1">
                 <a:latin typeface="Calibri"/>
               </a:rPr>
-              <a:t>(c) binom(2n, p + q)      (d) other</a:t>
+              <a:t>binom</a:t>
+            </a:r>
+            <a:r>
+              <a:rPr sz="2800" b="0" dirty="0">
+                <a:latin typeface="Calibri"/>
+              </a:rPr>
+              <a:t>(n, p + q)        (b) </a:t>
+            </a:r>
+            <a:r>
+              <a:rPr sz="2800" b="0" dirty="0" err="1">
+                <a:latin typeface="Calibri"/>
+              </a:rPr>
+              <a:t>binom</a:t>
+            </a:r>
+            <a:r>
+              <a:rPr sz="2800" b="0" dirty="0">
+                <a:latin typeface="Calibri"/>
+              </a:rPr>
+              <a:t>(n, </a:t>
+            </a:r>
+            <a:r>
+              <a:rPr sz="2800" b="0" dirty="0" err="1">
+                <a:latin typeface="Calibri"/>
+              </a:rPr>
+              <a:t>pq</a:t>
+            </a:r>
+            <a:r>
+              <a:rPr sz="2800" b="0" dirty="0">
+                <a:latin typeface="Calibri"/>
+              </a:rPr>
+              <a:t>)</a:t>
+            </a:r>
+          </a:p>
+          <a:p>
+            <a:r>
+              <a:rPr sz="2800" b="0" dirty="0">
+                <a:latin typeface="Calibri"/>
+              </a:rPr>
+              <a:t>(c) </a:t>
+            </a:r>
+            <a:r>
+              <a:rPr sz="2800" b="0" dirty="0" err="1">
+                <a:latin typeface="Calibri"/>
+              </a:rPr>
+              <a:t>binom</a:t>
+            </a:r>
+            <a:r>
+              <a:rPr sz="2800" b="0" dirty="0">
+                <a:latin typeface="Calibri"/>
+              </a:rPr>
+              <a:t>(2n, p + q)      (d) other</a:t>
             </a:r>
           </a:p>
         </p:txBody>
@@ -31899,8 +29930,8 @@
         </p:nvSpPr>
         <p:spPr>
           <a:xfrm>
-            <a:off x="1653860" y="3517536"/>
-            <a:ext cx="8351914" cy="569214"/>
+            <a:off x="1653859" y="5310996"/>
+            <a:ext cx="9185125" cy="569214"/>
           </a:xfrm>
           <a:prstGeom prst="rect">
             <a:avLst/>
@@ -31908,16 +29939,28 @@
           <a:noFill/>
         </p:spPr>
         <p:txBody>
-          <a:bodyPr wrap="square" anchor="t" lIns="0" rIns="0" tIns="0" bIns="0">
+          <a:bodyPr wrap="square" lIns="0" tIns="0" rIns="0" bIns="0" anchor="t">
             <a:spAutoFit/>
           </a:bodyPr>
           <a:lstStyle/>
           <a:p>
             <a:r>
-              <a:rPr sz="1500" b="0">
+              <a:rPr b="0" dirty="0">
                 <a:latin typeface="Calibri"/>
               </a:rPr>
-              <a:t>1. answer: (a). Each binomial random variable is a sum of independent Bernoulli(p) random variables, so their sum is also a sum of Bernoulli(p) r.v.'s.</a:t>
+              <a:t>1. answer: (a). Each binomial random variable is a sum of independent Bernoulli(p) random variables, so their sum is also a sum of Bernoulli(p) </a:t>
+            </a:r>
+            <a:r>
+              <a:rPr b="0" dirty="0" err="1">
+                <a:latin typeface="Calibri"/>
+              </a:rPr>
+              <a:t>r.v.'s</a:t>
+            </a:r>
+            <a:r>
+              <a:rPr b="0" dirty="0">
+                <a:latin typeface="Calibri"/>
+              </a:rPr>
+              <a:t>.</a:t>
             </a:r>
           </a:p>
         </p:txBody>
@@ -31930,8 +29973,8 @@
         </p:nvSpPr>
         <p:spPr>
           <a:xfrm>
-            <a:off x="1653860" y="4196478"/>
-            <a:ext cx="8351914" cy="569214"/>
+            <a:off x="1653859" y="5989938"/>
+            <a:ext cx="8939799" cy="553998"/>
           </a:xfrm>
           <a:prstGeom prst="rect">
             <a:avLst/>
@@ -31939,16 +29982,40 @@
           <a:noFill/>
         </p:spPr>
         <p:txBody>
-          <a:bodyPr wrap="square" anchor="t" lIns="0" rIns="0" tIns="0" bIns="0">
+          <a:bodyPr wrap="square" lIns="0" tIns="0" rIns="0" bIns="0" anchor="t">
             <a:spAutoFit/>
           </a:bodyPr>
           <a:lstStyle/>
           <a:p>
             <a:r>
-              <a:rPr sz="1500" b="0">
+              <a:rPr b="0" dirty="0">
                 <a:latin typeface="Calibri"/>
               </a:rPr>
-              <a:t>2. answer: (d) This is different from problem 1 because we are combining Bernoulli(p) r.v.'s with Bernoulli(q) r.v.'s. This is not one of the named random variables we know about.</a:t>
+              <a:t>2. answer: (d) This is different from problem 1 because we are combining Bernoulli(p) </a:t>
+            </a:r>
+            <a:r>
+              <a:rPr b="0" dirty="0" err="1">
+                <a:latin typeface="Calibri"/>
+              </a:rPr>
+              <a:t>r.v.'s</a:t>
+            </a:r>
+            <a:r>
+              <a:rPr b="0" dirty="0">
+                <a:latin typeface="Calibri"/>
+              </a:rPr>
+              <a:t> with Bernoulli(q) </a:t>
+            </a:r>
+            <a:r>
+              <a:rPr b="0" dirty="0" err="1">
+                <a:latin typeface="Calibri"/>
+              </a:rPr>
+              <a:t>r.v.'s</a:t>
+            </a:r>
+            <a:r>
+              <a:rPr b="0" dirty="0">
+                <a:latin typeface="Calibri"/>
+              </a:rPr>
+              <a:t>. This is not one of the named random variables we know about.</a:t>
             </a:r>
           </a:p>
         </p:txBody>
@@ -32162,7 +30229,7 @@
           <a:noFill/>
         </p:spPr>
         <p:txBody>
-          <a:bodyPr wrap="square" anchor="t" lIns="0" rIns="0" tIns="0" bIns="0">
+          <a:bodyPr wrap="square" lIns="0" tIns="0" rIns="0" bIns="0" anchor="t">
             <a:spAutoFit/>
           </a:bodyPr>
           <a:lstStyle/>
@@ -32193,7 +30260,7 @@
           <a:noFill/>
         </p:spPr>
         <p:txBody>
-          <a:bodyPr wrap="square" anchor="t" lIns="0" rIns="0" tIns="0" bIns="0">
+          <a:bodyPr wrap="square" lIns="0" tIns="0" rIns="0" bIns="0" anchor="t">
             <a:spAutoFit/>
           </a:bodyPr>
           <a:lstStyle/>

--- a/Day1_Probability/FW536_Day1_Afternoon Distributions I_accessible.pptx
+++ b/Day1_Probability/FW536_Day1_Afternoon Distributions I_accessible.pptx
@@ -243,7 +243,7 @@
           <a:p>
             <a:fld id="{EF945995-FC3E-D540-94CA-CACDC057E48E}" type="datetimeFigureOut">
               <a:rPr lang="en-US" smtClean="0"/>
-              <a:t>7/16/26</a:t>
+              <a:t>8/31/26</a:t>
             </a:fld>
             <a:endParaRPr lang="en-US"/>
           </a:p>
@@ -1101,7 +1101,7 @@
               </a14:hiddenEffects>
             </a:ext>
             <a:ext uri="{FAA26D3D-D897-4be2-8F04-BA451C77F1D7}">
-              <ma14:placeholderFlag xmlns:ma14="http://schemas.microsoft.com/office/mac/drawingml/2011/main" xmlns="" val="1"/>
+              <ma14:placeholderFlag xmlns="" xmlns:ma14="http://schemas.microsoft.com/office/mac/drawingml/2011/main" val="1"/>
             </a:ext>
           </a:extLst>
         </p:spPr>
@@ -1186,7 +1186,7 @@
               </a14:hiddenEffects>
             </a:ext>
             <a:ext uri="{FAA26D3D-D897-4be2-8F04-BA451C77F1D7}">
-              <ma14:placeholderFlag xmlns:ma14="http://schemas.microsoft.com/office/mac/drawingml/2011/main" xmlns="" val="1"/>
+              <ma14:placeholderFlag xmlns="" xmlns:ma14="http://schemas.microsoft.com/office/mac/drawingml/2011/main" val="1"/>
             </a:ext>
           </a:extLst>
         </p:spPr>
@@ -1271,7 +1271,7 @@
               </a14:hiddenEffects>
             </a:ext>
             <a:ext uri="{FAA26D3D-D897-4be2-8F04-BA451C77F1D7}">
-              <ma14:placeholderFlag xmlns:ma14="http://schemas.microsoft.com/office/mac/drawingml/2011/main" xmlns="" val="1"/>
+              <ma14:placeholderFlag xmlns="" xmlns:ma14="http://schemas.microsoft.com/office/mac/drawingml/2011/main" val="1"/>
             </a:ext>
           </a:extLst>
         </p:spPr>
@@ -1423,7 +1423,7 @@
               </a14:hiddenEffects>
             </a:ext>
             <a:ext uri="{FAA26D3D-D897-4be2-8F04-BA451C77F1D7}">
-              <ma14:placeholderFlag xmlns:ma14="http://schemas.microsoft.com/office/mac/drawingml/2011/main" xmlns="" val="1"/>
+              <ma14:placeholderFlag xmlns="" xmlns:ma14="http://schemas.microsoft.com/office/mac/drawingml/2011/main" val="1"/>
             </a:ext>
           </a:extLst>
         </p:spPr>
@@ -1508,7 +1508,7 @@
               </a14:hiddenEffects>
             </a:ext>
             <a:ext uri="{FAA26D3D-D897-4be2-8F04-BA451C77F1D7}">
-              <ma14:placeholderFlag xmlns:ma14="http://schemas.microsoft.com/office/mac/drawingml/2011/main" xmlns="" val="1"/>
+              <ma14:placeholderFlag xmlns="" xmlns:ma14="http://schemas.microsoft.com/office/mac/drawingml/2011/main" val="1"/>
             </a:ext>
           </a:extLst>
         </p:spPr>
@@ -1593,7 +1593,7 @@
               </a14:hiddenEffects>
             </a:ext>
             <a:ext uri="{FAA26D3D-D897-4be2-8F04-BA451C77F1D7}">
-              <ma14:placeholderFlag xmlns:ma14="http://schemas.microsoft.com/office/mac/drawingml/2011/main" xmlns="" val="1"/>
+              <ma14:placeholderFlag xmlns="" xmlns:ma14="http://schemas.microsoft.com/office/mac/drawingml/2011/main" val="1"/>
             </a:ext>
           </a:extLst>
         </p:spPr>
@@ -1678,7 +1678,7 @@
               </a14:hiddenEffects>
             </a:ext>
             <a:ext uri="{FAA26D3D-D897-4be2-8F04-BA451C77F1D7}">
-              <ma14:placeholderFlag xmlns:ma14="http://schemas.microsoft.com/office/mac/drawingml/2011/main" xmlns="" val="1"/>
+              <ma14:placeholderFlag xmlns="" xmlns:ma14="http://schemas.microsoft.com/office/mac/drawingml/2011/main" val="1"/>
             </a:ext>
           </a:extLst>
         </p:spPr>
@@ -1763,7 +1763,7 @@
               </a14:hiddenEffects>
             </a:ext>
             <a:ext uri="{FAA26D3D-D897-4be2-8F04-BA451C77F1D7}">
-              <ma14:placeholderFlag xmlns:ma14="http://schemas.microsoft.com/office/mac/drawingml/2011/main" xmlns="" val="1"/>
+              <ma14:placeholderFlag xmlns="" xmlns:ma14="http://schemas.microsoft.com/office/mac/drawingml/2011/main" val="1"/>
             </a:ext>
           </a:extLst>
         </p:spPr>
@@ -1848,7 +1848,7 @@
               </a14:hiddenEffects>
             </a:ext>
             <a:ext uri="{FAA26D3D-D897-4be2-8F04-BA451C77F1D7}">
-              <ma14:placeholderFlag xmlns:ma14="http://schemas.microsoft.com/office/mac/drawingml/2011/main" xmlns="" val="1"/>
+              <ma14:placeholderFlag xmlns="" xmlns:ma14="http://schemas.microsoft.com/office/mac/drawingml/2011/main" val="1"/>
             </a:ext>
           </a:extLst>
         </p:spPr>
@@ -1933,7 +1933,7 @@
               </a14:hiddenEffects>
             </a:ext>
             <a:ext uri="{FAA26D3D-D897-4be2-8F04-BA451C77F1D7}">
-              <ma14:placeholderFlag xmlns:ma14="http://schemas.microsoft.com/office/mac/drawingml/2011/main" xmlns="" val="1"/>
+              <ma14:placeholderFlag xmlns="" xmlns:ma14="http://schemas.microsoft.com/office/mac/drawingml/2011/main" val="1"/>
             </a:ext>
           </a:extLst>
         </p:spPr>
@@ -2018,7 +2018,7 @@
               </a14:hiddenEffects>
             </a:ext>
             <a:ext uri="{FAA26D3D-D897-4be2-8F04-BA451C77F1D7}">
-              <ma14:placeholderFlag xmlns:ma14="http://schemas.microsoft.com/office/mac/drawingml/2011/main" xmlns="" val="1"/>
+              <ma14:placeholderFlag xmlns="" xmlns:ma14="http://schemas.microsoft.com/office/mac/drawingml/2011/main" val="1"/>
             </a:ext>
           </a:extLst>
         </p:spPr>
@@ -2103,7 +2103,7 @@
               </a14:hiddenEffects>
             </a:ext>
             <a:ext uri="{FAA26D3D-D897-4be2-8F04-BA451C77F1D7}">
-              <ma14:placeholderFlag xmlns:ma14="http://schemas.microsoft.com/office/mac/drawingml/2011/main" xmlns="" val="1"/>
+              <ma14:placeholderFlag xmlns="" xmlns:ma14="http://schemas.microsoft.com/office/mac/drawingml/2011/main" val="1"/>
             </a:ext>
           </a:extLst>
         </p:spPr>
@@ -2188,7 +2188,7 @@
               </a14:hiddenEffects>
             </a:ext>
             <a:ext uri="{FAA26D3D-D897-4be2-8F04-BA451C77F1D7}">
-              <ma14:placeholderFlag xmlns:ma14="http://schemas.microsoft.com/office/mac/drawingml/2011/main" xmlns="" val="1"/>
+              <ma14:placeholderFlag xmlns="" xmlns:ma14="http://schemas.microsoft.com/office/mac/drawingml/2011/main" val="1"/>
             </a:ext>
           </a:extLst>
         </p:spPr>
@@ -2340,7 +2340,7 @@
               </a14:hiddenEffects>
             </a:ext>
             <a:ext uri="{FAA26D3D-D897-4be2-8F04-BA451C77F1D7}">
-              <ma14:placeholderFlag xmlns:ma14="http://schemas.microsoft.com/office/mac/drawingml/2011/main" xmlns="" val="1"/>
+              <ma14:placeholderFlag xmlns="" xmlns:ma14="http://schemas.microsoft.com/office/mac/drawingml/2011/main" val="1"/>
             </a:ext>
           </a:extLst>
         </p:spPr>
@@ -2425,7 +2425,7 @@
               </a14:hiddenEffects>
             </a:ext>
             <a:ext uri="{FAA26D3D-D897-4be2-8F04-BA451C77F1D7}">
-              <ma14:placeholderFlag xmlns:ma14="http://schemas.microsoft.com/office/mac/drawingml/2011/main" xmlns="" val="1"/>
+              <ma14:placeholderFlag xmlns="" xmlns:ma14="http://schemas.microsoft.com/office/mac/drawingml/2011/main" val="1"/>
             </a:ext>
           </a:extLst>
         </p:spPr>
@@ -2510,7 +2510,7 @@
               </a14:hiddenEffects>
             </a:ext>
             <a:ext uri="{FAA26D3D-D897-4be2-8F04-BA451C77F1D7}">
-              <ma14:placeholderFlag xmlns:ma14="http://schemas.microsoft.com/office/mac/drawingml/2011/main" xmlns="" val="1"/>
+              <ma14:placeholderFlag xmlns="" xmlns:ma14="http://schemas.microsoft.com/office/mac/drawingml/2011/main" val="1"/>
             </a:ext>
           </a:extLst>
         </p:spPr>
@@ -3206,7 +3206,7 @@
               </a14:hiddenEffects>
             </a:ext>
             <a:ext uri="{FAA26D3D-D897-4be2-8F04-BA451C77F1D7}">
-              <ma14:placeholderFlag xmlns:ma14="http://schemas.microsoft.com/office/mac/drawingml/2011/main" xmlns="" val="1"/>
+              <ma14:placeholderFlag xmlns="" xmlns:ma14="http://schemas.microsoft.com/office/mac/drawingml/2011/main" val="1"/>
             </a:ext>
           </a:extLst>
         </p:spPr>
@@ -3700,7 +3700,7 @@
           <a:p>
             <a:fld id="{AFF33797-E749-0F4D-9D43-8EDD7194A7C5}" type="datetimeFigureOut">
               <a:rPr lang="en-US" smtClean="0"/>
-              <a:t>7/16/26</a:t>
+              <a:t>8/31/26</a:t>
             </a:fld>
             <a:endParaRPr lang="en-US"/>
           </a:p>
@@ -3868,7 +3868,7 @@
           <a:p>
             <a:fld id="{AFF33797-E749-0F4D-9D43-8EDD7194A7C5}" type="datetimeFigureOut">
               <a:rPr lang="en-US" smtClean="0"/>
-              <a:t>7/16/26</a:t>
+              <a:t>8/31/26</a:t>
             </a:fld>
             <a:endParaRPr lang="en-US"/>
           </a:p>
@@ -4046,7 +4046,7 @@
           <a:p>
             <a:fld id="{AFF33797-E749-0F4D-9D43-8EDD7194A7C5}" type="datetimeFigureOut">
               <a:rPr lang="en-US" smtClean="0"/>
-              <a:t>7/16/26</a:t>
+              <a:t>8/31/26</a:t>
             </a:fld>
             <a:endParaRPr lang="en-US"/>
           </a:p>
@@ -5291,7 +5291,7 @@
           <a:p>
             <a:fld id="{AFF33797-E749-0F4D-9D43-8EDD7194A7C5}" type="datetimeFigureOut">
               <a:rPr lang="en-US" smtClean="0"/>
-              <a:t>7/16/26</a:t>
+              <a:t>8/31/26</a:t>
             </a:fld>
             <a:endParaRPr lang="en-US"/>
           </a:p>
@@ -5536,7 +5536,7 @@
           <a:p>
             <a:fld id="{AFF33797-E749-0F4D-9D43-8EDD7194A7C5}" type="datetimeFigureOut">
               <a:rPr lang="en-US" smtClean="0"/>
-              <a:t>7/16/26</a:t>
+              <a:t>8/31/26</a:t>
             </a:fld>
             <a:endParaRPr lang="en-US"/>
           </a:p>
@@ -5765,7 +5765,7 @@
           <a:p>
             <a:fld id="{AFF33797-E749-0F4D-9D43-8EDD7194A7C5}" type="datetimeFigureOut">
               <a:rPr lang="en-US" smtClean="0"/>
-              <a:t>7/16/26</a:t>
+              <a:t>8/31/26</a:t>
             </a:fld>
             <a:endParaRPr lang="en-US"/>
           </a:p>
@@ -6129,7 +6129,7 @@
           <a:p>
             <a:fld id="{AFF33797-E749-0F4D-9D43-8EDD7194A7C5}" type="datetimeFigureOut">
               <a:rPr lang="en-US" smtClean="0"/>
-              <a:t>7/16/26</a:t>
+              <a:t>8/31/26</a:t>
             </a:fld>
             <a:endParaRPr lang="en-US"/>
           </a:p>
@@ -6246,7 +6246,7 @@
           <a:p>
             <a:fld id="{AFF33797-E749-0F4D-9D43-8EDD7194A7C5}" type="datetimeFigureOut">
               <a:rPr lang="en-US" smtClean="0"/>
-              <a:t>7/16/26</a:t>
+              <a:t>8/31/26</a:t>
             </a:fld>
             <a:endParaRPr lang="en-US"/>
           </a:p>
@@ -6341,7 +6341,7 @@
           <a:p>
             <a:fld id="{AFF33797-E749-0F4D-9D43-8EDD7194A7C5}" type="datetimeFigureOut">
               <a:rPr lang="en-US" smtClean="0"/>
-              <a:t>7/16/26</a:t>
+              <a:t>8/31/26</a:t>
             </a:fld>
             <a:endParaRPr lang="en-US"/>
           </a:p>
@@ -6616,7 +6616,7 @@
           <a:p>
             <a:fld id="{AFF33797-E749-0F4D-9D43-8EDD7194A7C5}" type="datetimeFigureOut">
               <a:rPr lang="en-US" smtClean="0"/>
-              <a:t>7/16/26</a:t>
+              <a:t>8/31/26</a:t>
             </a:fld>
             <a:endParaRPr lang="en-US"/>
           </a:p>
@@ -6868,7 +6868,7 @@
           <a:p>
             <a:fld id="{AFF33797-E749-0F4D-9D43-8EDD7194A7C5}" type="datetimeFigureOut">
               <a:rPr lang="en-US" smtClean="0"/>
-              <a:t>7/16/26</a:t>
+              <a:t>8/31/26</a:t>
             </a:fld>
             <a:endParaRPr lang="en-US"/>
           </a:p>
@@ -7079,7 +7079,7 @@
           <a:p>
             <a:fld id="{AFF33797-E749-0F4D-9D43-8EDD7194A7C5}" type="datetimeFigureOut">
               <a:rPr lang="en-US" smtClean="0"/>
-              <a:t>7/16/26</a:t>
+              <a:t>8/31/26</a:t>
             </a:fld>
             <a:endParaRPr lang="en-US"/>
           </a:p>
@@ -8031,13 +8031,61 @@
           <a:p>
             <a:pPr algn="ctr"/>
             <a:r>
+              <a:rPr sz="2000" b="0" dirty="0">
+                <a:latin typeface="Cambria"/>
+              </a:rPr>
+              <a:t>Var(X) = Var(X</a:t>
+            </a:r>
+            <a:r>
+              <a:rPr sz="2000" b="0" baseline="-25000" dirty="0">
+                <a:latin typeface="Cambria"/>
+              </a:rPr>
+              <a:t>1</a:t>
+            </a:r>
+            <a:r>
+              <a:rPr sz="2000" b="0" dirty="0">
+                <a:latin typeface="Cambria"/>
+              </a:rPr>
+              <a:t>) + Var(X</a:t>
+            </a:r>
+            <a:r>
+              <a:rPr sz="2000" b="0" baseline="-25000" dirty="0">
+                <a:latin typeface="Cambria"/>
+              </a:rPr>
+              <a:t>2</a:t>
+            </a:r>
+            <a:r>
+              <a:rPr sz="2000" b="0" dirty="0">
+                <a:latin typeface="Cambria"/>
+              </a:rPr>
+              <a:t>) + … + Var(</a:t>
+            </a:r>
+            <a:r>
+              <a:rPr sz="2000" b="0" dirty="0" err="1">
+                <a:latin typeface="Cambria"/>
+              </a:rPr>
+              <a:t>X</a:t>
+            </a:r>
+            <a:r>
+              <a:rPr sz="2000" b="0" baseline="-25000" dirty="0" err="1">
+                <a:latin typeface="Cambria"/>
+              </a:rPr>
+              <a:t>n</a:t>
+            </a:r>
+            <a:r>
+              <a:rPr sz="2000" b="0" dirty="0">
+                <a:latin typeface="Cambria"/>
+              </a:rPr>
+              <a:t>) = </a:t>
+            </a:r>
+            <a:r>
               <a:rPr sz="2000" b="0">
                 <a:latin typeface="Cambria"/>
               </a:rPr>
-              <a:t>Var(X) = Var(X</a:t>
-            </a:r>
-            <a:r>
-              <a:rPr sz="2000" b="0" baseline="-25000">
+              <a:t>np(</a:t>
+            </a:r>
+            <a:r>
+              <a:rPr lang="en-US" sz="2000" b="0">
                 <a:latin typeface="Cambria"/>
               </a:rPr>
               <a:t>1</a:t>
@@ -8046,32 +8094,23 @@
               <a:rPr sz="2000" b="0">
                 <a:latin typeface="Cambria"/>
               </a:rPr>
-              <a:t>) + Var(X</a:t>
-            </a:r>
-            <a:r>
-              <a:rPr sz="2000" b="0" baseline="-25000">
+              <a:t> − </a:t>
+            </a:r>
+            <a:r>
+              <a:rPr lang="en-US" sz="2000" b="0">
                 <a:latin typeface="Cambria"/>
               </a:rPr>
-              <a:t>2</a:t>
+              <a:t>p</a:t>
             </a:r>
             <a:r>
               <a:rPr sz="2000" b="0">
                 <a:latin typeface="Cambria"/>
               </a:rPr>
-              <a:t>) + … + Var(X</a:t>
-            </a:r>
-            <a:r>
-              <a:rPr sz="2000" b="0" baseline="-25000">
-                <a:latin typeface="Cambria"/>
-              </a:rPr>
-              <a:t>n</a:t>
-            </a:r>
-            <a:r>
-              <a:rPr sz="2000" b="0">
-                <a:latin typeface="Cambria"/>
-              </a:rPr>
-              <a:t>) = np(p − 1).</a:t>
-            </a:r>
+              <a:t>).</a:t>
+            </a:r>
+            <a:endParaRPr sz="2000" b="0" dirty="0">
+              <a:latin typeface="Cambria"/>
+            </a:endParaRPr>
           </a:p>
         </p:txBody>
       </p:sp>
